--- a/Seminario de Sistemas/Clases/Clase 3 - Metodologias tradicionales/Presentacion.pptx
+++ b/Seminario de Sistemas/Clases/Clase 3 - Metodologias tradicionales/Presentacion.pptx
@@ -19,6 +19,13 @@
     <p:sldId id="267" r:id="rId18"/>
     <p:sldId id="268" r:id="rId19"/>
     <p:sldId id="269" r:id="rId20"/>
+    <p:sldId id="270" r:id="rId21"/>
+    <p:sldId id="271" r:id="rId22"/>
+    <p:sldId id="272" r:id="rId23"/>
+    <p:sldId id="273" r:id="rId24"/>
+    <p:sldId id="274" r:id="rId25"/>
+    <p:sldId id="275" r:id="rId26"/>
+    <p:sldId id="276" r:id="rId27"/>
   </p:sldIdLst>
   <p:sldSz cx="12191695" cy="6858000" type="screen4x3"/>
   <p:notesSz cx="6858000" cy="9144000"/>
@@ -3619,7 +3626,7 @@
                 </a:solidFill>
                 <a:latin typeface="Calibri"/>
               </a:rPr>
-              <a:t>Taller PI — pasos guiados</a:t>
+              <a:t>El modelo en V con trazabilidad</a:t>
             </a:r>
           </a:p>
         </p:txBody>
@@ -3632,8 +3639,8 @@
         </p:nvSpPr>
         <p:spPr>
           <a:xfrm>
-            <a:off x="457200" y="1234440"/>
-            <a:ext cx="11277295" cy="950976"/>
+            <a:off x="457200" y="1261872"/>
+            <a:ext cx="11277295" cy="5093208"/>
           </a:xfrm>
           <a:prstGeom prst="roundRect">
             <a:avLst>
@@ -3641,7 +3648,7 @@
             </a:avLst>
           </a:prstGeom>
           <a:solidFill>
-            <a:srgbClr val="F2F2F2"/>
+            <a:srgbClr val="1E2A38"/>
           </a:solidFill>
           <a:ln>
             <a:noFill/>
@@ -3671,19 +3678,17 @@
       </p:sp>
       <p:sp>
         <p:nvSpPr>
-          <p:cNvPr id="6" name="Rounded Rectangle 5"/>
+          <p:cNvPr id="6" name="Rectangle 5"/>
           <p:cNvSpPr/>
           <p:nvPr/>
         </p:nvSpPr>
         <p:spPr>
           <a:xfrm>
-            <a:off x="594360" y="1490472"/>
-            <a:ext cx="438912" cy="438912"/>
-          </a:xfrm>
-          <a:prstGeom prst="roundRect">
-            <a:avLst>
-              <a:gd name="adj" fmla="val 12000"/>
-            </a:avLst>
+            <a:off x="457200" y="1261872"/>
+            <a:ext cx="11277295" cy="320040"/>
+          </a:xfrm>
+          <a:prstGeom prst="rect">
+            <a:avLst/>
           </a:prstGeom>
           <a:solidFill>
             <a:srgbClr val="095292"/>
@@ -3722,8 +3727,8 @@
         </p:nvSpPr>
         <p:spPr>
           <a:xfrm>
-            <a:off x="594360" y="1490472"/>
-            <a:ext cx="438912" cy="438912"/>
+            <a:off x="685800" y="1307592"/>
+            <a:ext cx="10820095" cy="256032"/>
           </a:xfrm>
           <a:prstGeom prst="rect">
             <a:avLst/>
@@ -3734,15 +3739,14 @@
           <a:bodyPr wrap="square" anchor="ctr"/>
           <a:lstStyle/>
           <a:p>
-            <a:pPr algn="ctr"/>
-            <a:r>
-              <a:rPr sz="1600" b="1" i="0">
-                <a:solidFill>
-                  <a:srgbClr val="FFFFFF"/>
-                </a:solidFill>
-                <a:latin typeface="Calibri"/>
-              </a:rPr>
-              <a:t>1</a:t>
+            <a:r>
+              <a:rPr sz="1000" b="1" i="0">
+                <a:solidFill>
+                  <a:srgbClr val="269CCB"/>
+                </a:solidFill>
+                <a:latin typeface="Calibri"/>
+              </a:rPr>
+              <a:t>● ● ●</a:t>
             </a:r>
           </a:p>
         </p:txBody>
@@ -3755,8 +3759,8 @@
         </p:nvSpPr>
         <p:spPr>
           <a:xfrm>
-            <a:off x="1188720" y="1325880"/>
-            <a:ext cx="10271455" cy="786384"/>
+            <a:off x="777240" y="1719072"/>
+            <a:ext cx="10637215" cy="4453128"/>
           </a:xfrm>
           <a:prstGeom prst="rect">
             <a:avLst/>
@@ -3764,644 +3768,287 @@
           <a:noFill/>
         </p:spPr>
         <p:txBody>
-          <a:bodyPr wrap="square" anchor="ctr"/>
-          <a:lstStyle/>
-          <a:p>
-            <a:r>
-              <a:rPr sz="1400" b="1" i="0">
-                <a:solidFill>
-                  <a:srgbClr val="095292"/>
-                </a:solidFill>
-                <a:latin typeface="Calibri"/>
-              </a:rPr>
-              <a:t>En Google Docs escriba el indice del ERS de VetCare con al menos estas secciones numeradas: 1. Proposito y alcance, 2. Glosario del dominio veterinario, 3. Requisitos funcionales, 4. Requisitos no funcionales, 5. Reglas de negocio, 6. Matriz de trazabilidad, 7. Control de versiones y aprobaciones.</a:t>
-            </a:r>
-          </a:p>
-        </p:txBody>
-      </p:sp>
-      <p:sp>
-        <p:nvSpPr>
-          <p:cNvPr id="9" name="Rounded Rectangle 8"/>
-          <p:cNvSpPr/>
-          <p:nvPr/>
-        </p:nvSpPr>
-        <p:spPr>
-          <a:xfrm>
-            <a:off x="457200" y="2276856"/>
-            <a:ext cx="11277295" cy="950976"/>
-          </a:xfrm>
-          <a:prstGeom prst="roundRect">
-            <a:avLst>
-              <a:gd name="adj" fmla="val 12000"/>
-            </a:avLst>
-          </a:prstGeom>
-          <a:solidFill>
-            <a:srgbClr val="E8F4FA"/>
-          </a:solidFill>
-          <a:ln>
-            <a:noFill/>
-          </a:ln>
-        </p:spPr>
-        <p:style>
-          <a:lnRef idx="1">
-            <a:schemeClr val="accent1"/>
-          </a:lnRef>
-          <a:fillRef idx="3">
-            <a:schemeClr val="accent1"/>
-          </a:fillRef>
-          <a:effectRef idx="2">
-            <a:schemeClr val="accent1"/>
-          </a:effectRef>
-          <a:fontRef idx="minor">
-            <a:schemeClr val="lt1"/>
-          </a:fontRef>
-        </p:style>
-        <p:txBody>
-          <a:bodyPr rtlCol="0" anchor="ctr"/>
-          <a:lstStyle/>
-          <a:p>
-            <a:pPr algn="ctr"/>
-          </a:p>
-        </p:txBody>
-      </p:sp>
-      <p:sp>
-        <p:nvSpPr>
-          <p:cNvPr id="10" name="Rounded Rectangle 9"/>
-          <p:cNvSpPr/>
-          <p:nvPr/>
-        </p:nvSpPr>
-        <p:spPr>
-          <a:xfrm>
-            <a:off x="594360" y="2532888"/>
-            <a:ext cx="438912" cy="438912"/>
-          </a:xfrm>
-          <a:prstGeom prst="roundRect">
-            <a:avLst>
-              <a:gd name="adj" fmla="val 12000"/>
-            </a:avLst>
-          </a:prstGeom>
-          <a:solidFill>
-            <a:srgbClr val="095292"/>
-          </a:solidFill>
-          <a:ln>
-            <a:noFill/>
-          </a:ln>
-        </p:spPr>
-        <p:style>
-          <a:lnRef idx="1">
-            <a:schemeClr val="accent1"/>
-          </a:lnRef>
-          <a:fillRef idx="3">
-            <a:schemeClr val="accent1"/>
-          </a:fillRef>
-          <a:effectRef idx="2">
-            <a:schemeClr val="accent1"/>
-          </a:effectRef>
-          <a:fontRef idx="minor">
-            <a:schemeClr val="lt1"/>
-          </a:fontRef>
-        </p:style>
-        <p:txBody>
-          <a:bodyPr rtlCol="0" anchor="ctr"/>
-          <a:lstStyle/>
-          <a:p>
-            <a:pPr algn="ctr"/>
-          </a:p>
-        </p:txBody>
-      </p:sp>
-      <p:sp>
-        <p:nvSpPr>
-          <p:cNvPr id="11" name="TextBox 10"/>
-          <p:cNvSpPr txBox="1"/>
-          <p:nvPr/>
-        </p:nvSpPr>
-        <p:spPr>
-          <a:xfrm>
-            <a:off x="594360" y="2532888"/>
-            <a:ext cx="438912" cy="438912"/>
-          </a:xfrm>
-          <a:prstGeom prst="rect">
-            <a:avLst/>
-          </a:prstGeom>
-          <a:noFill/>
-        </p:spPr>
-        <p:txBody>
-          <a:bodyPr wrap="square" anchor="ctr"/>
-          <a:lstStyle/>
-          <a:p>
-            <a:pPr algn="ctr"/>
-            <a:r>
-              <a:rPr sz="1600" b="1" i="0">
+          <a:bodyPr wrap="square">
+            <a:spAutoFit/>
+          </a:bodyPr>
+          <a:lstStyle/>
+          <a:p>
+            <a:pPr>
+              <a:spcAft>
+                <a:spcPts val="371"/>
+              </a:spcAft>
+            </a:pPr>
+            <a:r>
+              <a:rPr sz="1300" b="0" i="0">
                 <a:solidFill>
                   <a:srgbClr val="FFFFFF"/>
                 </a:solidFill>
                 <a:latin typeface="Calibri"/>
               </a:rPr>
-              <a:t>2</a:t>
-            </a:r>
-          </a:p>
-        </p:txBody>
-      </p:sp>
-      <p:sp>
-        <p:nvSpPr>
-          <p:cNvPr id="12" name="TextBox 11"/>
-          <p:cNvSpPr txBox="1"/>
-          <p:nvPr/>
-        </p:nvSpPr>
-        <p:spPr>
-          <a:xfrm>
-            <a:off x="1188720" y="2368296"/>
-            <a:ext cx="10271455" cy="786384"/>
-          </a:xfrm>
-          <a:prstGeom prst="rect">
-            <a:avLst/>
-          </a:prstGeom>
-          <a:noFill/>
-        </p:spPr>
-        <p:txBody>
-          <a:bodyPr wrap="square" anchor="ctr"/>
-          <a:lstStyle/>
-          <a:p>
-            <a:r>
-              <a:rPr sz="1400" b="1" i="0">
-                <a:solidFill>
-                  <a:srgbClr val="095292"/>
-                </a:solidFill>
-                <a:latin typeface="Calibri"/>
-              </a:rPr>
-              <a:t>Escriba cuatro requisitos de VetCare en formato de ficha completa (ID, nombre, fuente, prioridad, estabilidad, descripcion, precondicion, criterio de aceptacion, version y estado); al menos uno debe ser no funcional y al menos uno debe declarar dependencia de otro.</a:t>
-            </a:r>
-          </a:p>
-        </p:txBody>
-      </p:sp>
-      <p:sp>
-        <p:nvSpPr>
-          <p:cNvPr id="13" name="Rounded Rectangle 12"/>
-          <p:cNvSpPr/>
-          <p:nvPr/>
-        </p:nvSpPr>
-        <p:spPr>
-          <a:xfrm>
-            <a:off x="457200" y="3319272"/>
-            <a:ext cx="11277295" cy="950976"/>
-          </a:xfrm>
-          <a:prstGeom prst="roundRect">
-            <a:avLst>
-              <a:gd name="adj" fmla="val 12000"/>
-            </a:avLst>
-          </a:prstGeom>
-          <a:solidFill>
-            <a:srgbClr val="F2F2F2"/>
-          </a:solidFill>
-          <a:ln>
-            <a:noFill/>
-          </a:ln>
-        </p:spPr>
-        <p:style>
-          <a:lnRef idx="1">
-            <a:schemeClr val="accent1"/>
-          </a:lnRef>
-          <a:fillRef idx="3">
-            <a:schemeClr val="accent1"/>
-          </a:fillRef>
-          <a:effectRef idx="2">
-            <a:schemeClr val="accent1"/>
-          </a:effectRef>
-          <a:fontRef idx="minor">
-            <a:schemeClr val="lt1"/>
-          </a:fontRef>
-        </p:style>
-        <p:txBody>
-          <a:bodyPr rtlCol="0" anchor="ctr"/>
-          <a:lstStyle/>
-          <a:p>
-            <a:pPr algn="ctr"/>
-          </a:p>
-        </p:txBody>
-      </p:sp>
-      <p:sp>
-        <p:nvSpPr>
-          <p:cNvPr id="14" name="Rounded Rectangle 13"/>
-          <p:cNvSpPr/>
-          <p:nvPr/>
-        </p:nvSpPr>
-        <p:spPr>
-          <a:xfrm>
-            <a:off x="594360" y="3575304"/>
-            <a:ext cx="438912" cy="438912"/>
-          </a:xfrm>
-          <a:prstGeom prst="roundRect">
-            <a:avLst>
-              <a:gd name="adj" fmla="val 12000"/>
-            </a:avLst>
-          </a:prstGeom>
-          <a:solidFill>
-            <a:srgbClr val="095292"/>
-          </a:solidFill>
-          <a:ln>
-            <a:noFill/>
-          </a:ln>
-        </p:spPr>
-        <p:style>
-          <a:lnRef idx="1">
-            <a:schemeClr val="accent1"/>
-          </a:lnRef>
-          <a:fillRef idx="3">
-            <a:schemeClr val="accent1"/>
-          </a:fillRef>
-          <a:effectRef idx="2">
-            <a:schemeClr val="accent1"/>
-          </a:effectRef>
-          <a:fontRef idx="minor">
-            <a:schemeClr val="lt1"/>
-          </a:fontRef>
-        </p:style>
-        <p:txBody>
-          <a:bodyPr rtlCol="0" anchor="ctr"/>
-          <a:lstStyle/>
-          <a:p>
-            <a:pPr algn="ctr"/>
-          </a:p>
-        </p:txBody>
-      </p:sp>
-      <p:sp>
-        <p:nvSpPr>
-          <p:cNvPr id="15" name="TextBox 14"/>
-          <p:cNvSpPr txBox="1"/>
-          <p:nvPr/>
-        </p:nvSpPr>
-        <p:spPr>
-          <a:xfrm>
-            <a:off x="594360" y="3575304"/>
-            <a:ext cx="438912" cy="438912"/>
-          </a:xfrm>
-          <a:prstGeom prst="rect">
-            <a:avLst/>
-          </a:prstGeom>
-          <a:noFill/>
-        </p:spPr>
-        <p:txBody>
-          <a:bodyPr wrap="square" anchor="ctr"/>
-          <a:lstStyle/>
-          <a:p>
-            <a:pPr algn="ctr"/>
-            <a:r>
-              <a:rPr sz="1600" b="1" i="0">
+              <a:t>flowchart TB</a:t>
+            </a:r>
+          </a:p>
+          <a:p>
+            <a:pPr>
+              <a:spcAft>
+                <a:spcPts val="371"/>
+              </a:spcAft>
+            </a:pPr>
+            <a:r>
+              <a:rPr sz="1300" b="0" i="0">
                 <a:solidFill>
                   <a:srgbClr val="FFFFFF"/>
                 </a:solidFill>
                 <a:latin typeface="Calibri"/>
               </a:rPr>
-              <a:t>3</a:t>
-            </a:r>
-          </a:p>
-        </p:txBody>
-      </p:sp>
-      <p:sp>
-        <p:nvSpPr>
-          <p:cNvPr id="16" name="TextBox 15"/>
-          <p:cNvSpPr txBox="1"/>
-          <p:nvPr/>
-        </p:nvSpPr>
-        <p:spPr>
-          <a:xfrm>
-            <a:off x="1188720" y="3410712"/>
-            <a:ext cx="10271455" cy="786384"/>
-          </a:xfrm>
-          <a:prstGeom prst="rect">
-            <a:avLst/>
-          </a:prstGeom>
-          <a:noFill/>
-        </p:spPr>
-        <p:txBody>
-          <a:bodyPr wrap="square" anchor="ctr"/>
-          <a:lstStyle/>
-          <a:p>
-            <a:r>
-              <a:rPr sz="1400" b="1" i="0">
-                <a:solidFill>
-                  <a:srgbClr val="095292"/>
-                </a:solidFill>
-                <a:latin typeface="Calibri"/>
-              </a:rPr>
-              <a:t>Construya la matriz en V en una tabla de cuatro columnas: Fase de la izquierda / Artefacto / Nivel de prueba emparejado / Caso de prueba de VetCare que lo verifica, y asegurese de que cada uno de sus cuatro requisitos aparezca con su codigo de prueba.</a:t>
-            </a:r>
-          </a:p>
-        </p:txBody>
-      </p:sp>
-      <p:sp>
-        <p:nvSpPr>
-          <p:cNvPr id="17" name="Rounded Rectangle 16"/>
-          <p:cNvSpPr/>
-          <p:nvPr/>
-        </p:nvSpPr>
-        <p:spPr>
-          <a:xfrm>
-            <a:off x="457200" y="4361688"/>
-            <a:ext cx="11277295" cy="950976"/>
-          </a:xfrm>
-          <a:prstGeom prst="roundRect">
-            <a:avLst>
-              <a:gd name="adj" fmla="val 12000"/>
-            </a:avLst>
-          </a:prstGeom>
-          <a:solidFill>
-            <a:srgbClr val="E8F4FA"/>
-          </a:solidFill>
-          <a:ln>
-            <a:noFill/>
-          </a:ln>
-        </p:spPr>
-        <p:style>
-          <a:lnRef idx="1">
-            <a:schemeClr val="accent1"/>
-          </a:lnRef>
-          <a:fillRef idx="3">
-            <a:schemeClr val="accent1"/>
-          </a:fillRef>
-          <a:effectRef idx="2">
-            <a:schemeClr val="accent1"/>
-          </a:effectRef>
-          <a:fontRef idx="minor">
-            <a:schemeClr val="lt1"/>
-          </a:fontRef>
-        </p:style>
-        <p:txBody>
-          <a:bodyPr rtlCol="0" anchor="ctr"/>
-          <a:lstStyle/>
-          <a:p>
-            <a:pPr algn="ctr"/>
-          </a:p>
-        </p:txBody>
-      </p:sp>
-      <p:sp>
-        <p:nvSpPr>
-          <p:cNvPr id="18" name="Rounded Rectangle 17"/>
-          <p:cNvSpPr/>
-          <p:nvPr/>
-        </p:nvSpPr>
-        <p:spPr>
-          <a:xfrm>
-            <a:off x="594360" y="4617720"/>
-            <a:ext cx="438912" cy="438912"/>
-          </a:xfrm>
-          <a:prstGeom prst="roundRect">
-            <a:avLst>
-              <a:gd name="adj" fmla="val 12000"/>
-            </a:avLst>
-          </a:prstGeom>
-          <a:solidFill>
-            <a:srgbClr val="095292"/>
-          </a:solidFill>
-          <a:ln>
-            <a:noFill/>
-          </a:ln>
-        </p:spPr>
-        <p:style>
-          <a:lnRef idx="1">
-            <a:schemeClr val="accent1"/>
-          </a:lnRef>
-          <a:fillRef idx="3">
-            <a:schemeClr val="accent1"/>
-          </a:fillRef>
-          <a:effectRef idx="2">
-            <a:schemeClr val="accent1"/>
-          </a:effectRef>
-          <a:fontRef idx="minor">
-            <a:schemeClr val="lt1"/>
-          </a:fontRef>
-        </p:style>
-        <p:txBody>
-          <a:bodyPr rtlCol="0" anchor="ctr"/>
-          <a:lstStyle/>
-          <a:p>
-            <a:pPr algn="ctr"/>
-          </a:p>
-        </p:txBody>
-      </p:sp>
-      <p:sp>
-        <p:nvSpPr>
-          <p:cNvPr id="19" name="TextBox 18"/>
-          <p:cNvSpPr txBox="1"/>
-          <p:nvPr/>
-        </p:nvSpPr>
-        <p:spPr>
-          <a:xfrm>
-            <a:off x="594360" y="4617720"/>
-            <a:ext cx="438912" cy="438912"/>
-          </a:xfrm>
-          <a:prstGeom prst="rect">
-            <a:avLst/>
-          </a:prstGeom>
-          <a:noFill/>
-        </p:spPr>
-        <p:txBody>
-          <a:bodyPr wrap="square" anchor="ctr"/>
-          <a:lstStyle/>
-          <a:p>
-            <a:pPr algn="ctr"/>
-            <a:r>
-              <a:rPr sz="1600" b="1" i="0">
+              <a:t>  R[Requisitos] --&gt; AF[Analisis funcional]</a:t>
+            </a:r>
+          </a:p>
+          <a:p>
+            <a:pPr>
+              <a:spcAft>
+                <a:spcPts val="371"/>
+              </a:spcAft>
+            </a:pPr>
+            <a:r>
+              <a:rPr sz="1300" b="0" i="0">
                 <a:solidFill>
                   <a:srgbClr val="FFFFFF"/>
                 </a:solidFill>
                 <a:latin typeface="Calibri"/>
               </a:rPr>
-              <a:t>4</a:t>
-            </a:r>
-          </a:p>
-        </p:txBody>
-      </p:sp>
-      <p:sp>
-        <p:nvSpPr>
-          <p:cNvPr id="20" name="TextBox 19"/>
-          <p:cNvSpPr txBox="1"/>
-          <p:nvPr/>
-        </p:nvSpPr>
-        <p:spPr>
-          <a:xfrm>
-            <a:off x="1188720" y="4453128"/>
-            <a:ext cx="10271455" cy="786384"/>
-          </a:xfrm>
-          <a:prstGeom prst="rect">
-            <a:avLst/>
-          </a:prstGeom>
-          <a:noFill/>
-        </p:spPr>
-        <p:txBody>
-          <a:bodyPr wrap="square" anchor="ctr"/>
-          <a:lstStyle/>
-          <a:p>
-            <a:r>
-              <a:rPr sz="1500" b="1" i="0">
-                <a:solidFill>
-                  <a:srgbClr val="095292"/>
-                </a:solidFill>
-                <a:latin typeface="Calibri"/>
-              </a:rPr>
-              <a:t>En draw.io dibuje el modelo en V de VetCare con las fases de bajada y de subida, y trace lineas punteadas horizontales que unan cada fase con su nivel de prueba; rotule al menos dos de esas lineas con el ID del requisito y el ID del caso de prueba.</a:t>
-            </a:r>
-          </a:p>
-        </p:txBody>
-      </p:sp>
-      <p:sp>
-        <p:nvSpPr>
-          <p:cNvPr id="21" name="Rounded Rectangle 20"/>
-          <p:cNvSpPr/>
-          <p:nvPr/>
-        </p:nvSpPr>
-        <p:spPr>
-          <a:xfrm>
-            <a:off x="457200" y="5404104"/>
-            <a:ext cx="11277295" cy="950976"/>
-          </a:xfrm>
-          <a:prstGeom prst="roundRect">
-            <a:avLst>
-              <a:gd name="adj" fmla="val 12000"/>
-            </a:avLst>
-          </a:prstGeom>
-          <a:solidFill>
-            <a:srgbClr val="F2F2F2"/>
-          </a:solidFill>
-          <a:ln>
-            <a:noFill/>
-          </a:ln>
-        </p:spPr>
-        <p:style>
-          <a:lnRef idx="1">
-            <a:schemeClr val="accent1"/>
-          </a:lnRef>
-          <a:fillRef idx="3">
-            <a:schemeClr val="accent1"/>
-          </a:fillRef>
-          <a:effectRef idx="2">
-            <a:schemeClr val="accent1"/>
-          </a:effectRef>
-          <a:fontRef idx="minor">
-            <a:schemeClr val="lt1"/>
-          </a:fontRef>
-        </p:style>
-        <p:txBody>
-          <a:bodyPr rtlCol="0" anchor="ctr"/>
-          <a:lstStyle/>
-          <a:p>
-            <a:pPr algn="ctr"/>
-          </a:p>
-        </p:txBody>
-      </p:sp>
-      <p:sp>
-        <p:nvSpPr>
-          <p:cNvPr id="22" name="Rounded Rectangle 21"/>
-          <p:cNvSpPr/>
-          <p:nvPr/>
-        </p:nvSpPr>
-        <p:spPr>
-          <a:xfrm>
-            <a:off x="594360" y="5660136"/>
-            <a:ext cx="438912" cy="438912"/>
-          </a:xfrm>
-          <a:prstGeom prst="roundRect">
-            <a:avLst>
-              <a:gd name="adj" fmla="val 12000"/>
-            </a:avLst>
-          </a:prstGeom>
-          <a:solidFill>
-            <a:srgbClr val="095292"/>
-          </a:solidFill>
-          <a:ln>
-            <a:noFill/>
-          </a:ln>
-        </p:spPr>
-        <p:style>
-          <a:lnRef idx="1">
-            <a:schemeClr val="accent1"/>
-          </a:lnRef>
-          <a:fillRef idx="3">
-            <a:schemeClr val="accent1"/>
-          </a:fillRef>
-          <a:effectRef idx="2">
-            <a:schemeClr val="accent1"/>
-          </a:effectRef>
-          <a:fontRef idx="minor">
-            <a:schemeClr val="lt1"/>
-          </a:fontRef>
-        </p:style>
-        <p:txBody>
-          <a:bodyPr rtlCol="0" anchor="ctr"/>
-          <a:lstStyle/>
-          <a:p>
-            <a:pPr algn="ctr"/>
-          </a:p>
-        </p:txBody>
-      </p:sp>
-      <p:sp>
-        <p:nvSpPr>
-          <p:cNvPr id="23" name="TextBox 22"/>
-          <p:cNvSpPr txBox="1"/>
-          <p:nvPr/>
-        </p:nvSpPr>
-        <p:spPr>
-          <a:xfrm>
-            <a:off x="594360" y="5660136"/>
-            <a:ext cx="438912" cy="438912"/>
-          </a:xfrm>
-          <a:prstGeom prst="rect">
-            <a:avLst/>
-          </a:prstGeom>
-          <a:noFill/>
-        </p:spPr>
-        <p:txBody>
-          <a:bodyPr wrap="square" anchor="ctr"/>
-          <a:lstStyle/>
-          <a:p>
-            <a:pPr algn="ctr"/>
-            <a:r>
-              <a:rPr sz="1600" b="1" i="0">
+              <a:t>  AF --&gt; DA[Diseno de arquitectura]</a:t>
+            </a:r>
+          </a:p>
+          <a:p>
+            <a:pPr>
+              <a:spcAft>
+                <a:spcPts val="371"/>
+              </a:spcAft>
+            </a:pPr>
+            <a:r>
+              <a:rPr sz="1300" b="0" i="0">
                 <a:solidFill>
                   <a:srgbClr val="FFFFFF"/>
                 </a:solidFill>
                 <a:latin typeface="Calibri"/>
               </a:rPr>
-              <a:t>5</a:t>
-            </a:r>
-          </a:p>
-        </p:txBody>
-      </p:sp>
-      <p:sp>
-        <p:nvSpPr>
-          <p:cNvPr id="24" name="TextBox 23"/>
-          <p:cNvSpPr txBox="1"/>
-          <p:nvPr/>
-        </p:nvSpPr>
-        <p:spPr>
-          <a:xfrm>
-            <a:off x="1188720" y="5495544"/>
-            <a:ext cx="10271455" cy="786384"/>
-          </a:xfrm>
-          <a:prstGeom prst="rect">
-            <a:avLst/>
-          </a:prstGeom>
-          <a:noFill/>
-        </p:spPr>
-        <p:txBody>
-          <a:bodyPr wrap="square" anchor="ctr"/>
-          <a:lstStyle/>
-          <a:p>
-            <a:r>
-              <a:rPr sz="1400" b="1" i="0">
-                <a:solidFill>
-                  <a:srgbClr val="095292"/>
-                </a:solidFill>
-                <a:latin typeface="Calibri"/>
-              </a:rPr>
-              <a:t>Diligencie el formato de solicitud de cambio con este caso real: la clinica pide, ya aprobada la linea base, que la busqueda tambien funcione por numero de microchip; describa el requisito afectado, el impacto en diseño y pruebas, y la decision (aprobar, aplazar o rechazar) con su justificacion. Exporte todo a PDF y suba a la plataforma del curso.</a:t>
-            </a:r>
-          </a:p>
-        </p:txBody>
-      </p:sp>
-      <p:sp>
-        <p:nvSpPr>
-          <p:cNvPr id="25" name="TextBox 24"/>
+              <a:t>  DA --&gt; DD[Diseno detallado]</a:t>
+            </a:r>
+          </a:p>
+          <a:p>
+            <a:pPr>
+              <a:spcAft>
+                <a:spcPts val="371"/>
+              </a:spcAft>
+            </a:pPr>
+            <a:r>
+              <a:rPr sz="1300" b="0" i="0">
+                <a:solidFill>
+                  <a:srgbClr val="FFFFFF"/>
+                </a:solidFill>
+                <a:latin typeface="Calibri"/>
+              </a:rPr>
+              <a:t>  DD --&gt; COD[Codificacion]</a:t>
+            </a:r>
+          </a:p>
+          <a:p>
+            <a:pPr>
+              <a:spcAft>
+                <a:spcPts val="371"/>
+              </a:spcAft>
+            </a:pPr>
+            <a:r>
+              <a:rPr sz="1300" b="0" i="0">
+                <a:solidFill>
+                  <a:srgbClr val="FFFFFF"/>
+                </a:solidFill>
+                <a:latin typeface="Calibri"/>
+              </a:rPr>
+              <a:t>  COD --&gt; PU[Pruebas unitarias]</a:t>
+            </a:r>
+          </a:p>
+          <a:p>
+            <a:pPr>
+              <a:spcAft>
+                <a:spcPts val="371"/>
+              </a:spcAft>
+            </a:pPr>
+            <a:r>
+              <a:rPr sz="1300" b="0" i="0">
+                <a:solidFill>
+                  <a:srgbClr val="FFFFFF"/>
+                </a:solidFill>
+                <a:latin typeface="Calibri"/>
+              </a:rPr>
+              <a:t>  PU --&gt; PI[Pruebas de integracion]</a:t>
+            </a:r>
+          </a:p>
+          <a:p>
+            <a:pPr>
+              <a:spcAft>
+                <a:spcPts val="371"/>
+              </a:spcAft>
+            </a:pPr>
+            <a:r>
+              <a:rPr sz="1300" b="0" i="0">
+                <a:solidFill>
+                  <a:srgbClr val="FFFFFF"/>
+                </a:solidFill>
+                <a:latin typeface="Calibri"/>
+              </a:rPr>
+              <a:t>  PI --&gt; PS[Pruebas de sistema]</a:t>
+            </a:r>
+          </a:p>
+          <a:p>
+            <a:pPr>
+              <a:spcAft>
+                <a:spcPts val="371"/>
+              </a:spcAft>
+            </a:pPr>
+            <a:r>
+              <a:rPr sz="1300" b="0" i="0">
+                <a:solidFill>
+                  <a:srgbClr val="FFFFFF"/>
+                </a:solidFill>
+                <a:latin typeface="Calibri"/>
+              </a:rPr>
+              <a:t>  PS --&gt; PA[Pruebas de aceptacion]</a:t>
+            </a:r>
+          </a:p>
+          <a:p>
+            <a:pPr>
+              <a:spcAft>
+                <a:spcPts val="371"/>
+              </a:spcAft>
+            </a:pPr>
+            <a:r>
+              <a:rPr sz="1300" b="0" i="0">
+                <a:solidFill>
+                  <a:srgbClr val="FFFFFF"/>
+                </a:solidFill>
+                <a:latin typeface="Calibri"/>
+              </a:rPr>
+              <a:t/>
+            </a:r>
+          </a:p>
+          <a:p>
+            <a:pPr>
+              <a:spcAft>
+                <a:spcPts val="371"/>
+              </a:spcAft>
+            </a:pPr>
+            <a:r>
+              <a:rPr sz="1300" b="0" i="0">
+                <a:solidFill>
+                  <a:srgbClr val="FFFFFF"/>
+                </a:solidFill>
+                <a:latin typeface="Calibri"/>
+              </a:rPr>
+              <a:t>  R  -.verifica.-&gt; PA</a:t>
+            </a:r>
+          </a:p>
+          <a:p>
+            <a:pPr>
+              <a:spcAft>
+                <a:spcPts val="371"/>
+              </a:spcAft>
+            </a:pPr>
+            <a:r>
+              <a:rPr sz="1300" b="0" i="0">
+                <a:solidFill>
+                  <a:srgbClr val="FFFFFF"/>
+                </a:solidFill>
+                <a:latin typeface="Calibri"/>
+              </a:rPr>
+              <a:t>  AF -.verifica.-&gt; PS</a:t>
+            </a:r>
+          </a:p>
+          <a:p>
+            <a:pPr>
+              <a:spcAft>
+                <a:spcPts val="371"/>
+              </a:spcAft>
+            </a:pPr>
+            <a:r>
+              <a:rPr sz="1300" b="0" i="0">
+                <a:solidFill>
+                  <a:srgbClr val="FFFFFF"/>
+                </a:solidFill>
+                <a:latin typeface="Calibri"/>
+              </a:rPr>
+              <a:t>  DA -.verifica.-&gt; PI</a:t>
+            </a:r>
+          </a:p>
+          <a:p>
+            <a:pPr>
+              <a:spcAft>
+                <a:spcPts val="371"/>
+              </a:spcAft>
+            </a:pPr>
+            <a:r>
+              <a:rPr sz="1300" b="0" i="0">
+                <a:solidFill>
+                  <a:srgbClr val="FFFFFF"/>
+                </a:solidFill>
+                <a:latin typeface="Calibri"/>
+              </a:rPr>
+              <a:t>  DD -.verifica.-&gt; PU</a:t>
+            </a:r>
+          </a:p>
+          <a:p>
+            <a:pPr>
+              <a:spcAft>
+                <a:spcPts val="371"/>
+              </a:spcAft>
+            </a:pPr>
+            <a:r>
+              <a:rPr sz="1300" b="0" i="0">
+                <a:solidFill>
+                  <a:srgbClr val="FFFFFF"/>
+                </a:solidFill>
+                <a:latin typeface="Calibri"/>
+              </a:rPr>
+              <a:t/>
+            </a:r>
+          </a:p>
+          <a:p>
+            <a:pPr>
+              <a:spcAft>
+                <a:spcPts val="371"/>
+              </a:spcAft>
+            </a:pPr>
+            <a:r>
+              <a:rPr sz="1300" b="0" i="0">
+                <a:solidFill>
+                  <a:srgbClr val="FFFFFF"/>
+                </a:solidFill>
+                <a:latin typeface="Calibri"/>
+              </a:rPr>
+              <a:t>%% Las lineas punteadas SON el modelo en V: cada nivel de diseno tiene</a:t>
+            </a:r>
+          </a:p>
+          <a:p>
+            <a:pPr>
+              <a:spcAft>
+                <a:spcPts val="371"/>
+              </a:spcAft>
+            </a:pPr>
+            <a:r>
+              <a:rPr sz="1300" b="0" i="0">
+                <a:solidFill>
+                  <a:srgbClr val="FFFFFF"/>
+                </a:solidFill>
+                <a:latin typeface="Calibri"/>
+              </a:rPr>
+              <a:t>%% su nivel de prueba. Sin ellas es una U y no trazabilidad.</a:t>
+            </a:r>
+          </a:p>
+        </p:txBody>
+      </p:sp>
+      <p:sp>
+        <p:nvSpPr>
+          <p:cNvPr id="9" name="TextBox 8"/>
           <p:cNvSpPr txBox="1"/>
           <p:nvPr/>
         </p:nvSpPr>
@@ -4575,7 +4222,7 @@
                 </a:solidFill>
                 <a:latin typeface="Calibri"/>
               </a:rPr>
-              <a:t>Antes de entregar — autochequeo</a:t>
+              <a:t>La solicitud de cambio sobre linea base</a:t>
             </a:r>
           </a:p>
         </p:txBody>
@@ -4589,7 +4236,7 @@
         <p:spPr>
           <a:xfrm>
             <a:off x="457200" y="1261872"/>
-            <a:ext cx="11277295" cy="566928"/>
+            <a:ext cx="11277295" cy="5093208"/>
           </a:xfrm>
           <a:prstGeom prst="roundRect">
             <a:avLst>
@@ -4597,7 +4244,7 @@
             </a:avLst>
           </a:prstGeom>
           <a:solidFill>
-            <a:srgbClr val="F2F2F2"/>
+            <a:srgbClr val="1E2A38"/>
           </a:solidFill>
           <a:ln>
             <a:noFill/>
@@ -4633,19 +4280,17 @@
         </p:nvSpPr>
         <p:spPr>
           <a:xfrm>
-            <a:off x="640080" y="1408175"/>
-            <a:ext cx="274320" cy="274320"/>
+            <a:off x="457200" y="1261872"/>
+            <a:ext cx="11277295" cy="320040"/>
           </a:xfrm>
           <a:prstGeom prst="rect">
             <a:avLst/>
           </a:prstGeom>
           <a:solidFill>
-            <a:srgbClr val="FFFFFF"/>
+            <a:srgbClr val="095292"/>
           </a:solidFill>
           <a:ln>
-            <a:solidFill>
-              <a:srgbClr val="333333"/>
-            </a:solidFill>
+            <a:noFill/>
           </a:ln>
         </p:spPr>
         <p:style>
@@ -4672,44 +4317,33 @@
       </p:sp>
       <p:sp>
         <p:nvSpPr>
-          <p:cNvPr id="7" name="Rectangle 6"/>
-          <p:cNvSpPr/>
-          <p:nvPr/>
-        </p:nvSpPr>
-        <p:spPr>
-          <a:xfrm>
-            <a:off x="640080" y="1408175"/>
-            <a:ext cx="73152" cy="274320"/>
-          </a:xfrm>
-          <a:prstGeom prst="rect">
-            <a:avLst/>
-          </a:prstGeom>
-          <a:solidFill>
-            <a:srgbClr val="269CCB"/>
-          </a:solidFill>
-          <a:ln>
-            <a:noFill/>
-          </a:ln>
-        </p:spPr>
-        <p:style>
-          <a:lnRef idx="1">
-            <a:schemeClr val="accent1"/>
-          </a:lnRef>
-          <a:fillRef idx="3">
-            <a:schemeClr val="accent1"/>
-          </a:fillRef>
-          <a:effectRef idx="2">
-            <a:schemeClr val="accent1"/>
-          </a:effectRef>
-          <a:fontRef idx="minor">
-            <a:schemeClr val="lt1"/>
-          </a:fontRef>
-        </p:style>
-        <p:txBody>
-          <a:bodyPr rtlCol="0" anchor="ctr"/>
-          <a:lstStyle/>
-          <a:p>
-            <a:pPr algn="ctr"/>
+          <p:cNvPr id="7" name="TextBox 6"/>
+          <p:cNvSpPr txBox="1"/>
+          <p:nvPr/>
+        </p:nvSpPr>
+        <p:spPr>
+          <a:xfrm>
+            <a:off x="685800" y="1307592"/>
+            <a:ext cx="10820095" cy="256032"/>
+          </a:xfrm>
+          <a:prstGeom prst="rect">
+            <a:avLst/>
+          </a:prstGeom>
+          <a:noFill/>
+        </p:spPr>
+        <p:txBody>
+          <a:bodyPr wrap="square" anchor="ctr"/>
+          <a:lstStyle/>
+          <a:p>
+            <a:r>
+              <a:rPr sz="1000" b="1" i="0">
+                <a:solidFill>
+                  <a:srgbClr val="269CCB"/>
+                </a:solidFill>
+                <a:latin typeface="Calibri"/>
+              </a:rPr>
+              <a:t>● ● ●</a:t>
+            </a:r>
           </a:p>
         </p:txBody>
       </p:sp>
@@ -4721,8 +4355,8 @@
         </p:nvSpPr>
         <p:spPr>
           <a:xfrm>
-            <a:off x="1097280" y="1353312"/>
-            <a:ext cx="10362895" cy="402336"/>
+            <a:off x="777240" y="1719072"/>
+            <a:ext cx="10637215" cy="4453128"/>
           </a:xfrm>
           <a:prstGeom prst="rect">
             <a:avLst/>
@@ -4730,354 +4364,239 @@
           <a:noFill/>
         </p:spPr>
         <p:txBody>
-          <a:bodyPr wrap="square" anchor="ctr"/>
-          <a:lstStyle/>
-          <a:p>
-            <a:r>
-              <a:rPr sz="1500" b="0" i="0">
-                <a:solidFill>
-                  <a:srgbClr val="333333"/>
-                </a:solidFill>
-                <a:latin typeface="Calibri"/>
-              </a:rPr>
-              <a:t>Su criterio de aceptacion se puede medir con un cronometro, un contador o un si/no, o depende de que la veterinaria este de buen genio ese dia?</a:t>
-            </a:r>
-          </a:p>
-        </p:txBody>
-      </p:sp>
-      <p:sp>
-        <p:nvSpPr>
-          <p:cNvPr id="9" name="Rounded Rectangle 8"/>
-          <p:cNvSpPr/>
-          <p:nvPr/>
-        </p:nvSpPr>
-        <p:spPr>
-          <a:xfrm>
-            <a:off x="457200" y="1938528"/>
-            <a:ext cx="11277295" cy="566928"/>
-          </a:xfrm>
-          <a:prstGeom prst="roundRect">
-            <a:avLst>
-              <a:gd name="adj" fmla="val 12000"/>
-            </a:avLst>
-          </a:prstGeom>
-          <a:solidFill>
-            <a:srgbClr val="F2F2F2"/>
-          </a:solidFill>
-          <a:ln>
-            <a:noFill/>
-          </a:ln>
-        </p:spPr>
-        <p:style>
-          <a:lnRef idx="1">
-            <a:schemeClr val="accent1"/>
-          </a:lnRef>
-          <a:fillRef idx="3">
-            <a:schemeClr val="accent1"/>
-          </a:fillRef>
-          <a:effectRef idx="2">
-            <a:schemeClr val="accent1"/>
-          </a:effectRef>
-          <a:fontRef idx="minor">
-            <a:schemeClr val="lt1"/>
-          </a:fontRef>
-        </p:style>
-        <p:txBody>
-          <a:bodyPr rtlCol="0" anchor="ctr"/>
-          <a:lstStyle/>
-          <a:p>
-            <a:pPr algn="ctr"/>
-          </a:p>
-        </p:txBody>
-      </p:sp>
-      <p:sp>
-        <p:nvSpPr>
-          <p:cNvPr id="10" name="Rectangle 9"/>
-          <p:cNvSpPr/>
-          <p:nvPr/>
-        </p:nvSpPr>
-        <p:spPr>
-          <a:xfrm>
-            <a:off x="640080" y="2084832"/>
-            <a:ext cx="274320" cy="274320"/>
-          </a:xfrm>
-          <a:prstGeom prst="rect">
-            <a:avLst/>
-          </a:prstGeom>
-          <a:solidFill>
-            <a:srgbClr val="FFFFFF"/>
-          </a:solidFill>
-          <a:ln>
-            <a:solidFill>
-              <a:srgbClr val="333333"/>
-            </a:solidFill>
-          </a:ln>
-        </p:spPr>
-        <p:style>
-          <a:lnRef idx="1">
-            <a:schemeClr val="accent1"/>
-          </a:lnRef>
-          <a:fillRef idx="3">
-            <a:schemeClr val="accent1"/>
-          </a:fillRef>
-          <a:effectRef idx="2">
-            <a:schemeClr val="accent1"/>
-          </a:effectRef>
-          <a:fontRef idx="minor">
-            <a:schemeClr val="lt1"/>
-          </a:fontRef>
-        </p:style>
-        <p:txBody>
-          <a:bodyPr rtlCol="0" anchor="ctr"/>
-          <a:lstStyle/>
-          <a:p>
-            <a:pPr algn="ctr"/>
-          </a:p>
-        </p:txBody>
-      </p:sp>
-      <p:sp>
-        <p:nvSpPr>
-          <p:cNvPr id="11" name="Rectangle 10"/>
-          <p:cNvSpPr/>
-          <p:nvPr/>
-        </p:nvSpPr>
-        <p:spPr>
-          <a:xfrm>
-            <a:off x="640080" y="2084832"/>
-            <a:ext cx="73152" cy="274320"/>
-          </a:xfrm>
-          <a:prstGeom prst="rect">
-            <a:avLst/>
-          </a:prstGeom>
-          <a:solidFill>
-            <a:srgbClr val="269CCB"/>
-          </a:solidFill>
-          <a:ln>
-            <a:noFill/>
-          </a:ln>
-        </p:spPr>
-        <p:style>
-          <a:lnRef idx="1">
-            <a:schemeClr val="accent1"/>
-          </a:lnRef>
-          <a:fillRef idx="3">
-            <a:schemeClr val="accent1"/>
-          </a:fillRef>
-          <a:effectRef idx="2">
-            <a:schemeClr val="accent1"/>
-          </a:effectRef>
-          <a:fontRef idx="minor">
-            <a:schemeClr val="lt1"/>
-          </a:fontRef>
-        </p:style>
-        <p:txBody>
-          <a:bodyPr rtlCol="0" anchor="ctr"/>
-          <a:lstStyle/>
-          <a:p>
-            <a:pPr algn="ctr"/>
-          </a:p>
-        </p:txBody>
-      </p:sp>
-      <p:sp>
-        <p:nvSpPr>
-          <p:cNvPr id="12" name="TextBox 11"/>
-          <p:cNvSpPr txBox="1"/>
-          <p:nvPr/>
-        </p:nvSpPr>
-        <p:spPr>
-          <a:xfrm>
-            <a:off x="1097280" y="2029968"/>
-            <a:ext cx="10362895" cy="402336"/>
-          </a:xfrm>
-          <a:prstGeom prst="rect">
-            <a:avLst/>
-          </a:prstGeom>
-          <a:noFill/>
-        </p:spPr>
-        <p:txBody>
-          <a:bodyPr wrap="square" anchor="ctr"/>
-          <a:lstStyle/>
-          <a:p>
-            <a:r>
-              <a:rPr sz="1500" b="0" i="0">
-                <a:solidFill>
-                  <a:srgbClr val="333333"/>
-                </a:solidFill>
-                <a:latin typeface="Calibri"/>
-              </a:rPr>
-              <a:t>Si mañana entra un estudiante nuevo al equipo, podria saber solo leyendo el documento quien pidio cada requisito y en que version se aprobo?</a:t>
-            </a:r>
-          </a:p>
-        </p:txBody>
-      </p:sp>
-      <p:sp>
-        <p:nvSpPr>
-          <p:cNvPr id="13" name="Rounded Rectangle 12"/>
-          <p:cNvSpPr/>
-          <p:nvPr/>
-        </p:nvSpPr>
-        <p:spPr>
-          <a:xfrm>
-            <a:off x="457200" y="2615184"/>
-            <a:ext cx="11277295" cy="566928"/>
-          </a:xfrm>
-          <a:prstGeom prst="roundRect">
-            <a:avLst>
-              <a:gd name="adj" fmla="val 12000"/>
-            </a:avLst>
-          </a:prstGeom>
-          <a:solidFill>
-            <a:srgbClr val="F2F2F2"/>
-          </a:solidFill>
-          <a:ln>
-            <a:noFill/>
-          </a:ln>
-        </p:spPr>
-        <p:style>
-          <a:lnRef idx="1">
-            <a:schemeClr val="accent1"/>
-          </a:lnRef>
-          <a:fillRef idx="3">
-            <a:schemeClr val="accent1"/>
-          </a:fillRef>
-          <a:effectRef idx="2">
-            <a:schemeClr val="accent1"/>
-          </a:effectRef>
-          <a:fontRef idx="minor">
-            <a:schemeClr val="lt1"/>
-          </a:fontRef>
-        </p:style>
-        <p:txBody>
-          <a:bodyPr rtlCol="0" anchor="ctr"/>
-          <a:lstStyle/>
-          <a:p>
-            <a:pPr algn="ctr"/>
-          </a:p>
-        </p:txBody>
-      </p:sp>
-      <p:sp>
-        <p:nvSpPr>
-          <p:cNvPr id="14" name="Rectangle 13"/>
-          <p:cNvSpPr/>
-          <p:nvPr/>
-        </p:nvSpPr>
-        <p:spPr>
-          <a:xfrm>
-            <a:off x="640080" y="2761488"/>
-            <a:ext cx="274320" cy="274320"/>
-          </a:xfrm>
-          <a:prstGeom prst="rect">
-            <a:avLst/>
-          </a:prstGeom>
-          <a:solidFill>
-            <a:srgbClr val="FFFFFF"/>
-          </a:solidFill>
-          <a:ln>
-            <a:solidFill>
-              <a:srgbClr val="333333"/>
-            </a:solidFill>
-          </a:ln>
-        </p:spPr>
-        <p:style>
-          <a:lnRef idx="1">
-            <a:schemeClr val="accent1"/>
-          </a:lnRef>
-          <a:fillRef idx="3">
-            <a:schemeClr val="accent1"/>
-          </a:fillRef>
-          <a:effectRef idx="2">
-            <a:schemeClr val="accent1"/>
-          </a:effectRef>
-          <a:fontRef idx="minor">
-            <a:schemeClr val="lt1"/>
-          </a:fontRef>
-        </p:style>
-        <p:txBody>
-          <a:bodyPr rtlCol="0" anchor="ctr"/>
-          <a:lstStyle/>
-          <a:p>
-            <a:pPr algn="ctr"/>
-          </a:p>
-        </p:txBody>
-      </p:sp>
-      <p:sp>
-        <p:nvSpPr>
-          <p:cNvPr id="15" name="Rectangle 14"/>
-          <p:cNvSpPr/>
-          <p:nvPr/>
-        </p:nvSpPr>
-        <p:spPr>
-          <a:xfrm>
-            <a:off x="640080" y="2761488"/>
-            <a:ext cx="73152" cy="274320"/>
-          </a:xfrm>
-          <a:prstGeom prst="rect">
-            <a:avLst/>
-          </a:prstGeom>
-          <a:solidFill>
-            <a:srgbClr val="269CCB"/>
-          </a:solidFill>
-          <a:ln>
-            <a:noFill/>
-          </a:ln>
-        </p:spPr>
-        <p:style>
-          <a:lnRef idx="1">
-            <a:schemeClr val="accent1"/>
-          </a:lnRef>
-          <a:fillRef idx="3">
-            <a:schemeClr val="accent1"/>
-          </a:fillRef>
-          <a:effectRef idx="2">
-            <a:schemeClr val="accent1"/>
-          </a:effectRef>
-          <a:fontRef idx="minor">
-            <a:schemeClr val="lt1"/>
-          </a:fontRef>
-        </p:style>
-        <p:txBody>
-          <a:bodyPr rtlCol="0" anchor="ctr"/>
-          <a:lstStyle/>
-          <a:p>
-            <a:pPr algn="ctr"/>
-          </a:p>
-        </p:txBody>
-      </p:sp>
-      <p:sp>
-        <p:nvSpPr>
-          <p:cNvPr id="16" name="TextBox 15"/>
-          <p:cNvSpPr txBox="1"/>
-          <p:nvPr/>
-        </p:nvSpPr>
-        <p:spPr>
-          <a:xfrm>
-            <a:off x="1097280" y="2706624"/>
-            <a:ext cx="10362895" cy="402336"/>
-          </a:xfrm>
-          <a:prstGeom prst="rect">
-            <a:avLst/>
-          </a:prstGeom>
-          <a:noFill/>
-        </p:spPr>
-        <p:txBody>
-          <a:bodyPr wrap="square" anchor="ctr"/>
-          <a:lstStyle/>
-          <a:p>
-            <a:r>
-              <a:rPr sz="1500" b="0" i="0">
-                <a:solidFill>
-                  <a:srgbClr val="333333"/>
-                </a:solidFill>
-                <a:latin typeface="Calibri"/>
-              </a:rPr>
-              <a:t>Hay algun requisito en su lista que no tenga ninguna prueba asociada? Si lo hay, como pensaba demostrarle a la clinica que ese requisito quedo cumplido?</a:t>
-            </a:r>
-          </a:p>
-        </p:txBody>
-      </p:sp>
-      <p:sp>
-        <p:nvSpPr>
-          <p:cNvPr id="17" name="TextBox 16"/>
+          <a:bodyPr wrap="square">
+            <a:spAutoFit/>
+          </a:bodyPr>
+          <a:lstStyle/>
+          <a:p>
+            <a:pPr>
+              <a:spcAft>
+                <a:spcPts val="400"/>
+              </a:spcAft>
+            </a:pPr>
+            <a:r>
+              <a:rPr sz="1400" b="0" i="0">
+                <a:solidFill>
+                  <a:srgbClr val="FFFFFF"/>
+                </a:solidFill>
+                <a:latin typeface="Calibri"/>
+              </a:rPr>
+              <a:t>SC-001  Solicitud de cambio</a:t>
+            </a:r>
+          </a:p>
+          <a:p>
+            <a:pPr>
+              <a:spcAft>
+                <a:spcPts val="400"/>
+              </a:spcAft>
+            </a:pPr>
+            <a:r>
+              <a:rPr sz="1400" b="0" i="0">
+                <a:solidFill>
+                  <a:srgbClr val="FFFFFF"/>
+                </a:solidFill>
+                <a:latin typeface="Calibri"/>
+              </a:rPr>
+              <a:t/>
+            </a:r>
+          </a:p>
+          <a:p>
+            <a:pPr>
+              <a:spcAft>
+                <a:spcPts val="400"/>
+              </a:spcAft>
+            </a:pPr>
+            <a:r>
+              <a:rPr sz="1400" b="0" i="0">
+                <a:solidFill>
+                  <a:srgbClr val="FFFFFF"/>
+                </a:solidFill>
+                <a:latin typeface="Calibri"/>
+              </a:rPr>
+              <a:t>Documento afectado: ERS VetCare v1.0 (linea base aprobada 20/08/2026)</a:t>
+            </a:r>
+          </a:p>
+          <a:p>
+            <a:pPr>
+              <a:spcAft>
+                <a:spcPts val="400"/>
+              </a:spcAft>
+            </a:pPr>
+            <a:r>
+              <a:rPr sz="1400" b="0" i="0">
+                <a:solidFill>
+                  <a:srgbClr val="FFFFFF"/>
+                </a:solidFill>
+                <a:latin typeface="Calibri"/>
+              </a:rPr>
+              <a:t>Solicita:           Dr. Ramirez</a:t>
+            </a:r>
+          </a:p>
+          <a:p>
+            <a:pPr>
+              <a:spcAft>
+                <a:spcPts val="400"/>
+              </a:spcAft>
+            </a:pPr>
+            <a:r>
+              <a:rPr sz="1400" b="0" i="0">
+                <a:solidFill>
+                  <a:srgbClr val="FFFFFF"/>
+                </a:solidFill>
+                <a:latin typeface="Calibri"/>
+              </a:rPr>
+              <a:t>Cambio pedido:      agregar recordatorio por WhatsApp al agendar</a:t>
+            </a:r>
+          </a:p>
+          <a:p>
+            <a:pPr>
+              <a:spcAft>
+                <a:spcPts val="400"/>
+              </a:spcAft>
+            </a:pPr>
+            <a:r>
+              <a:rPr sz="1400" b="0" i="0">
+                <a:solidFill>
+                  <a:srgbClr val="FFFFFF"/>
+                </a:solidFill>
+                <a:latin typeface="Calibri"/>
+              </a:rPr>
+              <a:t>Requisitos tocados: RF-03 (agendar cita), RNF-02 (disponibilidad)</a:t>
+            </a:r>
+          </a:p>
+          <a:p>
+            <a:pPr>
+              <a:spcAft>
+                <a:spcPts val="400"/>
+              </a:spcAft>
+            </a:pPr>
+            <a:r>
+              <a:rPr sz="1400" b="0" i="0">
+                <a:solidFill>
+                  <a:srgbClr val="FFFFFF"/>
+                </a:solidFill>
+                <a:latin typeface="Calibri"/>
+              </a:rPr>
+              <a:t>Impacto en alcance: +1 RF nuevo, +1 integracion externa</a:t>
+            </a:r>
+          </a:p>
+          <a:p>
+            <a:pPr>
+              <a:spcAft>
+                <a:spcPts val="400"/>
+              </a:spcAft>
+            </a:pPr>
+            <a:r>
+              <a:rPr sz="1400" b="0" i="0">
+                <a:solidFill>
+                  <a:srgbClr val="FFFFFF"/>
+                </a:solidFill>
+                <a:latin typeface="Calibri"/>
+              </a:rPr>
+              <a:t>Impacto en plan:    +1 sprint de diseno</a:t>
+            </a:r>
+          </a:p>
+          <a:p>
+            <a:pPr>
+              <a:spcAft>
+                <a:spcPts val="400"/>
+              </a:spcAft>
+            </a:pPr>
+            <a:r>
+              <a:rPr sz="1400" b="0" i="0">
+                <a:solidFill>
+                  <a:srgbClr val="FFFFFF"/>
+                </a:solidFill>
+                <a:latin typeface="Calibri"/>
+              </a:rPr>
+              <a:t>Decision:           &lt;aprobada | rechazada | diferida&gt;  por &lt;quien&gt;</a:t>
+            </a:r>
+          </a:p>
+          <a:p>
+            <a:pPr>
+              <a:spcAft>
+                <a:spcPts val="400"/>
+              </a:spcAft>
+            </a:pPr>
+            <a:r>
+              <a:rPr sz="1400" b="0" i="0">
+                <a:solidFill>
+                  <a:srgbClr val="FFFFFF"/>
+                </a:solidFill>
+                <a:latin typeface="Calibri"/>
+              </a:rPr>
+              <a:t>Nueva version:      ERS VetCare v1.1</a:t>
+            </a:r>
+          </a:p>
+          <a:p>
+            <a:pPr>
+              <a:spcAft>
+                <a:spcPts val="400"/>
+              </a:spcAft>
+            </a:pPr>
+            <a:r>
+              <a:rPr sz="1400" b="0" i="0">
+                <a:solidFill>
+                  <a:srgbClr val="FFFFFF"/>
+                </a:solidFill>
+                <a:latin typeface="Calibri"/>
+              </a:rPr>
+              <a:t/>
+            </a:r>
+          </a:p>
+          <a:p>
+            <a:pPr>
+              <a:spcAft>
+                <a:spcPts val="400"/>
+              </a:spcAft>
+            </a:pPr>
+            <a:r>
+              <a:rPr sz="1400" b="0" i="0">
+                <a:solidFill>
+                  <a:srgbClr val="FFFFFF"/>
+                </a:solidFill>
+                <a:latin typeface="Calibri"/>
+              </a:rPr>
+              <a:t>-- Tener linea base no significa que no se pueda cambiar: significa que</a:t>
+            </a:r>
+          </a:p>
+          <a:p>
+            <a:pPr>
+              <a:spcAft>
+                <a:spcPts val="400"/>
+              </a:spcAft>
+            </a:pPr>
+            <a:r>
+              <a:rPr sz="1400" b="0" i="0">
+                <a:solidFill>
+                  <a:srgbClr val="FFFFFF"/>
+                </a:solidFill>
+                <a:latin typeface="Calibri"/>
+              </a:rPr>
+              <a:t>-- el cambio deja RASTRO y sube la version. Editar el v1.0 en silencio</a:t>
+            </a:r>
+          </a:p>
+          <a:p>
+            <a:pPr>
+              <a:spcAft>
+                <a:spcPts val="400"/>
+              </a:spcAft>
+            </a:pPr>
+            <a:r>
+              <a:rPr sz="1400" b="0" i="0">
+                <a:solidFill>
+                  <a:srgbClr val="FFFFFF"/>
+                </a:solidFill>
+                <a:latin typeface="Calibri"/>
+              </a:rPr>
+              <a:t>-- es lo que rompe la trazabilidad.</a:t>
+            </a:r>
+          </a:p>
+        </p:txBody>
+      </p:sp>
+      <p:sp>
+        <p:nvSpPr>
+          <p:cNvPr id="9" name="TextBox 8"/>
           <p:cNvSpPr txBox="1"/>
           <p:nvPr/>
         </p:nvSpPr>
@@ -5251,21 +4770,141 @@
                 </a:solidFill>
                 <a:latin typeface="Calibri"/>
               </a:rPr>
-              <a:t>Criterios de exito / entregable</a:t>
-            </a:r>
-          </a:p>
-        </p:txBody>
-      </p:sp>
-      <p:sp>
-        <p:nvSpPr>
-          <p:cNvPr id="5" name="TextBox 4"/>
+              <a:t>Ficha formal de requisito de VetCare (asi se ve un requisito con linea base)</a:t>
+            </a:r>
+          </a:p>
+        </p:txBody>
+      </p:sp>
+      <p:sp>
+        <p:nvSpPr>
+          <p:cNvPr id="5" name="Rounded Rectangle 4"/>
+          <p:cNvSpPr/>
+          <p:nvPr/>
+        </p:nvSpPr>
+        <p:spPr>
+          <a:xfrm>
+            <a:off x="457200" y="1261872"/>
+            <a:ext cx="11277295" cy="4773168"/>
+          </a:xfrm>
+          <a:prstGeom prst="roundRect">
+            <a:avLst>
+              <a:gd name="adj" fmla="val 12000"/>
+            </a:avLst>
+          </a:prstGeom>
+          <a:solidFill>
+            <a:srgbClr val="1E2A38"/>
+          </a:solidFill>
+          <a:ln>
+            <a:noFill/>
+          </a:ln>
+        </p:spPr>
+        <p:style>
+          <a:lnRef idx="1">
+            <a:schemeClr val="accent1"/>
+          </a:lnRef>
+          <a:fillRef idx="3">
+            <a:schemeClr val="accent1"/>
+          </a:fillRef>
+          <a:effectRef idx="2">
+            <a:schemeClr val="accent1"/>
+          </a:effectRef>
+          <a:fontRef idx="minor">
+            <a:schemeClr val="lt1"/>
+          </a:fontRef>
+        </p:style>
+        <p:txBody>
+          <a:bodyPr rtlCol="0" anchor="ctr"/>
+          <a:lstStyle/>
+          <a:p>
+            <a:pPr algn="ctr"/>
+          </a:p>
+        </p:txBody>
+      </p:sp>
+      <p:sp>
+        <p:nvSpPr>
+          <p:cNvPr id="6" name="Rectangle 5"/>
+          <p:cNvSpPr/>
+          <p:nvPr/>
+        </p:nvSpPr>
+        <p:spPr>
+          <a:xfrm>
+            <a:off x="457200" y="1261872"/>
+            <a:ext cx="11277295" cy="320040"/>
+          </a:xfrm>
+          <a:prstGeom prst="rect">
+            <a:avLst/>
+          </a:prstGeom>
+          <a:solidFill>
+            <a:srgbClr val="095292"/>
+          </a:solidFill>
+          <a:ln>
+            <a:noFill/>
+          </a:ln>
+        </p:spPr>
+        <p:style>
+          <a:lnRef idx="1">
+            <a:schemeClr val="accent1"/>
+          </a:lnRef>
+          <a:fillRef idx="3">
+            <a:schemeClr val="accent1"/>
+          </a:fillRef>
+          <a:effectRef idx="2">
+            <a:schemeClr val="accent1"/>
+          </a:effectRef>
+          <a:fontRef idx="minor">
+            <a:schemeClr val="lt1"/>
+          </a:fontRef>
+        </p:style>
+        <p:txBody>
+          <a:bodyPr rtlCol="0" anchor="ctr"/>
+          <a:lstStyle/>
+          <a:p>
+            <a:pPr algn="ctr"/>
+          </a:p>
+        </p:txBody>
+      </p:sp>
+      <p:sp>
+        <p:nvSpPr>
+          <p:cNvPr id="7" name="TextBox 6"/>
           <p:cNvSpPr txBox="1"/>
           <p:nvPr/>
         </p:nvSpPr>
         <p:spPr>
           <a:xfrm>
-            <a:off x="457200" y="1170432"/>
-            <a:ext cx="11277295" cy="5230368"/>
+            <a:off x="685800" y="1307592"/>
+            <a:ext cx="10820095" cy="256032"/>
+          </a:xfrm>
+          <a:prstGeom prst="rect">
+            <a:avLst/>
+          </a:prstGeom>
+          <a:noFill/>
+        </p:spPr>
+        <p:txBody>
+          <a:bodyPr wrap="square" anchor="ctr"/>
+          <a:lstStyle/>
+          <a:p>
+            <a:r>
+              <a:rPr sz="1000" b="1" i="0">
+                <a:solidFill>
+                  <a:srgbClr val="269CCB"/>
+                </a:solidFill>
+                <a:latin typeface="Calibri"/>
+              </a:rPr>
+              <a:t>● ● ●</a:t>
+            </a:r>
+          </a:p>
+        </p:txBody>
+      </p:sp>
+      <p:sp>
+        <p:nvSpPr>
+          <p:cNvPr id="8" name="TextBox 7"/>
+          <p:cNvSpPr txBox="1"/>
+          <p:nvPr/>
+        </p:nvSpPr>
+        <p:spPr>
+          <a:xfrm>
+            <a:off x="777240" y="1719072"/>
+            <a:ext cx="10637215" cy="4133087"/>
           </a:xfrm>
           <a:prstGeom prst="rect">
             <a:avLst/>
@@ -5280,212 +4919,267 @@
           <a:p>
             <a:pPr>
               <a:spcAft>
-                <a:spcPts val="800"/>
+                <a:spcPts val="400"/>
               </a:spcAft>
             </a:pPr>
             <a:r>
-              <a:rPr sz="2000" b="0" i="0">
-                <a:solidFill>
-                  <a:srgbClr val="333333"/>
-                </a:solidFill>
-                <a:latin typeface="Calibri"/>
-              </a:rPr>
-              <a:t>–   </a:t>
-            </a:r>
-            <a:r>
-              <a:rPr sz="2000" b="1" i="0">
-                <a:solidFill>
-                  <a:srgbClr val="333333"/>
-                </a:solidFill>
-                <a:latin typeface="Calibri"/>
-              </a:rPr>
-              <a:t>Entregable:</a:t>
-            </a:r>
-            <a:r>
-              <a:rPr sz="2000" b="0" i="0">
-                <a:solidFill>
-                  <a:srgbClr val="333333"/>
-                </a:solidFill>
-                <a:latin typeface="Calibri"/>
-              </a:rPr>
-              <a:t> Un documento en Google Docs con el indice del ERS de VetCare, cuatro requisitos escritos en formato de ficha con version y linea base, la matriz en V (requisito - nivel de prueba - criterio de aceptacion) y un formato de solicitud de cambio diligenciado; mas el diagrama en V dibujado en draw.io y subido a la plataforma del curso.</a:t>
+              <a:rPr sz="1400" b="0" i="0">
+                <a:solidFill>
+                  <a:srgbClr val="FFFFFF"/>
+                </a:solidFill>
+                <a:latin typeface="Calibri"/>
+              </a:rPr>
+              <a:t>ID: RF-03            Version: 1.2      Estado: Aprobado (linea base 27/08)</a:t>
             </a:r>
           </a:p>
           <a:p>
             <a:pPr>
               <a:spcAft>
-                <a:spcPts val="800"/>
+                <a:spcPts val="400"/>
               </a:spcAft>
             </a:pPr>
             <a:r>
-              <a:rPr sz="2000" b="0" i="0">
-                <a:solidFill>
-                  <a:srgbClr val="333333"/>
-                </a:solidFill>
-                <a:latin typeface="Calibri"/>
-              </a:rPr>
-              <a:t>–   </a:t>
-            </a:r>
-            <a:r>
-              <a:rPr sz="2000" b="1" i="0">
-                <a:solidFill>
-                  <a:srgbClr val="333333"/>
-                </a:solidFill>
-                <a:latin typeface="Calibri"/>
-              </a:rPr>
-              <a:t>Exito:</a:t>
-            </a:r>
-            <a:r>
-              <a:rPr sz="2000" b="0" i="0">
-                <a:solidFill>
-                  <a:srgbClr val="333333"/>
-                </a:solidFill>
-                <a:latin typeface="Calibri"/>
-              </a:rPr>
-              <a:t> Cada requisito tiene ID unico, fuente identificada, version, estado y un criterio de aceptacion medible (con numero, tiempo o cantidad), no una opinion.</a:t>
+              <a:rPr sz="1400" b="0" i="0">
+                <a:solidFill>
+                  <a:srgbClr val="FFFFFF"/>
+                </a:solidFill>
+                <a:latin typeface="Calibri"/>
+              </a:rPr>
+              <a:t>Nombre: Buscar la historia clinica de un paciente</a:t>
             </a:r>
           </a:p>
           <a:p>
             <a:pPr>
               <a:spcAft>
-                <a:spcPts val="800"/>
+                <a:spcPts val="400"/>
               </a:spcAft>
             </a:pPr>
             <a:r>
-              <a:rPr sz="2000" b="0" i="0">
-                <a:solidFill>
-                  <a:srgbClr val="333333"/>
-                </a:solidFill>
-                <a:latin typeface="Calibri"/>
-              </a:rPr>
-              <a:t>–   </a:t>
-            </a:r>
-            <a:r>
-              <a:rPr sz="2000" b="1" i="0">
-                <a:solidFill>
-                  <a:srgbClr val="333333"/>
-                </a:solidFill>
-                <a:latin typeface="Calibri"/>
-              </a:rPr>
-              <a:t>Exito:</a:t>
-            </a:r>
-            <a:r>
-              <a:rPr sz="2000" b="0" i="0">
-                <a:solidFill>
-                  <a:srgbClr val="333333"/>
-                </a:solidFill>
-                <a:latin typeface="Calibri"/>
-              </a:rPr>
-              <a:t> La matriz en V empareja cada fase de la izquierda con su nivel de prueba a la derecha y no deja ningun requisito sin su caso de prueba asociado.</a:t>
+              <a:rPr sz="1400" b="0" i="0">
+                <a:solidFill>
+                  <a:srgbClr val="FFFFFF"/>
+                </a:solidFill>
+                <a:latin typeface="Calibri"/>
+              </a:rPr>
+              <a:t>Fuente: Dra. Marcela Rios, medica veterinaria de Huellitas</a:t>
             </a:r>
           </a:p>
           <a:p>
             <a:pPr>
               <a:spcAft>
-                <a:spcPts val="800"/>
+                <a:spcPts val="400"/>
               </a:spcAft>
             </a:pPr>
             <a:r>
-              <a:rPr sz="2000" b="0" i="0">
-                <a:solidFill>
-                  <a:srgbClr val="333333"/>
-                </a:solidFill>
-                <a:latin typeface="Calibri"/>
-              </a:rPr>
-              <a:t>–   </a:t>
-            </a:r>
-            <a:r>
-              <a:rPr sz="2000" b="1" i="0">
-                <a:solidFill>
-                  <a:srgbClr val="333333"/>
-                </a:solidFill>
-                <a:latin typeface="Calibri"/>
-              </a:rPr>
-              <a:t>Exito:</a:t>
-            </a:r>
-            <a:r>
-              <a:rPr sz="2000" b="0" i="0">
-                <a:solidFill>
-                  <a:srgbClr val="333333"/>
-                </a:solidFill>
-                <a:latin typeface="Calibri"/>
-              </a:rPr>
-              <a:t> El diagrama en draw.io muestra las dos ramas de la V y al menos dos lineas de trazabilidad rotuladas con IDs reales de VetCare.</a:t>
+              <a:rPr sz="1400" b="0" i="0">
+                <a:solidFill>
+                  <a:srgbClr val="FFFFFF"/>
+                </a:solidFill>
+                <a:latin typeface="Calibri"/>
+              </a:rPr>
+              <a:t>Prioridad: Alta      Estabilidad: Alta      Modulo: Historia clinica</a:t>
             </a:r>
           </a:p>
           <a:p>
             <a:pPr>
               <a:spcAft>
-                <a:spcPts val="800"/>
+                <a:spcPts val="400"/>
               </a:spcAft>
             </a:pPr>
             <a:r>
-              <a:rPr sz="2000" b="0" i="0">
-                <a:solidFill>
-                  <a:srgbClr val="333333"/>
-                </a:solidFill>
-                <a:latin typeface="Calibri"/>
-              </a:rPr>
-              <a:t>–   </a:t>
-            </a:r>
-            <a:r>
-              <a:rPr sz="2000" b="1" i="0">
-                <a:solidFill>
-                  <a:srgbClr val="333333"/>
-                </a:solidFill>
-                <a:latin typeface="Calibri"/>
-              </a:rPr>
-              <a:t>Exito:</a:t>
-            </a:r>
-            <a:r>
-              <a:rPr sz="2000" b="0" i="0">
-                <a:solidFill>
-                  <a:srgbClr val="333333"/>
-                </a:solidFill>
-                <a:latin typeface="Calibri"/>
-              </a:rPr>
-              <a:t> La solicitud de cambio identifica el requisito afectado, el impacto en diseño y pruebas y una decision justificada, no un simple 'si, se agrega'.</a:t>
+              <a:rPr sz="1400" b="0" i="0">
+                <a:solidFill>
+                  <a:srgbClr val="FFFFFF"/>
+                </a:solidFill>
+                <a:latin typeface="Calibri"/>
+              </a:rPr>
+              <a:t>Descripcion: El sistema debe permitir buscar la historia clinica de un</a:t>
             </a:r>
           </a:p>
           <a:p>
             <a:pPr>
               <a:spcAft>
-                <a:spcPts val="800"/>
+                <a:spcPts val="400"/>
               </a:spcAft>
             </a:pPr>
             <a:r>
-              <a:rPr sz="2000" b="0" i="0">
-                <a:solidFill>
-                  <a:srgbClr val="333333"/>
-                </a:solidFill>
-                <a:latin typeface="Calibri"/>
-              </a:rPr>
-              <a:t>–   </a:t>
-            </a:r>
-            <a:r>
-              <a:rPr sz="2000" b="1" i="0">
-                <a:solidFill>
-                  <a:srgbClr val="333333"/>
-                </a:solidFill>
-                <a:latin typeface="Calibri"/>
-              </a:rPr>
-              <a:t>Entrega en la plataforma del curso</a:t>
-            </a:r>
-            <a:r>
-              <a:rPr sz="2000" b="0" i="0">
-                <a:solidFill>
-                  <a:srgbClr val="333333"/>
-                </a:solidFill>
-                <a:latin typeface="Calibri"/>
-              </a:rPr>
-              <a:t> — en la fecha que indique el docente.</a:t>
-            </a:r>
-          </a:p>
-        </p:txBody>
-      </p:sp>
-      <p:sp>
-        <p:nvSpPr>
-          <p:cNvPr id="6" name="TextBox 5"/>
+              <a:rPr sz="1400" b="0" i="0">
+                <a:solidFill>
+                  <a:srgbClr val="FFFFFF"/>
+                </a:solidFill>
+                <a:latin typeface="Calibri"/>
+              </a:rPr>
+              <a:t>  paciente por nombre de la mascota, por documento del propietario o por</a:t>
+            </a:r>
+          </a:p>
+          <a:p>
+            <a:pPr>
+              <a:spcAft>
+                <a:spcPts val="400"/>
+              </a:spcAft>
+            </a:pPr>
+            <a:r>
+              <a:rPr sz="1400" b="0" i="0">
+                <a:solidFill>
+                  <a:srgbClr val="FFFFFF"/>
+                </a:solidFill>
+                <a:latin typeface="Calibri"/>
+              </a:rPr>
+              <a:t>  codigo de ficha, mostrando las ultimas tres consultas registradas.</a:t>
+            </a:r>
+          </a:p>
+          <a:p>
+            <a:pPr>
+              <a:spcAft>
+                <a:spcPts val="400"/>
+              </a:spcAft>
+            </a:pPr>
+            <a:r>
+              <a:rPr sz="1400" b="0" i="0">
+                <a:solidFill>
+                  <a:srgbClr val="FFFFFF"/>
+                </a:solidFill>
+                <a:latin typeface="Calibri"/>
+              </a:rPr>
+              <a:t>Precondicion: el paciente esta registrado y el usuario tiene rol Veterinario.</a:t>
+            </a:r>
+          </a:p>
+          <a:p>
+            <a:pPr>
+              <a:spcAft>
+                <a:spcPts val="400"/>
+              </a:spcAft>
+            </a:pPr>
+            <a:r>
+              <a:rPr sz="1400" b="0" i="0">
+                <a:solidFill>
+                  <a:srgbClr val="FFFFFF"/>
+                </a:solidFill>
+                <a:latin typeface="Calibri"/>
+              </a:rPr>
+              <a:t>Criterio de aceptacion: con 5.000 fichas cargadas el resultado se muestra</a:t>
+            </a:r>
+          </a:p>
+          <a:p>
+            <a:pPr>
+              <a:spcAft>
+                <a:spcPts val="400"/>
+              </a:spcAft>
+            </a:pPr>
+            <a:r>
+              <a:rPr sz="1400" b="0" i="0">
+                <a:solidFill>
+                  <a:srgbClr val="FFFFFF"/>
+                </a:solidFill>
+                <a:latin typeface="Calibri"/>
+              </a:rPr>
+              <a:t>  en menos de 3 segundos y en maximo 3 clics desde el tablero principal.</a:t>
+            </a:r>
+          </a:p>
+          <a:p>
+            <a:pPr>
+              <a:spcAft>
+                <a:spcPts val="400"/>
+              </a:spcAft>
+            </a:pPr>
+            <a:r>
+              <a:rPr sz="1400" b="0" i="0">
+                <a:solidFill>
+                  <a:srgbClr val="FFFFFF"/>
+                </a:solidFill>
+                <a:latin typeface="Calibri"/>
+              </a:rPr>
+              <a:t>Depende de: RF-01 (registrar paciente), RNF-02 (tiempo de respuesta)</a:t>
+            </a:r>
+          </a:p>
+          <a:p>
+            <a:pPr>
+              <a:spcAft>
+                <a:spcPts val="400"/>
+              </a:spcAft>
+            </a:pPr>
+            <a:r>
+              <a:rPr sz="1400" b="0" i="0">
+                <a:solidFill>
+                  <a:srgbClr val="FFFFFF"/>
+                </a:solidFill>
+                <a:latin typeface="Calibri"/>
+              </a:rPr>
+              <a:t>Verificado por: CP-ACEP-07 (prueba de aceptacion)</a:t>
+            </a:r>
+          </a:p>
+          <a:p>
+            <a:pPr>
+              <a:spcAft>
+                <a:spcPts val="400"/>
+              </a:spcAft>
+            </a:pPr>
+            <a:r>
+              <a:rPr sz="1400" b="0" i="0">
+                <a:solidFill>
+                  <a:srgbClr val="FFFFFF"/>
+                </a:solidFill>
+                <a:latin typeface="Calibri"/>
+              </a:rPr>
+              <a:t>Historial: v1.1 se agrega busqueda por documento (SC-002)</a:t>
+            </a:r>
+          </a:p>
+          <a:p>
+            <a:pPr>
+              <a:spcAft>
+                <a:spcPts val="400"/>
+              </a:spcAft>
+            </a:pPr>
+            <a:r>
+              <a:rPr sz="1400" b="0" i="0">
+                <a:solidFill>
+                  <a:srgbClr val="FFFFFF"/>
+                </a:solidFill>
+                <a:latin typeface="Calibri"/>
+              </a:rPr>
+              <a:t>           v1.2 se agrega busqueda por microchip (SC-004, aprobada)</a:t>
+            </a:r>
+          </a:p>
+        </p:txBody>
+      </p:sp>
+      <p:sp>
+        <p:nvSpPr>
+          <p:cNvPr id="9" name="TextBox 8"/>
+          <p:cNvSpPr txBox="1"/>
+          <p:nvPr/>
+        </p:nvSpPr>
+        <p:spPr>
+          <a:xfrm>
+            <a:off x="457200" y="6080760"/>
+            <a:ext cx="11277295" cy="320040"/>
+          </a:xfrm>
+          <a:prstGeom prst="rect">
+            <a:avLst/>
+          </a:prstGeom>
+          <a:noFill/>
+        </p:spPr>
+        <p:txBody>
+          <a:bodyPr wrap="square">
+            <a:spAutoFit/>
+          </a:bodyPr>
+          <a:lstStyle/>
+          <a:p>
+            <a:pPr algn="ctr"/>
+            <a:r>
+              <a:rPr sz="1200" b="0" i="1">
+                <a:solidFill>
+                  <a:srgbClr val="666666"/>
+                </a:solidFill>
+                <a:latin typeface="Calibri"/>
+              </a:rPr>
+              <a:t>En el enfoque tradicional un requisito no es una frase suelta: es una ficha con ID, version, criterio medible y la prueba que lo verifica.</a:t>
+            </a:r>
+          </a:p>
+        </p:txBody>
+      </p:sp>
+      <p:sp>
+        <p:nvSpPr>
+          <p:cNvPr id="10" name="TextBox 9"/>
           <p:cNvSpPr txBox="1"/>
           <p:nvPr/>
         </p:nvSpPr>
@@ -5659,109 +5353,21 @@
                 </a:solidFill>
                 <a:latin typeface="Calibri"/>
               </a:rPr>
-              <a:t>Para el PI esta semana</a:t>
-            </a:r>
-          </a:p>
-        </p:txBody>
-      </p:sp>
-      <p:sp>
-        <p:nvSpPr>
-          <p:cNvPr id="5" name="Rounded Rectangle 4"/>
-          <p:cNvSpPr/>
-          <p:nvPr/>
-        </p:nvSpPr>
-        <p:spPr>
-          <a:xfrm>
-            <a:off x="457200" y="1261872"/>
-            <a:ext cx="11277295" cy="1051560"/>
-          </a:xfrm>
-          <a:prstGeom prst="roundRect">
-            <a:avLst>
-              <a:gd name="adj" fmla="val 12000"/>
-            </a:avLst>
-          </a:prstGeom>
-          <a:solidFill>
-            <a:srgbClr val="E8F4FA"/>
-          </a:solidFill>
-          <a:ln>
-            <a:noFill/>
-          </a:ln>
-        </p:spPr>
-        <p:style>
-          <a:lnRef idx="1">
-            <a:schemeClr val="accent1"/>
-          </a:lnRef>
-          <a:fillRef idx="3">
-            <a:schemeClr val="accent1"/>
-          </a:fillRef>
-          <a:effectRef idx="2">
-            <a:schemeClr val="accent1"/>
-          </a:effectRef>
-          <a:fontRef idx="minor">
-            <a:schemeClr val="lt1"/>
-          </a:fontRef>
-        </p:style>
-        <p:txBody>
-          <a:bodyPr rtlCol="0" anchor="ctr"/>
-          <a:lstStyle/>
-          <a:p>
-            <a:pPr algn="ctr"/>
-          </a:p>
-        </p:txBody>
-      </p:sp>
-      <p:sp>
-        <p:nvSpPr>
-          <p:cNvPr id="6" name="Rectangle 5"/>
-          <p:cNvSpPr/>
-          <p:nvPr/>
-        </p:nvSpPr>
-        <p:spPr>
-          <a:xfrm>
-            <a:off x="457200" y="1261872"/>
-            <a:ext cx="128016" cy="1051560"/>
-          </a:xfrm>
-          <a:prstGeom prst="rect">
-            <a:avLst/>
-          </a:prstGeom>
-          <a:solidFill>
-            <a:srgbClr val="269CCB"/>
-          </a:solidFill>
-          <a:ln>
-            <a:noFill/>
-          </a:ln>
-        </p:spPr>
-        <p:style>
-          <a:lnRef idx="1">
-            <a:schemeClr val="accent1"/>
-          </a:lnRef>
-          <a:fillRef idx="3">
-            <a:schemeClr val="accent1"/>
-          </a:fillRef>
-          <a:effectRef idx="2">
-            <a:schemeClr val="accent1"/>
-          </a:effectRef>
-          <a:fontRef idx="minor">
-            <a:schemeClr val="lt1"/>
-          </a:fontRef>
-        </p:style>
-        <p:txBody>
-          <a:bodyPr rtlCol="0" anchor="ctr"/>
-          <a:lstStyle/>
-          <a:p>
-            <a:pPr algn="ctr"/>
-          </a:p>
-        </p:txBody>
-      </p:sp>
-      <p:sp>
-        <p:nvSpPr>
-          <p:cNvPr id="7" name="TextBox 6"/>
+              <a:t>Demo del dia</a:t>
+            </a:r>
+          </a:p>
+        </p:txBody>
+      </p:sp>
+      <p:sp>
+        <p:nvSpPr>
+          <p:cNvPr id="5" name="TextBox 4"/>
           <p:cNvSpPr txBox="1"/>
           <p:nvPr/>
         </p:nvSpPr>
         <p:spPr>
           <a:xfrm>
-            <a:off x="777240" y="1399031"/>
-            <a:ext cx="10774375" cy="822959"/>
+            <a:off x="457200" y="1170432"/>
+            <a:ext cx="11277295" cy="5230368"/>
           </a:xfrm>
           <a:prstGeom prst="rect">
             <a:avLst/>
@@ -5774,313 +5380,94 @@
           </a:bodyPr>
           <a:lstStyle/>
           <a:p>
-            <a:r>
-              <a:rPr sz="1200" b="1" i="0">
-                <a:solidFill>
-                  <a:srgbClr val="269CCB"/>
-                </a:solidFill>
-                <a:latin typeface="Calibri"/>
-              </a:rPr>
-              <a:t>Info</a:t>
-            </a:r>
-          </a:p>
-          <a:p>
             <a:pPr>
-              <a:spcBef>
-                <a:spcPts val="400"/>
-              </a:spcBef>
+              <a:spcAft>
+                <a:spcPts val="800"/>
+              </a:spcAft>
             </a:pPr>
             <a:r>
-              <a:rPr sz="1400" b="0" i="0">
+              <a:rPr sz="2000" b="0" i="0">
                 <a:solidFill>
                   <a:srgbClr val="333333"/>
                 </a:solidFill>
                 <a:latin typeface="Calibri"/>
               </a:rPr>
-              <a:t>Hito: Queda listo el indice del documento formal de diseño de VetCare y la matriz en V que amarra cada requisito con la prueba que lo va a verificar.</a:t>
-            </a:r>
-          </a:p>
-        </p:txBody>
-      </p:sp>
-      <p:sp>
-        <p:nvSpPr>
-          <p:cNvPr id="8" name="Rounded Rectangle 7"/>
-          <p:cNvSpPr/>
-          <p:nvPr/>
-        </p:nvSpPr>
-        <p:spPr>
-          <a:xfrm>
-            <a:off x="457200" y="2478024"/>
-            <a:ext cx="11277295" cy="1051560"/>
-          </a:xfrm>
-          <a:prstGeom prst="roundRect">
-            <a:avLst>
-              <a:gd name="adj" fmla="val 12000"/>
-            </a:avLst>
-          </a:prstGeom>
-          <a:solidFill>
-            <a:srgbClr val="FFF8E1"/>
-          </a:solidFill>
-          <a:ln>
-            <a:noFill/>
-          </a:ln>
-        </p:spPr>
-        <p:style>
-          <a:lnRef idx="1">
-            <a:schemeClr val="accent1"/>
-          </a:lnRef>
-          <a:fillRef idx="3">
-            <a:schemeClr val="accent1"/>
-          </a:fillRef>
-          <a:effectRef idx="2">
-            <a:schemeClr val="accent1"/>
-          </a:effectRef>
-          <a:fontRef idx="minor">
-            <a:schemeClr val="lt1"/>
-          </a:fontRef>
-        </p:style>
-        <p:txBody>
-          <a:bodyPr rtlCol="0" anchor="ctr"/>
-          <a:lstStyle/>
-          <a:p>
-            <a:pPr algn="ctr"/>
-          </a:p>
-        </p:txBody>
-      </p:sp>
-      <p:sp>
-        <p:nvSpPr>
-          <p:cNvPr id="9" name="Rectangle 8"/>
-          <p:cNvSpPr/>
-          <p:nvPr/>
-        </p:nvSpPr>
-        <p:spPr>
-          <a:xfrm>
-            <a:off x="457200" y="2478024"/>
-            <a:ext cx="128016" cy="1051560"/>
-          </a:xfrm>
-          <a:prstGeom prst="rect">
-            <a:avLst/>
-          </a:prstGeom>
-          <a:solidFill>
-            <a:srgbClr val="FFD000"/>
-          </a:solidFill>
-          <a:ln>
-            <a:noFill/>
-          </a:ln>
-        </p:spPr>
-        <p:style>
-          <a:lnRef idx="1">
-            <a:schemeClr val="accent1"/>
-          </a:lnRef>
-          <a:fillRef idx="3">
-            <a:schemeClr val="accent1"/>
-          </a:fillRef>
-          <a:effectRef idx="2">
-            <a:schemeClr val="accent1"/>
-          </a:effectRef>
-          <a:fontRef idx="minor">
-            <a:schemeClr val="lt1"/>
-          </a:fontRef>
-        </p:style>
-        <p:txBody>
-          <a:bodyPr rtlCol="0" anchor="ctr"/>
-          <a:lstStyle/>
-          <a:p>
-            <a:pPr algn="ctr"/>
-          </a:p>
-        </p:txBody>
-      </p:sp>
-      <p:sp>
-        <p:nvSpPr>
-          <p:cNvPr id="10" name="TextBox 9"/>
-          <p:cNvSpPr txBox="1"/>
-          <p:nvPr/>
-        </p:nvSpPr>
-        <p:spPr>
-          <a:xfrm>
-            <a:off x="777240" y="2615184"/>
-            <a:ext cx="10774375" cy="822959"/>
-          </a:xfrm>
-          <a:prstGeom prst="rect">
-            <a:avLst/>
-          </a:prstGeom>
-          <a:noFill/>
-        </p:spPr>
-        <p:txBody>
-          <a:bodyPr wrap="square">
-            <a:spAutoFit/>
-          </a:bodyPr>
-          <a:lstStyle/>
-          <a:p>
-            <a:r>
-              <a:rPr sz="1200" b="1" i="0">
-                <a:solidFill>
-                  <a:srgbClr val="FFD000"/>
-                </a:solidFill>
-                <a:latin typeface="Calibri"/>
-              </a:rPr>
-              <a:t>Aclaración</a:t>
+              <a:t>–   </a:t>
+            </a:r>
+            <a:r>
+              <a:rPr sz="2000" b="1" i="0">
+                <a:solidFill>
+                  <a:srgbClr val="333333"/>
+                </a:solidFill>
+                <a:latin typeface="Calibri"/>
+              </a:rPr>
+              <a:t>Herramienta:</a:t>
+            </a:r>
+            <a:r>
+              <a:rPr sz="2000" b="0" i="0">
+                <a:solidFill>
+                  <a:srgbClr val="333333"/>
+                </a:solidFill>
+                <a:latin typeface="Calibri"/>
+              </a:rPr>
+              <a:t> draw.io · Google Docs</a:t>
             </a:r>
           </a:p>
           <a:p>
             <a:pPr>
-              <a:spcBef>
-                <a:spcPts val="400"/>
-              </a:spcBef>
+              <a:spcAft>
+                <a:spcPts val="800"/>
+              </a:spcAft>
             </a:pPr>
             <a:r>
-              <a:rPr sz="1400" b="0" i="0">
+              <a:rPr sz="2000" b="0" i="0">
                 <a:solidFill>
                   <a:srgbClr val="333333"/>
                 </a:solidFill>
                 <a:latin typeface="Calibri"/>
               </a:rPr>
-              <a:t>Enunciado completo: Clases/Proyecto Integrador/ (VetCare).</a:t>
-            </a:r>
-          </a:p>
-        </p:txBody>
-      </p:sp>
-      <p:sp>
-        <p:nvSpPr>
-          <p:cNvPr id="11" name="Rounded Rectangle 10"/>
-          <p:cNvSpPr/>
-          <p:nvPr/>
-        </p:nvSpPr>
-        <p:spPr>
-          <a:xfrm>
-            <a:off x="457200" y="3694176"/>
-            <a:ext cx="11277295" cy="1051560"/>
-          </a:xfrm>
-          <a:prstGeom prst="roundRect">
-            <a:avLst>
-              <a:gd name="adj" fmla="val 12000"/>
-            </a:avLst>
-          </a:prstGeom>
-          <a:solidFill>
-            <a:srgbClr val="FBE4E4"/>
-          </a:solidFill>
-          <a:ln>
-            <a:noFill/>
-          </a:ln>
-        </p:spPr>
-        <p:style>
-          <a:lnRef idx="1">
-            <a:schemeClr val="accent1"/>
-          </a:lnRef>
-          <a:fillRef idx="3">
-            <a:schemeClr val="accent1"/>
-          </a:fillRef>
-          <a:effectRef idx="2">
-            <a:schemeClr val="accent1"/>
-          </a:effectRef>
-          <a:fontRef idx="minor">
-            <a:schemeClr val="lt1"/>
-          </a:fontRef>
-        </p:style>
-        <p:txBody>
-          <a:bodyPr rtlCol="0" anchor="ctr"/>
-          <a:lstStyle/>
-          <a:p>
-            <a:pPr algn="ctr"/>
-          </a:p>
-        </p:txBody>
-      </p:sp>
-      <p:sp>
-        <p:nvSpPr>
-          <p:cNvPr id="12" name="Rectangle 11"/>
-          <p:cNvSpPr/>
-          <p:nvPr/>
-        </p:nvSpPr>
-        <p:spPr>
-          <a:xfrm>
-            <a:off x="457200" y="3694176"/>
-            <a:ext cx="128016" cy="1051560"/>
-          </a:xfrm>
-          <a:prstGeom prst="rect">
-            <a:avLst/>
-          </a:prstGeom>
-          <a:solidFill>
-            <a:srgbClr val="A02030"/>
-          </a:solidFill>
-          <a:ln>
-            <a:noFill/>
-          </a:ln>
-        </p:spPr>
-        <p:style>
-          <a:lnRef idx="1">
-            <a:schemeClr val="accent1"/>
-          </a:lnRef>
-          <a:fillRef idx="3">
-            <a:schemeClr val="accent1"/>
-          </a:fillRef>
-          <a:effectRef idx="2">
-            <a:schemeClr val="accent1"/>
-          </a:effectRef>
-          <a:fontRef idx="minor">
-            <a:schemeClr val="lt1"/>
-          </a:fontRef>
-        </p:style>
-        <p:txBody>
-          <a:bodyPr rtlCol="0" anchor="ctr"/>
-          <a:lstStyle/>
-          <a:p>
-            <a:pPr algn="ctr"/>
-          </a:p>
-        </p:txBody>
-      </p:sp>
-      <p:sp>
-        <p:nvSpPr>
-          <p:cNvPr id="13" name="TextBox 12"/>
-          <p:cNvSpPr txBox="1"/>
-          <p:nvPr/>
-        </p:nvSpPr>
-        <p:spPr>
-          <a:xfrm>
-            <a:off x="777240" y="3831336"/>
-            <a:ext cx="10774375" cy="822959"/>
-          </a:xfrm>
-          <a:prstGeom prst="rect">
-            <a:avLst/>
-          </a:prstGeom>
-          <a:noFill/>
-        </p:spPr>
-        <p:txBody>
-          <a:bodyPr wrap="square">
-            <a:spAutoFit/>
-          </a:bodyPr>
-          <a:lstStyle/>
-          <a:p>
-            <a:r>
-              <a:rPr sz="1200" b="1" i="0">
-                <a:solidFill>
-                  <a:srgbClr val="A02030"/>
-                </a:solidFill>
-                <a:latin typeface="Calibri"/>
-              </a:rPr>
-              <a:t>Atención</a:t>
+              <a:t>–   </a:t>
+            </a:r>
+            <a:r>
+              <a:rPr sz="2000" b="1" i="0">
+                <a:solidFill>
+                  <a:srgbClr val="333333"/>
+                </a:solidFill>
+                <a:latin typeface="Calibri"/>
+              </a:rPr>
+              <a:t>Demo:</a:t>
+            </a:r>
+            <a:r>
+              <a:rPr sz="2000" b="0" i="0">
+                <a:solidFill>
+                  <a:srgbClr val="333333"/>
+                </a:solidFill>
+                <a:latin typeface="Calibri"/>
+              </a:rPr>
+              <a:t> El docente dibuja en draw.io el modelo en V de VetCare y traza en vivo la linea punteada que conecta el requisito RF-03 'buscar historial' con su prueba de aceptacion CP-ACEP-07.</a:t>
             </a:r>
           </a:p>
           <a:p>
             <a:pPr>
-              <a:spcBef>
-                <a:spcPts val="400"/>
-              </a:spcBef>
+              <a:spcAft>
+                <a:spcPts val="800"/>
+              </a:spcAft>
             </a:pPr>
             <a:r>
-              <a:rPr sz="1400" b="0" i="0">
+              <a:rPr sz="2000" b="0" i="0">
                 <a:solidFill>
                   <a:srgbClr val="333333"/>
                 </a:solidFill>
                 <a:latin typeface="Calibri"/>
               </a:rPr>
-              <a:t>Entrega del taller, si el docente lo asigna · en la fecha que indique el docente.</a:t>
-            </a:r>
-          </a:p>
-        </p:txBody>
-      </p:sp>
-      <p:sp>
-        <p:nvSpPr>
-          <p:cNvPr id="14" name="TextBox 13"/>
+              <a:t>–   Mismo dominio VetCare — no otro ejemplo. Aqui se diseña, no se programa.</a:t>
+            </a:r>
+          </a:p>
+        </p:txBody>
+      </p:sp>
+      <p:sp>
+        <p:nvSpPr>
+          <p:cNvPr id="6" name="TextBox 5"/>
           <p:cNvSpPr txBox="1"/>
           <p:nvPr/>
         </p:nvSpPr>
@@ -6148,13 +5535,13 @@
         <p:spPr>
           <a:xfrm>
             <a:off x="0" y="0"/>
-            <a:ext cx="12191695" cy="164592"/>
+            <a:ext cx="12191695" cy="1170432"/>
           </a:xfrm>
           <a:prstGeom prst="rect">
             <a:avLst/>
           </a:prstGeom>
           <a:solidFill>
-            <a:srgbClr val="269CCB"/>
+            <a:srgbClr val="095292"/>
           </a:solidFill>
           <a:ln>
             <a:noFill/>
@@ -6182,9 +5569,251 @@
           </a:p>
         </p:txBody>
       </p:sp>
+      <p:sp>
+        <p:nvSpPr>
+          <p:cNvPr id="3" name="Rectangle 2"/>
+          <p:cNvSpPr/>
+          <p:nvPr/>
+        </p:nvSpPr>
+        <p:spPr>
+          <a:xfrm>
+            <a:off x="0" y="1170432"/>
+            <a:ext cx="12191695" cy="41148"/>
+          </a:xfrm>
+          <a:prstGeom prst="rect">
+            <a:avLst/>
+          </a:prstGeom>
+          <a:solidFill>
+            <a:srgbClr val="FFD000"/>
+          </a:solidFill>
+          <a:ln>
+            <a:noFill/>
+          </a:ln>
+        </p:spPr>
+        <p:style>
+          <a:lnRef idx="1">
+            <a:schemeClr val="accent1"/>
+          </a:lnRef>
+          <a:fillRef idx="3">
+            <a:schemeClr val="accent1"/>
+          </a:fillRef>
+          <a:effectRef idx="2">
+            <a:schemeClr val="accent1"/>
+          </a:effectRef>
+          <a:fontRef idx="minor">
+            <a:schemeClr val="lt1"/>
+          </a:fontRef>
+        </p:style>
+        <p:txBody>
+          <a:bodyPr rtlCol="0" anchor="ctr"/>
+          <a:lstStyle/>
+          <a:p>
+            <a:pPr algn="ctr"/>
+          </a:p>
+        </p:txBody>
+      </p:sp>
+      <p:sp>
+        <p:nvSpPr>
+          <p:cNvPr id="4" name="TextBox 3"/>
+          <p:cNvSpPr txBox="1"/>
+          <p:nvPr/>
+        </p:nvSpPr>
+        <p:spPr>
+          <a:xfrm>
+            <a:off x="457200" y="164592"/>
+            <a:ext cx="11277295" cy="384048"/>
+          </a:xfrm>
+          <a:prstGeom prst="rect">
+            <a:avLst/>
+          </a:prstGeom>
+          <a:noFill/>
+        </p:spPr>
+        <p:txBody>
+          <a:bodyPr wrap="square">
+            <a:spAutoFit/>
+          </a:bodyPr>
+          <a:lstStyle/>
+          <a:p>
+            <a:r>
+              <a:rPr sz="2600" b="1" i="0">
+                <a:solidFill>
+                  <a:srgbClr val="FFFFFF"/>
+                </a:solidFill>
+                <a:latin typeface="Calibri"/>
+              </a:rPr>
+              <a:t>Herramientas de hoy</a:t>
+            </a:r>
+          </a:p>
+        </p:txBody>
+      </p:sp>
+      <p:sp>
+        <p:nvSpPr>
+          <p:cNvPr id="5" name="TextBox 4"/>
+          <p:cNvSpPr txBox="1"/>
+          <p:nvPr/>
+        </p:nvSpPr>
+        <p:spPr>
+          <a:xfrm>
+            <a:off x="457200" y="566928"/>
+            <a:ext cx="11277295" cy="411480"/>
+          </a:xfrm>
+          <a:prstGeom prst="rect">
+            <a:avLst/>
+          </a:prstGeom>
+          <a:noFill/>
+        </p:spPr>
+        <p:txBody>
+          <a:bodyPr wrap="square">
+            <a:spAutoFit/>
+          </a:bodyPr>
+          <a:lstStyle/>
+          <a:p>
+            <a:r>
+              <a:rPr sz="1400" b="0" i="0">
+                <a:solidFill>
+                  <a:srgbClr val="B8D8EE"/>
+                </a:solidFill>
+                <a:latin typeface="Calibri"/>
+              </a:rPr>
+              <a:t>Gratis · funcionan en el navegador</a:t>
+            </a:r>
+          </a:p>
+        </p:txBody>
+      </p:sp>
+      <p:sp>
+        <p:nvSpPr>
+          <p:cNvPr id="6" name="Rounded Rectangle 5"/>
+          <p:cNvSpPr/>
+          <p:nvPr/>
+        </p:nvSpPr>
+        <p:spPr>
+          <a:xfrm>
+            <a:off x="457200" y="1591056"/>
+            <a:ext cx="3624986" cy="2331720"/>
+          </a:xfrm>
+          <a:prstGeom prst="roundRect">
+            <a:avLst>
+              <a:gd name="adj" fmla="val 12000"/>
+            </a:avLst>
+          </a:prstGeom>
+          <a:solidFill>
+            <a:srgbClr val="F2F2F2"/>
+          </a:solidFill>
+          <a:ln>
+            <a:noFill/>
+          </a:ln>
+        </p:spPr>
+        <p:style>
+          <a:lnRef idx="1">
+            <a:schemeClr val="accent1"/>
+          </a:lnRef>
+          <a:fillRef idx="3">
+            <a:schemeClr val="accent1"/>
+          </a:fillRef>
+          <a:effectRef idx="2">
+            <a:schemeClr val="accent1"/>
+          </a:effectRef>
+          <a:fontRef idx="minor">
+            <a:schemeClr val="lt1"/>
+          </a:fontRef>
+        </p:style>
+        <p:txBody>
+          <a:bodyPr rtlCol="0" anchor="ctr"/>
+          <a:lstStyle/>
+          <a:p>
+            <a:pPr algn="ctr"/>
+          </a:p>
+        </p:txBody>
+      </p:sp>
+      <p:sp>
+        <p:nvSpPr>
+          <p:cNvPr id="7" name="Rectangle 6"/>
+          <p:cNvSpPr/>
+          <p:nvPr/>
+        </p:nvSpPr>
+        <p:spPr>
+          <a:xfrm>
+            <a:off x="457200" y="1591056"/>
+            <a:ext cx="3624986" cy="64008"/>
+          </a:xfrm>
+          <a:prstGeom prst="rect">
+            <a:avLst/>
+          </a:prstGeom>
+          <a:solidFill>
+            <a:srgbClr val="095292"/>
+          </a:solidFill>
+          <a:ln>
+            <a:noFill/>
+          </a:ln>
+        </p:spPr>
+        <p:style>
+          <a:lnRef idx="1">
+            <a:schemeClr val="accent1"/>
+          </a:lnRef>
+          <a:fillRef idx="3">
+            <a:schemeClr val="accent1"/>
+          </a:fillRef>
+          <a:effectRef idx="2">
+            <a:schemeClr val="accent1"/>
+          </a:effectRef>
+          <a:fontRef idx="minor">
+            <a:schemeClr val="lt1"/>
+          </a:fontRef>
+        </p:style>
+        <p:txBody>
+          <a:bodyPr rtlCol="0" anchor="ctr"/>
+          <a:lstStyle/>
+          <a:p>
+            <a:pPr algn="ctr"/>
+          </a:p>
+        </p:txBody>
+      </p:sp>
+      <p:sp>
+        <p:nvSpPr>
+          <p:cNvPr id="8" name="Rectangle 7"/>
+          <p:cNvSpPr/>
+          <p:nvPr/>
+        </p:nvSpPr>
+        <p:spPr>
+          <a:xfrm>
+            <a:off x="457200" y="1655064"/>
+            <a:ext cx="3624986" cy="27432"/>
+          </a:xfrm>
+          <a:prstGeom prst="rect">
+            <a:avLst/>
+          </a:prstGeom>
+          <a:solidFill>
+            <a:srgbClr val="FFD000"/>
+          </a:solidFill>
+          <a:ln>
+            <a:noFill/>
+          </a:ln>
+        </p:spPr>
+        <p:style>
+          <a:lnRef idx="1">
+            <a:schemeClr val="accent1"/>
+          </a:lnRef>
+          <a:fillRef idx="3">
+            <a:schemeClr val="accent1"/>
+          </a:fillRef>
+          <a:effectRef idx="2">
+            <a:schemeClr val="accent1"/>
+          </a:effectRef>
+          <a:fontRef idx="minor">
+            <a:schemeClr val="lt1"/>
+          </a:fontRef>
+        </p:style>
+        <p:txBody>
+          <a:bodyPr rtlCol="0" anchor="ctr"/>
+          <a:lstStyle/>
+          <a:p>
+            <a:pPr algn="ctr"/>
+          </a:p>
+        </p:txBody>
+      </p:sp>
       <p:pic>
         <p:nvPicPr>
-          <p:cNvPr id="3" name="Picture 2" descr="logo_uniajc_color.png"/>
+          <p:cNvPr id="9" name="Picture 8" descr="drawio.png"/>
           <p:cNvPicPr>
             <a:picLocks noChangeAspect="1"/>
           </p:cNvPicPr>
@@ -6198,8 +5827,8 @@
         </p:blipFill>
         <p:spPr>
           <a:xfrm>
-            <a:off x="10271455" y="5998464"/>
-            <a:ext cx="1463040" cy="643233"/>
+            <a:off x="1643329" y="1847087"/>
+            <a:ext cx="1252728" cy="1252728"/>
           </a:xfrm>
           <a:prstGeom prst="rect">
             <a:avLst/>
@@ -6208,14 +5837,14 @@
       </p:pic>
       <p:sp>
         <p:nvSpPr>
-          <p:cNvPr id="4" name="TextBox 3"/>
+          <p:cNvPr id="10" name="TextBox 9"/>
           <p:cNvSpPr txBox="1"/>
           <p:nvPr/>
         </p:nvSpPr>
         <p:spPr>
           <a:xfrm>
-            <a:off x="457200" y="1737360"/>
-            <a:ext cx="11277295" cy="1097280"/>
+            <a:off x="530352" y="3191256"/>
+            <a:ext cx="3478682" cy="621792"/>
           </a:xfrm>
           <a:prstGeom prst="rect">
             <a:avLst/>
@@ -6223,32 +5852,456 @@
           <a:noFill/>
         </p:spPr>
         <p:txBody>
-          <a:bodyPr wrap="square" anchor="ctr"/>
+          <a:bodyPr wrap="square" anchor="t"/>
           <a:lstStyle/>
           <a:p>
             <a:pPr algn="ctr"/>
             <a:r>
-              <a:rPr sz="3400" b="1" i="0">
+              <a:rPr sz="1300" b="1" i="0">
                 <a:solidFill>
                   <a:srgbClr val="095292"/>
                 </a:solidFill>
                 <a:latin typeface="Calibri"/>
               </a:rPr>
-              <a:t>Clase 3 · VetCare avanza</a:t>
-            </a:r>
-          </a:p>
-        </p:txBody>
-      </p:sp>
-      <p:sp>
-        <p:nvSpPr>
-          <p:cNvPr id="5" name="TextBox 4"/>
+              <a:t>Draw.Io</a:t>
+            </a:r>
+          </a:p>
+          <a:p>
+            <a:pPr algn="ctr">
+              <a:spcBef>
+                <a:spcPts val="200"/>
+              </a:spcBef>
+            </a:pPr>
+            <a:r>
+              <a:rPr sz="1000" b="0" i="0">
+                <a:solidFill>
+                  <a:srgbClr val="666666"/>
+                </a:solidFill>
+                <a:latin typeface="Calibri"/>
+              </a:rPr>
+              <a:t>Diagramas UML y de contexto</a:t>
+            </a:r>
+          </a:p>
+        </p:txBody>
+      </p:sp>
+      <p:sp>
+        <p:nvSpPr>
+          <p:cNvPr id="11" name="Rounded Rectangle 10"/>
+          <p:cNvSpPr/>
+          <p:nvPr/>
+        </p:nvSpPr>
+        <p:spPr>
+          <a:xfrm>
+            <a:off x="4283354" y="1591056"/>
+            <a:ext cx="3624986" cy="2331720"/>
+          </a:xfrm>
+          <a:prstGeom prst="roundRect">
+            <a:avLst>
+              <a:gd name="adj" fmla="val 12000"/>
+            </a:avLst>
+          </a:prstGeom>
+          <a:solidFill>
+            <a:srgbClr val="F2F2F2"/>
+          </a:solidFill>
+          <a:ln>
+            <a:noFill/>
+          </a:ln>
+        </p:spPr>
+        <p:style>
+          <a:lnRef idx="1">
+            <a:schemeClr val="accent1"/>
+          </a:lnRef>
+          <a:fillRef idx="3">
+            <a:schemeClr val="accent1"/>
+          </a:fillRef>
+          <a:effectRef idx="2">
+            <a:schemeClr val="accent1"/>
+          </a:effectRef>
+          <a:fontRef idx="minor">
+            <a:schemeClr val="lt1"/>
+          </a:fontRef>
+        </p:style>
+        <p:txBody>
+          <a:bodyPr rtlCol="0" anchor="ctr"/>
+          <a:lstStyle/>
+          <a:p>
+            <a:pPr algn="ctr"/>
+          </a:p>
+        </p:txBody>
+      </p:sp>
+      <p:sp>
+        <p:nvSpPr>
+          <p:cNvPr id="12" name="Rectangle 11"/>
+          <p:cNvSpPr/>
+          <p:nvPr/>
+        </p:nvSpPr>
+        <p:spPr>
+          <a:xfrm>
+            <a:off x="4283354" y="1591056"/>
+            <a:ext cx="3624986" cy="64008"/>
+          </a:xfrm>
+          <a:prstGeom prst="rect">
+            <a:avLst/>
+          </a:prstGeom>
+          <a:solidFill>
+            <a:srgbClr val="095292"/>
+          </a:solidFill>
+          <a:ln>
+            <a:noFill/>
+          </a:ln>
+        </p:spPr>
+        <p:style>
+          <a:lnRef idx="1">
+            <a:schemeClr val="accent1"/>
+          </a:lnRef>
+          <a:fillRef idx="3">
+            <a:schemeClr val="accent1"/>
+          </a:fillRef>
+          <a:effectRef idx="2">
+            <a:schemeClr val="accent1"/>
+          </a:effectRef>
+          <a:fontRef idx="minor">
+            <a:schemeClr val="lt1"/>
+          </a:fontRef>
+        </p:style>
+        <p:txBody>
+          <a:bodyPr rtlCol="0" anchor="ctr"/>
+          <a:lstStyle/>
+          <a:p>
+            <a:pPr algn="ctr"/>
+          </a:p>
+        </p:txBody>
+      </p:sp>
+      <p:sp>
+        <p:nvSpPr>
+          <p:cNvPr id="13" name="Rectangle 12"/>
+          <p:cNvSpPr/>
+          <p:nvPr/>
+        </p:nvSpPr>
+        <p:spPr>
+          <a:xfrm>
+            <a:off x="4283354" y="1655064"/>
+            <a:ext cx="3624986" cy="27432"/>
+          </a:xfrm>
+          <a:prstGeom prst="rect">
+            <a:avLst/>
+          </a:prstGeom>
+          <a:solidFill>
+            <a:srgbClr val="FFD000"/>
+          </a:solidFill>
+          <a:ln>
+            <a:noFill/>
+          </a:ln>
+        </p:spPr>
+        <p:style>
+          <a:lnRef idx="1">
+            <a:schemeClr val="accent1"/>
+          </a:lnRef>
+          <a:fillRef idx="3">
+            <a:schemeClr val="accent1"/>
+          </a:fillRef>
+          <a:effectRef idx="2">
+            <a:schemeClr val="accent1"/>
+          </a:effectRef>
+          <a:fontRef idx="minor">
+            <a:schemeClr val="lt1"/>
+          </a:fontRef>
+        </p:style>
+        <p:txBody>
+          <a:bodyPr rtlCol="0" anchor="ctr"/>
+          <a:lstStyle/>
+          <a:p>
+            <a:pPr algn="ctr"/>
+          </a:p>
+        </p:txBody>
+      </p:sp>
+      <p:pic>
+        <p:nvPicPr>
+          <p:cNvPr id="14" name="Picture 13" descr="google_docs.png"/>
+          <p:cNvPicPr>
+            <a:picLocks noChangeAspect="1"/>
+          </p:cNvPicPr>
+          <p:nvPr/>
+        </p:nvPicPr>
+        <p:blipFill>
+          <a:blip r:embed="rId3"/>
+          <a:stretch>
+            <a:fillRect/>
+          </a:stretch>
+        </p:blipFill>
+        <p:spPr>
+          <a:xfrm>
+            <a:off x="5469483" y="1847087"/>
+            <a:ext cx="1252728" cy="1252728"/>
+          </a:xfrm>
+          <a:prstGeom prst="rect">
+            <a:avLst/>
+          </a:prstGeom>
+        </p:spPr>
+      </p:pic>
+      <p:sp>
+        <p:nvSpPr>
+          <p:cNvPr id="15" name="TextBox 14"/>
           <p:cNvSpPr txBox="1"/>
           <p:nvPr/>
         </p:nvSpPr>
         <p:spPr>
           <a:xfrm>
-            <a:off x="457200" y="3017520"/>
-            <a:ext cx="11277295" cy="1645920"/>
+            <a:off x="4356506" y="3191256"/>
+            <a:ext cx="3478682" cy="621792"/>
+          </a:xfrm>
+          <a:prstGeom prst="rect">
+            <a:avLst/>
+          </a:prstGeom>
+          <a:noFill/>
+        </p:spPr>
+        <p:txBody>
+          <a:bodyPr wrap="square" anchor="t"/>
+          <a:lstStyle/>
+          <a:p>
+            <a:pPr algn="ctr"/>
+            <a:r>
+              <a:rPr sz="1300" b="1" i="0">
+                <a:solidFill>
+                  <a:srgbClr val="095292"/>
+                </a:solidFill>
+                <a:latin typeface="Calibri"/>
+              </a:rPr>
+              <a:t>google docs</a:t>
+            </a:r>
+          </a:p>
+          <a:p>
+            <a:pPr algn="ctr">
+              <a:spcBef>
+                <a:spcPts val="200"/>
+              </a:spcBef>
+            </a:pPr>
+            <a:r>
+              <a:rPr sz="1000" b="0" i="0">
+                <a:solidFill>
+                  <a:srgbClr val="666666"/>
+                </a:solidFill>
+                <a:latin typeface="Calibri"/>
+              </a:rPr>
+              <a:t>Documentos del paquete de diseño</a:t>
+            </a:r>
+          </a:p>
+        </p:txBody>
+      </p:sp>
+      <p:sp>
+        <p:nvSpPr>
+          <p:cNvPr id="16" name="Rounded Rectangle 15"/>
+          <p:cNvSpPr/>
+          <p:nvPr/>
+        </p:nvSpPr>
+        <p:spPr>
+          <a:xfrm>
+            <a:off x="8109508" y="1591056"/>
+            <a:ext cx="3624986" cy="2331720"/>
+          </a:xfrm>
+          <a:prstGeom prst="roundRect">
+            <a:avLst>
+              <a:gd name="adj" fmla="val 12000"/>
+            </a:avLst>
+          </a:prstGeom>
+          <a:solidFill>
+            <a:srgbClr val="F2F2F2"/>
+          </a:solidFill>
+          <a:ln>
+            <a:noFill/>
+          </a:ln>
+        </p:spPr>
+        <p:style>
+          <a:lnRef idx="1">
+            <a:schemeClr val="accent1"/>
+          </a:lnRef>
+          <a:fillRef idx="3">
+            <a:schemeClr val="accent1"/>
+          </a:fillRef>
+          <a:effectRef idx="2">
+            <a:schemeClr val="accent1"/>
+          </a:effectRef>
+          <a:fontRef idx="minor">
+            <a:schemeClr val="lt1"/>
+          </a:fontRef>
+        </p:style>
+        <p:txBody>
+          <a:bodyPr rtlCol="0" anchor="ctr"/>
+          <a:lstStyle/>
+          <a:p>
+            <a:pPr algn="ctr"/>
+          </a:p>
+        </p:txBody>
+      </p:sp>
+      <p:sp>
+        <p:nvSpPr>
+          <p:cNvPr id="17" name="Rectangle 16"/>
+          <p:cNvSpPr/>
+          <p:nvPr/>
+        </p:nvSpPr>
+        <p:spPr>
+          <a:xfrm>
+            <a:off x="8109508" y="1591056"/>
+            <a:ext cx="3624986" cy="64008"/>
+          </a:xfrm>
+          <a:prstGeom prst="rect">
+            <a:avLst/>
+          </a:prstGeom>
+          <a:solidFill>
+            <a:srgbClr val="095292"/>
+          </a:solidFill>
+          <a:ln>
+            <a:noFill/>
+          </a:ln>
+        </p:spPr>
+        <p:style>
+          <a:lnRef idx="1">
+            <a:schemeClr val="accent1"/>
+          </a:lnRef>
+          <a:fillRef idx="3">
+            <a:schemeClr val="accent1"/>
+          </a:fillRef>
+          <a:effectRef idx="2">
+            <a:schemeClr val="accent1"/>
+          </a:effectRef>
+          <a:fontRef idx="minor">
+            <a:schemeClr val="lt1"/>
+          </a:fontRef>
+        </p:style>
+        <p:txBody>
+          <a:bodyPr rtlCol="0" anchor="ctr"/>
+          <a:lstStyle/>
+          <a:p>
+            <a:pPr algn="ctr"/>
+          </a:p>
+        </p:txBody>
+      </p:sp>
+      <p:sp>
+        <p:nvSpPr>
+          <p:cNvPr id="18" name="Rectangle 17"/>
+          <p:cNvSpPr/>
+          <p:nvPr/>
+        </p:nvSpPr>
+        <p:spPr>
+          <a:xfrm>
+            <a:off x="8109508" y="1655064"/>
+            <a:ext cx="3624986" cy="27432"/>
+          </a:xfrm>
+          <a:prstGeom prst="rect">
+            <a:avLst/>
+          </a:prstGeom>
+          <a:solidFill>
+            <a:srgbClr val="FFD000"/>
+          </a:solidFill>
+          <a:ln>
+            <a:noFill/>
+          </a:ln>
+        </p:spPr>
+        <p:style>
+          <a:lnRef idx="1">
+            <a:schemeClr val="accent1"/>
+          </a:lnRef>
+          <a:fillRef idx="3">
+            <a:schemeClr val="accent1"/>
+          </a:fillRef>
+          <a:effectRef idx="2">
+            <a:schemeClr val="accent1"/>
+          </a:effectRef>
+          <a:fontRef idx="minor">
+            <a:schemeClr val="lt1"/>
+          </a:fontRef>
+        </p:style>
+        <p:txBody>
+          <a:bodyPr rtlCol="0" anchor="ctr"/>
+          <a:lstStyle/>
+          <a:p>
+            <a:pPr algn="ctr"/>
+          </a:p>
+        </p:txBody>
+      </p:sp>
+      <p:pic>
+        <p:nvPicPr>
+          <p:cNvPr id="19" name="Picture 18" descr="examlab.png"/>
+          <p:cNvPicPr>
+            <a:picLocks noChangeAspect="1"/>
+          </p:cNvPicPr>
+          <p:nvPr/>
+        </p:nvPicPr>
+        <p:blipFill>
+          <a:blip r:embed="rId4"/>
+          <a:stretch>
+            <a:fillRect/>
+          </a:stretch>
+        </p:blipFill>
+        <p:spPr>
+          <a:xfrm>
+            <a:off x="9295638" y="1847087"/>
+            <a:ext cx="1252728" cy="1252728"/>
+          </a:xfrm>
+          <a:prstGeom prst="rect">
+            <a:avLst/>
+          </a:prstGeom>
+        </p:spPr>
+      </p:pic>
+      <p:sp>
+        <p:nvSpPr>
+          <p:cNvPr id="20" name="TextBox 19"/>
+          <p:cNvSpPr txBox="1"/>
+          <p:nvPr/>
+        </p:nvSpPr>
+        <p:spPr>
+          <a:xfrm>
+            <a:off x="8182660" y="3191256"/>
+            <a:ext cx="3478682" cy="621792"/>
+          </a:xfrm>
+          <a:prstGeom prst="rect">
+            <a:avLst/>
+          </a:prstGeom>
+          <a:noFill/>
+        </p:spPr>
+        <p:txBody>
+          <a:bodyPr wrap="square" anchor="t"/>
+          <a:lstStyle/>
+          <a:p>
+            <a:pPr algn="ctr"/>
+            <a:r>
+              <a:rPr sz="1300" b="1" i="0">
+                <a:solidFill>
+                  <a:srgbClr val="095292"/>
+                </a:solidFill>
+                <a:latin typeface="Calibri"/>
+              </a:rPr>
+              <a:t>la plataforma del curso</a:t>
+            </a:r>
+          </a:p>
+          <a:p>
+            <a:pPr algn="ctr">
+              <a:spcBef>
+                <a:spcPts val="200"/>
+              </a:spcBef>
+            </a:pPr>
+            <a:r>
+              <a:rPr sz="1000" b="0" i="0">
+                <a:solidFill>
+                  <a:srgbClr val="666666"/>
+                </a:solidFill>
+                <a:latin typeface="Calibri"/>
+              </a:rPr>
+              <a:t>Entrega del taller · en la fecha que indique el docente</a:t>
+            </a:r>
+          </a:p>
+        </p:txBody>
+      </p:sp>
+      <p:sp>
+        <p:nvSpPr>
+          <p:cNvPr id="21" name="TextBox 20"/>
+          <p:cNvSpPr txBox="1"/>
+          <p:nvPr/>
+        </p:nvSpPr>
+        <p:spPr>
+          <a:xfrm>
+            <a:off x="11185855" y="6473952"/>
+            <a:ext cx="640080" cy="274320"/>
           </a:xfrm>
           <a:prstGeom prst="rect">
             <a:avLst/>
@@ -6261,65 +6314,141 @@
           </a:bodyPr>
           <a:lstStyle/>
           <a:p>
-            <a:pPr algn="ctr">
-              <a:spcAft>
-                <a:spcPts val="600"/>
-              </a:spcAft>
-            </a:pPr>
-            <a:r>
-              <a:rPr sz="1600" b="0" i="0">
-                <a:solidFill>
-                  <a:srgbClr val="333333"/>
-                </a:solidFill>
-                <a:latin typeface="Calibri"/>
-              </a:rPr>
-              <a:t>Queda listo el indice del documento formal de diseño de VetCare y la matriz en V que amarra cada requisito con la prueba que lo va a verificar.</a:t>
-            </a:r>
-          </a:p>
-          <a:p>
-            <a:pPr algn="ctr">
-              <a:spcAft>
-                <a:spcPts val="600"/>
-              </a:spcAft>
-            </a:pPr>
-            <a:r>
-              <a:rPr sz="1600" b="0" i="0">
-                <a:solidFill>
-                  <a:srgbClr val="333333"/>
-                </a:solidFill>
-                <a:latin typeface="Calibri"/>
-              </a:rPr>
-              <a:t>Entregable: Un documento en Google Docs con el indice del ERS de VetCare, cuatro requisitos escritos en formato de ficha con version y linea base, la matriz en V (requisito - nivel de prueba - criterio de aceptacion) y un formato de solicitud de cambio diligenciado; mas el diagrama en V dibujado en draw.io y subido a la plataforma del curso.</a:t>
-            </a:r>
-          </a:p>
-          <a:p>
-            <a:pPr algn="ctr">
-              <a:spcAft>
-                <a:spcPts val="600"/>
-              </a:spcAft>
-            </a:pPr>
-            <a:r>
-              <a:rPr sz="1600" b="0" i="0">
-                <a:solidFill>
-                  <a:srgbClr val="333333"/>
-                </a:solidFill>
-                <a:latin typeface="Calibri"/>
-              </a:rPr>
-              <a:t>Siguiente clase: continuamos el hilo del PI</a:t>
-            </a:r>
-          </a:p>
-        </p:txBody>
-      </p:sp>
-      <p:sp>
-        <p:nvSpPr>
-          <p:cNvPr id="6" name="TextBox 5"/>
+            <a:pPr algn="r"/>
+            <a:r>
+              <a:rPr sz="1100" b="0" i="0">
+                <a:solidFill>
+                  <a:srgbClr val="666666"/>
+                </a:solidFill>
+                <a:latin typeface="Calibri"/>
+              </a:rPr>
+              <a:t>14</a:t>
+            </a:r>
+          </a:p>
+        </p:txBody>
+      </p:sp>
+    </p:spTree>
+  </p:cSld>
+  <p:clrMapOvr>
+    <a:masterClrMapping/>
+  </p:clrMapOvr>
+</p:sld>
+</file>
+
+<file path=ppt/slides/slide15.xml><?xml version="1.0" encoding="utf-8"?>
+<p:sld xmlns:a="http://schemas.openxmlformats.org/drawingml/2006/main" xmlns:p="http://schemas.openxmlformats.org/presentationml/2006/main" xmlns:r="http://schemas.openxmlformats.org/officeDocument/2006/relationships">
+  <p:cSld>
+    <p:bg>
+      <p:bgPr>
+        <a:solidFill>
+          <a:srgbClr val="FFFFFF"/>
+        </a:solidFill>
+        <a:effectLst/>
+      </p:bgPr>
+    </p:bg>
+    <p:spTree>
+      <p:nvGrpSpPr>
+        <p:cNvPr id="1" name=""/>
+        <p:cNvGrpSpPr/>
+        <p:nvPr/>
+      </p:nvGrpSpPr>
+      <p:grpSpPr/>
+      <p:sp>
+        <p:nvSpPr>
+          <p:cNvPr id="2" name="Rectangle 1"/>
+          <p:cNvSpPr/>
+          <p:nvPr/>
+        </p:nvSpPr>
+        <p:spPr>
+          <a:xfrm>
+            <a:off x="0" y="0"/>
+            <a:ext cx="12191695" cy="960120"/>
+          </a:xfrm>
+          <a:prstGeom prst="rect">
+            <a:avLst/>
+          </a:prstGeom>
+          <a:solidFill>
+            <a:srgbClr val="095292"/>
+          </a:solidFill>
+          <a:ln>
+            <a:noFill/>
+          </a:ln>
+        </p:spPr>
+        <p:style>
+          <a:lnRef idx="1">
+            <a:schemeClr val="accent1"/>
+          </a:lnRef>
+          <a:fillRef idx="3">
+            <a:schemeClr val="accent1"/>
+          </a:fillRef>
+          <a:effectRef idx="2">
+            <a:schemeClr val="accent1"/>
+          </a:effectRef>
+          <a:fontRef idx="minor">
+            <a:schemeClr val="lt1"/>
+          </a:fontRef>
+        </p:style>
+        <p:txBody>
+          <a:bodyPr rtlCol="0" anchor="ctr"/>
+          <a:lstStyle/>
+          <a:p>
+            <a:pPr algn="ctr"/>
+          </a:p>
+        </p:txBody>
+      </p:sp>
+      <p:sp>
+        <p:nvSpPr>
+          <p:cNvPr id="3" name="Rectangle 2"/>
+          <p:cNvSpPr/>
+          <p:nvPr/>
+        </p:nvSpPr>
+        <p:spPr>
+          <a:xfrm>
+            <a:off x="0" y="960120"/>
+            <a:ext cx="12191695" cy="41148"/>
+          </a:xfrm>
+          <a:prstGeom prst="rect">
+            <a:avLst/>
+          </a:prstGeom>
+          <a:solidFill>
+            <a:srgbClr val="FFD000"/>
+          </a:solidFill>
+          <a:ln>
+            <a:noFill/>
+          </a:ln>
+        </p:spPr>
+        <p:style>
+          <a:lnRef idx="1">
+            <a:schemeClr val="accent1"/>
+          </a:lnRef>
+          <a:fillRef idx="3">
+            <a:schemeClr val="accent1"/>
+          </a:fillRef>
+          <a:effectRef idx="2">
+            <a:schemeClr val="accent1"/>
+          </a:effectRef>
+          <a:fontRef idx="minor">
+            <a:schemeClr val="lt1"/>
+          </a:fontRef>
+        </p:style>
+        <p:txBody>
+          <a:bodyPr rtlCol="0" anchor="ctr"/>
+          <a:lstStyle/>
+          <a:p>
+            <a:pPr algn="ctr"/>
+          </a:p>
+        </p:txBody>
+      </p:sp>
+      <p:sp>
+        <p:nvSpPr>
+          <p:cNvPr id="4" name="TextBox 3"/>
           <p:cNvSpPr txBox="1"/>
           <p:nvPr/>
         </p:nvSpPr>
         <p:spPr>
           <a:xfrm>
-            <a:off x="457200" y="4754880"/>
-            <a:ext cx="11277295" cy="640080"/>
+            <a:off x="457200" y="164592"/>
+            <a:ext cx="11277295" cy="502920"/>
           </a:xfrm>
           <a:prstGeom prst="rect">
             <a:avLst/>
@@ -6332,15 +6461,2430 @@
           </a:bodyPr>
           <a:lstStyle/>
           <a:p>
+            <a:r>
+              <a:rPr sz="2600" b="1" i="0">
+                <a:solidFill>
+                  <a:srgbClr val="FFFFFF"/>
+                </a:solidFill>
+                <a:latin typeface="Calibri"/>
+              </a:rPr>
+              <a:t>Taller PI — por que importa</a:t>
+            </a:r>
+          </a:p>
+        </p:txBody>
+      </p:sp>
+      <p:sp>
+        <p:nvSpPr>
+          <p:cNvPr id="5" name="TextBox 4"/>
+          <p:cNvSpPr txBox="1"/>
+          <p:nvPr/>
+        </p:nvSpPr>
+        <p:spPr>
+          <a:xfrm>
+            <a:off x="457200" y="1170432"/>
+            <a:ext cx="11277295" cy="5230368"/>
+          </a:xfrm>
+          <a:prstGeom prst="rect">
+            <a:avLst/>
+          </a:prstGeom>
+          <a:noFill/>
+        </p:spPr>
+        <p:txBody>
+          <a:bodyPr wrap="square">
+            <a:spAutoFit/>
+          </a:bodyPr>
+          <a:lstStyle/>
+          <a:p>
+            <a:pPr>
+              <a:spcAft>
+                <a:spcPts val="800"/>
+              </a:spcAft>
+            </a:pPr>
+            <a:r>
+              <a:rPr sz="2000" b="0" i="0">
+                <a:solidFill>
+                  <a:srgbClr val="333333"/>
+                </a:solidFill>
+                <a:latin typeface="Calibri"/>
+              </a:rPr>
+              <a:t>–   </a:t>
+            </a:r>
+            <a:r>
+              <a:rPr sz="2000" b="1" i="0">
+                <a:solidFill>
+                  <a:srgbClr val="333333"/>
+                </a:solidFill>
+                <a:latin typeface="Calibri"/>
+              </a:rPr>
+              <a:t>Por que importa al PI:</a:t>
+            </a:r>
+            <a:r>
+              <a:rPr sz="2000" b="0" i="0">
+                <a:solidFill>
+                  <a:srgbClr val="333333"/>
+                </a:solidFill>
+                <a:latin typeface="Calibri"/>
+              </a:rPr>
+              <a:t> si Huellitas exige aprobar todo el diseño antes de que Programacion II escriba una linea, este es exactamente el paquete de documentos que el equipo tendria que entregar y defender.</a:t>
+            </a:r>
+          </a:p>
+          <a:p>
+            <a:pPr>
+              <a:spcAft>
+                <a:spcPts val="800"/>
+              </a:spcAft>
+            </a:pPr>
+            <a:r>
+              <a:rPr sz="2000" b="0" i="0">
+                <a:solidFill>
+                  <a:srgbClr val="333333"/>
+                </a:solidFill>
+                <a:latin typeface="Calibri"/>
+              </a:rPr>
+              <a:t>–   La clase pasada quedo el mapa de fases; hoy se aprende a cerrar una fase de manera formal, con version, aprobacion y trazabilidad hacia las pruebas.</a:t>
+            </a:r>
+          </a:p>
+          <a:p>
+            <a:pPr>
+              <a:spcAft>
+                <a:spcPts val="800"/>
+              </a:spcAft>
+            </a:pPr>
+            <a:r>
+              <a:rPr sz="2000" b="0" i="0">
+                <a:solidFill>
+                  <a:srgbClr val="333333"/>
+                </a:solidFill>
+                <a:latin typeface="Calibri"/>
+              </a:rPr>
+              <a:t>–   Este es el enfoque que sostiene la ruta del estudiante que solo cursa Seminario: su producto final es un documento de diseño formal, que es lo que en la industria se contrata y se factura.</a:t>
+            </a:r>
+          </a:p>
+        </p:txBody>
+      </p:sp>
+      <p:sp>
+        <p:nvSpPr>
+          <p:cNvPr id="6" name="TextBox 5"/>
+          <p:cNvSpPr txBox="1"/>
+          <p:nvPr/>
+        </p:nvSpPr>
+        <p:spPr>
+          <a:xfrm>
+            <a:off x="11185855" y="6473952"/>
+            <a:ext cx="640080" cy="274320"/>
+          </a:xfrm>
+          <a:prstGeom prst="rect">
+            <a:avLst/>
+          </a:prstGeom>
+          <a:noFill/>
+        </p:spPr>
+        <p:txBody>
+          <a:bodyPr wrap="square">
+            <a:spAutoFit/>
+          </a:bodyPr>
+          <a:lstStyle/>
+          <a:p>
+            <a:pPr algn="r"/>
+            <a:r>
+              <a:rPr sz="1100" b="0" i="0">
+                <a:solidFill>
+                  <a:srgbClr val="666666"/>
+                </a:solidFill>
+                <a:latin typeface="Calibri"/>
+              </a:rPr>
+              <a:t>15</a:t>
+            </a:r>
+          </a:p>
+        </p:txBody>
+      </p:sp>
+    </p:spTree>
+  </p:cSld>
+  <p:clrMapOvr>
+    <a:masterClrMapping/>
+  </p:clrMapOvr>
+</p:sld>
+</file>
+
+<file path=ppt/slides/slide16.xml><?xml version="1.0" encoding="utf-8"?>
+<p:sld xmlns:a="http://schemas.openxmlformats.org/drawingml/2006/main" xmlns:p="http://schemas.openxmlformats.org/presentationml/2006/main" xmlns:r="http://schemas.openxmlformats.org/officeDocument/2006/relationships">
+  <p:cSld>
+    <p:bg>
+      <p:bgPr>
+        <a:solidFill>
+          <a:srgbClr val="FFFFFF"/>
+        </a:solidFill>
+        <a:effectLst/>
+      </p:bgPr>
+    </p:bg>
+    <p:spTree>
+      <p:nvGrpSpPr>
+        <p:cNvPr id="1" name=""/>
+        <p:cNvGrpSpPr/>
+        <p:nvPr/>
+      </p:nvGrpSpPr>
+      <p:grpSpPr/>
+      <p:sp>
+        <p:nvSpPr>
+          <p:cNvPr id="2" name="Rectangle 1"/>
+          <p:cNvSpPr/>
+          <p:nvPr/>
+        </p:nvSpPr>
+        <p:spPr>
+          <a:xfrm>
+            <a:off x="0" y="0"/>
+            <a:ext cx="12191695" cy="960120"/>
+          </a:xfrm>
+          <a:prstGeom prst="rect">
+            <a:avLst/>
+          </a:prstGeom>
+          <a:solidFill>
+            <a:srgbClr val="095292"/>
+          </a:solidFill>
+          <a:ln>
+            <a:noFill/>
+          </a:ln>
+        </p:spPr>
+        <p:style>
+          <a:lnRef idx="1">
+            <a:schemeClr val="accent1"/>
+          </a:lnRef>
+          <a:fillRef idx="3">
+            <a:schemeClr val="accent1"/>
+          </a:fillRef>
+          <a:effectRef idx="2">
+            <a:schemeClr val="accent1"/>
+          </a:effectRef>
+          <a:fontRef idx="minor">
+            <a:schemeClr val="lt1"/>
+          </a:fontRef>
+        </p:style>
+        <p:txBody>
+          <a:bodyPr rtlCol="0" anchor="ctr"/>
+          <a:lstStyle/>
+          <a:p>
             <a:pPr algn="ctr"/>
+          </a:p>
+        </p:txBody>
+      </p:sp>
+      <p:sp>
+        <p:nvSpPr>
+          <p:cNvPr id="3" name="Rectangle 2"/>
+          <p:cNvSpPr/>
+          <p:nvPr/>
+        </p:nvSpPr>
+        <p:spPr>
+          <a:xfrm>
+            <a:off x="0" y="960120"/>
+            <a:ext cx="12191695" cy="41148"/>
+          </a:xfrm>
+          <a:prstGeom prst="rect">
+            <a:avLst/>
+          </a:prstGeom>
+          <a:solidFill>
+            <a:srgbClr val="FFD000"/>
+          </a:solidFill>
+          <a:ln>
+            <a:noFill/>
+          </a:ln>
+        </p:spPr>
+        <p:style>
+          <a:lnRef idx="1">
+            <a:schemeClr val="accent1"/>
+          </a:lnRef>
+          <a:fillRef idx="3">
+            <a:schemeClr val="accent1"/>
+          </a:fillRef>
+          <a:effectRef idx="2">
+            <a:schemeClr val="accent1"/>
+          </a:effectRef>
+          <a:fontRef idx="minor">
+            <a:schemeClr val="lt1"/>
+          </a:fontRef>
+        </p:style>
+        <p:txBody>
+          <a:bodyPr rtlCol="0" anchor="ctr"/>
+          <a:lstStyle/>
+          <a:p>
+            <a:pPr algn="ctr"/>
+          </a:p>
+        </p:txBody>
+      </p:sp>
+      <p:sp>
+        <p:nvSpPr>
+          <p:cNvPr id="4" name="TextBox 3"/>
+          <p:cNvSpPr txBox="1"/>
+          <p:nvPr/>
+        </p:nvSpPr>
+        <p:spPr>
+          <a:xfrm>
+            <a:off x="457200" y="164592"/>
+            <a:ext cx="11277295" cy="502920"/>
+          </a:xfrm>
+          <a:prstGeom prst="rect">
+            <a:avLst/>
+          </a:prstGeom>
+          <a:noFill/>
+        </p:spPr>
+        <p:txBody>
+          <a:bodyPr wrap="square">
+            <a:spAutoFit/>
+          </a:bodyPr>
+          <a:lstStyle/>
+          <a:p>
+            <a:r>
+              <a:rPr sz="2600" b="1" i="0">
+                <a:solidFill>
+                  <a:srgbClr val="FFFFFF"/>
+                </a:solidFill>
+                <a:latin typeface="Calibri"/>
+              </a:rPr>
+              <a:t>Taller PI — punto de partida</a:t>
+            </a:r>
+          </a:p>
+        </p:txBody>
+      </p:sp>
+      <p:sp>
+        <p:nvSpPr>
+          <p:cNvPr id="5" name="TextBox 4"/>
+          <p:cNvSpPr txBox="1"/>
+          <p:nvPr/>
+        </p:nvSpPr>
+        <p:spPr>
+          <a:xfrm>
+            <a:off x="457200" y="1170432"/>
+            <a:ext cx="11277295" cy="5230368"/>
+          </a:xfrm>
+          <a:prstGeom prst="rect">
+            <a:avLst/>
+          </a:prstGeom>
+          <a:noFill/>
+        </p:spPr>
+        <p:txBody>
+          <a:bodyPr wrap="square">
+            <a:spAutoFit/>
+          </a:bodyPr>
+          <a:lstStyle/>
+          <a:p>
+            <a:pPr>
+              <a:spcAft>
+                <a:spcPts val="800"/>
+              </a:spcAft>
+            </a:pPr>
+            <a:r>
+              <a:rPr sz="2000" b="0" i="0">
+                <a:solidFill>
+                  <a:srgbClr val="333333"/>
+                </a:solidFill>
+                <a:latin typeface="Calibri"/>
+              </a:rPr>
+              <a:t>–   El equipo ya tiene una lista cruda de necesidades de Huellitas, pero escrita en frases sueltas tipo 'que sea rapido' y 'que no se pierdan las fichas', sin ID, sin version y sin quien lo pidio.</a:t>
+            </a:r>
+          </a:p>
+          <a:p>
+            <a:pPr>
+              <a:spcAft>
+                <a:spcPts val="800"/>
+              </a:spcAft>
+            </a:pPr>
+            <a:r>
+              <a:rPr sz="2000" b="0" i="0">
+                <a:solidFill>
+                  <a:srgbClr val="333333"/>
+                </a:solidFill>
+                <a:latin typeface="Calibri"/>
+              </a:rPr>
+              <a:t>–   La administradora de la clinica avisa que solo dispone de dos reuniones en todo el semestre, asi que no habra a quien preguntarle cada semana.</a:t>
+            </a:r>
+          </a:p>
+          <a:p>
+            <a:pPr>
+              <a:spcAft>
+                <a:spcPts val="800"/>
+              </a:spcAft>
+            </a:pPr>
+            <a:r>
+              <a:rPr sz="2000" b="0" i="0">
+                <a:solidFill>
+                  <a:srgbClr val="333333"/>
+                </a:solidFill>
+                <a:latin typeface="Calibri"/>
+              </a:rPr>
+              <a:t>–   Nadie ha escrito todavia una sola prueba, y la idea instalada en el grupo es que las pruebas se piensan al final, cuando ya haya algo que probar.</a:t>
+            </a:r>
+          </a:p>
+        </p:txBody>
+      </p:sp>
+      <p:sp>
+        <p:nvSpPr>
+          <p:cNvPr id="6" name="TextBox 5"/>
+          <p:cNvSpPr txBox="1"/>
+          <p:nvPr/>
+        </p:nvSpPr>
+        <p:spPr>
+          <a:xfrm>
+            <a:off x="11185855" y="6473952"/>
+            <a:ext cx="640080" cy="274320"/>
+          </a:xfrm>
+          <a:prstGeom prst="rect">
+            <a:avLst/>
+          </a:prstGeom>
+          <a:noFill/>
+        </p:spPr>
+        <p:txBody>
+          <a:bodyPr wrap="square">
+            <a:spAutoFit/>
+          </a:bodyPr>
+          <a:lstStyle/>
+          <a:p>
+            <a:pPr algn="r"/>
+            <a:r>
+              <a:rPr sz="1100" b="0" i="0">
+                <a:solidFill>
+                  <a:srgbClr val="666666"/>
+                </a:solidFill>
+                <a:latin typeface="Calibri"/>
+              </a:rPr>
+              <a:t>16</a:t>
+            </a:r>
+          </a:p>
+        </p:txBody>
+      </p:sp>
+    </p:spTree>
+  </p:cSld>
+  <p:clrMapOvr>
+    <a:masterClrMapping/>
+  </p:clrMapOvr>
+</p:sld>
+</file>
+
+<file path=ppt/slides/slide17.xml><?xml version="1.0" encoding="utf-8"?>
+<p:sld xmlns:a="http://schemas.openxmlformats.org/drawingml/2006/main" xmlns:p="http://schemas.openxmlformats.org/presentationml/2006/main" xmlns:r="http://schemas.openxmlformats.org/officeDocument/2006/relationships">
+  <p:cSld>
+    <p:bg>
+      <p:bgPr>
+        <a:solidFill>
+          <a:srgbClr val="FFFFFF"/>
+        </a:solidFill>
+        <a:effectLst/>
+      </p:bgPr>
+    </p:bg>
+    <p:spTree>
+      <p:nvGrpSpPr>
+        <p:cNvPr id="1" name=""/>
+        <p:cNvGrpSpPr/>
+        <p:nvPr/>
+      </p:nvGrpSpPr>
+      <p:grpSpPr/>
+      <p:sp>
+        <p:nvSpPr>
+          <p:cNvPr id="2" name="Rectangle 1"/>
+          <p:cNvSpPr/>
+          <p:nvPr/>
+        </p:nvSpPr>
+        <p:spPr>
+          <a:xfrm>
+            <a:off x="0" y="0"/>
+            <a:ext cx="12191695" cy="960120"/>
+          </a:xfrm>
+          <a:prstGeom prst="rect">
+            <a:avLst/>
+          </a:prstGeom>
+          <a:solidFill>
+            <a:srgbClr val="095292"/>
+          </a:solidFill>
+          <a:ln>
+            <a:noFill/>
+          </a:ln>
+        </p:spPr>
+        <p:style>
+          <a:lnRef idx="1">
+            <a:schemeClr val="accent1"/>
+          </a:lnRef>
+          <a:fillRef idx="3">
+            <a:schemeClr val="accent1"/>
+          </a:fillRef>
+          <a:effectRef idx="2">
+            <a:schemeClr val="accent1"/>
+          </a:effectRef>
+          <a:fontRef idx="minor">
+            <a:schemeClr val="lt1"/>
+          </a:fontRef>
+        </p:style>
+        <p:txBody>
+          <a:bodyPr rtlCol="0" anchor="ctr"/>
+          <a:lstStyle/>
+          <a:p>
+            <a:pPr algn="ctr"/>
+          </a:p>
+        </p:txBody>
+      </p:sp>
+      <p:sp>
+        <p:nvSpPr>
+          <p:cNvPr id="3" name="Rectangle 2"/>
+          <p:cNvSpPr/>
+          <p:nvPr/>
+        </p:nvSpPr>
+        <p:spPr>
+          <a:xfrm>
+            <a:off x="0" y="960120"/>
+            <a:ext cx="12191695" cy="41148"/>
+          </a:xfrm>
+          <a:prstGeom prst="rect">
+            <a:avLst/>
+          </a:prstGeom>
+          <a:solidFill>
+            <a:srgbClr val="FFD000"/>
+          </a:solidFill>
+          <a:ln>
+            <a:noFill/>
+          </a:ln>
+        </p:spPr>
+        <p:style>
+          <a:lnRef idx="1">
+            <a:schemeClr val="accent1"/>
+          </a:lnRef>
+          <a:fillRef idx="3">
+            <a:schemeClr val="accent1"/>
+          </a:fillRef>
+          <a:effectRef idx="2">
+            <a:schemeClr val="accent1"/>
+          </a:effectRef>
+          <a:fontRef idx="minor">
+            <a:schemeClr val="lt1"/>
+          </a:fontRef>
+        </p:style>
+        <p:txBody>
+          <a:bodyPr rtlCol="0" anchor="ctr"/>
+          <a:lstStyle/>
+          <a:p>
+            <a:pPr algn="ctr"/>
+          </a:p>
+        </p:txBody>
+      </p:sp>
+      <p:sp>
+        <p:nvSpPr>
+          <p:cNvPr id="4" name="TextBox 3"/>
+          <p:cNvSpPr txBox="1"/>
+          <p:nvPr/>
+        </p:nvSpPr>
+        <p:spPr>
+          <a:xfrm>
+            <a:off x="457200" y="164592"/>
+            <a:ext cx="11277295" cy="502920"/>
+          </a:xfrm>
+          <a:prstGeom prst="rect">
+            <a:avLst/>
+          </a:prstGeom>
+          <a:noFill/>
+        </p:spPr>
+        <p:txBody>
+          <a:bodyPr wrap="square">
+            <a:spAutoFit/>
+          </a:bodyPr>
+          <a:lstStyle/>
+          <a:p>
+            <a:r>
+              <a:rPr sz="2600" b="1" i="0">
+                <a:solidFill>
+                  <a:srgbClr val="FFFFFF"/>
+                </a:solidFill>
+                <a:latin typeface="Calibri"/>
+              </a:rPr>
+              <a:t>Taller PI — pasos guiados</a:t>
+            </a:r>
+          </a:p>
+        </p:txBody>
+      </p:sp>
+      <p:sp>
+        <p:nvSpPr>
+          <p:cNvPr id="5" name="Rounded Rectangle 4"/>
+          <p:cNvSpPr/>
+          <p:nvPr/>
+        </p:nvSpPr>
+        <p:spPr>
+          <a:xfrm>
+            <a:off x="457200" y="1234440"/>
+            <a:ext cx="11277295" cy="950976"/>
+          </a:xfrm>
+          <a:prstGeom prst="roundRect">
+            <a:avLst>
+              <a:gd name="adj" fmla="val 12000"/>
+            </a:avLst>
+          </a:prstGeom>
+          <a:solidFill>
+            <a:srgbClr val="F2F2F2"/>
+          </a:solidFill>
+          <a:ln>
+            <a:noFill/>
+          </a:ln>
+        </p:spPr>
+        <p:style>
+          <a:lnRef idx="1">
+            <a:schemeClr val="accent1"/>
+          </a:lnRef>
+          <a:fillRef idx="3">
+            <a:schemeClr val="accent1"/>
+          </a:fillRef>
+          <a:effectRef idx="2">
+            <a:schemeClr val="accent1"/>
+          </a:effectRef>
+          <a:fontRef idx="minor">
+            <a:schemeClr val="lt1"/>
+          </a:fontRef>
+        </p:style>
+        <p:txBody>
+          <a:bodyPr rtlCol="0" anchor="ctr"/>
+          <a:lstStyle/>
+          <a:p>
+            <a:pPr algn="ctr"/>
+          </a:p>
+        </p:txBody>
+      </p:sp>
+      <p:sp>
+        <p:nvSpPr>
+          <p:cNvPr id="6" name="Rounded Rectangle 5"/>
+          <p:cNvSpPr/>
+          <p:nvPr/>
+        </p:nvSpPr>
+        <p:spPr>
+          <a:xfrm>
+            <a:off x="594360" y="1490472"/>
+            <a:ext cx="438912" cy="438912"/>
+          </a:xfrm>
+          <a:prstGeom prst="roundRect">
+            <a:avLst>
+              <a:gd name="adj" fmla="val 12000"/>
+            </a:avLst>
+          </a:prstGeom>
+          <a:solidFill>
+            <a:srgbClr val="095292"/>
+          </a:solidFill>
+          <a:ln>
+            <a:noFill/>
+          </a:ln>
+        </p:spPr>
+        <p:style>
+          <a:lnRef idx="1">
+            <a:schemeClr val="accent1"/>
+          </a:lnRef>
+          <a:fillRef idx="3">
+            <a:schemeClr val="accent1"/>
+          </a:fillRef>
+          <a:effectRef idx="2">
+            <a:schemeClr val="accent1"/>
+          </a:effectRef>
+          <a:fontRef idx="minor">
+            <a:schemeClr val="lt1"/>
+          </a:fontRef>
+        </p:style>
+        <p:txBody>
+          <a:bodyPr rtlCol="0" anchor="ctr"/>
+          <a:lstStyle/>
+          <a:p>
+            <a:pPr algn="ctr"/>
+          </a:p>
+        </p:txBody>
+      </p:sp>
+      <p:sp>
+        <p:nvSpPr>
+          <p:cNvPr id="7" name="TextBox 6"/>
+          <p:cNvSpPr txBox="1"/>
+          <p:nvPr/>
+        </p:nvSpPr>
+        <p:spPr>
+          <a:xfrm>
+            <a:off x="594360" y="1490472"/>
+            <a:ext cx="438912" cy="438912"/>
+          </a:xfrm>
+          <a:prstGeom prst="rect">
+            <a:avLst/>
+          </a:prstGeom>
+          <a:noFill/>
+        </p:spPr>
+        <p:txBody>
+          <a:bodyPr wrap="square" anchor="ctr"/>
+          <a:lstStyle/>
+          <a:p>
+            <a:pPr algn="ctr"/>
+            <a:r>
+              <a:rPr sz="1600" b="1" i="0">
+                <a:solidFill>
+                  <a:srgbClr val="FFFFFF"/>
+                </a:solidFill>
+                <a:latin typeface="Calibri"/>
+              </a:rPr>
+              <a:t>1</a:t>
+            </a:r>
+          </a:p>
+        </p:txBody>
+      </p:sp>
+      <p:sp>
+        <p:nvSpPr>
+          <p:cNvPr id="8" name="TextBox 7"/>
+          <p:cNvSpPr txBox="1"/>
+          <p:nvPr/>
+        </p:nvSpPr>
+        <p:spPr>
+          <a:xfrm>
+            <a:off x="1188720" y="1325880"/>
+            <a:ext cx="10271455" cy="786384"/>
+          </a:xfrm>
+          <a:prstGeom prst="rect">
+            <a:avLst/>
+          </a:prstGeom>
+          <a:noFill/>
+        </p:spPr>
+        <p:txBody>
+          <a:bodyPr wrap="square" anchor="ctr"/>
+          <a:lstStyle/>
+          <a:p>
+            <a:r>
+              <a:rPr sz="1400" b="1" i="0">
+                <a:solidFill>
+                  <a:srgbClr val="095292"/>
+                </a:solidFill>
+                <a:latin typeface="Calibri"/>
+              </a:rPr>
+              <a:t>En Google Docs escriba el indice del ERS de VetCare con al menos estas secciones numeradas: 1. Proposito y alcance, 2. Glosario del dominio veterinario, 3. Requisitos funcionales, 4. Requisitos no funcionales, 5. Reglas de negocio, 6. Matriz de trazabilidad, 7. Control de versiones y aprobaciones.</a:t>
+            </a:r>
+          </a:p>
+        </p:txBody>
+      </p:sp>
+      <p:sp>
+        <p:nvSpPr>
+          <p:cNvPr id="9" name="Rounded Rectangle 8"/>
+          <p:cNvSpPr/>
+          <p:nvPr/>
+        </p:nvSpPr>
+        <p:spPr>
+          <a:xfrm>
+            <a:off x="457200" y="2276856"/>
+            <a:ext cx="11277295" cy="950976"/>
+          </a:xfrm>
+          <a:prstGeom prst="roundRect">
+            <a:avLst>
+              <a:gd name="adj" fmla="val 12000"/>
+            </a:avLst>
+          </a:prstGeom>
+          <a:solidFill>
+            <a:srgbClr val="E8F4FA"/>
+          </a:solidFill>
+          <a:ln>
+            <a:noFill/>
+          </a:ln>
+        </p:spPr>
+        <p:style>
+          <a:lnRef idx="1">
+            <a:schemeClr val="accent1"/>
+          </a:lnRef>
+          <a:fillRef idx="3">
+            <a:schemeClr val="accent1"/>
+          </a:fillRef>
+          <a:effectRef idx="2">
+            <a:schemeClr val="accent1"/>
+          </a:effectRef>
+          <a:fontRef idx="minor">
+            <a:schemeClr val="lt1"/>
+          </a:fontRef>
+        </p:style>
+        <p:txBody>
+          <a:bodyPr rtlCol="0" anchor="ctr"/>
+          <a:lstStyle/>
+          <a:p>
+            <a:pPr algn="ctr"/>
+          </a:p>
+        </p:txBody>
+      </p:sp>
+      <p:sp>
+        <p:nvSpPr>
+          <p:cNvPr id="10" name="Rounded Rectangle 9"/>
+          <p:cNvSpPr/>
+          <p:nvPr/>
+        </p:nvSpPr>
+        <p:spPr>
+          <a:xfrm>
+            <a:off x="594360" y="2532888"/>
+            <a:ext cx="438912" cy="438912"/>
+          </a:xfrm>
+          <a:prstGeom prst="roundRect">
+            <a:avLst>
+              <a:gd name="adj" fmla="val 12000"/>
+            </a:avLst>
+          </a:prstGeom>
+          <a:solidFill>
+            <a:srgbClr val="095292"/>
+          </a:solidFill>
+          <a:ln>
+            <a:noFill/>
+          </a:ln>
+        </p:spPr>
+        <p:style>
+          <a:lnRef idx="1">
+            <a:schemeClr val="accent1"/>
+          </a:lnRef>
+          <a:fillRef idx="3">
+            <a:schemeClr val="accent1"/>
+          </a:fillRef>
+          <a:effectRef idx="2">
+            <a:schemeClr val="accent1"/>
+          </a:effectRef>
+          <a:fontRef idx="minor">
+            <a:schemeClr val="lt1"/>
+          </a:fontRef>
+        </p:style>
+        <p:txBody>
+          <a:bodyPr rtlCol="0" anchor="ctr"/>
+          <a:lstStyle/>
+          <a:p>
+            <a:pPr algn="ctr"/>
+          </a:p>
+        </p:txBody>
+      </p:sp>
+      <p:sp>
+        <p:nvSpPr>
+          <p:cNvPr id="11" name="TextBox 10"/>
+          <p:cNvSpPr txBox="1"/>
+          <p:nvPr/>
+        </p:nvSpPr>
+        <p:spPr>
+          <a:xfrm>
+            <a:off x="594360" y="2532888"/>
+            <a:ext cx="438912" cy="438912"/>
+          </a:xfrm>
+          <a:prstGeom prst="rect">
+            <a:avLst/>
+          </a:prstGeom>
+          <a:noFill/>
+        </p:spPr>
+        <p:txBody>
+          <a:bodyPr wrap="square" anchor="ctr"/>
+          <a:lstStyle/>
+          <a:p>
+            <a:pPr algn="ctr"/>
+            <a:r>
+              <a:rPr sz="1600" b="1" i="0">
+                <a:solidFill>
+                  <a:srgbClr val="FFFFFF"/>
+                </a:solidFill>
+                <a:latin typeface="Calibri"/>
+              </a:rPr>
+              <a:t>2</a:t>
+            </a:r>
+          </a:p>
+        </p:txBody>
+      </p:sp>
+      <p:sp>
+        <p:nvSpPr>
+          <p:cNvPr id="12" name="TextBox 11"/>
+          <p:cNvSpPr txBox="1"/>
+          <p:nvPr/>
+        </p:nvSpPr>
+        <p:spPr>
+          <a:xfrm>
+            <a:off x="1188720" y="2368296"/>
+            <a:ext cx="10271455" cy="786384"/>
+          </a:xfrm>
+          <a:prstGeom prst="rect">
+            <a:avLst/>
+          </a:prstGeom>
+          <a:noFill/>
+        </p:spPr>
+        <p:txBody>
+          <a:bodyPr wrap="square" anchor="ctr"/>
+          <a:lstStyle/>
+          <a:p>
+            <a:r>
+              <a:rPr sz="1400" b="1" i="0">
+                <a:solidFill>
+                  <a:srgbClr val="095292"/>
+                </a:solidFill>
+                <a:latin typeface="Calibri"/>
+              </a:rPr>
+              <a:t>Escriba cuatro requisitos de VetCare en formato de ficha completa (ID, nombre, fuente, prioridad, estabilidad, descripcion, precondicion, criterio de aceptacion, version y estado); al menos uno debe ser no funcional y al menos uno debe declarar dependencia de otro.</a:t>
+            </a:r>
+          </a:p>
+        </p:txBody>
+      </p:sp>
+      <p:sp>
+        <p:nvSpPr>
+          <p:cNvPr id="13" name="Rounded Rectangle 12"/>
+          <p:cNvSpPr/>
+          <p:nvPr/>
+        </p:nvSpPr>
+        <p:spPr>
+          <a:xfrm>
+            <a:off x="457200" y="3319272"/>
+            <a:ext cx="11277295" cy="950976"/>
+          </a:xfrm>
+          <a:prstGeom prst="roundRect">
+            <a:avLst>
+              <a:gd name="adj" fmla="val 12000"/>
+            </a:avLst>
+          </a:prstGeom>
+          <a:solidFill>
+            <a:srgbClr val="F2F2F2"/>
+          </a:solidFill>
+          <a:ln>
+            <a:noFill/>
+          </a:ln>
+        </p:spPr>
+        <p:style>
+          <a:lnRef idx="1">
+            <a:schemeClr val="accent1"/>
+          </a:lnRef>
+          <a:fillRef idx="3">
+            <a:schemeClr val="accent1"/>
+          </a:fillRef>
+          <a:effectRef idx="2">
+            <a:schemeClr val="accent1"/>
+          </a:effectRef>
+          <a:fontRef idx="minor">
+            <a:schemeClr val="lt1"/>
+          </a:fontRef>
+        </p:style>
+        <p:txBody>
+          <a:bodyPr rtlCol="0" anchor="ctr"/>
+          <a:lstStyle/>
+          <a:p>
+            <a:pPr algn="ctr"/>
+          </a:p>
+        </p:txBody>
+      </p:sp>
+      <p:sp>
+        <p:nvSpPr>
+          <p:cNvPr id="14" name="Rounded Rectangle 13"/>
+          <p:cNvSpPr/>
+          <p:nvPr/>
+        </p:nvSpPr>
+        <p:spPr>
+          <a:xfrm>
+            <a:off x="594360" y="3575304"/>
+            <a:ext cx="438912" cy="438912"/>
+          </a:xfrm>
+          <a:prstGeom prst="roundRect">
+            <a:avLst>
+              <a:gd name="adj" fmla="val 12000"/>
+            </a:avLst>
+          </a:prstGeom>
+          <a:solidFill>
+            <a:srgbClr val="095292"/>
+          </a:solidFill>
+          <a:ln>
+            <a:noFill/>
+          </a:ln>
+        </p:spPr>
+        <p:style>
+          <a:lnRef idx="1">
+            <a:schemeClr val="accent1"/>
+          </a:lnRef>
+          <a:fillRef idx="3">
+            <a:schemeClr val="accent1"/>
+          </a:fillRef>
+          <a:effectRef idx="2">
+            <a:schemeClr val="accent1"/>
+          </a:effectRef>
+          <a:fontRef idx="minor">
+            <a:schemeClr val="lt1"/>
+          </a:fontRef>
+        </p:style>
+        <p:txBody>
+          <a:bodyPr rtlCol="0" anchor="ctr"/>
+          <a:lstStyle/>
+          <a:p>
+            <a:pPr algn="ctr"/>
+          </a:p>
+        </p:txBody>
+      </p:sp>
+      <p:sp>
+        <p:nvSpPr>
+          <p:cNvPr id="15" name="TextBox 14"/>
+          <p:cNvSpPr txBox="1"/>
+          <p:nvPr/>
+        </p:nvSpPr>
+        <p:spPr>
+          <a:xfrm>
+            <a:off x="594360" y="3575304"/>
+            <a:ext cx="438912" cy="438912"/>
+          </a:xfrm>
+          <a:prstGeom prst="rect">
+            <a:avLst/>
+          </a:prstGeom>
+          <a:noFill/>
+        </p:spPr>
+        <p:txBody>
+          <a:bodyPr wrap="square" anchor="ctr"/>
+          <a:lstStyle/>
+          <a:p>
+            <a:pPr algn="ctr"/>
+            <a:r>
+              <a:rPr sz="1600" b="1" i="0">
+                <a:solidFill>
+                  <a:srgbClr val="FFFFFF"/>
+                </a:solidFill>
+                <a:latin typeface="Calibri"/>
+              </a:rPr>
+              <a:t>3</a:t>
+            </a:r>
+          </a:p>
+        </p:txBody>
+      </p:sp>
+      <p:sp>
+        <p:nvSpPr>
+          <p:cNvPr id="16" name="TextBox 15"/>
+          <p:cNvSpPr txBox="1"/>
+          <p:nvPr/>
+        </p:nvSpPr>
+        <p:spPr>
+          <a:xfrm>
+            <a:off x="1188720" y="3410712"/>
+            <a:ext cx="10271455" cy="786384"/>
+          </a:xfrm>
+          <a:prstGeom prst="rect">
+            <a:avLst/>
+          </a:prstGeom>
+          <a:noFill/>
+        </p:spPr>
+        <p:txBody>
+          <a:bodyPr wrap="square" anchor="ctr"/>
+          <a:lstStyle/>
+          <a:p>
+            <a:r>
+              <a:rPr sz="1400" b="1" i="0">
+                <a:solidFill>
+                  <a:srgbClr val="095292"/>
+                </a:solidFill>
+                <a:latin typeface="Calibri"/>
+              </a:rPr>
+              <a:t>Construya la matriz en V en una tabla de cuatro columnas: Fase de la izquierda / Artefacto / Nivel de prueba emparejado / Caso de prueba de VetCare que lo verifica, y asegurese de que cada uno de sus cuatro requisitos aparezca con su codigo de prueba.</a:t>
+            </a:r>
+          </a:p>
+        </p:txBody>
+      </p:sp>
+      <p:sp>
+        <p:nvSpPr>
+          <p:cNvPr id="17" name="Rounded Rectangle 16"/>
+          <p:cNvSpPr/>
+          <p:nvPr/>
+        </p:nvSpPr>
+        <p:spPr>
+          <a:xfrm>
+            <a:off x="457200" y="4361688"/>
+            <a:ext cx="11277295" cy="950976"/>
+          </a:xfrm>
+          <a:prstGeom prst="roundRect">
+            <a:avLst>
+              <a:gd name="adj" fmla="val 12000"/>
+            </a:avLst>
+          </a:prstGeom>
+          <a:solidFill>
+            <a:srgbClr val="E8F4FA"/>
+          </a:solidFill>
+          <a:ln>
+            <a:noFill/>
+          </a:ln>
+        </p:spPr>
+        <p:style>
+          <a:lnRef idx="1">
+            <a:schemeClr val="accent1"/>
+          </a:lnRef>
+          <a:fillRef idx="3">
+            <a:schemeClr val="accent1"/>
+          </a:fillRef>
+          <a:effectRef idx="2">
+            <a:schemeClr val="accent1"/>
+          </a:effectRef>
+          <a:fontRef idx="minor">
+            <a:schemeClr val="lt1"/>
+          </a:fontRef>
+        </p:style>
+        <p:txBody>
+          <a:bodyPr rtlCol="0" anchor="ctr"/>
+          <a:lstStyle/>
+          <a:p>
+            <a:pPr algn="ctr"/>
+          </a:p>
+        </p:txBody>
+      </p:sp>
+      <p:sp>
+        <p:nvSpPr>
+          <p:cNvPr id="18" name="Rounded Rectangle 17"/>
+          <p:cNvSpPr/>
+          <p:nvPr/>
+        </p:nvSpPr>
+        <p:spPr>
+          <a:xfrm>
+            <a:off x="594360" y="4617720"/>
+            <a:ext cx="438912" cy="438912"/>
+          </a:xfrm>
+          <a:prstGeom prst="roundRect">
+            <a:avLst>
+              <a:gd name="adj" fmla="val 12000"/>
+            </a:avLst>
+          </a:prstGeom>
+          <a:solidFill>
+            <a:srgbClr val="095292"/>
+          </a:solidFill>
+          <a:ln>
+            <a:noFill/>
+          </a:ln>
+        </p:spPr>
+        <p:style>
+          <a:lnRef idx="1">
+            <a:schemeClr val="accent1"/>
+          </a:lnRef>
+          <a:fillRef idx="3">
+            <a:schemeClr val="accent1"/>
+          </a:fillRef>
+          <a:effectRef idx="2">
+            <a:schemeClr val="accent1"/>
+          </a:effectRef>
+          <a:fontRef idx="minor">
+            <a:schemeClr val="lt1"/>
+          </a:fontRef>
+        </p:style>
+        <p:txBody>
+          <a:bodyPr rtlCol="0" anchor="ctr"/>
+          <a:lstStyle/>
+          <a:p>
+            <a:pPr algn="ctr"/>
+          </a:p>
+        </p:txBody>
+      </p:sp>
+      <p:sp>
+        <p:nvSpPr>
+          <p:cNvPr id="19" name="TextBox 18"/>
+          <p:cNvSpPr txBox="1"/>
+          <p:nvPr/>
+        </p:nvSpPr>
+        <p:spPr>
+          <a:xfrm>
+            <a:off x="594360" y="4617720"/>
+            <a:ext cx="438912" cy="438912"/>
+          </a:xfrm>
+          <a:prstGeom prst="rect">
+            <a:avLst/>
+          </a:prstGeom>
+          <a:noFill/>
+        </p:spPr>
+        <p:txBody>
+          <a:bodyPr wrap="square" anchor="ctr"/>
+          <a:lstStyle/>
+          <a:p>
+            <a:pPr algn="ctr"/>
+            <a:r>
+              <a:rPr sz="1600" b="1" i="0">
+                <a:solidFill>
+                  <a:srgbClr val="FFFFFF"/>
+                </a:solidFill>
+                <a:latin typeface="Calibri"/>
+              </a:rPr>
+              <a:t>4</a:t>
+            </a:r>
+          </a:p>
+        </p:txBody>
+      </p:sp>
+      <p:sp>
+        <p:nvSpPr>
+          <p:cNvPr id="20" name="TextBox 19"/>
+          <p:cNvSpPr txBox="1"/>
+          <p:nvPr/>
+        </p:nvSpPr>
+        <p:spPr>
+          <a:xfrm>
+            <a:off x="1188720" y="4453128"/>
+            <a:ext cx="10271455" cy="786384"/>
+          </a:xfrm>
+          <a:prstGeom prst="rect">
+            <a:avLst/>
+          </a:prstGeom>
+          <a:noFill/>
+        </p:spPr>
+        <p:txBody>
+          <a:bodyPr wrap="square" anchor="ctr"/>
+          <a:lstStyle/>
+          <a:p>
+            <a:r>
+              <a:rPr sz="1500" b="1" i="0">
+                <a:solidFill>
+                  <a:srgbClr val="095292"/>
+                </a:solidFill>
+                <a:latin typeface="Calibri"/>
+              </a:rPr>
+              <a:t>En draw.io dibuje el modelo en V de VetCare con las fases de bajada y de subida, y trace lineas punteadas horizontales que unan cada fase con su nivel de prueba; rotule al menos dos de esas lineas con el ID del requisito y el ID del caso de prueba.</a:t>
+            </a:r>
+          </a:p>
+        </p:txBody>
+      </p:sp>
+      <p:sp>
+        <p:nvSpPr>
+          <p:cNvPr id="21" name="Rounded Rectangle 20"/>
+          <p:cNvSpPr/>
+          <p:nvPr/>
+        </p:nvSpPr>
+        <p:spPr>
+          <a:xfrm>
+            <a:off x="457200" y="5404104"/>
+            <a:ext cx="11277295" cy="950976"/>
+          </a:xfrm>
+          <a:prstGeom prst="roundRect">
+            <a:avLst>
+              <a:gd name="adj" fmla="val 12000"/>
+            </a:avLst>
+          </a:prstGeom>
+          <a:solidFill>
+            <a:srgbClr val="F2F2F2"/>
+          </a:solidFill>
+          <a:ln>
+            <a:noFill/>
+          </a:ln>
+        </p:spPr>
+        <p:style>
+          <a:lnRef idx="1">
+            <a:schemeClr val="accent1"/>
+          </a:lnRef>
+          <a:fillRef idx="3">
+            <a:schemeClr val="accent1"/>
+          </a:fillRef>
+          <a:effectRef idx="2">
+            <a:schemeClr val="accent1"/>
+          </a:effectRef>
+          <a:fontRef idx="minor">
+            <a:schemeClr val="lt1"/>
+          </a:fontRef>
+        </p:style>
+        <p:txBody>
+          <a:bodyPr rtlCol="0" anchor="ctr"/>
+          <a:lstStyle/>
+          <a:p>
+            <a:pPr algn="ctr"/>
+          </a:p>
+        </p:txBody>
+      </p:sp>
+      <p:sp>
+        <p:nvSpPr>
+          <p:cNvPr id="22" name="Rounded Rectangle 21"/>
+          <p:cNvSpPr/>
+          <p:nvPr/>
+        </p:nvSpPr>
+        <p:spPr>
+          <a:xfrm>
+            <a:off x="594360" y="5660136"/>
+            <a:ext cx="438912" cy="438912"/>
+          </a:xfrm>
+          <a:prstGeom prst="roundRect">
+            <a:avLst>
+              <a:gd name="adj" fmla="val 12000"/>
+            </a:avLst>
+          </a:prstGeom>
+          <a:solidFill>
+            <a:srgbClr val="095292"/>
+          </a:solidFill>
+          <a:ln>
+            <a:noFill/>
+          </a:ln>
+        </p:spPr>
+        <p:style>
+          <a:lnRef idx="1">
+            <a:schemeClr val="accent1"/>
+          </a:lnRef>
+          <a:fillRef idx="3">
+            <a:schemeClr val="accent1"/>
+          </a:fillRef>
+          <a:effectRef idx="2">
+            <a:schemeClr val="accent1"/>
+          </a:effectRef>
+          <a:fontRef idx="minor">
+            <a:schemeClr val="lt1"/>
+          </a:fontRef>
+        </p:style>
+        <p:txBody>
+          <a:bodyPr rtlCol="0" anchor="ctr"/>
+          <a:lstStyle/>
+          <a:p>
+            <a:pPr algn="ctr"/>
+          </a:p>
+        </p:txBody>
+      </p:sp>
+      <p:sp>
+        <p:nvSpPr>
+          <p:cNvPr id="23" name="TextBox 22"/>
+          <p:cNvSpPr txBox="1"/>
+          <p:nvPr/>
+        </p:nvSpPr>
+        <p:spPr>
+          <a:xfrm>
+            <a:off x="594360" y="5660136"/>
+            <a:ext cx="438912" cy="438912"/>
+          </a:xfrm>
+          <a:prstGeom prst="rect">
+            <a:avLst/>
+          </a:prstGeom>
+          <a:noFill/>
+        </p:spPr>
+        <p:txBody>
+          <a:bodyPr wrap="square" anchor="ctr"/>
+          <a:lstStyle/>
+          <a:p>
+            <a:pPr algn="ctr"/>
+            <a:r>
+              <a:rPr sz="1600" b="1" i="0">
+                <a:solidFill>
+                  <a:srgbClr val="FFFFFF"/>
+                </a:solidFill>
+                <a:latin typeface="Calibri"/>
+              </a:rPr>
+              <a:t>5</a:t>
+            </a:r>
+          </a:p>
+        </p:txBody>
+      </p:sp>
+      <p:sp>
+        <p:nvSpPr>
+          <p:cNvPr id="24" name="TextBox 23"/>
+          <p:cNvSpPr txBox="1"/>
+          <p:nvPr/>
+        </p:nvSpPr>
+        <p:spPr>
+          <a:xfrm>
+            <a:off x="1188720" y="5495544"/>
+            <a:ext cx="10271455" cy="786384"/>
+          </a:xfrm>
+          <a:prstGeom prst="rect">
+            <a:avLst/>
+          </a:prstGeom>
+          <a:noFill/>
+        </p:spPr>
+        <p:txBody>
+          <a:bodyPr wrap="square" anchor="ctr"/>
+          <a:lstStyle/>
+          <a:p>
+            <a:r>
+              <a:rPr sz="1400" b="1" i="0">
+                <a:solidFill>
+                  <a:srgbClr val="095292"/>
+                </a:solidFill>
+                <a:latin typeface="Calibri"/>
+              </a:rPr>
+              <a:t>Diligencie el formato de solicitud de cambio con este caso real: la clinica pide, ya aprobada la linea base, que la busqueda tambien funcione por numero de microchip; describa el requisito afectado, el impacto en diseño y pruebas, y la decision (aprobar, aplazar o rechazar) con su justificacion. Exporte todo a PDF y suba a la plataforma del curso.</a:t>
+            </a:r>
+          </a:p>
+        </p:txBody>
+      </p:sp>
+      <p:sp>
+        <p:nvSpPr>
+          <p:cNvPr id="25" name="TextBox 24"/>
+          <p:cNvSpPr txBox="1"/>
+          <p:nvPr/>
+        </p:nvSpPr>
+        <p:spPr>
+          <a:xfrm>
+            <a:off x="11185855" y="6473952"/>
+            <a:ext cx="640080" cy="274320"/>
+          </a:xfrm>
+          <a:prstGeom prst="rect">
+            <a:avLst/>
+          </a:prstGeom>
+          <a:noFill/>
+        </p:spPr>
+        <p:txBody>
+          <a:bodyPr wrap="square">
+            <a:spAutoFit/>
+          </a:bodyPr>
+          <a:lstStyle/>
+          <a:p>
+            <a:pPr algn="r"/>
+            <a:r>
+              <a:rPr sz="1100" b="0" i="0">
+                <a:solidFill>
+                  <a:srgbClr val="666666"/>
+                </a:solidFill>
+                <a:latin typeface="Calibri"/>
+              </a:rPr>
+              <a:t>17</a:t>
+            </a:r>
+          </a:p>
+        </p:txBody>
+      </p:sp>
+    </p:spTree>
+  </p:cSld>
+  <p:clrMapOvr>
+    <a:masterClrMapping/>
+  </p:clrMapOvr>
+</p:sld>
+</file>
+
+<file path=ppt/slides/slide18.xml><?xml version="1.0" encoding="utf-8"?>
+<p:sld xmlns:a="http://schemas.openxmlformats.org/drawingml/2006/main" xmlns:p="http://schemas.openxmlformats.org/presentationml/2006/main" xmlns:r="http://schemas.openxmlformats.org/officeDocument/2006/relationships">
+  <p:cSld>
+    <p:bg>
+      <p:bgPr>
+        <a:solidFill>
+          <a:srgbClr val="FFFFFF"/>
+        </a:solidFill>
+        <a:effectLst/>
+      </p:bgPr>
+    </p:bg>
+    <p:spTree>
+      <p:nvGrpSpPr>
+        <p:cNvPr id="1" name=""/>
+        <p:cNvGrpSpPr/>
+        <p:nvPr/>
+      </p:nvGrpSpPr>
+      <p:grpSpPr/>
+      <p:sp>
+        <p:nvSpPr>
+          <p:cNvPr id="2" name="Rectangle 1"/>
+          <p:cNvSpPr/>
+          <p:nvPr/>
+        </p:nvSpPr>
+        <p:spPr>
+          <a:xfrm>
+            <a:off x="0" y="0"/>
+            <a:ext cx="12191695" cy="960120"/>
+          </a:xfrm>
+          <a:prstGeom prst="rect">
+            <a:avLst/>
+          </a:prstGeom>
+          <a:solidFill>
+            <a:srgbClr val="095292"/>
+          </a:solidFill>
+          <a:ln>
+            <a:noFill/>
+          </a:ln>
+        </p:spPr>
+        <p:style>
+          <a:lnRef idx="1">
+            <a:schemeClr val="accent1"/>
+          </a:lnRef>
+          <a:fillRef idx="3">
+            <a:schemeClr val="accent1"/>
+          </a:fillRef>
+          <a:effectRef idx="2">
+            <a:schemeClr val="accent1"/>
+          </a:effectRef>
+          <a:fontRef idx="minor">
+            <a:schemeClr val="lt1"/>
+          </a:fontRef>
+        </p:style>
+        <p:txBody>
+          <a:bodyPr rtlCol="0" anchor="ctr"/>
+          <a:lstStyle/>
+          <a:p>
+            <a:pPr algn="ctr"/>
+          </a:p>
+        </p:txBody>
+      </p:sp>
+      <p:sp>
+        <p:nvSpPr>
+          <p:cNvPr id="3" name="Rectangle 2"/>
+          <p:cNvSpPr/>
+          <p:nvPr/>
+        </p:nvSpPr>
+        <p:spPr>
+          <a:xfrm>
+            <a:off x="0" y="960120"/>
+            <a:ext cx="12191695" cy="41148"/>
+          </a:xfrm>
+          <a:prstGeom prst="rect">
+            <a:avLst/>
+          </a:prstGeom>
+          <a:solidFill>
+            <a:srgbClr val="FFD000"/>
+          </a:solidFill>
+          <a:ln>
+            <a:noFill/>
+          </a:ln>
+        </p:spPr>
+        <p:style>
+          <a:lnRef idx="1">
+            <a:schemeClr val="accent1"/>
+          </a:lnRef>
+          <a:fillRef idx="3">
+            <a:schemeClr val="accent1"/>
+          </a:fillRef>
+          <a:effectRef idx="2">
+            <a:schemeClr val="accent1"/>
+          </a:effectRef>
+          <a:fontRef idx="minor">
+            <a:schemeClr val="lt1"/>
+          </a:fontRef>
+        </p:style>
+        <p:txBody>
+          <a:bodyPr rtlCol="0" anchor="ctr"/>
+          <a:lstStyle/>
+          <a:p>
+            <a:pPr algn="ctr"/>
+          </a:p>
+        </p:txBody>
+      </p:sp>
+      <p:sp>
+        <p:nvSpPr>
+          <p:cNvPr id="4" name="TextBox 3"/>
+          <p:cNvSpPr txBox="1"/>
+          <p:nvPr/>
+        </p:nvSpPr>
+        <p:spPr>
+          <a:xfrm>
+            <a:off x="457200" y="164592"/>
+            <a:ext cx="11277295" cy="502920"/>
+          </a:xfrm>
+          <a:prstGeom prst="rect">
+            <a:avLst/>
+          </a:prstGeom>
+          <a:noFill/>
+        </p:spPr>
+        <p:txBody>
+          <a:bodyPr wrap="square">
+            <a:spAutoFit/>
+          </a:bodyPr>
+          <a:lstStyle/>
+          <a:p>
+            <a:r>
+              <a:rPr sz="2600" b="1" i="0">
+                <a:solidFill>
+                  <a:srgbClr val="FFFFFF"/>
+                </a:solidFill>
+                <a:latin typeface="Calibri"/>
+              </a:rPr>
+              <a:t>Antes de entregar — autochequeo</a:t>
+            </a:r>
+          </a:p>
+        </p:txBody>
+      </p:sp>
+      <p:sp>
+        <p:nvSpPr>
+          <p:cNvPr id="5" name="Rounded Rectangle 4"/>
+          <p:cNvSpPr/>
+          <p:nvPr/>
+        </p:nvSpPr>
+        <p:spPr>
+          <a:xfrm>
+            <a:off x="457200" y="1261872"/>
+            <a:ext cx="11277295" cy="566928"/>
+          </a:xfrm>
+          <a:prstGeom prst="roundRect">
+            <a:avLst>
+              <a:gd name="adj" fmla="val 12000"/>
+            </a:avLst>
+          </a:prstGeom>
+          <a:solidFill>
+            <a:srgbClr val="F2F2F2"/>
+          </a:solidFill>
+          <a:ln>
+            <a:noFill/>
+          </a:ln>
+        </p:spPr>
+        <p:style>
+          <a:lnRef idx="1">
+            <a:schemeClr val="accent1"/>
+          </a:lnRef>
+          <a:fillRef idx="3">
+            <a:schemeClr val="accent1"/>
+          </a:fillRef>
+          <a:effectRef idx="2">
+            <a:schemeClr val="accent1"/>
+          </a:effectRef>
+          <a:fontRef idx="minor">
+            <a:schemeClr val="lt1"/>
+          </a:fontRef>
+        </p:style>
+        <p:txBody>
+          <a:bodyPr rtlCol="0" anchor="ctr"/>
+          <a:lstStyle/>
+          <a:p>
+            <a:pPr algn="ctr"/>
+          </a:p>
+        </p:txBody>
+      </p:sp>
+      <p:sp>
+        <p:nvSpPr>
+          <p:cNvPr id="6" name="Rectangle 5"/>
+          <p:cNvSpPr/>
+          <p:nvPr/>
+        </p:nvSpPr>
+        <p:spPr>
+          <a:xfrm>
+            <a:off x="640080" y="1408175"/>
+            <a:ext cx="274320" cy="274320"/>
+          </a:xfrm>
+          <a:prstGeom prst="rect">
+            <a:avLst/>
+          </a:prstGeom>
+          <a:solidFill>
+            <a:srgbClr val="FFFFFF"/>
+          </a:solidFill>
+          <a:ln>
+            <a:solidFill>
+              <a:srgbClr val="333333"/>
+            </a:solidFill>
+          </a:ln>
+        </p:spPr>
+        <p:style>
+          <a:lnRef idx="1">
+            <a:schemeClr val="accent1"/>
+          </a:lnRef>
+          <a:fillRef idx="3">
+            <a:schemeClr val="accent1"/>
+          </a:fillRef>
+          <a:effectRef idx="2">
+            <a:schemeClr val="accent1"/>
+          </a:effectRef>
+          <a:fontRef idx="minor">
+            <a:schemeClr val="lt1"/>
+          </a:fontRef>
+        </p:style>
+        <p:txBody>
+          <a:bodyPr rtlCol="0" anchor="ctr"/>
+          <a:lstStyle/>
+          <a:p>
+            <a:pPr algn="ctr"/>
+          </a:p>
+        </p:txBody>
+      </p:sp>
+      <p:sp>
+        <p:nvSpPr>
+          <p:cNvPr id="7" name="Rectangle 6"/>
+          <p:cNvSpPr/>
+          <p:nvPr/>
+        </p:nvSpPr>
+        <p:spPr>
+          <a:xfrm>
+            <a:off x="640080" y="1408175"/>
+            <a:ext cx="73152" cy="274320"/>
+          </a:xfrm>
+          <a:prstGeom prst="rect">
+            <a:avLst/>
+          </a:prstGeom>
+          <a:solidFill>
+            <a:srgbClr val="269CCB"/>
+          </a:solidFill>
+          <a:ln>
+            <a:noFill/>
+          </a:ln>
+        </p:spPr>
+        <p:style>
+          <a:lnRef idx="1">
+            <a:schemeClr val="accent1"/>
+          </a:lnRef>
+          <a:fillRef idx="3">
+            <a:schemeClr val="accent1"/>
+          </a:fillRef>
+          <a:effectRef idx="2">
+            <a:schemeClr val="accent1"/>
+          </a:effectRef>
+          <a:fontRef idx="minor">
+            <a:schemeClr val="lt1"/>
+          </a:fontRef>
+        </p:style>
+        <p:txBody>
+          <a:bodyPr rtlCol="0" anchor="ctr"/>
+          <a:lstStyle/>
+          <a:p>
+            <a:pPr algn="ctr"/>
+          </a:p>
+        </p:txBody>
+      </p:sp>
+      <p:sp>
+        <p:nvSpPr>
+          <p:cNvPr id="8" name="TextBox 7"/>
+          <p:cNvSpPr txBox="1"/>
+          <p:nvPr/>
+        </p:nvSpPr>
+        <p:spPr>
+          <a:xfrm>
+            <a:off x="1097280" y="1353312"/>
+            <a:ext cx="10362895" cy="402336"/>
+          </a:xfrm>
+          <a:prstGeom prst="rect">
+            <a:avLst/>
+          </a:prstGeom>
+          <a:noFill/>
+        </p:spPr>
+        <p:txBody>
+          <a:bodyPr wrap="square" anchor="ctr"/>
+          <a:lstStyle/>
+          <a:p>
+            <a:r>
+              <a:rPr sz="1500" b="0" i="0">
+                <a:solidFill>
+                  <a:srgbClr val="333333"/>
+                </a:solidFill>
+                <a:latin typeface="Calibri"/>
+              </a:rPr>
+              <a:t>Su criterio de aceptacion se puede medir con un cronometro, un contador o un si/no, o depende de que la veterinaria este de buen genio ese dia?</a:t>
+            </a:r>
+          </a:p>
+        </p:txBody>
+      </p:sp>
+      <p:sp>
+        <p:nvSpPr>
+          <p:cNvPr id="9" name="Rounded Rectangle 8"/>
+          <p:cNvSpPr/>
+          <p:nvPr/>
+        </p:nvSpPr>
+        <p:spPr>
+          <a:xfrm>
+            <a:off x="457200" y="1938528"/>
+            <a:ext cx="11277295" cy="566928"/>
+          </a:xfrm>
+          <a:prstGeom prst="roundRect">
+            <a:avLst>
+              <a:gd name="adj" fmla="val 12000"/>
+            </a:avLst>
+          </a:prstGeom>
+          <a:solidFill>
+            <a:srgbClr val="F2F2F2"/>
+          </a:solidFill>
+          <a:ln>
+            <a:noFill/>
+          </a:ln>
+        </p:spPr>
+        <p:style>
+          <a:lnRef idx="1">
+            <a:schemeClr val="accent1"/>
+          </a:lnRef>
+          <a:fillRef idx="3">
+            <a:schemeClr val="accent1"/>
+          </a:fillRef>
+          <a:effectRef idx="2">
+            <a:schemeClr val="accent1"/>
+          </a:effectRef>
+          <a:fontRef idx="minor">
+            <a:schemeClr val="lt1"/>
+          </a:fontRef>
+        </p:style>
+        <p:txBody>
+          <a:bodyPr rtlCol="0" anchor="ctr"/>
+          <a:lstStyle/>
+          <a:p>
+            <a:pPr algn="ctr"/>
+          </a:p>
+        </p:txBody>
+      </p:sp>
+      <p:sp>
+        <p:nvSpPr>
+          <p:cNvPr id="10" name="Rectangle 9"/>
+          <p:cNvSpPr/>
+          <p:nvPr/>
+        </p:nvSpPr>
+        <p:spPr>
+          <a:xfrm>
+            <a:off x="640080" y="2084832"/>
+            <a:ext cx="274320" cy="274320"/>
+          </a:xfrm>
+          <a:prstGeom prst="rect">
+            <a:avLst/>
+          </a:prstGeom>
+          <a:solidFill>
+            <a:srgbClr val="FFFFFF"/>
+          </a:solidFill>
+          <a:ln>
+            <a:solidFill>
+              <a:srgbClr val="333333"/>
+            </a:solidFill>
+          </a:ln>
+        </p:spPr>
+        <p:style>
+          <a:lnRef idx="1">
+            <a:schemeClr val="accent1"/>
+          </a:lnRef>
+          <a:fillRef idx="3">
+            <a:schemeClr val="accent1"/>
+          </a:fillRef>
+          <a:effectRef idx="2">
+            <a:schemeClr val="accent1"/>
+          </a:effectRef>
+          <a:fontRef idx="minor">
+            <a:schemeClr val="lt1"/>
+          </a:fontRef>
+        </p:style>
+        <p:txBody>
+          <a:bodyPr rtlCol="0" anchor="ctr"/>
+          <a:lstStyle/>
+          <a:p>
+            <a:pPr algn="ctr"/>
+          </a:p>
+        </p:txBody>
+      </p:sp>
+      <p:sp>
+        <p:nvSpPr>
+          <p:cNvPr id="11" name="Rectangle 10"/>
+          <p:cNvSpPr/>
+          <p:nvPr/>
+        </p:nvSpPr>
+        <p:spPr>
+          <a:xfrm>
+            <a:off x="640080" y="2084832"/>
+            <a:ext cx="73152" cy="274320"/>
+          </a:xfrm>
+          <a:prstGeom prst="rect">
+            <a:avLst/>
+          </a:prstGeom>
+          <a:solidFill>
+            <a:srgbClr val="269CCB"/>
+          </a:solidFill>
+          <a:ln>
+            <a:noFill/>
+          </a:ln>
+        </p:spPr>
+        <p:style>
+          <a:lnRef idx="1">
+            <a:schemeClr val="accent1"/>
+          </a:lnRef>
+          <a:fillRef idx="3">
+            <a:schemeClr val="accent1"/>
+          </a:fillRef>
+          <a:effectRef idx="2">
+            <a:schemeClr val="accent1"/>
+          </a:effectRef>
+          <a:fontRef idx="minor">
+            <a:schemeClr val="lt1"/>
+          </a:fontRef>
+        </p:style>
+        <p:txBody>
+          <a:bodyPr rtlCol="0" anchor="ctr"/>
+          <a:lstStyle/>
+          <a:p>
+            <a:pPr algn="ctr"/>
+          </a:p>
+        </p:txBody>
+      </p:sp>
+      <p:sp>
+        <p:nvSpPr>
+          <p:cNvPr id="12" name="TextBox 11"/>
+          <p:cNvSpPr txBox="1"/>
+          <p:nvPr/>
+        </p:nvSpPr>
+        <p:spPr>
+          <a:xfrm>
+            <a:off x="1097280" y="2029968"/>
+            <a:ext cx="10362895" cy="402336"/>
+          </a:xfrm>
+          <a:prstGeom prst="rect">
+            <a:avLst/>
+          </a:prstGeom>
+          <a:noFill/>
+        </p:spPr>
+        <p:txBody>
+          <a:bodyPr wrap="square" anchor="ctr"/>
+          <a:lstStyle/>
+          <a:p>
+            <a:r>
+              <a:rPr sz="1500" b="0" i="0">
+                <a:solidFill>
+                  <a:srgbClr val="333333"/>
+                </a:solidFill>
+                <a:latin typeface="Calibri"/>
+              </a:rPr>
+              <a:t>Si mañana entra un estudiante nuevo al equipo, podria saber solo leyendo el documento quien pidio cada requisito y en que version se aprobo?</a:t>
+            </a:r>
+          </a:p>
+        </p:txBody>
+      </p:sp>
+      <p:sp>
+        <p:nvSpPr>
+          <p:cNvPr id="13" name="Rounded Rectangle 12"/>
+          <p:cNvSpPr/>
+          <p:nvPr/>
+        </p:nvSpPr>
+        <p:spPr>
+          <a:xfrm>
+            <a:off x="457200" y="2615184"/>
+            <a:ext cx="11277295" cy="566928"/>
+          </a:xfrm>
+          <a:prstGeom prst="roundRect">
+            <a:avLst>
+              <a:gd name="adj" fmla="val 12000"/>
+            </a:avLst>
+          </a:prstGeom>
+          <a:solidFill>
+            <a:srgbClr val="F2F2F2"/>
+          </a:solidFill>
+          <a:ln>
+            <a:noFill/>
+          </a:ln>
+        </p:spPr>
+        <p:style>
+          <a:lnRef idx="1">
+            <a:schemeClr val="accent1"/>
+          </a:lnRef>
+          <a:fillRef idx="3">
+            <a:schemeClr val="accent1"/>
+          </a:fillRef>
+          <a:effectRef idx="2">
+            <a:schemeClr val="accent1"/>
+          </a:effectRef>
+          <a:fontRef idx="minor">
+            <a:schemeClr val="lt1"/>
+          </a:fontRef>
+        </p:style>
+        <p:txBody>
+          <a:bodyPr rtlCol="0" anchor="ctr"/>
+          <a:lstStyle/>
+          <a:p>
+            <a:pPr algn="ctr"/>
+          </a:p>
+        </p:txBody>
+      </p:sp>
+      <p:sp>
+        <p:nvSpPr>
+          <p:cNvPr id="14" name="Rectangle 13"/>
+          <p:cNvSpPr/>
+          <p:nvPr/>
+        </p:nvSpPr>
+        <p:spPr>
+          <a:xfrm>
+            <a:off x="640080" y="2761488"/>
+            <a:ext cx="274320" cy="274320"/>
+          </a:xfrm>
+          <a:prstGeom prst="rect">
+            <a:avLst/>
+          </a:prstGeom>
+          <a:solidFill>
+            <a:srgbClr val="FFFFFF"/>
+          </a:solidFill>
+          <a:ln>
+            <a:solidFill>
+              <a:srgbClr val="333333"/>
+            </a:solidFill>
+          </a:ln>
+        </p:spPr>
+        <p:style>
+          <a:lnRef idx="1">
+            <a:schemeClr val="accent1"/>
+          </a:lnRef>
+          <a:fillRef idx="3">
+            <a:schemeClr val="accent1"/>
+          </a:fillRef>
+          <a:effectRef idx="2">
+            <a:schemeClr val="accent1"/>
+          </a:effectRef>
+          <a:fontRef idx="minor">
+            <a:schemeClr val="lt1"/>
+          </a:fontRef>
+        </p:style>
+        <p:txBody>
+          <a:bodyPr rtlCol="0" anchor="ctr"/>
+          <a:lstStyle/>
+          <a:p>
+            <a:pPr algn="ctr"/>
+          </a:p>
+        </p:txBody>
+      </p:sp>
+      <p:sp>
+        <p:nvSpPr>
+          <p:cNvPr id="15" name="Rectangle 14"/>
+          <p:cNvSpPr/>
+          <p:nvPr/>
+        </p:nvSpPr>
+        <p:spPr>
+          <a:xfrm>
+            <a:off x="640080" y="2761488"/>
+            <a:ext cx="73152" cy="274320"/>
+          </a:xfrm>
+          <a:prstGeom prst="rect">
+            <a:avLst/>
+          </a:prstGeom>
+          <a:solidFill>
+            <a:srgbClr val="269CCB"/>
+          </a:solidFill>
+          <a:ln>
+            <a:noFill/>
+          </a:ln>
+        </p:spPr>
+        <p:style>
+          <a:lnRef idx="1">
+            <a:schemeClr val="accent1"/>
+          </a:lnRef>
+          <a:fillRef idx="3">
+            <a:schemeClr val="accent1"/>
+          </a:fillRef>
+          <a:effectRef idx="2">
+            <a:schemeClr val="accent1"/>
+          </a:effectRef>
+          <a:fontRef idx="minor">
+            <a:schemeClr val="lt1"/>
+          </a:fontRef>
+        </p:style>
+        <p:txBody>
+          <a:bodyPr rtlCol="0" anchor="ctr"/>
+          <a:lstStyle/>
+          <a:p>
+            <a:pPr algn="ctr"/>
+          </a:p>
+        </p:txBody>
+      </p:sp>
+      <p:sp>
+        <p:nvSpPr>
+          <p:cNvPr id="16" name="TextBox 15"/>
+          <p:cNvSpPr txBox="1"/>
+          <p:nvPr/>
+        </p:nvSpPr>
+        <p:spPr>
+          <a:xfrm>
+            <a:off x="1097280" y="2706624"/>
+            <a:ext cx="10362895" cy="402336"/>
+          </a:xfrm>
+          <a:prstGeom prst="rect">
+            <a:avLst/>
+          </a:prstGeom>
+          <a:noFill/>
+        </p:spPr>
+        <p:txBody>
+          <a:bodyPr wrap="square" anchor="ctr"/>
+          <a:lstStyle/>
+          <a:p>
+            <a:r>
+              <a:rPr sz="1500" b="0" i="0">
+                <a:solidFill>
+                  <a:srgbClr val="333333"/>
+                </a:solidFill>
+                <a:latin typeface="Calibri"/>
+              </a:rPr>
+              <a:t>Hay algun requisito en su lista que no tenga ninguna prueba asociada? Si lo hay, como pensaba demostrarle a la clinica que ese requisito quedo cumplido?</a:t>
+            </a:r>
+          </a:p>
+        </p:txBody>
+      </p:sp>
+      <p:sp>
+        <p:nvSpPr>
+          <p:cNvPr id="17" name="TextBox 16"/>
+          <p:cNvSpPr txBox="1"/>
+          <p:nvPr/>
+        </p:nvSpPr>
+        <p:spPr>
+          <a:xfrm>
+            <a:off x="11185855" y="6473952"/>
+            <a:ext cx="640080" cy="274320"/>
+          </a:xfrm>
+          <a:prstGeom prst="rect">
+            <a:avLst/>
+          </a:prstGeom>
+          <a:noFill/>
+        </p:spPr>
+        <p:txBody>
+          <a:bodyPr wrap="square">
+            <a:spAutoFit/>
+          </a:bodyPr>
+          <a:lstStyle/>
+          <a:p>
+            <a:pPr algn="r"/>
+            <a:r>
+              <a:rPr sz="1100" b="0" i="0">
+                <a:solidFill>
+                  <a:srgbClr val="666666"/>
+                </a:solidFill>
+                <a:latin typeface="Calibri"/>
+              </a:rPr>
+              <a:t>18</a:t>
+            </a:r>
+          </a:p>
+        </p:txBody>
+      </p:sp>
+    </p:spTree>
+  </p:cSld>
+  <p:clrMapOvr>
+    <a:masterClrMapping/>
+  </p:clrMapOvr>
+</p:sld>
+</file>
+
+<file path=ppt/slides/slide19.xml><?xml version="1.0" encoding="utf-8"?>
+<p:sld xmlns:a="http://schemas.openxmlformats.org/drawingml/2006/main" xmlns:p="http://schemas.openxmlformats.org/presentationml/2006/main" xmlns:r="http://schemas.openxmlformats.org/officeDocument/2006/relationships">
+  <p:cSld>
+    <p:bg>
+      <p:bgPr>
+        <a:solidFill>
+          <a:srgbClr val="FFFFFF"/>
+        </a:solidFill>
+        <a:effectLst/>
+      </p:bgPr>
+    </p:bg>
+    <p:spTree>
+      <p:nvGrpSpPr>
+        <p:cNvPr id="1" name=""/>
+        <p:cNvGrpSpPr/>
+        <p:nvPr/>
+      </p:nvGrpSpPr>
+      <p:grpSpPr/>
+      <p:sp>
+        <p:nvSpPr>
+          <p:cNvPr id="2" name="Rectangle 1"/>
+          <p:cNvSpPr/>
+          <p:nvPr/>
+        </p:nvSpPr>
+        <p:spPr>
+          <a:xfrm>
+            <a:off x="0" y="0"/>
+            <a:ext cx="12191695" cy="960120"/>
+          </a:xfrm>
+          <a:prstGeom prst="rect">
+            <a:avLst/>
+          </a:prstGeom>
+          <a:solidFill>
+            <a:srgbClr val="095292"/>
+          </a:solidFill>
+          <a:ln>
+            <a:noFill/>
+          </a:ln>
+        </p:spPr>
+        <p:style>
+          <a:lnRef idx="1">
+            <a:schemeClr val="accent1"/>
+          </a:lnRef>
+          <a:fillRef idx="3">
+            <a:schemeClr val="accent1"/>
+          </a:fillRef>
+          <a:effectRef idx="2">
+            <a:schemeClr val="accent1"/>
+          </a:effectRef>
+          <a:fontRef idx="minor">
+            <a:schemeClr val="lt1"/>
+          </a:fontRef>
+        </p:style>
+        <p:txBody>
+          <a:bodyPr rtlCol="0" anchor="ctr"/>
+          <a:lstStyle/>
+          <a:p>
+            <a:pPr algn="ctr"/>
+          </a:p>
+        </p:txBody>
+      </p:sp>
+      <p:sp>
+        <p:nvSpPr>
+          <p:cNvPr id="3" name="Rectangle 2"/>
+          <p:cNvSpPr/>
+          <p:nvPr/>
+        </p:nvSpPr>
+        <p:spPr>
+          <a:xfrm>
+            <a:off x="0" y="960120"/>
+            <a:ext cx="12191695" cy="41148"/>
+          </a:xfrm>
+          <a:prstGeom prst="rect">
+            <a:avLst/>
+          </a:prstGeom>
+          <a:solidFill>
+            <a:srgbClr val="FFD000"/>
+          </a:solidFill>
+          <a:ln>
+            <a:noFill/>
+          </a:ln>
+        </p:spPr>
+        <p:style>
+          <a:lnRef idx="1">
+            <a:schemeClr val="accent1"/>
+          </a:lnRef>
+          <a:fillRef idx="3">
+            <a:schemeClr val="accent1"/>
+          </a:fillRef>
+          <a:effectRef idx="2">
+            <a:schemeClr val="accent1"/>
+          </a:effectRef>
+          <a:fontRef idx="minor">
+            <a:schemeClr val="lt1"/>
+          </a:fontRef>
+        </p:style>
+        <p:txBody>
+          <a:bodyPr rtlCol="0" anchor="ctr"/>
+          <a:lstStyle/>
+          <a:p>
+            <a:pPr algn="ctr"/>
+          </a:p>
+        </p:txBody>
+      </p:sp>
+      <p:sp>
+        <p:nvSpPr>
+          <p:cNvPr id="4" name="TextBox 3"/>
+          <p:cNvSpPr txBox="1"/>
+          <p:nvPr/>
+        </p:nvSpPr>
+        <p:spPr>
+          <a:xfrm>
+            <a:off x="457200" y="164592"/>
+            <a:ext cx="11277295" cy="502920"/>
+          </a:xfrm>
+          <a:prstGeom prst="rect">
+            <a:avLst/>
+          </a:prstGeom>
+          <a:noFill/>
+        </p:spPr>
+        <p:txBody>
+          <a:bodyPr wrap="square">
+            <a:spAutoFit/>
+          </a:bodyPr>
+          <a:lstStyle/>
+          <a:p>
+            <a:r>
+              <a:rPr sz="2600" b="1" i="0">
+                <a:solidFill>
+                  <a:srgbClr val="FFFFFF"/>
+                </a:solidFill>
+                <a:latin typeface="Calibri"/>
+              </a:rPr>
+              <a:t>Criterios de exito / entregable</a:t>
+            </a:r>
+          </a:p>
+        </p:txBody>
+      </p:sp>
+      <p:sp>
+        <p:nvSpPr>
+          <p:cNvPr id="5" name="TextBox 4"/>
+          <p:cNvSpPr txBox="1"/>
+          <p:nvPr/>
+        </p:nvSpPr>
+        <p:spPr>
+          <a:xfrm>
+            <a:off x="457200" y="1170432"/>
+            <a:ext cx="11277295" cy="5230368"/>
+          </a:xfrm>
+          <a:prstGeom prst="rect">
+            <a:avLst/>
+          </a:prstGeom>
+          <a:noFill/>
+        </p:spPr>
+        <p:txBody>
+          <a:bodyPr wrap="square">
+            <a:spAutoFit/>
+          </a:bodyPr>
+          <a:lstStyle/>
+          <a:p>
+            <a:pPr>
+              <a:spcAft>
+                <a:spcPts val="800"/>
+              </a:spcAft>
+            </a:pPr>
+            <a:r>
+              <a:rPr sz="2000" b="0" i="0">
+                <a:solidFill>
+                  <a:srgbClr val="333333"/>
+                </a:solidFill>
+                <a:latin typeface="Calibri"/>
+              </a:rPr>
+              <a:t>–   </a:t>
+            </a:r>
             <a:r>
               <a:rPr sz="2000" b="1" i="0">
                 <a:solidFill>
-                  <a:srgbClr val="269CCB"/>
-                </a:solidFill>
-                <a:latin typeface="Calibri"/>
-              </a:rPr>
-              <a:t>Teoria al servicio del proyecto</a:t>
+                  <a:srgbClr val="333333"/>
+                </a:solidFill>
+                <a:latin typeface="Calibri"/>
+              </a:rPr>
+              <a:t>Entregable:</a:t>
+            </a:r>
+            <a:r>
+              <a:rPr sz="2000" b="0" i="0">
+                <a:solidFill>
+                  <a:srgbClr val="333333"/>
+                </a:solidFill>
+                <a:latin typeface="Calibri"/>
+              </a:rPr>
+              <a:t> Un documento en Google Docs con el indice del ERS de VetCare, cuatro requisitos escritos en formato de ficha con version y linea base, la matriz en V (requisito - nivel de prueba - criterio de aceptacion) y un formato de solicitud de cambio diligenciado; mas el diagrama en V dibujado en draw.io y subido a la plataforma del curso.</a:t>
+            </a:r>
+          </a:p>
+          <a:p>
+            <a:pPr>
+              <a:spcAft>
+                <a:spcPts val="800"/>
+              </a:spcAft>
+            </a:pPr>
+            <a:r>
+              <a:rPr sz="2000" b="0" i="0">
+                <a:solidFill>
+                  <a:srgbClr val="333333"/>
+                </a:solidFill>
+                <a:latin typeface="Calibri"/>
+              </a:rPr>
+              <a:t>–   </a:t>
+            </a:r>
+            <a:r>
+              <a:rPr sz="2000" b="1" i="0">
+                <a:solidFill>
+                  <a:srgbClr val="333333"/>
+                </a:solidFill>
+                <a:latin typeface="Calibri"/>
+              </a:rPr>
+              <a:t>Exito:</a:t>
+            </a:r>
+            <a:r>
+              <a:rPr sz="2000" b="0" i="0">
+                <a:solidFill>
+                  <a:srgbClr val="333333"/>
+                </a:solidFill>
+                <a:latin typeface="Calibri"/>
+              </a:rPr>
+              <a:t> Cada requisito tiene ID unico, fuente identificada, version, estado y un criterio de aceptacion medible (con numero, tiempo o cantidad), no una opinion.</a:t>
+            </a:r>
+          </a:p>
+          <a:p>
+            <a:pPr>
+              <a:spcAft>
+                <a:spcPts val="800"/>
+              </a:spcAft>
+            </a:pPr>
+            <a:r>
+              <a:rPr sz="2000" b="0" i="0">
+                <a:solidFill>
+                  <a:srgbClr val="333333"/>
+                </a:solidFill>
+                <a:latin typeface="Calibri"/>
+              </a:rPr>
+              <a:t>–   </a:t>
+            </a:r>
+            <a:r>
+              <a:rPr sz="2000" b="1" i="0">
+                <a:solidFill>
+                  <a:srgbClr val="333333"/>
+                </a:solidFill>
+                <a:latin typeface="Calibri"/>
+              </a:rPr>
+              <a:t>Exito:</a:t>
+            </a:r>
+            <a:r>
+              <a:rPr sz="2000" b="0" i="0">
+                <a:solidFill>
+                  <a:srgbClr val="333333"/>
+                </a:solidFill>
+                <a:latin typeface="Calibri"/>
+              </a:rPr>
+              <a:t> La matriz en V empareja cada fase de la izquierda con su nivel de prueba a la derecha y no deja ningun requisito sin su caso de prueba asociado.</a:t>
+            </a:r>
+          </a:p>
+          <a:p>
+            <a:pPr>
+              <a:spcAft>
+                <a:spcPts val="800"/>
+              </a:spcAft>
+            </a:pPr>
+            <a:r>
+              <a:rPr sz="2000" b="0" i="0">
+                <a:solidFill>
+                  <a:srgbClr val="333333"/>
+                </a:solidFill>
+                <a:latin typeface="Calibri"/>
+              </a:rPr>
+              <a:t>–   </a:t>
+            </a:r>
+            <a:r>
+              <a:rPr sz="2000" b="1" i="0">
+                <a:solidFill>
+                  <a:srgbClr val="333333"/>
+                </a:solidFill>
+                <a:latin typeface="Calibri"/>
+              </a:rPr>
+              <a:t>Exito:</a:t>
+            </a:r>
+            <a:r>
+              <a:rPr sz="2000" b="0" i="0">
+                <a:solidFill>
+                  <a:srgbClr val="333333"/>
+                </a:solidFill>
+                <a:latin typeface="Calibri"/>
+              </a:rPr>
+              <a:t> El diagrama en draw.io muestra las dos ramas de la V y al menos dos lineas de trazabilidad rotuladas con IDs reales de VetCare.</a:t>
+            </a:r>
+          </a:p>
+          <a:p>
+            <a:pPr>
+              <a:spcAft>
+                <a:spcPts val="800"/>
+              </a:spcAft>
+            </a:pPr>
+            <a:r>
+              <a:rPr sz="2000" b="0" i="0">
+                <a:solidFill>
+                  <a:srgbClr val="333333"/>
+                </a:solidFill>
+                <a:latin typeface="Calibri"/>
+              </a:rPr>
+              <a:t>–   </a:t>
+            </a:r>
+            <a:r>
+              <a:rPr sz="2000" b="1" i="0">
+                <a:solidFill>
+                  <a:srgbClr val="333333"/>
+                </a:solidFill>
+                <a:latin typeface="Calibri"/>
+              </a:rPr>
+              <a:t>Exito:</a:t>
+            </a:r>
+            <a:r>
+              <a:rPr sz="2000" b="0" i="0">
+                <a:solidFill>
+                  <a:srgbClr val="333333"/>
+                </a:solidFill>
+                <a:latin typeface="Calibri"/>
+              </a:rPr>
+              <a:t> La solicitud de cambio identifica el requisito afectado, el impacto en diseño y pruebas y una decision justificada, no un simple 'si, se agrega'.</a:t>
+            </a:r>
+          </a:p>
+          <a:p>
+            <a:pPr>
+              <a:spcAft>
+                <a:spcPts val="800"/>
+              </a:spcAft>
+            </a:pPr>
+            <a:r>
+              <a:rPr sz="2000" b="0" i="0">
+                <a:solidFill>
+                  <a:srgbClr val="333333"/>
+                </a:solidFill>
+                <a:latin typeface="Calibri"/>
+              </a:rPr>
+              <a:t>–   </a:t>
+            </a:r>
+            <a:r>
+              <a:rPr sz="2000" b="1" i="0">
+                <a:solidFill>
+                  <a:srgbClr val="333333"/>
+                </a:solidFill>
+                <a:latin typeface="Calibri"/>
+              </a:rPr>
+              <a:t>Entrega en la plataforma del curso</a:t>
+            </a:r>
+            <a:r>
+              <a:rPr sz="2000" b="0" i="0">
+                <a:solidFill>
+                  <a:srgbClr val="333333"/>
+                </a:solidFill>
+                <a:latin typeface="Calibri"/>
+              </a:rPr>
+              <a:t> — en la fecha que indique el docente.</a:t>
+            </a:r>
+          </a:p>
+        </p:txBody>
+      </p:sp>
+      <p:sp>
+        <p:nvSpPr>
+          <p:cNvPr id="6" name="TextBox 5"/>
+          <p:cNvSpPr txBox="1"/>
+          <p:nvPr/>
+        </p:nvSpPr>
+        <p:spPr>
+          <a:xfrm>
+            <a:off x="11185855" y="6473952"/>
+            <a:ext cx="640080" cy="274320"/>
+          </a:xfrm>
+          <a:prstGeom prst="rect">
+            <a:avLst/>
+          </a:prstGeom>
+          <a:noFill/>
+        </p:spPr>
+        <p:txBody>
+          <a:bodyPr wrap="square">
+            <a:spAutoFit/>
+          </a:bodyPr>
+          <a:lstStyle/>
+          <a:p>
+            <a:pPr algn="r"/>
+            <a:r>
+              <a:rPr sz="1100" b="0" i="0">
+                <a:solidFill>
+                  <a:srgbClr val="666666"/>
+                </a:solidFill>
+                <a:latin typeface="Calibri"/>
+              </a:rPr>
+              <a:t>19</a:t>
             </a:r>
           </a:p>
         </p:txBody>
@@ -6684,6 +9228,833 @@
 </p:sld>
 </file>
 
+<file path=ppt/slides/slide20.xml><?xml version="1.0" encoding="utf-8"?>
+<p:sld xmlns:a="http://schemas.openxmlformats.org/drawingml/2006/main" xmlns:p="http://schemas.openxmlformats.org/presentationml/2006/main" xmlns:r="http://schemas.openxmlformats.org/officeDocument/2006/relationships">
+  <p:cSld>
+    <p:bg>
+      <p:bgPr>
+        <a:solidFill>
+          <a:srgbClr val="FFFFFF"/>
+        </a:solidFill>
+        <a:effectLst/>
+      </p:bgPr>
+    </p:bg>
+    <p:spTree>
+      <p:nvGrpSpPr>
+        <p:cNvPr id="1" name=""/>
+        <p:cNvGrpSpPr/>
+        <p:nvPr/>
+      </p:nvGrpSpPr>
+      <p:grpSpPr/>
+      <p:sp>
+        <p:nvSpPr>
+          <p:cNvPr id="2" name="Rectangle 1"/>
+          <p:cNvSpPr/>
+          <p:nvPr/>
+        </p:nvSpPr>
+        <p:spPr>
+          <a:xfrm>
+            <a:off x="0" y="0"/>
+            <a:ext cx="12191695" cy="960120"/>
+          </a:xfrm>
+          <a:prstGeom prst="rect">
+            <a:avLst/>
+          </a:prstGeom>
+          <a:solidFill>
+            <a:srgbClr val="095292"/>
+          </a:solidFill>
+          <a:ln>
+            <a:noFill/>
+          </a:ln>
+        </p:spPr>
+        <p:style>
+          <a:lnRef idx="1">
+            <a:schemeClr val="accent1"/>
+          </a:lnRef>
+          <a:fillRef idx="3">
+            <a:schemeClr val="accent1"/>
+          </a:fillRef>
+          <a:effectRef idx="2">
+            <a:schemeClr val="accent1"/>
+          </a:effectRef>
+          <a:fontRef idx="minor">
+            <a:schemeClr val="lt1"/>
+          </a:fontRef>
+        </p:style>
+        <p:txBody>
+          <a:bodyPr rtlCol="0" anchor="ctr"/>
+          <a:lstStyle/>
+          <a:p>
+            <a:pPr algn="ctr"/>
+          </a:p>
+        </p:txBody>
+      </p:sp>
+      <p:sp>
+        <p:nvSpPr>
+          <p:cNvPr id="3" name="Rectangle 2"/>
+          <p:cNvSpPr/>
+          <p:nvPr/>
+        </p:nvSpPr>
+        <p:spPr>
+          <a:xfrm>
+            <a:off x="0" y="960120"/>
+            <a:ext cx="12191695" cy="41148"/>
+          </a:xfrm>
+          <a:prstGeom prst="rect">
+            <a:avLst/>
+          </a:prstGeom>
+          <a:solidFill>
+            <a:srgbClr val="FFD000"/>
+          </a:solidFill>
+          <a:ln>
+            <a:noFill/>
+          </a:ln>
+        </p:spPr>
+        <p:style>
+          <a:lnRef idx="1">
+            <a:schemeClr val="accent1"/>
+          </a:lnRef>
+          <a:fillRef idx="3">
+            <a:schemeClr val="accent1"/>
+          </a:fillRef>
+          <a:effectRef idx="2">
+            <a:schemeClr val="accent1"/>
+          </a:effectRef>
+          <a:fontRef idx="minor">
+            <a:schemeClr val="lt1"/>
+          </a:fontRef>
+        </p:style>
+        <p:txBody>
+          <a:bodyPr rtlCol="0" anchor="ctr"/>
+          <a:lstStyle/>
+          <a:p>
+            <a:pPr algn="ctr"/>
+          </a:p>
+        </p:txBody>
+      </p:sp>
+      <p:sp>
+        <p:nvSpPr>
+          <p:cNvPr id="4" name="TextBox 3"/>
+          <p:cNvSpPr txBox="1"/>
+          <p:nvPr/>
+        </p:nvSpPr>
+        <p:spPr>
+          <a:xfrm>
+            <a:off x="457200" y="164592"/>
+            <a:ext cx="11277295" cy="502920"/>
+          </a:xfrm>
+          <a:prstGeom prst="rect">
+            <a:avLst/>
+          </a:prstGeom>
+          <a:noFill/>
+        </p:spPr>
+        <p:txBody>
+          <a:bodyPr wrap="square">
+            <a:spAutoFit/>
+          </a:bodyPr>
+          <a:lstStyle/>
+          <a:p>
+            <a:r>
+              <a:rPr sz="2600" b="1" i="0">
+                <a:solidFill>
+                  <a:srgbClr val="FFFFFF"/>
+                </a:solidFill>
+                <a:latin typeface="Calibri"/>
+              </a:rPr>
+              <a:t>Para el PI esta semana</a:t>
+            </a:r>
+          </a:p>
+        </p:txBody>
+      </p:sp>
+      <p:sp>
+        <p:nvSpPr>
+          <p:cNvPr id="5" name="Rounded Rectangle 4"/>
+          <p:cNvSpPr/>
+          <p:nvPr/>
+        </p:nvSpPr>
+        <p:spPr>
+          <a:xfrm>
+            <a:off x="457200" y="1261872"/>
+            <a:ext cx="11277295" cy="1051560"/>
+          </a:xfrm>
+          <a:prstGeom prst="roundRect">
+            <a:avLst>
+              <a:gd name="adj" fmla="val 12000"/>
+            </a:avLst>
+          </a:prstGeom>
+          <a:solidFill>
+            <a:srgbClr val="E8F4FA"/>
+          </a:solidFill>
+          <a:ln>
+            <a:noFill/>
+          </a:ln>
+        </p:spPr>
+        <p:style>
+          <a:lnRef idx="1">
+            <a:schemeClr val="accent1"/>
+          </a:lnRef>
+          <a:fillRef idx="3">
+            <a:schemeClr val="accent1"/>
+          </a:fillRef>
+          <a:effectRef idx="2">
+            <a:schemeClr val="accent1"/>
+          </a:effectRef>
+          <a:fontRef idx="minor">
+            <a:schemeClr val="lt1"/>
+          </a:fontRef>
+        </p:style>
+        <p:txBody>
+          <a:bodyPr rtlCol="0" anchor="ctr"/>
+          <a:lstStyle/>
+          <a:p>
+            <a:pPr algn="ctr"/>
+          </a:p>
+        </p:txBody>
+      </p:sp>
+      <p:sp>
+        <p:nvSpPr>
+          <p:cNvPr id="6" name="Rectangle 5"/>
+          <p:cNvSpPr/>
+          <p:nvPr/>
+        </p:nvSpPr>
+        <p:spPr>
+          <a:xfrm>
+            <a:off x="457200" y="1261872"/>
+            <a:ext cx="128016" cy="1051560"/>
+          </a:xfrm>
+          <a:prstGeom prst="rect">
+            <a:avLst/>
+          </a:prstGeom>
+          <a:solidFill>
+            <a:srgbClr val="269CCB"/>
+          </a:solidFill>
+          <a:ln>
+            <a:noFill/>
+          </a:ln>
+        </p:spPr>
+        <p:style>
+          <a:lnRef idx="1">
+            <a:schemeClr val="accent1"/>
+          </a:lnRef>
+          <a:fillRef idx="3">
+            <a:schemeClr val="accent1"/>
+          </a:fillRef>
+          <a:effectRef idx="2">
+            <a:schemeClr val="accent1"/>
+          </a:effectRef>
+          <a:fontRef idx="minor">
+            <a:schemeClr val="lt1"/>
+          </a:fontRef>
+        </p:style>
+        <p:txBody>
+          <a:bodyPr rtlCol="0" anchor="ctr"/>
+          <a:lstStyle/>
+          <a:p>
+            <a:pPr algn="ctr"/>
+          </a:p>
+        </p:txBody>
+      </p:sp>
+      <p:sp>
+        <p:nvSpPr>
+          <p:cNvPr id="7" name="TextBox 6"/>
+          <p:cNvSpPr txBox="1"/>
+          <p:nvPr/>
+        </p:nvSpPr>
+        <p:spPr>
+          <a:xfrm>
+            <a:off x="777240" y="1399031"/>
+            <a:ext cx="10774375" cy="822959"/>
+          </a:xfrm>
+          <a:prstGeom prst="rect">
+            <a:avLst/>
+          </a:prstGeom>
+          <a:noFill/>
+        </p:spPr>
+        <p:txBody>
+          <a:bodyPr wrap="square">
+            <a:spAutoFit/>
+          </a:bodyPr>
+          <a:lstStyle/>
+          <a:p>
+            <a:r>
+              <a:rPr sz="1200" b="1" i="0">
+                <a:solidFill>
+                  <a:srgbClr val="269CCB"/>
+                </a:solidFill>
+                <a:latin typeface="Calibri"/>
+              </a:rPr>
+              <a:t>Info</a:t>
+            </a:r>
+          </a:p>
+          <a:p>
+            <a:pPr>
+              <a:spcBef>
+                <a:spcPts val="400"/>
+              </a:spcBef>
+            </a:pPr>
+            <a:r>
+              <a:rPr sz="1400" b="0" i="0">
+                <a:solidFill>
+                  <a:srgbClr val="333333"/>
+                </a:solidFill>
+                <a:latin typeface="Calibri"/>
+              </a:rPr>
+              <a:t>Hito: Queda listo el indice del documento formal de diseño de VetCare y la matriz en V que amarra cada requisito con la prueba que lo va a verificar.</a:t>
+            </a:r>
+          </a:p>
+        </p:txBody>
+      </p:sp>
+      <p:sp>
+        <p:nvSpPr>
+          <p:cNvPr id="8" name="Rounded Rectangle 7"/>
+          <p:cNvSpPr/>
+          <p:nvPr/>
+        </p:nvSpPr>
+        <p:spPr>
+          <a:xfrm>
+            <a:off x="457200" y="2478024"/>
+            <a:ext cx="11277295" cy="1051560"/>
+          </a:xfrm>
+          <a:prstGeom prst="roundRect">
+            <a:avLst>
+              <a:gd name="adj" fmla="val 12000"/>
+            </a:avLst>
+          </a:prstGeom>
+          <a:solidFill>
+            <a:srgbClr val="FFF8E1"/>
+          </a:solidFill>
+          <a:ln>
+            <a:noFill/>
+          </a:ln>
+        </p:spPr>
+        <p:style>
+          <a:lnRef idx="1">
+            <a:schemeClr val="accent1"/>
+          </a:lnRef>
+          <a:fillRef idx="3">
+            <a:schemeClr val="accent1"/>
+          </a:fillRef>
+          <a:effectRef idx="2">
+            <a:schemeClr val="accent1"/>
+          </a:effectRef>
+          <a:fontRef idx="minor">
+            <a:schemeClr val="lt1"/>
+          </a:fontRef>
+        </p:style>
+        <p:txBody>
+          <a:bodyPr rtlCol="0" anchor="ctr"/>
+          <a:lstStyle/>
+          <a:p>
+            <a:pPr algn="ctr"/>
+          </a:p>
+        </p:txBody>
+      </p:sp>
+      <p:sp>
+        <p:nvSpPr>
+          <p:cNvPr id="9" name="Rectangle 8"/>
+          <p:cNvSpPr/>
+          <p:nvPr/>
+        </p:nvSpPr>
+        <p:spPr>
+          <a:xfrm>
+            <a:off x="457200" y="2478024"/>
+            <a:ext cx="128016" cy="1051560"/>
+          </a:xfrm>
+          <a:prstGeom prst="rect">
+            <a:avLst/>
+          </a:prstGeom>
+          <a:solidFill>
+            <a:srgbClr val="FFD000"/>
+          </a:solidFill>
+          <a:ln>
+            <a:noFill/>
+          </a:ln>
+        </p:spPr>
+        <p:style>
+          <a:lnRef idx="1">
+            <a:schemeClr val="accent1"/>
+          </a:lnRef>
+          <a:fillRef idx="3">
+            <a:schemeClr val="accent1"/>
+          </a:fillRef>
+          <a:effectRef idx="2">
+            <a:schemeClr val="accent1"/>
+          </a:effectRef>
+          <a:fontRef idx="minor">
+            <a:schemeClr val="lt1"/>
+          </a:fontRef>
+        </p:style>
+        <p:txBody>
+          <a:bodyPr rtlCol="0" anchor="ctr"/>
+          <a:lstStyle/>
+          <a:p>
+            <a:pPr algn="ctr"/>
+          </a:p>
+        </p:txBody>
+      </p:sp>
+      <p:sp>
+        <p:nvSpPr>
+          <p:cNvPr id="10" name="TextBox 9"/>
+          <p:cNvSpPr txBox="1"/>
+          <p:nvPr/>
+        </p:nvSpPr>
+        <p:spPr>
+          <a:xfrm>
+            <a:off x="777240" y="2615184"/>
+            <a:ext cx="10774375" cy="822959"/>
+          </a:xfrm>
+          <a:prstGeom prst="rect">
+            <a:avLst/>
+          </a:prstGeom>
+          <a:noFill/>
+        </p:spPr>
+        <p:txBody>
+          <a:bodyPr wrap="square">
+            <a:spAutoFit/>
+          </a:bodyPr>
+          <a:lstStyle/>
+          <a:p>
+            <a:r>
+              <a:rPr sz="1200" b="1" i="0">
+                <a:solidFill>
+                  <a:srgbClr val="FFD000"/>
+                </a:solidFill>
+                <a:latin typeface="Calibri"/>
+              </a:rPr>
+              <a:t>Aclaración</a:t>
+            </a:r>
+          </a:p>
+          <a:p>
+            <a:pPr>
+              <a:spcBef>
+                <a:spcPts val="400"/>
+              </a:spcBef>
+            </a:pPr>
+            <a:r>
+              <a:rPr sz="1400" b="0" i="0">
+                <a:solidFill>
+                  <a:srgbClr val="333333"/>
+                </a:solidFill>
+                <a:latin typeface="Calibri"/>
+              </a:rPr>
+              <a:t>Enunciado completo: Clases/Proyecto Integrador/ (VetCare).</a:t>
+            </a:r>
+          </a:p>
+        </p:txBody>
+      </p:sp>
+      <p:sp>
+        <p:nvSpPr>
+          <p:cNvPr id="11" name="Rounded Rectangle 10"/>
+          <p:cNvSpPr/>
+          <p:nvPr/>
+        </p:nvSpPr>
+        <p:spPr>
+          <a:xfrm>
+            <a:off x="457200" y="3694176"/>
+            <a:ext cx="11277295" cy="1051560"/>
+          </a:xfrm>
+          <a:prstGeom prst="roundRect">
+            <a:avLst>
+              <a:gd name="adj" fmla="val 12000"/>
+            </a:avLst>
+          </a:prstGeom>
+          <a:solidFill>
+            <a:srgbClr val="FBE4E4"/>
+          </a:solidFill>
+          <a:ln>
+            <a:noFill/>
+          </a:ln>
+        </p:spPr>
+        <p:style>
+          <a:lnRef idx="1">
+            <a:schemeClr val="accent1"/>
+          </a:lnRef>
+          <a:fillRef idx="3">
+            <a:schemeClr val="accent1"/>
+          </a:fillRef>
+          <a:effectRef idx="2">
+            <a:schemeClr val="accent1"/>
+          </a:effectRef>
+          <a:fontRef idx="minor">
+            <a:schemeClr val="lt1"/>
+          </a:fontRef>
+        </p:style>
+        <p:txBody>
+          <a:bodyPr rtlCol="0" anchor="ctr"/>
+          <a:lstStyle/>
+          <a:p>
+            <a:pPr algn="ctr"/>
+          </a:p>
+        </p:txBody>
+      </p:sp>
+      <p:sp>
+        <p:nvSpPr>
+          <p:cNvPr id="12" name="Rectangle 11"/>
+          <p:cNvSpPr/>
+          <p:nvPr/>
+        </p:nvSpPr>
+        <p:spPr>
+          <a:xfrm>
+            <a:off x="457200" y="3694176"/>
+            <a:ext cx="128016" cy="1051560"/>
+          </a:xfrm>
+          <a:prstGeom prst="rect">
+            <a:avLst/>
+          </a:prstGeom>
+          <a:solidFill>
+            <a:srgbClr val="A02030"/>
+          </a:solidFill>
+          <a:ln>
+            <a:noFill/>
+          </a:ln>
+        </p:spPr>
+        <p:style>
+          <a:lnRef idx="1">
+            <a:schemeClr val="accent1"/>
+          </a:lnRef>
+          <a:fillRef idx="3">
+            <a:schemeClr val="accent1"/>
+          </a:fillRef>
+          <a:effectRef idx="2">
+            <a:schemeClr val="accent1"/>
+          </a:effectRef>
+          <a:fontRef idx="minor">
+            <a:schemeClr val="lt1"/>
+          </a:fontRef>
+        </p:style>
+        <p:txBody>
+          <a:bodyPr rtlCol="0" anchor="ctr"/>
+          <a:lstStyle/>
+          <a:p>
+            <a:pPr algn="ctr"/>
+          </a:p>
+        </p:txBody>
+      </p:sp>
+      <p:sp>
+        <p:nvSpPr>
+          <p:cNvPr id="13" name="TextBox 12"/>
+          <p:cNvSpPr txBox="1"/>
+          <p:nvPr/>
+        </p:nvSpPr>
+        <p:spPr>
+          <a:xfrm>
+            <a:off x="777240" y="3831336"/>
+            <a:ext cx="10774375" cy="822959"/>
+          </a:xfrm>
+          <a:prstGeom prst="rect">
+            <a:avLst/>
+          </a:prstGeom>
+          <a:noFill/>
+        </p:spPr>
+        <p:txBody>
+          <a:bodyPr wrap="square">
+            <a:spAutoFit/>
+          </a:bodyPr>
+          <a:lstStyle/>
+          <a:p>
+            <a:r>
+              <a:rPr sz="1200" b="1" i="0">
+                <a:solidFill>
+                  <a:srgbClr val="A02030"/>
+                </a:solidFill>
+                <a:latin typeface="Calibri"/>
+              </a:rPr>
+              <a:t>Atención</a:t>
+            </a:r>
+          </a:p>
+          <a:p>
+            <a:pPr>
+              <a:spcBef>
+                <a:spcPts val="400"/>
+              </a:spcBef>
+            </a:pPr>
+            <a:r>
+              <a:rPr sz="1400" b="0" i="0">
+                <a:solidFill>
+                  <a:srgbClr val="333333"/>
+                </a:solidFill>
+                <a:latin typeface="Calibri"/>
+              </a:rPr>
+              <a:t>Entrega del taller, si el docente lo asigna · en la fecha que indique el docente.</a:t>
+            </a:r>
+          </a:p>
+        </p:txBody>
+      </p:sp>
+      <p:sp>
+        <p:nvSpPr>
+          <p:cNvPr id="14" name="TextBox 13"/>
+          <p:cNvSpPr txBox="1"/>
+          <p:nvPr/>
+        </p:nvSpPr>
+        <p:spPr>
+          <a:xfrm>
+            <a:off x="11185855" y="6473952"/>
+            <a:ext cx="640080" cy="274320"/>
+          </a:xfrm>
+          <a:prstGeom prst="rect">
+            <a:avLst/>
+          </a:prstGeom>
+          <a:noFill/>
+        </p:spPr>
+        <p:txBody>
+          <a:bodyPr wrap="square">
+            <a:spAutoFit/>
+          </a:bodyPr>
+          <a:lstStyle/>
+          <a:p>
+            <a:pPr algn="r"/>
+            <a:r>
+              <a:rPr sz="1100" b="0" i="0">
+                <a:solidFill>
+                  <a:srgbClr val="666666"/>
+                </a:solidFill>
+                <a:latin typeface="Calibri"/>
+              </a:rPr>
+              <a:t>20</a:t>
+            </a:r>
+          </a:p>
+        </p:txBody>
+      </p:sp>
+    </p:spTree>
+  </p:cSld>
+  <p:clrMapOvr>
+    <a:masterClrMapping/>
+  </p:clrMapOvr>
+</p:sld>
+</file>
+
+<file path=ppt/slides/slide21.xml><?xml version="1.0" encoding="utf-8"?>
+<p:sld xmlns:a="http://schemas.openxmlformats.org/drawingml/2006/main" xmlns:p="http://schemas.openxmlformats.org/presentationml/2006/main" xmlns:r="http://schemas.openxmlformats.org/officeDocument/2006/relationships">
+  <p:cSld>
+    <p:bg>
+      <p:bgPr>
+        <a:solidFill>
+          <a:srgbClr val="FFFFFF"/>
+        </a:solidFill>
+        <a:effectLst/>
+      </p:bgPr>
+    </p:bg>
+    <p:spTree>
+      <p:nvGrpSpPr>
+        <p:cNvPr id="1" name=""/>
+        <p:cNvGrpSpPr/>
+        <p:nvPr/>
+      </p:nvGrpSpPr>
+      <p:grpSpPr/>
+      <p:sp>
+        <p:nvSpPr>
+          <p:cNvPr id="2" name="Rectangle 1"/>
+          <p:cNvSpPr/>
+          <p:nvPr/>
+        </p:nvSpPr>
+        <p:spPr>
+          <a:xfrm>
+            <a:off x="0" y="0"/>
+            <a:ext cx="12191695" cy="164592"/>
+          </a:xfrm>
+          <a:prstGeom prst="rect">
+            <a:avLst/>
+          </a:prstGeom>
+          <a:solidFill>
+            <a:srgbClr val="269CCB"/>
+          </a:solidFill>
+          <a:ln>
+            <a:noFill/>
+          </a:ln>
+        </p:spPr>
+        <p:style>
+          <a:lnRef idx="1">
+            <a:schemeClr val="accent1"/>
+          </a:lnRef>
+          <a:fillRef idx="3">
+            <a:schemeClr val="accent1"/>
+          </a:fillRef>
+          <a:effectRef idx="2">
+            <a:schemeClr val="accent1"/>
+          </a:effectRef>
+          <a:fontRef idx="minor">
+            <a:schemeClr val="lt1"/>
+          </a:fontRef>
+        </p:style>
+        <p:txBody>
+          <a:bodyPr rtlCol="0" anchor="ctr"/>
+          <a:lstStyle/>
+          <a:p>
+            <a:pPr algn="ctr"/>
+          </a:p>
+        </p:txBody>
+      </p:sp>
+      <p:pic>
+        <p:nvPicPr>
+          <p:cNvPr id="3" name="Picture 2" descr="logo_uniajc_color.png"/>
+          <p:cNvPicPr>
+            <a:picLocks noChangeAspect="1"/>
+          </p:cNvPicPr>
+          <p:nvPr/>
+        </p:nvPicPr>
+        <p:blipFill>
+          <a:blip r:embed="rId2"/>
+          <a:stretch>
+            <a:fillRect/>
+          </a:stretch>
+        </p:blipFill>
+        <p:spPr>
+          <a:xfrm>
+            <a:off x="10271455" y="5998464"/>
+            <a:ext cx="1463040" cy="643233"/>
+          </a:xfrm>
+          <a:prstGeom prst="rect">
+            <a:avLst/>
+          </a:prstGeom>
+        </p:spPr>
+      </p:pic>
+      <p:sp>
+        <p:nvSpPr>
+          <p:cNvPr id="4" name="TextBox 3"/>
+          <p:cNvSpPr txBox="1"/>
+          <p:nvPr/>
+        </p:nvSpPr>
+        <p:spPr>
+          <a:xfrm>
+            <a:off x="457200" y="1737360"/>
+            <a:ext cx="11277295" cy="1097280"/>
+          </a:xfrm>
+          <a:prstGeom prst="rect">
+            <a:avLst/>
+          </a:prstGeom>
+          <a:noFill/>
+        </p:spPr>
+        <p:txBody>
+          <a:bodyPr wrap="square" anchor="ctr"/>
+          <a:lstStyle/>
+          <a:p>
+            <a:pPr algn="ctr"/>
+            <a:r>
+              <a:rPr sz="3400" b="1" i="0">
+                <a:solidFill>
+                  <a:srgbClr val="095292"/>
+                </a:solidFill>
+                <a:latin typeface="Calibri"/>
+              </a:rPr>
+              <a:t>Clase 3 · VetCare avanza</a:t>
+            </a:r>
+          </a:p>
+        </p:txBody>
+      </p:sp>
+      <p:sp>
+        <p:nvSpPr>
+          <p:cNvPr id="5" name="TextBox 4"/>
+          <p:cNvSpPr txBox="1"/>
+          <p:nvPr/>
+        </p:nvSpPr>
+        <p:spPr>
+          <a:xfrm>
+            <a:off x="457200" y="3017520"/>
+            <a:ext cx="11277295" cy="1645920"/>
+          </a:xfrm>
+          <a:prstGeom prst="rect">
+            <a:avLst/>
+          </a:prstGeom>
+          <a:noFill/>
+        </p:spPr>
+        <p:txBody>
+          <a:bodyPr wrap="square">
+            <a:spAutoFit/>
+          </a:bodyPr>
+          <a:lstStyle/>
+          <a:p>
+            <a:pPr algn="ctr">
+              <a:spcAft>
+                <a:spcPts val="600"/>
+              </a:spcAft>
+            </a:pPr>
+            <a:r>
+              <a:rPr sz="1600" b="0" i="0">
+                <a:solidFill>
+                  <a:srgbClr val="333333"/>
+                </a:solidFill>
+                <a:latin typeface="Calibri"/>
+              </a:rPr>
+              <a:t>Queda listo el indice del documento formal de diseño de VetCare y la matriz en V que amarra cada requisito con la prueba que lo va a verificar.</a:t>
+            </a:r>
+          </a:p>
+          <a:p>
+            <a:pPr algn="ctr">
+              <a:spcAft>
+                <a:spcPts val="600"/>
+              </a:spcAft>
+            </a:pPr>
+            <a:r>
+              <a:rPr sz="1600" b="0" i="0">
+                <a:solidFill>
+                  <a:srgbClr val="333333"/>
+                </a:solidFill>
+                <a:latin typeface="Calibri"/>
+              </a:rPr>
+              <a:t>Entregable: Un documento en Google Docs con el indice del ERS de VetCare, cuatro requisitos escritos en formato de ficha con version y linea base, la matriz en V (requisito - nivel de prueba - criterio de aceptacion) y un formato de solicitud de cambio diligenciado; mas el diagrama en V dibujado en draw.io y subido a la plataforma del curso.</a:t>
+            </a:r>
+          </a:p>
+          <a:p>
+            <a:pPr algn="ctr">
+              <a:spcAft>
+                <a:spcPts val="600"/>
+              </a:spcAft>
+            </a:pPr>
+            <a:r>
+              <a:rPr sz="1600" b="0" i="0">
+                <a:solidFill>
+                  <a:srgbClr val="333333"/>
+                </a:solidFill>
+                <a:latin typeface="Calibri"/>
+              </a:rPr>
+              <a:t>Siguiente clase: continuamos el hilo del PI</a:t>
+            </a:r>
+          </a:p>
+        </p:txBody>
+      </p:sp>
+      <p:sp>
+        <p:nvSpPr>
+          <p:cNvPr id="6" name="TextBox 5"/>
+          <p:cNvSpPr txBox="1"/>
+          <p:nvPr/>
+        </p:nvSpPr>
+        <p:spPr>
+          <a:xfrm>
+            <a:off x="457200" y="4754880"/>
+            <a:ext cx="11277295" cy="640080"/>
+          </a:xfrm>
+          <a:prstGeom prst="rect">
+            <a:avLst/>
+          </a:prstGeom>
+          <a:noFill/>
+        </p:spPr>
+        <p:txBody>
+          <a:bodyPr wrap="square">
+            <a:spAutoFit/>
+          </a:bodyPr>
+          <a:lstStyle/>
+          <a:p>
+            <a:pPr algn="ctr"/>
+            <a:r>
+              <a:rPr sz="2000" b="1" i="0">
+                <a:solidFill>
+                  <a:srgbClr val="269CCB"/>
+                </a:solidFill>
+                <a:latin typeface="Calibri"/>
+              </a:rPr>
+              <a:t>Teoria al servicio del proyecto</a:t>
+            </a:r>
+          </a:p>
+        </p:txBody>
+      </p:sp>
+    </p:spTree>
+  </p:cSld>
+  <p:clrMapOvr>
+    <a:masterClrMapping/>
+  </p:clrMapOvr>
+</p:sld>
+</file>
+
 <file path=ppt/slides/slide3.xml><?xml version="1.0" encoding="utf-8"?>
 <p:sld xmlns:a="http://schemas.openxmlformats.org/drawingml/2006/main" xmlns:p="http://schemas.openxmlformats.org/presentationml/2006/main" xmlns:r="http://schemas.openxmlformats.org/officeDocument/2006/relationships">
   <p:cSld>
@@ -7669,7 +11040,7 @@
                 </a:solidFill>
                 <a:latin typeface="Calibri"/>
               </a:rPr>
-              <a:t>Teoria Core</a:t>
+              <a:t>El modelo en cascada es el recorrido lineal llevado a su version... (1/2)</a:t>
             </a:r>
           </a:p>
         </p:txBody>
@@ -7708,7 +11079,7 @@
                 </a:solidFill>
                 <a:latin typeface="Calibri"/>
               </a:rPr>
-              <a:t>–   El modelo en cascada es el recorrido lineal llevado a su version formal: las fases van una detras de otra y cada…</a:t>
+              <a:t>–   El modelo en cascada es el recorrido lineal llevado a su version formal: las fases van una detras de otra y cada una termina con un documento que alguien firma.</a:t>
             </a:r>
           </a:p>
           <a:p>
@@ -7724,7 +11095,7 @@
                 </a:solidFill>
                 <a:latin typeface="Calibri"/>
               </a:rPr>
-              <a:t>–   El modelo en V toma la cascada y la dobla en forma de letra V para dejar visible algo que la cascada esconde: cada…</a:t>
+              <a:t>–   Ese documento es la puerta de entrada a la siguiente fase; si no esta aprobado, no se avanza.</a:t>
             </a:r>
           </a:p>
           <a:p>
@@ -7740,7 +11111,7 @@
                 </a:solidFill>
                 <a:latin typeface="Calibri"/>
               </a:rPr>
-              <a:t>–   Cuando SI tienen sentido estos modelos? Cuando los requisitos son estables y se conocen desde el principio, cuando…</a:t>
+              <a:t>–   Cuando el documento de requisitos se aprueba, se convierte en linea base, es decir, la version oficial contra la cual se va a medir todo lo demas.</a:t>
             </a:r>
           </a:p>
           <a:p>
@@ -7756,23 +11127,7 @@
                 </a:solidFill>
                 <a:latin typeface="Calibri"/>
               </a:rPr>
-              <a:t>–   Cuando NO tienen sentido? Cuando el cliente no sabe lo que quiere hasta que lo ve, cuando el dominio es nuevo para…</a:t>
-            </a:r>
-          </a:p>
-          <a:p>
-            <a:pPr>
-              <a:spcAft>
-                <a:spcPts val="800"/>
-              </a:spcAft>
-            </a:pPr>
-            <a:r>
-              <a:rPr sz="2000" b="0" i="0">
-                <a:solidFill>
-                  <a:srgbClr val="333333"/>
-                </a:solidFill>
-                <a:latin typeface="Calibri"/>
-              </a:rPr>
-              <a:t>–   En el mundo tradicional la documentacion no acompaña al producto: en buena parte ES el producto contratado</a:t>
+              <a:t>–   La idea de fondo es sencilla y muy usada en ingenieria civil: corregir un plano cuesta una borrada, corregir un muro construido cuesta demoler.</a:t>
             </a:r>
           </a:p>
         </p:txBody>
@@ -7953,141 +11308,21 @@
                 </a:solidFill>
                 <a:latin typeface="Calibri"/>
               </a:rPr>
-              <a:t>Ficha formal de requisito de VetCare (asi se ve un requisito con linea base)</a:t>
-            </a:r>
-          </a:p>
-        </p:txBody>
-      </p:sp>
-      <p:sp>
-        <p:nvSpPr>
-          <p:cNvPr id="5" name="Rounded Rectangle 4"/>
-          <p:cNvSpPr/>
-          <p:nvPr/>
-        </p:nvSpPr>
-        <p:spPr>
-          <a:xfrm>
-            <a:off x="457200" y="1261872"/>
-            <a:ext cx="11277295" cy="4773168"/>
-          </a:xfrm>
-          <a:prstGeom prst="roundRect">
-            <a:avLst>
-              <a:gd name="adj" fmla="val 12000"/>
-            </a:avLst>
-          </a:prstGeom>
-          <a:solidFill>
-            <a:srgbClr val="1E2A38"/>
-          </a:solidFill>
-          <a:ln>
-            <a:noFill/>
-          </a:ln>
-        </p:spPr>
-        <p:style>
-          <a:lnRef idx="1">
-            <a:schemeClr val="accent1"/>
-          </a:lnRef>
-          <a:fillRef idx="3">
-            <a:schemeClr val="accent1"/>
-          </a:fillRef>
-          <a:effectRef idx="2">
-            <a:schemeClr val="accent1"/>
-          </a:effectRef>
-          <a:fontRef idx="minor">
-            <a:schemeClr val="lt1"/>
-          </a:fontRef>
-        </p:style>
-        <p:txBody>
-          <a:bodyPr rtlCol="0" anchor="ctr"/>
-          <a:lstStyle/>
-          <a:p>
-            <a:pPr algn="ctr"/>
-          </a:p>
-        </p:txBody>
-      </p:sp>
-      <p:sp>
-        <p:nvSpPr>
-          <p:cNvPr id="6" name="Rectangle 5"/>
-          <p:cNvSpPr/>
-          <p:nvPr/>
-        </p:nvSpPr>
-        <p:spPr>
-          <a:xfrm>
-            <a:off x="457200" y="1261872"/>
-            <a:ext cx="11277295" cy="320040"/>
-          </a:xfrm>
-          <a:prstGeom prst="rect">
-            <a:avLst/>
-          </a:prstGeom>
-          <a:solidFill>
-            <a:srgbClr val="095292"/>
-          </a:solidFill>
-          <a:ln>
-            <a:noFill/>
-          </a:ln>
-        </p:spPr>
-        <p:style>
-          <a:lnRef idx="1">
-            <a:schemeClr val="accent1"/>
-          </a:lnRef>
-          <a:fillRef idx="3">
-            <a:schemeClr val="accent1"/>
-          </a:fillRef>
-          <a:effectRef idx="2">
-            <a:schemeClr val="accent1"/>
-          </a:effectRef>
-          <a:fontRef idx="minor">
-            <a:schemeClr val="lt1"/>
-          </a:fontRef>
-        </p:style>
-        <p:txBody>
-          <a:bodyPr rtlCol="0" anchor="ctr"/>
-          <a:lstStyle/>
-          <a:p>
-            <a:pPr algn="ctr"/>
-          </a:p>
-        </p:txBody>
-      </p:sp>
-      <p:sp>
-        <p:nvSpPr>
-          <p:cNvPr id="7" name="TextBox 6"/>
+              <a:t>El modelo en cascada es el recorrido lineal llevado a su version... (2/2)</a:t>
+            </a:r>
+          </a:p>
+        </p:txBody>
+      </p:sp>
+      <p:sp>
+        <p:nvSpPr>
+          <p:cNvPr id="5" name="TextBox 4"/>
           <p:cNvSpPr txBox="1"/>
           <p:nvPr/>
         </p:nvSpPr>
         <p:spPr>
           <a:xfrm>
-            <a:off x="685800" y="1307592"/>
-            <a:ext cx="10820095" cy="256032"/>
-          </a:xfrm>
-          <a:prstGeom prst="rect">
-            <a:avLst/>
-          </a:prstGeom>
-          <a:noFill/>
-        </p:spPr>
-        <p:txBody>
-          <a:bodyPr wrap="square" anchor="ctr"/>
-          <a:lstStyle/>
-          <a:p>
-            <a:r>
-              <a:rPr sz="1000" b="1" i="0">
-                <a:solidFill>
-                  <a:srgbClr val="269CCB"/>
-                </a:solidFill>
-                <a:latin typeface="Calibri"/>
-              </a:rPr>
-              <a:t>● ● ●</a:t>
-            </a:r>
-          </a:p>
-        </p:txBody>
-      </p:sp>
-      <p:sp>
-        <p:nvSpPr>
-          <p:cNvPr id="8" name="TextBox 7"/>
-          <p:cNvSpPr txBox="1"/>
-          <p:nvPr/>
-        </p:nvSpPr>
-        <p:spPr>
-          <a:xfrm>
-            <a:off x="777240" y="1719072"/>
-            <a:ext cx="10637215" cy="4133087"/>
+            <a:off x="457200" y="1170432"/>
+            <a:ext cx="11277295" cy="5230368"/>
           </a:xfrm>
           <a:prstGeom prst="rect">
             <a:avLst/>
@@ -8102,267 +11337,40 @@
           <a:p>
             <a:pPr>
               <a:spcAft>
-                <a:spcPts val="400"/>
+                <a:spcPts val="800"/>
               </a:spcAft>
             </a:pPr>
             <a:r>
-              <a:rPr sz="1400" b="0" i="0">
-                <a:solidFill>
-                  <a:srgbClr val="FFFFFF"/>
-                </a:solidFill>
-                <a:latin typeface="Calibri"/>
-              </a:rPr>
-              <a:t>ID: RF-03            Version: 1.2      Estado: Aprobado (linea base 27/08)</a:t>
+              <a:rPr sz="2000" b="0" i="0">
+                <a:solidFill>
+                  <a:srgbClr val="333333"/>
+                </a:solidFill>
+                <a:latin typeface="Calibri"/>
+              </a:rPr>
+              <a:t>–   Trasladado a VetCare: si Huellitas aprueba que la busqueda se hace por nombre de la mascota y por documento del propietario, ese acuerdo queda escrito, fechado y versionado</a:t>
             </a:r>
           </a:p>
           <a:p>
             <a:pPr>
               <a:spcAft>
-                <a:spcPts val="400"/>
+                <a:spcPts val="800"/>
               </a:spcAft>
             </a:pPr>
             <a:r>
-              <a:rPr sz="1400" b="0" i="0">
-                <a:solidFill>
-                  <a:srgbClr val="FFFFFF"/>
-                </a:solidFill>
-                <a:latin typeface="Calibri"/>
-              </a:rPr>
-              <a:t>Nombre: Buscar la historia clinica de un paciente</a:t>
-            </a:r>
-          </a:p>
-          <a:p>
-            <a:pPr>
-              <a:spcAft>
-                <a:spcPts val="400"/>
-              </a:spcAft>
-            </a:pPr>
-            <a:r>
-              <a:rPr sz="1400" b="0" i="0">
-                <a:solidFill>
-                  <a:srgbClr val="FFFFFF"/>
-                </a:solidFill>
-                <a:latin typeface="Calibri"/>
-              </a:rPr>
-              <a:t>Fuente: Dra. Marcela Rios, medica veterinaria de Huellitas</a:t>
-            </a:r>
-          </a:p>
-          <a:p>
-            <a:pPr>
-              <a:spcAft>
-                <a:spcPts val="400"/>
-              </a:spcAft>
-            </a:pPr>
-            <a:r>
-              <a:rPr sz="1400" b="0" i="0">
-                <a:solidFill>
-                  <a:srgbClr val="FFFFFF"/>
-                </a:solidFill>
-                <a:latin typeface="Calibri"/>
-              </a:rPr>
-              <a:t>Prioridad: Alta      Estabilidad: Alta      Modulo: Historia clinica</a:t>
-            </a:r>
-          </a:p>
-          <a:p>
-            <a:pPr>
-              <a:spcAft>
-                <a:spcPts val="400"/>
-              </a:spcAft>
-            </a:pPr>
-            <a:r>
-              <a:rPr sz="1400" b="0" i="0">
-                <a:solidFill>
-                  <a:srgbClr val="FFFFFF"/>
-                </a:solidFill>
-                <a:latin typeface="Calibri"/>
-              </a:rPr>
-              <a:t>Descripcion: El sistema debe permitir buscar la historia clinica de un</a:t>
-            </a:r>
-          </a:p>
-          <a:p>
-            <a:pPr>
-              <a:spcAft>
-                <a:spcPts val="400"/>
-              </a:spcAft>
-            </a:pPr>
-            <a:r>
-              <a:rPr sz="1400" b="0" i="0">
-                <a:solidFill>
-                  <a:srgbClr val="FFFFFF"/>
-                </a:solidFill>
-                <a:latin typeface="Calibri"/>
-              </a:rPr>
-              <a:t>  paciente por nombre de la mascota, por documento del propietario o por</a:t>
-            </a:r>
-          </a:p>
-          <a:p>
-            <a:pPr>
-              <a:spcAft>
-                <a:spcPts val="400"/>
-              </a:spcAft>
-            </a:pPr>
-            <a:r>
-              <a:rPr sz="1400" b="0" i="0">
-                <a:solidFill>
-                  <a:srgbClr val="FFFFFF"/>
-                </a:solidFill>
-                <a:latin typeface="Calibri"/>
-              </a:rPr>
-              <a:t>  codigo de ficha, mostrando las ultimas tres consultas registradas.</a:t>
-            </a:r>
-          </a:p>
-          <a:p>
-            <a:pPr>
-              <a:spcAft>
-                <a:spcPts val="400"/>
-              </a:spcAft>
-            </a:pPr>
-            <a:r>
-              <a:rPr sz="1400" b="0" i="0">
-                <a:solidFill>
-                  <a:srgbClr val="FFFFFF"/>
-                </a:solidFill>
-                <a:latin typeface="Calibri"/>
-              </a:rPr>
-              <a:t>Precondicion: el paciente esta registrado y el usuario tiene rol Veterinario.</a:t>
-            </a:r>
-          </a:p>
-          <a:p>
-            <a:pPr>
-              <a:spcAft>
-                <a:spcPts val="400"/>
-              </a:spcAft>
-            </a:pPr>
-            <a:r>
-              <a:rPr sz="1400" b="0" i="0">
-                <a:solidFill>
-                  <a:srgbClr val="FFFFFF"/>
-                </a:solidFill>
-                <a:latin typeface="Calibri"/>
-              </a:rPr>
-              <a:t>Criterio de aceptacion: con 5.000 fichas cargadas el resultado se muestra</a:t>
-            </a:r>
-          </a:p>
-          <a:p>
-            <a:pPr>
-              <a:spcAft>
-                <a:spcPts val="400"/>
-              </a:spcAft>
-            </a:pPr>
-            <a:r>
-              <a:rPr sz="1400" b="0" i="0">
-                <a:solidFill>
-                  <a:srgbClr val="FFFFFF"/>
-                </a:solidFill>
-                <a:latin typeface="Calibri"/>
-              </a:rPr>
-              <a:t>  en menos de 3 segundos y en maximo 3 clics desde el tablero principal.</a:t>
-            </a:r>
-          </a:p>
-          <a:p>
-            <a:pPr>
-              <a:spcAft>
-                <a:spcPts val="400"/>
-              </a:spcAft>
-            </a:pPr>
-            <a:r>
-              <a:rPr sz="1400" b="0" i="0">
-                <a:solidFill>
-                  <a:srgbClr val="FFFFFF"/>
-                </a:solidFill>
-                <a:latin typeface="Calibri"/>
-              </a:rPr>
-              <a:t>Depende de: RF-01 (registrar paciente), RNF-02 (tiempo de respuesta)</a:t>
-            </a:r>
-          </a:p>
-          <a:p>
-            <a:pPr>
-              <a:spcAft>
-                <a:spcPts val="400"/>
-              </a:spcAft>
-            </a:pPr>
-            <a:r>
-              <a:rPr sz="1400" b="0" i="0">
-                <a:solidFill>
-                  <a:srgbClr val="FFFFFF"/>
-                </a:solidFill>
-                <a:latin typeface="Calibri"/>
-              </a:rPr>
-              <a:t>Verificado por: CP-ACEP-07 (prueba de aceptacion)</a:t>
-            </a:r>
-          </a:p>
-          <a:p>
-            <a:pPr>
-              <a:spcAft>
-                <a:spcPts val="400"/>
-              </a:spcAft>
-            </a:pPr>
-            <a:r>
-              <a:rPr sz="1400" b="0" i="0">
-                <a:solidFill>
-                  <a:srgbClr val="FFFFFF"/>
-                </a:solidFill>
-                <a:latin typeface="Calibri"/>
-              </a:rPr>
-              <a:t>Historial: v1.1 se agrega busqueda por documento (SC-002)</a:t>
-            </a:r>
-          </a:p>
-          <a:p>
-            <a:pPr>
-              <a:spcAft>
-                <a:spcPts val="400"/>
-              </a:spcAft>
-            </a:pPr>
-            <a:r>
-              <a:rPr sz="1400" b="0" i="0">
-                <a:solidFill>
-                  <a:srgbClr val="FFFFFF"/>
-                </a:solidFill>
-                <a:latin typeface="Calibri"/>
-              </a:rPr>
-              <a:t>           v1.2 se agrega busqueda por microchip (SC-004, aprobada)</a:t>
-            </a:r>
-          </a:p>
-        </p:txBody>
-      </p:sp>
-      <p:sp>
-        <p:nvSpPr>
-          <p:cNvPr id="9" name="TextBox 8"/>
-          <p:cNvSpPr txBox="1"/>
-          <p:nvPr/>
-        </p:nvSpPr>
-        <p:spPr>
-          <a:xfrm>
-            <a:off x="457200" y="6080760"/>
-            <a:ext cx="11277295" cy="320040"/>
-          </a:xfrm>
-          <a:prstGeom prst="rect">
-            <a:avLst/>
-          </a:prstGeom>
-          <a:noFill/>
-        </p:spPr>
-        <p:txBody>
-          <a:bodyPr wrap="square">
-            <a:spAutoFit/>
-          </a:bodyPr>
-          <a:lstStyle/>
-          <a:p>
-            <a:pPr algn="ctr"/>
-            <a:r>
-              <a:rPr sz="1200" b="0" i="1">
-                <a:solidFill>
-                  <a:srgbClr val="666666"/>
-                </a:solidFill>
-                <a:latin typeface="Calibri"/>
-              </a:rPr>
-              <a:t>En el enfoque tradicional un requisito no es una frase suelta: es una ficha con ID, version, criterio medible y la prueba que lo verifica.</a:t>
-            </a:r>
-          </a:p>
-        </p:txBody>
-      </p:sp>
-      <p:sp>
-        <p:nvSpPr>
-          <p:cNvPr id="10" name="TextBox 9"/>
+              <a:rPr sz="2000" b="0" i="0">
+                <a:solidFill>
+                  <a:srgbClr val="333333"/>
+                </a:solidFill>
+                <a:latin typeface="Calibri"/>
+              </a:rPr>
+              <a:t>–   Y a partir de ahi el equipo diseña con la tranquilidad de que el piso no se le va a mover.</a:t>
+            </a:r>
+          </a:p>
+        </p:txBody>
+      </p:sp>
+      <p:sp>
+        <p:nvSpPr>
+          <p:cNvPr id="6" name="TextBox 5"/>
           <p:cNvSpPr txBox="1"/>
           <p:nvPr/>
         </p:nvSpPr>
@@ -8536,7 +11544,7 @@
                 </a:solidFill>
                 <a:latin typeface="Calibri"/>
               </a:rPr>
-              <a:t>Demo del dia</a:t>
+              <a:t>El modelo en V toma la cascada y la dobla en forma de letra V para...</a:t>
             </a:r>
           </a:p>
         </p:txBody>
@@ -8575,25 +11583,7 @@
                 </a:solidFill>
                 <a:latin typeface="Calibri"/>
               </a:rPr>
-              <a:t>–   </a:t>
-            </a:r>
-            <a:r>
-              <a:rPr sz="2000" b="1" i="0">
-                <a:solidFill>
-                  <a:srgbClr val="333333"/>
-                </a:solidFill>
-                <a:latin typeface="Calibri"/>
-              </a:rPr>
-              <a:t>Herramienta:</a:t>
-            </a:r>
-            <a:r>
-              <a:rPr sz="2000" b="0" i="0">
-                <a:solidFill>
-                  <a:srgbClr val="333333"/>
-                </a:solidFill>
-                <a:latin typeface="Calibri"/>
-              </a:rPr>
-              <a:t> draw.io · Google Docs</a:t>
+              <a:t>–   El modelo en V toma la cascada y la dobla en forma de letra V para dejar visible algo que la cascada esconde: cada fase de la izquierda tiene su prueba correspondiente a la derecha.</a:t>
             </a:r>
           </a:p>
           <a:p>
@@ -8609,25 +11599,7 @@
                 </a:solidFill>
                 <a:latin typeface="Calibri"/>
               </a:rPr>
-              <a:t>–   </a:t>
-            </a:r>
-            <a:r>
-              <a:rPr sz="2000" b="1" i="0">
-                <a:solidFill>
-                  <a:srgbClr val="333333"/>
-                </a:solidFill>
-                <a:latin typeface="Calibri"/>
-              </a:rPr>
-              <a:t>Demo:</a:t>
-            </a:r>
-            <a:r>
-              <a:rPr sz="2000" b="0" i="0">
-                <a:solidFill>
-                  <a:srgbClr val="333333"/>
-                </a:solidFill>
-                <a:latin typeface="Calibri"/>
-              </a:rPr>
-              <a:t> El docente dibuja en draw.io el modelo en V de VetCare y traza en vivo la linea punteada que conecta el requisito RF-03 'buscar historial' con su prueba de aceptacion CP-ACEP-07.</a:t>
+              <a:t>–   La consecuencia practica es enorme: la prueba se diseña al mismo tiempo que el requisito, no al final.</a:t>
             </a:r>
           </a:p>
           <a:p>
@@ -8643,7 +11615,39 @@
                 </a:solidFill>
                 <a:latin typeface="Calibri"/>
               </a:rPr>
-              <a:t>–   Mismo dominio VetCare — no otro ejemplo. Aqui se diseña, no se programa.</a:t>
+              <a:t>–   En VetCare, cuando se escribe el requisito RF-03 'la veterinaria busca la historia clinica por nombre o por documento'</a:t>
+            </a:r>
+          </a:p>
+          <a:p>
+            <a:pPr>
+              <a:spcAft>
+                <a:spcPts val="800"/>
+              </a:spcAft>
+            </a:pPr>
+            <a:r>
+              <a:rPr sz="2000" b="0" i="0">
+                <a:solidFill>
+                  <a:srgbClr val="333333"/>
+                </a:solidFill>
+                <a:latin typeface="Calibri"/>
+              </a:rPr>
+              <a:t>–   En ese mismo momento se escribe el caso de prueba CP-ACEP-07: con 5.000 fichas cargadas, escribir Rocky y obtener la ficha en menos de tres segundos y en maximo tres clics.</a:t>
+            </a:r>
+          </a:p>
+          <a:p>
+            <a:pPr>
+              <a:spcAft>
+                <a:spcPts val="800"/>
+              </a:spcAft>
+            </a:pPr>
+            <a:r>
+              <a:rPr sz="2000" b="0" i="0">
+                <a:solidFill>
+                  <a:srgbClr val="333333"/>
+                </a:solidFill>
+                <a:latin typeface="Calibri"/>
+              </a:rPr>
+              <a:t>–   Aqui aparecen dos palabras que hay que distinguir: verificar es preguntarse si construimos el sistema correctamente segun el documento; validar es preguntarse si construimos el sistema correcto para la clinica.</a:t>
             </a:r>
           </a:p>
         </p:txBody>
@@ -8718,7 +11722,7 @@
         <p:spPr>
           <a:xfrm>
             <a:off x="0" y="0"/>
-            <a:ext cx="12191695" cy="1170432"/>
+            <a:ext cx="12191695" cy="960120"/>
           </a:xfrm>
           <a:prstGeom prst="rect">
             <a:avLst/>
@@ -8760,7 +11764,7 @@
         </p:nvSpPr>
         <p:spPr>
           <a:xfrm>
-            <a:off x="0" y="1170432"/>
+            <a:off x="0" y="960120"/>
             <a:ext cx="12191695" cy="41148"/>
           </a:xfrm>
           <a:prstGeom prst="rect">
@@ -8804,7 +11808,7 @@
         <p:spPr>
           <a:xfrm>
             <a:off x="457200" y="164592"/>
-            <a:ext cx="11277295" cy="384048"/>
+            <a:ext cx="11277295" cy="502920"/>
           </a:xfrm>
           <a:prstGeom prst="rect">
             <a:avLst/>
@@ -8824,7 +11828,7 @@
                 </a:solidFill>
                 <a:latin typeface="Calibri"/>
               </a:rPr>
-              <a:t>Herramientas de hoy</a:t>
+              <a:t>Cuando SI tienen sentido estos modelos?</a:t>
             </a:r>
           </a:p>
         </p:txBody>
@@ -8837,8 +11841,8 @@
         </p:nvSpPr>
         <p:spPr>
           <a:xfrm>
-            <a:off x="457200" y="566928"/>
-            <a:ext cx="11277295" cy="411480"/>
+            <a:off x="457200" y="1170432"/>
+            <a:ext cx="11277295" cy="5230368"/>
           </a:xfrm>
           <a:prstGeom prst="rect">
             <a:avLst/>
@@ -8851,633 +11855,74 @@
           </a:bodyPr>
           <a:lstStyle/>
           <a:p>
-            <a:r>
-              <a:rPr sz="1400" b="0" i="0">
-                <a:solidFill>
-                  <a:srgbClr val="B8D8EE"/>
-                </a:solidFill>
-                <a:latin typeface="Calibri"/>
-              </a:rPr>
-              <a:t>Gratis · funcionan en el navegador</a:t>
-            </a:r>
-          </a:p>
-        </p:txBody>
-      </p:sp>
-      <p:sp>
-        <p:nvSpPr>
-          <p:cNvPr id="6" name="Rounded Rectangle 5"/>
-          <p:cNvSpPr/>
-          <p:nvPr/>
-        </p:nvSpPr>
-        <p:spPr>
-          <a:xfrm>
-            <a:off x="457200" y="1591056"/>
-            <a:ext cx="3624986" cy="2331720"/>
-          </a:xfrm>
-          <a:prstGeom prst="roundRect">
-            <a:avLst>
-              <a:gd name="adj" fmla="val 12000"/>
-            </a:avLst>
-          </a:prstGeom>
-          <a:solidFill>
-            <a:srgbClr val="F2F2F2"/>
-          </a:solidFill>
-          <a:ln>
-            <a:noFill/>
-          </a:ln>
-        </p:spPr>
-        <p:style>
-          <a:lnRef idx="1">
-            <a:schemeClr val="accent1"/>
-          </a:lnRef>
-          <a:fillRef idx="3">
-            <a:schemeClr val="accent1"/>
-          </a:fillRef>
-          <a:effectRef idx="2">
-            <a:schemeClr val="accent1"/>
-          </a:effectRef>
-          <a:fontRef idx="minor">
-            <a:schemeClr val="lt1"/>
-          </a:fontRef>
-        </p:style>
-        <p:txBody>
-          <a:bodyPr rtlCol="0" anchor="ctr"/>
-          <a:lstStyle/>
-          <a:p>
-            <a:pPr algn="ctr"/>
-          </a:p>
-        </p:txBody>
-      </p:sp>
-      <p:sp>
-        <p:nvSpPr>
-          <p:cNvPr id="7" name="Rectangle 6"/>
-          <p:cNvSpPr/>
-          <p:nvPr/>
-        </p:nvSpPr>
-        <p:spPr>
-          <a:xfrm>
-            <a:off x="457200" y="1591056"/>
-            <a:ext cx="3624986" cy="64008"/>
-          </a:xfrm>
-          <a:prstGeom prst="rect">
-            <a:avLst/>
-          </a:prstGeom>
-          <a:solidFill>
-            <a:srgbClr val="095292"/>
-          </a:solidFill>
-          <a:ln>
-            <a:noFill/>
-          </a:ln>
-        </p:spPr>
-        <p:style>
-          <a:lnRef idx="1">
-            <a:schemeClr val="accent1"/>
-          </a:lnRef>
-          <a:fillRef idx="3">
-            <a:schemeClr val="accent1"/>
-          </a:fillRef>
-          <a:effectRef idx="2">
-            <a:schemeClr val="accent1"/>
-          </a:effectRef>
-          <a:fontRef idx="minor">
-            <a:schemeClr val="lt1"/>
-          </a:fontRef>
-        </p:style>
-        <p:txBody>
-          <a:bodyPr rtlCol="0" anchor="ctr"/>
-          <a:lstStyle/>
-          <a:p>
-            <a:pPr algn="ctr"/>
-          </a:p>
-        </p:txBody>
-      </p:sp>
-      <p:sp>
-        <p:nvSpPr>
-          <p:cNvPr id="8" name="Rectangle 7"/>
-          <p:cNvSpPr/>
-          <p:nvPr/>
-        </p:nvSpPr>
-        <p:spPr>
-          <a:xfrm>
-            <a:off x="457200" y="1655064"/>
-            <a:ext cx="3624986" cy="27432"/>
-          </a:xfrm>
-          <a:prstGeom prst="rect">
-            <a:avLst/>
-          </a:prstGeom>
-          <a:solidFill>
-            <a:srgbClr val="FFD000"/>
-          </a:solidFill>
-          <a:ln>
-            <a:noFill/>
-          </a:ln>
-        </p:spPr>
-        <p:style>
-          <a:lnRef idx="1">
-            <a:schemeClr val="accent1"/>
-          </a:lnRef>
-          <a:fillRef idx="3">
-            <a:schemeClr val="accent1"/>
-          </a:fillRef>
-          <a:effectRef idx="2">
-            <a:schemeClr val="accent1"/>
-          </a:effectRef>
-          <a:fontRef idx="minor">
-            <a:schemeClr val="lt1"/>
-          </a:fontRef>
-        </p:style>
-        <p:txBody>
-          <a:bodyPr rtlCol="0" anchor="ctr"/>
-          <a:lstStyle/>
-          <a:p>
-            <a:pPr algn="ctr"/>
-          </a:p>
-        </p:txBody>
-      </p:sp>
-      <p:pic>
-        <p:nvPicPr>
-          <p:cNvPr id="9" name="Picture 8" descr="drawio.png"/>
-          <p:cNvPicPr>
-            <a:picLocks noChangeAspect="1"/>
-          </p:cNvPicPr>
-          <p:nvPr/>
-        </p:nvPicPr>
-        <p:blipFill>
-          <a:blip r:embed="rId2"/>
-          <a:stretch>
-            <a:fillRect/>
-          </a:stretch>
-        </p:blipFill>
-        <p:spPr>
-          <a:xfrm>
-            <a:off x="1643329" y="1847087"/>
-            <a:ext cx="1252728" cy="1252728"/>
-          </a:xfrm>
-          <a:prstGeom prst="rect">
-            <a:avLst/>
-          </a:prstGeom>
-        </p:spPr>
-      </p:pic>
-      <p:sp>
-        <p:nvSpPr>
-          <p:cNvPr id="10" name="TextBox 9"/>
-          <p:cNvSpPr txBox="1"/>
-          <p:nvPr/>
-        </p:nvSpPr>
-        <p:spPr>
-          <a:xfrm>
-            <a:off x="530352" y="3191256"/>
-            <a:ext cx="3478682" cy="621792"/>
-          </a:xfrm>
-          <a:prstGeom prst="rect">
-            <a:avLst/>
-          </a:prstGeom>
-          <a:noFill/>
-        </p:spPr>
-        <p:txBody>
-          <a:bodyPr wrap="square" anchor="t"/>
-          <a:lstStyle/>
-          <a:p>
-            <a:pPr algn="ctr"/>
-            <a:r>
-              <a:rPr sz="1300" b="1" i="0">
-                <a:solidFill>
-                  <a:srgbClr val="095292"/>
-                </a:solidFill>
-                <a:latin typeface="Calibri"/>
-              </a:rPr>
-              <a:t>Draw.Io</a:t>
-            </a:r>
-          </a:p>
-          <a:p>
-            <a:pPr algn="ctr">
-              <a:spcBef>
-                <a:spcPts val="200"/>
-              </a:spcBef>
+            <a:pPr>
+              <a:spcAft>
+                <a:spcPts val="800"/>
+              </a:spcAft>
             </a:pPr>
             <a:r>
-              <a:rPr sz="1000" b="0" i="0">
-                <a:solidFill>
-                  <a:srgbClr val="666666"/>
-                </a:solidFill>
-                <a:latin typeface="Calibri"/>
-              </a:rPr>
-              <a:t>Diagramas UML y de contexto</a:t>
-            </a:r>
-          </a:p>
-        </p:txBody>
-      </p:sp>
-      <p:sp>
-        <p:nvSpPr>
-          <p:cNvPr id="11" name="Rounded Rectangle 10"/>
-          <p:cNvSpPr/>
-          <p:nvPr/>
-        </p:nvSpPr>
-        <p:spPr>
-          <a:xfrm>
-            <a:off x="4283354" y="1591056"/>
-            <a:ext cx="3624986" cy="2331720"/>
-          </a:xfrm>
-          <a:prstGeom prst="roundRect">
-            <a:avLst>
-              <a:gd name="adj" fmla="val 12000"/>
-            </a:avLst>
-          </a:prstGeom>
-          <a:solidFill>
-            <a:srgbClr val="F2F2F2"/>
-          </a:solidFill>
-          <a:ln>
-            <a:noFill/>
-          </a:ln>
-        </p:spPr>
-        <p:style>
-          <a:lnRef idx="1">
-            <a:schemeClr val="accent1"/>
-          </a:lnRef>
-          <a:fillRef idx="3">
-            <a:schemeClr val="accent1"/>
-          </a:fillRef>
-          <a:effectRef idx="2">
-            <a:schemeClr val="accent1"/>
-          </a:effectRef>
-          <a:fontRef idx="minor">
-            <a:schemeClr val="lt1"/>
-          </a:fontRef>
-        </p:style>
-        <p:txBody>
-          <a:bodyPr rtlCol="0" anchor="ctr"/>
-          <a:lstStyle/>
-          <a:p>
-            <a:pPr algn="ctr"/>
-          </a:p>
-        </p:txBody>
-      </p:sp>
-      <p:sp>
-        <p:nvSpPr>
-          <p:cNvPr id="12" name="Rectangle 11"/>
-          <p:cNvSpPr/>
-          <p:nvPr/>
-        </p:nvSpPr>
-        <p:spPr>
-          <a:xfrm>
-            <a:off x="4283354" y="1591056"/>
-            <a:ext cx="3624986" cy="64008"/>
-          </a:xfrm>
-          <a:prstGeom prst="rect">
-            <a:avLst/>
-          </a:prstGeom>
-          <a:solidFill>
-            <a:srgbClr val="095292"/>
-          </a:solidFill>
-          <a:ln>
-            <a:noFill/>
-          </a:ln>
-        </p:spPr>
-        <p:style>
-          <a:lnRef idx="1">
-            <a:schemeClr val="accent1"/>
-          </a:lnRef>
-          <a:fillRef idx="3">
-            <a:schemeClr val="accent1"/>
-          </a:fillRef>
-          <a:effectRef idx="2">
-            <a:schemeClr val="accent1"/>
-          </a:effectRef>
-          <a:fontRef idx="minor">
-            <a:schemeClr val="lt1"/>
-          </a:fontRef>
-        </p:style>
-        <p:txBody>
-          <a:bodyPr rtlCol="0" anchor="ctr"/>
-          <a:lstStyle/>
-          <a:p>
-            <a:pPr algn="ctr"/>
-          </a:p>
-        </p:txBody>
-      </p:sp>
-      <p:sp>
-        <p:nvSpPr>
-          <p:cNvPr id="13" name="Rectangle 12"/>
-          <p:cNvSpPr/>
-          <p:nvPr/>
-        </p:nvSpPr>
-        <p:spPr>
-          <a:xfrm>
-            <a:off x="4283354" y="1655064"/>
-            <a:ext cx="3624986" cy="27432"/>
-          </a:xfrm>
-          <a:prstGeom prst="rect">
-            <a:avLst/>
-          </a:prstGeom>
-          <a:solidFill>
-            <a:srgbClr val="FFD000"/>
-          </a:solidFill>
-          <a:ln>
-            <a:noFill/>
-          </a:ln>
-        </p:spPr>
-        <p:style>
-          <a:lnRef idx="1">
-            <a:schemeClr val="accent1"/>
-          </a:lnRef>
-          <a:fillRef idx="3">
-            <a:schemeClr val="accent1"/>
-          </a:fillRef>
-          <a:effectRef idx="2">
-            <a:schemeClr val="accent1"/>
-          </a:effectRef>
-          <a:fontRef idx="minor">
-            <a:schemeClr val="lt1"/>
-          </a:fontRef>
-        </p:style>
-        <p:txBody>
-          <a:bodyPr rtlCol="0" anchor="ctr"/>
-          <a:lstStyle/>
-          <a:p>
-            <a:pPr algn="ctr"/>
-          </a:p>
-        </p:txBody>
-      </p:sp>
-      <p:pic>
-        <p:nvPicPr>
-          <p:cNvPr id="14" name="Picture 13" descr="google_docs.png"/>
-          <p:cNvPicPr>
-            <a:picLocks noChangeAspect="1"/>
-          </p:cNvPicPr>
-          <p:nvPr/>
-        </p:nvPicPr>
-        <p:blipFill>
-          <a:blip r:embed="rId3"/>
-          <a:stretch>
-            <a:fillRect/>
-          </a:stretch>
-        </p:blipFill>
-        <p:spPr>
-          <a:xfrm>
-            <a:off x="5469483" y="1847087"/>
-            <a:ext cx="1252728" cy="1252728"/>
-          </a:xfrm>
-          <a:prstGeom prst="rect">
-            <a:avLst/>
-          </a:prstGeom>
-        </p:spPr>
-      </p:pic>
-      <p:sp>
-        <p:nvSpPr>
-          <p:cNvPr id="15" name="TextBox 14"/>
-          <p:cNvSpPr txBox="1"/>
-          <p:nvPr/>
-        </p:nvSpPr>
-        <p:spPr>
-          <a:xfrm>
-            <a:off x="4356506" y="3191256"/>
-            <a:ext cx="3478682" cy="621792"/>
-          </a:xfrm>
-          <a:prstGeom prst="rect">
-            <a:avLst/>
-          </a:prstGeom>
-          <a:noFill/>
-        </p:spPr>
-        <p:txBody>
-          <a:bodyPr wrap="square" anchor="t"/>
-          <a:lstStyle/>
-          <a:p>
-            <a:pPr algn="ctr"/>
-            <a:r>
-              <a:rPr sz="1300" b="1" i="0">
-                <a:solidFill>
-                  <a:srgbClr val="095292"/>
-                </a:solidFill>
-                <a:latin typeface="Calibri"/>
-              </a:rPr>
-              <a:t>google docs</a:t>
-            </a:r>
-          </a:p>
-          <a:p>
-            <a:pPr algn="ctr">
-              <a:spcBef>
-                <a:spcPts val="200"/>
-              </a:spcBef>
+              <a:rPr sz="2000" b="0" i="0">
+                <a:solidFill>
+                  <a:srgbClr val="333333"/>
+                </a:solidFill>
+                <a:latin typeface="Calibri"/>
+              </a:rPr>
+              <a:t>–   Cuando los requisitos son estables y se conocen desde el principio, cuando el contrato es a precio fijo o viene de una licitacion publica y el alcance debe estar cerrado para poder cotizar</a:t>
+            </a:r>
+          </a:p>
+          <a:p>
+            <a:pPr>
+              <a:spcAft>
+                <a:spcPts val="800"/>
+              </a:spcAft>
             </a:pPr>
             <a:r>
-              <a:rPr sz="1000" b="0" i="0">
-                <a:solidFill>
-                  <a:srgbClr val="666666"/>
-                </a:solidFill>
-                <a:latin typeface="Calibri"/>
-              </a:rPr>
-              <a:t>Documentos del paquete de diseño</a:t>
-            </a:r>
-          </a:p>
-        </p:txBody>
-      </p:sp>
-      <p:sp>
-        <p:nvSpPr>
-          <p:cNvPr id="16" name="Rounded Rectangle 15"/>
-          <p:cNvSpPr/>
-          <p:nvPr/>
-        </p:nvSpPr>
-        <p:spPr>
-          <a:xfrm>
-            <a:off x="8109508" y="1591056"/>
-            <a:ext cx="3624986" cy="2331720"/>
-          </a:xfrm>
-          <a:prstGeom prst="roundRect">
-            <a:avLst>
-              <a:gd name="adj" fmla="val 12000"/>
-            </a:avLst>
-          </a:prstGeom>
-          <a:solidFill>
-            <a:srgbClr val="F2F2F2"/>
-          </a:solidFill>
-          <a:ln>
-            <a:noFill/>
-          </a:ln>
-        </p:spPr>
-        <p:style>
-          <a:lnRef idx="1">
-            <a:schemeClr val="accent1"/>
-          </a:lnRef>
-          <a:fillRef idx="3">
-            <a:schemeClr val="accent1"/>
-          </a:fillRef>
-          <a:effectRef idx="2">
-            <a:schemeClr val="accent1"/>
-          </a:effectRef>
-          <a:fontRef idx="minor">
-            <a:schemeClr val="lt1"/>
-          </a:fontRef>
-        </p:style>
-        <p:txBody>
-          <a:bodyPr rtlCol="0" anchor="ctr"/>
-          <a:lstStyle/>
-          <a:p>
-            <a:pPr algn="ctr"/>
-          </a:p>
-        </p:txBody>
-      </p:sp>
-      <p:sp>
-        <p:nvSpPr>
-          <p:cNvPr id="17" name="Rectangle 16"/>
-          <p:cNvSpPr/>
-          <p:nvPr/>
-        </p:nvSpPr>
-        <p:spPr>
-          <a:xfrm>
-            <a:off x="8109508" y="1591056"/>
-            <a:ext cx="3624986" cy="64008"/>
-          </a:xfrm>
-          <a:prstGeom prst="rect">
-            <a:avLst/>
-          </a:prstGeom>
-          <a:solidFill>
-            <a:srgbClr val="095292"/>
-          </a:solidFill>
-          <a:ln>
-            <a:noFill/>
-          </a:ln>
-        </p:spPr>
-        <p:style>
-          <a:lnRef idx="1">
-            <a:schemeClr val="accent1"/>
-          </a:lnRef>
-          <a:fillRef idx="3">
-            <a:schemeClr val="accent1"/>
-          </a:fillRef>
-          <a:effectRef idx="2">
-            <a:schemeClr val="accent1"/>
-          </a:effectRef>
-          <a:fontRef idx="minor">
-            <a:schemeClr val="lt1"/>
-          </a:fontRef>
-        </p:style>
-        <p:txBody>
-          <a:bodyPr rtlCol="0" anchor="ctr"/>
-          <a:lstStyle/>
-          <a:p>
-            <a:pPr algn="ctr"/>
-          </a:p>
-        </p:txBody>
-      </p:sp>
-      <p:sp>
-        <p:nvSpPr>
-          <p:cNvPr id="18" name="Rectangle 17"/>
-          <p:cNvSpPr/>
-          <p:nvPr/>
-        </p:nvSpPr>
-        <p:spPr>
-          <a:xfrm>
-            <a:off x="8109508" y="1655064"/>
-            <a:ext cx="3624986" cy="27432"/>
-          </a:xfrm>
-          <a:prstGeom prst="rect">
-            <a:avLst/>
-          </a:prstGeom>
-          <a:solidFill>
-            <a:srgbClr val="FFD000"/>
-          </a:solidFill>
-          <a:ln>
-            <a:noFill/>
-          </a:ln>
-        </p:spPr>
-        <p:style>
-          <a:lnRef idx="1">
-            <a:schemeClr val="accent1"/>
-          </a:lnRef>
-          <a:fillRef idx="3">
-            <a:schemeClr val="accent1"/>
-          </a:fillRef>
-          <a:effectRef idx="2">
-            <a:schemeClr val="accent1"/>
-          </a:effectRef>
-          <a:fontRef idx="minor">
-            <a:schemeClr val="lt1"/>
-          </a:fontRef>
-        </p:style>
-        <p:txBody>
-          <a:bodyPr rtlCol="0" anchor="ctr"/>
-          <a:lstStyle/>
-          <a:p>
-            <a:pPr algn="ctr"/>
-          </a:p>
-        </p:txBody>
-      </p:sp>
-      <p:pic>
-        <p:nvPicPr>
-          <p:cNvPr id="19" name="Picture 18" descr="examlab.png"/>
-          <p:cNvPicPr>
-            <a:picLocks noChangeAspect="1"/>
-          </p:cNvPicPr>
-          <p:nvPr/>
-        </p:nvPicPr>
-        <p:blipFill>
-          <a:blip r:embed="rId4"/>
-          <a:stretch>
-            <a:fillRect/>
-          </a:stretch>
-        </p:blipFill>
-        <p:spPr>
-          <a:xfrm>
-            <a:off x="9295638" y="1847087"/>
-            <a:ext cx="1252728" cy="1252728"/>
-          </a:xfrm>
-          <a:prstGeom prst="rect">
-            <a:avLst/>
-          </a:prstGeom>
-        </p:spPr>
-      </p:pic>
-      <p:sp>
-        <p:nvSpPr>
-          <p:cNvPr id="20" name="TextBox 19"/>
-          <p:cNvSpPr txBox="1"/>
-          <p:nvPr/>
-        </p:nvSpPr>
-        <p:spPr>
-          <a:xfrm>
-            <a:off x="8182660" y="3191256"/>
-            <a:ext cx="3478682" cy="621792"/>
-          </a:xfrm>
-          <a:prstGeom prst="rect">
-            <a:avLst/>
-          </a:prstGeom>
-          <a:noFill/>
-        </p:spPr>
-        <p:txBody>
-          <a:bodyPr wrap="square" anchor="t"/>
-          <a:lstStyle/>
-          <a:p>
-            <a:pPr algn="ctr"/>
-            <a:r>
-              <a:rPr sz="1300" b="1" i="0">
-                <a:solidFill>
-                  <a:srgbClr val="095292"/>
-                </a:solidFill>
-                <a:latin typeface="Calibri"/>
-              </a:rPr>
-              <a:t>la plataforma del curso</a:t>
-            </a:r>
-          </a:p>
-          <a:p>
-            <a:pPr algn="ctr">
-              <a:spcBef>
-                <a:spcPts val="200"/>
-              </a:spcBef>
+              <a:rPr sz="2000" b="0" i="0">
+                <a:solidFill>
+                  <a:srgbClr val="333333"/>
+                </a:solidFill>
+                <a:latin typeface="Calibri"/>
+              </a:rPr>
+              <a:t>–   Cuando el sistema es critico o esta regulado (equipos medicos, aviacion, banca, manejo de historia clinica con normativa de proteccion de datos) y cuando hay varios proveedores que necesitan un documento comun para poder trabajar en paralelo.</a:t>
+            </a:r>
+          </a:p>
+          <a:p>
+            <a:pPr>
+              <a:spcAft>
+                <a:spcPts val="800"/>
+              </a:spcAft>
             </a:pPr>
             <a:r>
-              <a:rPr sz="1000" b="0" i="0">
-                <a:solidFill>
-                  <a:srgbClr val="666666"/>
-                </a:solidFill>
-                <a:latin typeface="Calibri"/>
-              </a:rPr>
-              <a:t>Entrega del taller · en la fecha que indique el docente</a:t>
-            </a:r>
-          </a:p>
-        </p:txBody>
-      </p:sp>
-      <p:sp>
-        <p:nvSpPr>
-          <p:cNvPr id="21" name="TextBox 20"/>
+              <a:rPr sz="2000" b="0" i="0">
+                <a:solidFill>
+                  <a:srgbClr val="333333"/>
+                </a:solidFill>
+                <a:latin typeface="Calibri"/>
+              </a:rPr>
+              <a:t>–   En VetCare hay partes que caben perfecto en este enfoque: los datos basicos de un paciente casi no cambian, y si mañana la clinica conecta facturacion electronica, las reglas de esa parte vienen impuestas por la norma y no se negocian con el cliente.</a:t>
+            </a:r>
+          </a:p>
+          <a:p>
+            <a:pPr>
+              <a:spcAft>
+                <a:spcPts val="800"/>
+              </a:spcAft>
+            </a:pPr>
+            <a:r>
+              <a:rPr sz="2000" b="0" i="0">
+                <a:solidFill>
+                  <a:srgbClr val="333333"/>
+                </a:solidFill>
+                <a:latin typeface="Calibri"/>
+              </a:rPr>
+              <a:t>–   En esos casos escribir todo el detalle antes no es burocracia, es la unica forma de estimar y de cumplir.</a:t>
+            </a:r>
+          </a:p>
+        </p:txBody>
+      </p:sp>
+      <p:sp>
+        <p:nvSpPr>
+          <p:cNvPr id="6" name="TextBox 5"/>
           <p:cNvSpPr txBox="1"/>
           <p:nvPr/>
         </p:nvSpPr>
@@ -9651,7 +12096,7 @@
                 </a:solidFill>
                 <a:latin typeface="Calibri"/>
               </a:rPr>
-              <a:t>Taller PI — por que importa</a:t>
+              <a:t>Cuando NO tienen sentido?</a:t>
             </a:r>
           </a:p>
         </p:txBody>
@@ -9690,25 +12135,7 @@
                 </a:solidFill>
                 <a:latin typeface="Calibri"/>
               </a:rPr>
-              <a:t>–   </a:t>
-            </a:r>
-            <a:r>
-              <a:rPr sz="2000" b="1" i="0">
-                <a:solidFill>
-                  <a:srgbClr val="333333"/>
-                </a:solidFill>
-                <a:latin typeface="Calibri"/>
-              </a:rPr>
-              <a:t>Por que importa al PI:</a:t>
-            </a:r>
-            <a:r>
-              <a:rPr sz="2000" b="0" i="0">
-                <a:solidFill>
-                  <a:srgbClr val="333333"/>
-                </a:solidFill>
-                <a:latin typeface="Calibri"/>
-              </a:rPr>
-              <a:t> si Huellitas exige aprobar todo el diseño antes de que Programacion II escriba una linea, este es exactamente el paquete de documentos que el equipo tendria que entregar y defender.</a:t>
+              <a:t>–   Cuando el cliente no sabe lo que quiere hasta que lo ve, cuando el dominio es nuevo para el equipo, cuando el tiempo hasta la primera entrega visible es tan largo que el negocio cambia antes de recibir nada</a:t>
             </a:r>
           </a:p>
           <a:p>
@@ -9724,7 +12151,7 @@
                 </a:solidFill>
                 <a:latin typeface="Calibri"/>
               </a:rPr>
-              <a:t>–   La clase pasada quedo el mapa de fases; hoy se aprende a cerrar una fase de manera formal, con version, aprobacion y trazabilidad hacia las pruebas.</a:t>
+              <a:t>–   Y cuando integrar todo de un solo golpe al final concentra el riesgo en el peor momento.</a:t>
             </a:r>
           </a:p>
           <a:p>
@@ -9740,7 +12167,39 @@
                 </a:solidFill>
                 <a:latin typeface="Calibri"/>
               </a:rPr>
-              <a:t>–   Este es el enfoque que sostiene la ruta del estudiante que solo cursa Seminario: su producto final es un documento de diseño formal, que es lo que en la industria se contrata y se factura.</a:t>
+              <a:t>–   El costo de corregir crece de forma brutal a medida que se avanza: cambiar una frase en el documento de requisitos vale casi nada; cambiar la misma idea cuando ya hay diseño, codigo y datos migrados puede costar semanas.</a:t>
+            </a:r>
+          </a:p>
+          <a:p>
+            <a:pPr>
+              <a:spcAft>
+                <a:spcPts val="800"/>
+              </a:spcAft>
+            </a:pPr>
+            <a:r>
+              <a:rPr sz="2000" b="0" i="0">
+                <a:solidFill>
+                  <a:srgbClr val="333333"/>
+                </a:solidFill>
+                <a:latin typeface="Calibri"/>
+              </a:rPr>
+              <a:t>–   En VetCare esto se ve clarito con el tablero de metricas: la administradora dice 'quiero ver cuantos pacientes atendemos', pero cuando vea el primer grafico va a pedir por especie, por veterinario y por mes.</a:t>
+            </a:r>
+          </a:p>
+          <a:p>
+            <a:pPr>
+              <a:spcAft>
+                <a:spcPts val="800"/>
+              </a:spcAft>
+            </a:pPr>
+            <a:r>
+              <a:rPr sz="2000" b="0" i="0">
+                <a:solidFill>
+                  <a:srgbClr val="333333"/>
+                </a:solidFill>
+                <a:latin typeface="Calibri"/>
+              </a:rPr>
+              <a:t>–   Congelar ese requisito en la semana dos es congelar una suposicion.</a:t>
             </a:r>
           </a:p>
         </p:txBody>
@@ -9921,7 +12380,7 @@
                 </a:solidFill>
                 <a:latin typeface="Calibri"/>
               </a:rPr>
-              <a:t>Taller PI — punto de partida</a:t>
+              <a:t>En el mundo tradicional la documentacion no acompaña al producto: en...</a:t>
             </a:r>
           </a:p>
         </p:txBody>
@@ -9960,7 +12419,7 @@
                 </a:solidFill>
                 <a:latin typeface="Calibri"/>
               </a:rPr>
-              <a:t>–   El equipo ya tiene una lista cruda de necesidades de Huellitas, pero escrita en frases sueltas tipo 'que sea rapido' y 'que no se pierdan las fichas', sin ID, sin version y sin quien lo pidio.</a:t>
+              <a:t>–   En el mundo tradicional la documentacion no acompaña al producto: en buena parte ES el producto contratado.</a:t>
             </a:r>
           </a:p>
           <a:p>
@@ -9976,7 +12435,7 @@
                 </a:solidFill>
                 <a:latin typeface="Calibri"/>
               </a:rPr>
-              <a:t>–   La administradora de la clinica avisa que solo dispone de dos reuniones en todo el semestre, asi que no habra a quien preguntarle cada semana.</a:t>
+              <a:t>–   Los entregables tipicos son la Especificacion de Requisitos de Software (ERS o SRS, con estructura tipo IEEE 830 / ISO 29148)</a:t>
             </a:r>
           </a:p>
           <a:p>
@@ -9992,7 +12451,23 @@
                 </a:solidFill>
                 <a:latin typeface="Calibri"/>
               </a:rPr>
-              <a:t>–   Nadie ha escrito todavia una sola prueba, y la idea instalada en el grupo es que las pruebas se piensan al final, cuando ya haya algo que probar.</a:t>
+              <a:t>–   El Documento de Diseño (SDD), la matriz de trazabilidad que muestra que cada requisito tiene diseño y prueba, y el acta de aprobacion.</a:t>
+            </a:r>
+          </a:p>
+          <a:p>
+            <a:pPr>
+              <a:spcAft>
+                <a:spcPts val="800"/>
+              </a:spcAft>
+            </a:pPr>
+            <a:r>
+              <a:rPr sz="2000" b="0" i="0">
+                <a:solidFill>
+                  <a:srgbClr val="333333"/>
+                </a:solidFill>
+                <a:latin typeface="Calibri"/>
+              </a:rPr>
+              <a:t>–   Para el estudiante que solo cursa Seminario de Sistemas esto es una gran noticia: su entregable final -documento de diseño mas prototipo navegable- es exactamente el tipo de producto que se factura en un proyecto tradicional, y por eso su ruta es completa y no una version reducida del curso.</a:t>
             </a:r>
           </a:p>
         </p:txBody>

--- a/Seminario de Sistemas/Clases/Clase 3 - Metodologias tradicionales/Presentacion.pptx
+++ b/Seminario de Sistemas/Clases/Clase 3 - Metodologias tradicionales/Presentacion.pptx
@@ -11,21 +11,14 @@
     <p:sldId id="259" r:id="rId10"/>
     <p:sldId id="260" r:id="rId11"/>
     <p:sldId id="261" r:id="rId12"/>
-    <p:sldId id="262" r:id="rId13"/>
-    <p:sldId id="263" r:id="rId14"/>
-    <p:sldId id="264" r:id="rId15"/>
-    <p:sldId id="265" r:id="rId16"/>
-    <p:sldId id="266" r:id="rId17"/>
-    <p:sldId id="267" r:id="rId18"/>
-    <p:sldId id="268" r:id="rId19"/>
-    <p:sldId id="269" r:id="rId20"/>
-    <p:sldId id="270" r:id="rId21"/>
-    <p:sldId id="271" r:id="rId22"/>
-    <p:sldId id="272" r:id="rId23"/>
-    <p:sldId id="273" r:id="rId24"/>
-    <p:sldId id="274" r:id="rId25"/>
-    <p:sldId id="275" r:id="rId26"/>
-    <p:sldId id="276" r:id="rId27"/>
+    <p:sldId id="262" r:id="rId14"/>
+    <p:sldId id="263" r:id="rId15"/>
+    <p:sldId id="264" r:id="rId16"/>
+    <p:sldId id="265" r:id="rId17"/>
+    <p:sldId id="266" r:id="rId18"/>
+    <p:sldId id="267" r:id="rId19"/>
+    <p:sldId id="268" r:id="rId20"/>
+    <p:sldId id="269" r:id="rId21"/>
   </p:sldIdLst>
   <p:sldSz cx="12191695" cy="6858000" type="screen4x3"/>
   <p:notesSz cx="6858000" cy="9144000"/>
@@ -125,6 +118,636 @@
     </a:lvl9pPr>
   </p:defaultTextStyle>
 </p:presentation>
+</file>
+
+<file path=ppt/notesMasters/notesMaster1.xml><?xml version="1.0" encoding="utf-8"?>
+<p:notesMaster xmlns:a="http://schemas.openxmlformats.org/drawingml/2006/main" xmlns:p="http://schemas.openxmlformats.org/presentationml/2006/main" xmlns:r="http://schemas.openxmlformats.org/officeDocument/2006/relationships">
+  <p:cSld>
+    <p:bg>
+      <p:bgRef idx="1001">
+        <a:schemeClr val="bg1"/>
+      </p:bgRef>
+    </p:bg>
+    <p:spTree>
+      <p:nvGrpSpPr>
+        <p:cNvPr id="1" name=""/>
+        <p:cNvGrpSpPr/>
+        <p:nvPr/>
+      </p:nvGrpSpPr>
+      <p:grpSpPr>
+        <a:xfrm>
+          <a:off x="0" y="0"/>
+          <a:ext cx="0" cy="0"/>
+          <a:chOff x="0" y="0"/>
+          <a:chExt cx="0" cy="0"/>
+        </a:xfrm>
+      </p:grpSpPr>
+      <p:sp>
+        <p:nvSpPr>
+          <p:cNvPr id="2" name="Header Placeholder 1"/>
+          <p:cNvSpPr>
+            <a:spLocks noGrp="1"/>
+          </p:cNvSpPr>
+          <p:nvPr>
+            <p:ph type="hdr" sz="quarter"/>
+          </p:nvPr>
+        </p:nvSpPr>
+        <p:spPr>
+          <a:xfrm>
+            <a:off x="0" y="0"/>
+            <a:ext cx="2971800" cy="457200"/>
+          </a:xfrm>
+          <a:prstGeom prst="rect">
+            <a:avLst/>
+          </a:prstGeom>
+        </p:spPr>
+        <p:txBody>
+          <a:bodyPr vert="horz" lIns="91440" tIns="45720" rIns="91440" bIns="45720" rtlCol="0"/>
+          <a:lstStyle>
+            <a:lvl1pPr algn="l">
+              <a:defRPr sz="1200"/>
+            </a:lvl1pPr>
+          </a:lstStyle>
+          <a:p>
+            <a:endParaRPr lang="en-US"/>
+          </a:p>
+        </p:txBody>
+      </p:sp>
+      <p:sp>
+        <p:nvSpPr>
+          <p:cNvPr id="3" name="Date Placeholder 2"/>
+          <p:cNvSpPr>
+            <a:spLocks noGrp="1"/>
+          </p:cNvSpPr>
+          <p:nvPr>
+            <p:ph type="dt" idx="1"/>
+          </p:nvPr>
+        </p:nvSpPr>
+        <p:spPr>
+          <a:xfrm>
+            <a:off x="3884613" y="0"/>
+            <a:ext cx="2971800" cy="457200"/>
+          </a:xfrm>
+          <a:prstGeom prst="rect">
+            <a:avLst/>
+          </a:prstGeom>
+        </p:spPr>
+        <p:txBody>
+          <a:bodyPr vert="horz" lIns="91440" tIns="45720" rIns="91440" bIns="45720" rtlCol="0"/>
+          <a:lstStyle>
+            <a:lvl1pPr algn="r">
+              <a:defRPr sz="1200"/>
+            </a:lvl1pPr>
+          </a:lstStyle>
+          <a:p>
+            <a:fld id="{0F89C1C7-3DCD-1040-A9CF-14679D8B5DDD}" type="datetimeFigureOut">
+              <a:rPr lang="en-US" smtClean="0"/>
+              <a:t>10/17/16</a:t>
+            </a:fld>
+            <a:endParaRPr lang="en-US"/>
+          </a:p>
+        </p:txBody>
+      </p:sp>
+      <p:sp>
+        <p:nvSpPr>
+          <p:cNvPr id="4" name="Slide Image Placeholder 3"/>
+          <p:cNvSpPr>
+            <a:spLocks noGrp="1" noRot="1" noChangeAspect="1"/>
+          </p:cNvSpPr>
+          <p:nvPr>
+            <p:ph type="sldImg" idx="2"/>
+          </p:nvPr>
+        </p:nvSpPr>
+        <p:spPr>
+          <a:xfrm>
+            <a:off x="1143000" y="685800"/>
+            <a:ext cx="4572000" cy="3429000"/>
+          </a:xfrm>
+          <a:prstGeom prst="rect">
+            <a:avLst/>
+          </a:prstGeom>
+          <a:noFill/>
+          <a:ln w="12700">
+            <a:solidFill>
+              <a:prstClr val="black"/>
+            </a:solidFill>
+          </a:ln>
+        </p:spPr>
+        <p:txBody>
+          <a:bodyPr vert="horz" lIns="91440" tIns="45720" rIns="91440" bIns="45720" rtlCol="0" anchor="ctr"/>
+          <a:lstStyle/>
+          <a:p>
+            <a:endParaRPr lang="en-US"/>
+          </a:p>
+        </p:txBody>
+      </p:sp>
+      <p:sp>
+        <p:nvSpPr>
+          <p:cNvPr id="5" name="Notes Placeholder 4"/>
+          <p:cNvSpPr>
+            <a:spLocks noGrp="1"/>
+          </p:cNvSpPr>
+          <p:nvPr>
+            <p:ph type="body" sz="quarter" idx="3"/>
+          </p:nvPr>
+        </p:nvSpPr>
+        <p:spPr>
+          <a:xfrm>
+            <a:off x="685800" y="4343400"/>
+            <a:ext cx="5486400" cy="4114800"/>
+          </a:xfrm>
+          <a:prstGeom prst="rect">
+            <a:avLst/>
+          </a:prstGeom>
+        </p:spPr>
+        <p:txBody>
+          <a:bodyPr vert="horz" lIns="91440" tIns="45720" rIns="91440" bIns="45720" rtlCol="0"/>
+          <a:lstStyle/>
+          <a:p>
+            <a:pPr lvl="0"/>
+            <a:r>
+              <a:rPr lang="en-US" smtClean="0"/>
+              <a:t>Click to edit Master text styles</a:t>
+            </a:r>
+          </a:p>
+          <a:p>
+            <a:pPr lvl="1"/>
+            <a:r>
+              <a:rPr lang="en-US" smtClean="0"/>
+              <a:t>Second level</a:t>
+            </a:r>
+          </a:p>
+          <a:p>
+            <a:pPr lvl="2"/>
+            <a:r>
+              <a:rPr lang="en-US" smtClean="0"/>
+              <a:t>Third level</a:t>
+            </a:r>
+          </a:p>
+          <a:p>
+            <a:pPr lvl="3"/>
+            <a:r>
+              <a:rPr lang="en-US" smtClean="0"/>
+              <a:t>Fourth level</a:t>
+            </a:r>
+          </a:p>
+          <a:p>
+            <a:pPr lvl="4"/>
+            <a:r>
+              <a:rPr lang="en-US" smtClean="0"/>
+              <a:t>Fifth level</a:t>
+            </a:r>
+            <a:endParaRPr lang="en-US"/>
+          </a:p>
+        </p:txBody>
+      </p:sp>
+      <p:sp>
+        <p:nvSpPr>
+          <p:cNvPr id="6" name="Footer Placeholder 5"/>
+          <p:cNvSpPr>
+            <a:spLocks noGrp="1"/>
+          </p:cNvSpPr>
+          <p:nvPr>
+            <p:ph type="ftr" sz="quarter" idx="4"/>
+          </p:nvPr>
+        </p:nvSpPr>
+        <p:spPr>
+          <a:xfrm>
+            <a:off x="0" y="8685213"/>
+            <a:ext cx="2971800" cy="457200"/>
+          </a:xfrm>
+          <a:prstGeom prst="rect">
+            <a:avLst/>
+          </a:prstGeom>
+        </p:spPr>
+        <p:txBody>
+          <a:bodyPr vert="horz" lIns="91440" tIns="45720" rIns="91440" bIns="45720" rtlCol="0" anchor="b"/>
+          <a:lstStyle>
+            <a:lvl1pPr algn="l">
+              <a:defRPr sz="1200"/>
+            </a:lvl1pPr>
+          </a:lstStyle>
+          <a:p>
+            <a:endParaRPr lang="en-US"/>
+          </a:p>
+        </p:txBody>
+      </p:sp>
+      <p:sp>
+        <p:nvSpPr>
+          <p:cNvPr id="7" name="Slide Number Placeholder 6"/>
+          <p:cNvSpPr>
+            <a:spLocks noGrp="1"/>
+          </p:cNvSpPr>
+          <p:nvPr>
+            <p:ph type="sldNum" sz="quarter" idx="5"/>
+          </p:nvPr>
+        </p:nvSpPr>
+        <p:spPr>
+          <a:xfrm>
+            <a:off x="3884613" y="8685213"/>
+            <a:ext cx="2971800" cy="457200"/>
+          </a:xfrm>
+          <a:prstGeom prst="rect">
+            <a:avLst/>
+          </a:prstGeom>
+        </p:spPr>
+        <p:txBody>
+          <a:bodyPr vert="horz" lIns="91440" tIns="45720" rIns="91440" bIns="45720" rtlCol="0" anchor="b"/>
+          <a:lstStyle>
+            <a:lvl1pPr algn="r">
+              <a:defRPr sz="1200"/>
+            </a:lvl1pPr>
+          </a:lstStyle>
+          <a:p>
+            <a:fld id="{BB5E49A5-4136-284D-997B-48E1D791AD67}" type="slidenum">
+              <a:rPr lang="en-US" smtClean="0"/>
+              <a:t>‹#›</a:t>
+            </a:fld>
+            <a:endParaRPr lang="en-US"/>
+          </a:p>
+        </p:txBody>
+      </p:sp>
+    </p:spTree>
+    <p:extLst>
+      <p:ext uri="{BB962C8B-B14F-4D97-AF65-F5344CB8AC3E}">
+        <p14:creationId xmlns:p14="http://schemas.microsoft.com/office/powerpoint/2010/main" val="2623252185"/>
+      </p:ext>
+    </p:extLst>
+  </p:cSld>
+  <p:clrMap bg1="lt1" tx1="dk1" bg2="lt2" tx2="dk2" accent1="accent1" accent2="accent2" accent3="accent3" accent4="accent4" accent5="accent5" accent6="accent6" hlink="hlink" folHlink="folHlink"/>
+  <p:notesStyle>
+    <a:lvl1pPr marL="0" algn="l" defTabSz="457200" rtl="0" eaLnBrk="1" latinLnBrk="0" hangingPunct="1">
+      <a:defRPr sz="1200" kern="1200">
+        <a:solidFill>
+          <a:schemeClr val="tx1"/>
+        </a:solidFill>
+        <a:latin typeface="+mn-lt"/>
+        <a:ea typeface="+mn-ea"/>
+        <a:cs typeface="+mn-cs"/>
+      </a:defRPr>
+    </a:lvl1pPr>
+    <a:lvl2pPr marL="457200" algn="l" defTabSz="457200" rtl="0" eaLnBrk="1" latinLnBrk="0" hangingPunct="1">
+      <a:defRPr sz="1200" kern="1200">
+        <a:solidFill>
+          <a:schemeClr val="tx1"/>
+        </a:solidFill>
+        <a:latin typeface="+mn-lt"/>
+        <a:ea typeface="+mn-ea"/>
+        <a:cs typeface="+mn-cs"/>
+      </a:defRPr>
+    </a:lvl2pPr>
+    <a:lvl3pPr marL="914400" algn="l" defTabSz="457200" rtl="0" eaLnBrk="1" latinLnBrk="0" hangingPunct="1">
+      <a:defRPr sz="1200" kern="1200">
+        <a:solidFill>
+          <a:schemeClr val="tx1"/>
+        </a:solidFill>
+        <a:latin typeface="+mn-lt"/>
+        <a:ea typeface="+mn-ea"/>
+        <a:cs typeface="+mn-cs"/>
+      </a:defRPr>
+    </a:lvl3pPr>
+    <a:lvl4pPr marL="1371600" algn="l" defTabSz="457200" rtl="0" eaLnBrk="1" latinLnBrk="0" hangingPunct="1">
+      <a:defRPr sz="1200" kern="1200">
+        <a:solidFill>
+          <a:schemeClr val="tx1"/>
+        </a:solidFill>
+        <a:latin typeface="+mn-lt"/>
+        <a:ea typeface="+mn-ea"/>
+        <a:cs typeface="+mn-cs"/>
+      </a:defRPr>
+    </a:lvl4pPr>
+    <a:lvl5pPr marL="1828800" algn="l" defTabSz="457200" rtl="0" eaLnBrk="1" latinLnBrk="0" hangingPunct="1">
+      <a:defRPr sz="1200" kern="1200">
+        <a:solidFill>
+          <a:schemeClr val="tx1"/>
+        </a:solidFill>
+        <a:latin typeface="+mn-lt"/>
+        <a:ea typeface="+mn-ea"/>
+        <a:cs typeface="+mn-cs"/>
+      </a:defRPr>
+    </a:lvl5pPr>
+    <a:lvl6pPr marL="2286000" algn="l" defTabSz="457200" rtl="0" eaLnBrk="1" latinLnBrk="0" hangingPunct="1">
+      <a:defRPr sz="1200" kern="1200">
+        <a:solidFill>
+          <a:schemeClr val="tx1"/>
+        </a:solidFill>
+        <a:latin typeface="+mn-lt"/>
+        <a:ea typeface="+mn-ea"/>
+        <a:cs typeface="+mn-cs"/>
+      </a:defRPr>
+    </a:lvl6pPr>
+    <a:lvl7pPr marL="2743200" algn="l" defTabSz="457200" rtl="0" eaLnBrk="1" latinLnBrk="0" hangingPunct="1">
+      <a:defRPr sz="1200" kern="1200">
+        <a:solidFill>
+          <a:schemeClr val="tx1"/>
+        </a:solidFill>
+        <a:latin typeface="+mn-lt"/>
+        <a:ea typeface="+mn-ea"/>
+        <a:cs typeface="+mn-cs"/>
+      </a:defRPr>
+    </a:lvl7pPr>
+    <a:lvl8pPr marL="3200400" algn="l" defTabSz="457200" rtl="0" eaLnBrk="1" latinLnBrk="0" hangingPunct="1">
+      <a:defRPr sz="1200" kern="1200">
+        <a:solidFill>
+          <a:schemeClr val="tx1"/>
+        </a:solidFill>
+        <a:latin typeface="+mn-lt"/>
+        <a:ea typeface="+mn-ea"/>
+        <a:cs typeface="+mn-cs"/>
+      </a:defRPr>
+    </a:lvl8pPr>
+    <a:lvl9pPr marL="3657600" algn="l" defTabSz="457200" rtl="0" eaLnBrk="1" latinLnBrk="0" hangingPunct="1">
+      <a:defRPr sz="1200" kern="1200">
+        <a:solidFill>
+          <a:schemeClr val="tx1"/>
+        </a:solidFill>
+        <a:latin typeface="+mn-lt"/>
+        <a:ea typeface="+mn-ea"/>
+        <a:cs typeface="+mn-cs"/>
+      </a:defRPr>
+    </a:lvl9pPr>
+  </p:notesStyle>
+</p:notesMaster>
+</file>
+
+<file path=ppt/notesSlides/notesSlide1.xml><?xml version="1.0" encoding="utf-8"?>
+<p:notes xmlns:a="http://schemas.openxmlformats.org/drawingml/2006/main" xmlns:p="http://schemas.openxmlformats.org/presentationml/2006/main" xmlns:r="http://schemas.openxmlformats.org/officeDocument/2006/relationships">
+  <p:cSld>
+    <p:spTree>
+      <p:nvGrpSpPr>
+        <p:cNvPr id="1" name=""/>
+        <p:cNvGrpSpPr/>
+        <p:nvPr/>
+      </p:nvGrpSpPr>
+      <p:grpSpPr>
+        <a:xfrm>
+          <a:off x="0" y="0"/>
+          <a:ext cx="0" cy="0"/>
+          <a:chOff x="0" y="0"/>
+          <a:chExt cx="0" cy="0"/>
+        </a:xfrm>
+      </p:grpSpPr>
+      <p:sp>
+        <p:nvSpPr>
+          <p:cNvPr id="2" name="Slide Image Placeholder 1"/>
+          <p:cNvSpPr>
+            <a:spLocks noGrp="1"/>
+          </p:cNvSpPr>
+          <p:nvPr>
+            <p:ph type="sldImg" idx="2"/>
+          </p:nvPr>
+        </p:nvSpPr>
+        <p:spPr/>
+      </p:sp>
+      <p:sp>
+        <p:nvSpPr>
+          <p:cNvPr id="3" name="Notes Placeholder 2"/>
+          <p:cNvSpPr>
+            <a:spLocks noGrp="1"/>
+          </p:cNvSpPr>
+          <p:nvPr>
+            <p:ph type="body" idx="3" sz="quarter"/>
+          </p:nvPr>
+        </p:nvSpPr>
+        <p:spPr/>
+        <p:txBody>
+          <a:bodyPr/>
+          <a:lstStyle/>
+          <a:p>
+            <a:r>
+              <a:t>Los requisitos se emparejan con las pruebas de aceptacion, el diseño de la arquitectura con las pruebas de integracion y el diseño detallado con las pruebas unitarias.</a:t>
+            </a:r>
+          </a:p>
+        </p:txBody>
+      </p:sp>
+      <p:sp>
+        <p:nvSpPr>
+          <p:cNvPr id="4" name="Slide Number Placeholder 3"/>
+          <p:cNvSpPr>
+            <a:spLocks noGrp="1"/>
+          </p:cNvSpPr>
+          <p:nvPr>
+            <p:ph type="sldNum" idx="5" sz="quarter"/>
+          </p:nvPr>
+        </p:nvSpPr>
+        <p:spPr/>
+      </p:sp>
+    </p:spTree>
+  </p:cSld>
+  <p:clrMapOvr>
+    <a:masterClrMapping/>
+  </p:clrMapOvr>
+</p:notes>
+</file>
+
+<file path=ppt/notesSlides/notesSlide2.xml><?xml version="1.0" encoding="utf-8"?>
+<p:notes xmlns:a="http://schemas.openxmlformats.org/drawingml/2006/main" xmlns:p="http://schemas.openxmlformats.org/presentationml/2006/main" xmlns:r="http://schemas.openxmlformats.org/officeDocument/2006/relationships">
+  <p:cSld>
+    <p:spTree>
+      <p:nvGrpSpPr>
+        <p:cNvPr id="1" name=""/>
+        <p:cNvGrpSpPr/>
+        <p:nvPr/>
+      </p:nvGrpSpPr>
+      <p:grpSpPr>
+        <a:xfrm>
+          <a:off x="0" y="0"/>
+          <a:ext cx="0" cy="0"/>
+          <a:chOff x="0" y="0"/>
+          <a:chExt cx="0" cy="0"/>
+        </a:xfrm>
+      </p:grpSpPr>
+      <p:sp>
+        <p:nvSpPr>
+          <p:cNvPr id="2" name="Slide Image Placeholder 1"/>
+          <p:cNvSpPr>
+            <a:spLocks noGrp="1"/>
+          </p:cNvSpPr>
+          <p:nvPr>
+            <p:ph type="sldImg" idx="2"/>
+          </p:nvPr>
+        </p:nvSpPr>
+        <p:spPr/>
+      </p:sp>
+      <p:sp>
+        <p:nvSpPr>
+          <p:cNvPr id="3" name="Notes Placeholder 2"/>
+          <p:cNvSpPr>
+            <a:spLocks noGrp="1"/>
+          </p:cNvSpPr>
+          <p:nvPr>
+            <p:ph type="body" idx="3" sz="quarter"/>
+          </p:nvPr>
+        </p:nvSpPr>
+        <p:spPr/>
+        <p:txBody>
+          <a:bodyPr/>
+          <a:lstStyle/>
+          <a:p>
+            <a:r>
+              <a:t>Cuando SI tienen sentido estos modelos?</a:t>
+            </a:r>
+          </a:p>
+        </p:txBody>
+      </p:sp>
+      <p:sp>
+        <p:nvSpPr>
+          <p:cNvPr id="4" name="Slide Number Placeholder 3"/>
+          <p:cNvSpPr>
+            <a:spLocks noGrp="1"/>
+          </p:cNvSpPr>
+          <p:nvPr>
+            <p:ph type="sldNum" idx="5" sz="quarter"/>
+          </p:nvPr>
+        </p:nvSpPr>
+        <p:spPr/>
+      </p:sp>
+    </p:spTree>
+  </p:cSld>
+  <p:clrMapOvr>
+    <a:masterClrMapping/>
+  </p:clrMapOvr>
+</p:notes>
+</file>
+
+<file path=ppt/notesSlides/notesSlide3.xml><?xml version="1.0" encoding="utf-8"?>
+<p:notes xmlns:a="http://schemas.openxmlformats.org/drawingml/2006/main" xmlns:p="http://schemas.openxmlformats.org/presentationml/2006/main" xmlns:r="http://schemas.openxmlformats.org/officeDocument/2006/relationships">
+  <p:cSld>
+    <p:spTree>
+      <p:nvGrpSpPr>
+        <p:cNvPr id="1" name=""/>
+        <p:cNvGrpSpPr/>
+        <p:nvPr/>
+      </p:nvGrpSpPr>
+      <p:grpSpPr>
+        <a:xfrm>
+          <a:off x="0" y="0"/>
+          <a:ext cx="0" cy="0"/>
+          <a:chOff x="0" y="0"/>
+          <a:chExt cx="0" cy="0"/>
+        </a:xfrm>
+      </p:grpSpPr>
+      <p:sp>
+        <p:nvSpPr>
+          <p:cNvPr id="2" name="Slide Image Placeholder 1"/>
+          <p:cNvSpPr>
+            <a:spLocks noGrp="1"/>
+          </p:cNvSpPr>
+          <p:nvPr>
+            <p:ph type="sldImg" idx="2"/>
+          </p:nvPr>
+        </p:nvSpPr>
+        <p:spPr/>
+      </p:sp>
+      <p:sp>
+        <p:nvSpPr>
+          <p:cNvPr id="3" name="Notes Placeholder 2"/>
+          <p:cNvSpPr>
+            <a:spLocks noGrp="1"/>
+          </p:cNvSpPr>
+          <p:nvPr>
+            <p:ph type="body" idx="3" sz="quarter"/>
+          </p:nvPr>
+        </p:nvSpPr>
+        <p:spPr/>
+        <p:txBody>
+          <a:bodyPr/>
+          <a:lstStyle/>
+          <a:p>
+            <a:r>
+              <a:t>Cuando NO tienen sentido?</a:t>
+            </a:r>
+          </a:p>
+        </p:txBody>
+      </p:sp>
+      <p:sp>
+        <p:nvSpPr>
+          <p:cNvPr id="4" name="Slide Number Placeholder 3"/>
+          <p:cNvSpPr>
+            <a:spLocks noGrp="1"/>
+          </p:cNvSpPr>
+          <p:nvPr>
+            <p:ph type="sldNum" idx="5" sz="quarter"/>
+          </p:nvPr>
+        </p:nvSpPr>
+        <p:spPr/>
+      </p:sp>
+    </p:spTree>
+  </p:cSld>
+  <p:clrMapOvr>
+    <a:masterClrMapping/>
+  </p:clrMapOvr>
+</p:notes>
+</file>
+
+<file path=ppt/notesSlides/notesSlide4.xml><?xml version="1.0" encoding="utf-8"?>
+<p:notes xmlns:a="http://schemas.openxmlformats.org/drawingml/2006/main" xmlns:p="http://schemas.openxmlformats.org/presentationml/2006/main" xmlns:r="http://schemas.openxmlformats.org/officeDocument/2006/relationships">
+  <p:cSld>
+    <p:spTree>
+      <p:nvGrpSpPr>
+        <p:cNvPr id="1" name=""/>
+        <p:cNvGrpSpPr/>
+        <p:nvPr/>
+      </p:nvGrpSpPr>
+      <p:grpSpPr>
+        <a:xfrm>
+          <a:off x="0" y="0"/>
+          <a:ext cx="0" cy="0"/>
+          <a:chOff x="0" y="0"/>
+          <a:chExt cx="0" cy="0"/>
+        </a:xfrm>
+      </p:grpSpPr>
+      <p:sp>
+        <p:nvSpPr>
+          <p:cNvPr id="2" name="Slide Image Placeholder 1"/>
+          <p:cNvSpPr>
+            <a:spLocks noGrp="1"/>
+          </p:cNvSpPr>
+          <p:nvPr>
+            <p:ph type="sldImg" idx="2"/>
+          </p:nvPr>
+        </p:nvSpPr>
+        <p:spPr/>
+      </p:sp>
+      <p:sp>
+        <p:nvSpPr>
+          <p:cNvPr id="3" name="Notes Placeholder 2"/>
+          <p:cNvSpPr>
+            <a:spLocks noGrp="1"/>
+          </p:cNvSpPr>
+          <p:nvPr>
+            <p:ph type="body" idx="3" sz="quarter"/>
+          </p:nvPr>
+        </p:nvSpPr>
+        <p:spPr/>
+        <p:txBody>
+          <a:bodyPr/>
+          <a:lstStyle/>
+          <a:p>
+            <a:r>
+              <a:t>Cada documento tiene numero de version, fecha, autor y aprobador, y todo cambio entra por una solicitud formal donde se evalua impacto en alcance, tiempo y costo antes de aceptarla.</a:t>
+            </a:r>
+          </a:p>
+        </p:txBody>
+      </p:sp>
+      <p:sp>
+        <p:nvSpPr>
+          <p:cNvPr id="4" name="Slide Number Placeholder 3"/>
+          <p:cNvSpPr>
+            <a:spLocks noGrp="1"/>
+          </p:cNvSpPr>
+          <p:nvPr>
+            <p:ph type="sldNum" idx="5" sz="quarter"/>
+          </p:nvPr>
+        </p:nvSpPr>
+        <p:spPr/>
+      </p:sp>
+    </p:spTree>
+  </p:cSld>
+  <p:clrMapOvr>
+    <a:masterClrMapping/>
+  </p:clrMapOvr>
+</p:notes>
 </file>
 
 <file path=ppt/slideLayouts/slideLayout1.xml><?xml version="1.0" encoding="utf-8"?>
@@ -5535,13 +6158,13 @@
         <p:spPr>
           <a:xfrm>
             <a:off x="0" y="0"/>
-            <a:ext cx="12191695" cy="1170432"/>
+            <a:ext cx="12191695" cy="164592"/>
           </a:xfrm>
           <a:prstGeom prst="rect">
             <a:avLst/>
           </a:prstGeom>
           <a:solidFill>
-            <a:srgbClr val="095292"/>
+            <a:srgbClr val="269CCB"/>
           </a:solidFill>
           <a:ln>
             <a:noFill/>
@@ -5569,251 +6192,9 @@
           </a:p>
         </p:txBody>
       </p:sp>
-      <p:sp>
-        <p:nvSpPr>
-          <p:cNvPr id="3" name="Rectangle 2"/>
-          <p:cNvSpPr/>
-          <p:nvPr/>
-        </p:nvSpPr>
-        <p:spPr>
-          <a:xfrm>
-            <a:off x="0" y="1170432"/>
-            <a:ext cx="12191695" cy="41148"/>
-          </a:xfrm>
-          <a:prstGeom prst="rect">
-            <a:avLst/>
-          </a:prstGeom>
-          <a:solidFill>
-            <a:srgbClr val="FFD000"/>
-          </a:solidFill>
-          <a:ln>
-            <a:noFill/>
-          </a:ln>
-        </p:spPr>
-        <p:style>
-          <a:lnRef idx="1">
-            <a:schemeClr val="accent1"/>
-          </a:lnRef>
-          <a:fillRef idx="3">
-            <a:schemeClr val="accent1"/>
-          </a:fillRef>
-          <a:effectRef idx="2">
-            <a:schemeClr val="accent1"/>
-          </a:effectRef>
-          <a:fontRef idx="minor">
-            <a:schemeClr val="lt1"/>
-          </a:fontRef>
-        </p:style>
-        <p:txBody>
-          <a:bodyPr rtlCol="0" anchor="ctr"/>
-          <a:lstStyle/>
-          <a:p>
-            <a:pPr algn="ctr"/>
-          </a:p>
-        </p:txBody>
-      </p:sp>
-      <p:sp>
-        <p:nvSpPr>
-          <p:cNvPr id="4" name="TextBox 3"/>
-          <p:cNvSpPr txBox="1"/>
-          <p:nvPr/>
-        </p:nvSpPr>
-        <p:spPr>
-          <a:xfrm>
-            <a:off x="457200" y="164592"/>
-            <a:ext cx="11277295" cy="384048"/>
-          </a:xfrm>
-          <a:prstGeom prst="rect">
-            <a:avLst/>
-          </a:prstGeom>
-          <a:noFill/>
-        </p:spPr>
-        <p:txBody>
-          <a:bodyPr wrap="square">
-            <a:spAutoFit/>
-          </a:bodyPr>
-          <a:lstStyle/>
-          <a:p>
-            <a:r>
-              <a:rPr sz="2600" b="1" i="0">
-                <a:solidFill>
-                  <a:srgbClr val="FFFFFF"/>
-                </a:solidFill>
-                <a:latin typeface="Calibri"/>
-              </a:rPr>
-              <a:t>Herramientas de hoy</a:t>
-            </a:r>
-          </a:p>
-        </p:txBody>
-      </p:sp>
-      <p:sp>
-        <p:nvSpPr>
-          <p:cNvPr id="5" name="TextBox 4"/>
-          <p:cNvSpPr txBox="1"/>
-          <p:nvPr/>
-        </p:nvSpPr>
-        <p:spPr>
-          <a:xfrm>
-            <a:off x="457200" y="566928"/>
-            <a:ext cx="11277295" cy="411480"/>
-          </a:xfrm>
-          <a:prstGeom prst="rect">
-            <a:avLst/>
-          </a:prstGeom>
-          <a:noFill/>
-        </p:spPr>
-        <p:txBody>
-          <a:bodyPr wrap="square">
-            <a:spAutoFit/>
-          </a:bodyPr>
-          <a:lstStyle/>
-          <a:p>
-            <a:r>
-              <a:rPr sz="1400" b="0" i="0">
-                <a:solidFill>
-                  <a:srgbClr val="B8D8EE"/>
-                </a:solidFill>
-                <a:latin typeface="Calibri"/>
-              </a:rPr>
-              <a:t>Gratis · funcionan en el navegador</a:t>
-            </a:r>
-          </a:p>
-        </p:txBody>
-      </p:sp>
-      <p:sp>
-        <p:nvSpPr>
-          <p:cNvPr id="6" name="Rounded Rectangle 5"/>
-          <p:cNvSpPr/>
-          <p:nvPr/>
-        </p:nvSpPr>
-        <p:spPr>
-          <a:xfrm>
-            <a:off x="457200" y="1591056"/>
-            <a:ext cx="3624986" cy="2331720"/>
-          </a:xfrm>
-          <a:prstGeom prst="roundRect">
-            <a:avLst>
-              <a:gd name="adj" fmla="val 12000"/>
-            </a:avLst>
-          </a:prstGeom>
-          <a:solidFill>
-            <a:srgbClr val="F2F2F2"/>
-          </a:solidFill>
-          <a:ln>
-            <a:noFill/>
-          </a:ln>
-        </p:spPr>
-        <p:style>
-          <a:lnRef idx="1">
-            <a:schemeClr val="accent1"/>
-          </a:lnRef>
-          <a:fillRef idx="3">
-            <a:schemeClr val="accent1"/>
-          </a:fillRef>
-          <a:effectRef idx="2">
-            <a:schemeClr val="accent1"/>
-          </a:effectRef>
-          <a:fontRef idx="minor">
-            <a:schemeClr val="lt1"/>
-          </a:fontRef>
-        </p:style>
-        <p:txBody>
-          <a:bodyPr rtlCol="0" anchor="ctr"/>
-          <a:lstStyle/>
-          <a:p>
-            <a:pPr algn="ctr"/>
-          </a:p>
-        </p:txBody>
-      </p:sp>
-      <p:sp>
-        <p:nvSpPr>
-          <p:cNvPr id="7" name="Rectangle 6"/>
-          <p:cNvSpPr/>
-          <p:nvPr/>
-        </p:nvSpPr>
-        <p:spPr>
-          <a:xfrm>
-            <a:off x="457200" y="1591056"/>
-            <a:ext cx="3624986" cy="64008"/>
-          </a:xfrm>
-          <a:prstGeom prst="rect">
-            <a:avLst/>
-          </a:prstGeom>
-          <a:solidFill>
-            <a:srgbClr val="095292"/>
-          </a:solidFill>
-          <a:ln>
-            <a:noFill/>
-          </a:ln>
-        </p:spPr>
-        <p:style>
-          <a:lnRef idx="1">
-            <a:schemeClr val="accent1"/>
-          </a:lnRef>
-          <a:fillRef idx="3">
-            <a:schemeClr val="accent1"/>
-          </a:fillRef>
-          <a:effectRef idx="2">
-            <a:schemeClr val="accent1"/>
-          </a:effectRef>
-          <a:fontRef idx="minor">
-            <a:schemeClr val="lt1"/>
-          </a:fontRef>
-        </p:style>
-        <p:txBody>
-          <a:bodyPr rtlCol="0" anchor="ctr"/>
-          <a:lstStyle/>
-          <a:p>
-            <a:pPr algn="ctr"/>
-          </a:p>
-        </p:txBody>
-      </p:sp>
-      <p:sp>
-        <p:nvSpPr>
-          <p:cNvPr id="8" name="Rectangle 7"/>
-          <p:cNvSpPr/>
-          <p:nvPr/>
-        </p:nvSpPr>
-        <p:spPr>
-          <a:xfrm>
-            <a:off x="457200" y="1655064"/>
-            <a:ext cx="3624986" cy="27432"/>
-          </a:xfrm>
-          <a:prstGeom prst="rect">
-            <a:avLst/>
-          </a:prstGeom>
-          <a:solidFill>
-            <a:srgbClr val="FFD000"/>
-          </a:solidFill>
-          <a:ln>
-            <a:noFill/>
-          </a:ln>
-        </p:spPr>
-        <p:style>
-          <a:lnRef idx="1">
-            <a:schemeClr val="accent1"/>
-          </a:lnRef>
-          <a:fillRef idx="3">
-            <a:schemeClr val="accent1"/>
-          </a:fillRef>
-          <a:effectRef idx="2">
-            <a:schemeClr val="accent1"/>
-          </a:effectRef>
-          <a:fontRef idx="minor">
-            <a:schemeClr val="lt1"/>
-          </a:fontRef>
-        </p:style>
-        <p:txBody>
-          <a:bodyPr rtlCol="0" anchor="ctr"/>
-          <a:lstStyle/>
-          <a:p>
-            <a:pPr algn="ctr"/>
-          </a:p>
-        </p:txBody>
-      </p:sp>
       <p:pic>
         <p:nvPicPr>
-          <p:cNvPr id="9" name="Picture 8" descr="drawio.png"/>
+          <p:cNvPr id="3" name="Picture 2" descr="logo_uniajc_color.png"/>
           <p:cNvPicPr>
             <a:picLocks noChangeAspect="1"/>
           </p:cNvPicPr>
@@ -5827,8 +6208,8 @@
         </p:blipFill>
         <p:spPr>
           <a:xfrm>
-            <a:off x="1643329" y="1847087"/>
-            <a:ext cx="1252728" cy="1252728"/>
+            <a:off x="10271455" y="5998464"/>
+            <a:ext cx="1463040" cy="643233"/>
           </a:xfrm>
           <a:prstGeom prst="rect">
             <a:avLst/>
@@ -5837,14 +6218,14 @@
       </p:pic>
       <p:sp>
         <p:nvSpPr>
-          <p:cNvPr id="10" name="TextBox 9"/>
+          <p:cNvPr id="4" name="TextBox 3"/>
           <p:cNvSpPr txBox="1"/>
           <p:nvPr/>
         </p:nvSpPr>
         <p:spPr>
           <a:xfrm>
-            <a:off x="530352" y="3191256"/>
-            <a:ext cx="3478682" cy="621792"/>
+            <a:off x="457200" y="1737360"/>
+            <a:ext cx="11277295" cy="1097280"/>
           </a:xfrm>
           <a:prstGeom prst="rect">
             <a:avLst/>
@@ -5852,456 +6233,32 @@
           <a:noFill/>
         </p:spPr>
         <p:txBody>
-          <a:bodyPr wrap="square" anchor="t"/>
+          <a:bodyPr wrap="square" anchor="ctr"/>
           <a:lstStyle/>
           <a:p>
             <a:pPr algn="ctr"/>
             <a:r>
-              <a:rPr sz="1300" b="1" i="0">
+              <a:rPr sz="3400" b="1" i="0">
                 <a:solidFill>
                   <a:srgbClr val="095292"/>
                 </a:solidFill>
                 <a:latin typeface="Calibri"/>
               </a:rPr>
-              <a:t>Draw.Io</a:t>
-            </a:r>
-          </a:p>
-          <a:p>
-            <a:pPr algn="ctr">
-              <a:spcBef>
-                <a:spcPts val="200"/>
-              </a:spcBef>
-            </a:pPr>
-            <a:r>
-              <a:rPr sz="1000" b="0" i="0">
-                <a:solidFill>
-                  <a:srgbClr val="666666"/>
-                </a:solidFill>
-                <a:latin typeface="Calibri"/>
-              </a:rPr>
-              <a:t>Diagramas UML y de contexto</a:t>
-            </a:r>
-          </a:p>
-        </p:txBody>
-      </p:sp>
-      <p:sp>
-        <p:nvSpPr>
-          <p:cNvPr id="11" name="Rounded Rectangle 10"/>
-          <p:cNvSpPr/>
-          <p:nvPr/>
-        </p:nvSpPr>
-        <p:spPr>
-          <a:xfrm>
-            <a:off x="4283354" y="1591056"/>
-            <a:ext cx="3624986" cy="2331720"/>
-          </a:xfrm>
-          <a:prstGeom prst="roundRect">
-            <a:avLst>
-              <a:gd name="adj" fmla="val 12000"/>
-            </a:avLst>
-          </a:prstGeom>
-          <a:solidFill>
-            <a:srgbClr val="F2F2F2"/>
-          </a:solidFill>
-          <a:ln>
-            <a:noFill/>
-          </a:ln>
-        </p:spPr>
-        <p:style>
-          <a:lnRef idx="1">
-            <a:schemeClr val="accent1"/>
-          </a:lnRef>
-          <a:fillRef idx="3">
-            <a:schemeClr val="accent1"/>
-          </a:fillRef>
-          <a:effectRef idx="2">
-            <a:schemeClr val="accent1"/>
-          </a:effectRef>
-          <a:fontRef idx="minor">
-            <a:schemeClr val="lt1"/>
-          </a:fontRef>
-        </p:style>
-        <p:txBody>
-          <a:bodyPr rtlCol="0" anchor="ctr"/>
-          <a:lstStyle/>
-          <a:p>
-            <a:pPr algn="ctr"/>
-          </a:p>
-        </p:txBody>
-      </p:sp>
-      <p:sp>
-        <p:nvSpPr>
-          <p:cNvPr id="12" name="Rectangle 11"/>
-          <p:cNvSpPr/>
-          <p:nvPr/>
-        </p:nvSpPr>
-        <p:spPr>
-          <a:xfrm>
-            <a:off x="4283354" y="1591056"/>
-            <a:ext cx="3624986" cy="64008"/>
-          </a:xfrm>
-          <a:prstGeom prst="rect">
-            <a:avLst/>
-          </a:prstGeom>
-          <a:solidFill>
-            <a:srgbClr val="095292"/>
-          </a:solidFill>
-          <a:ln>
-            <a:noFill/>
-          </a:ln>
-        </p:spPr>
-        <p:style>
-          <a:lnRef idx="1">
-            <a:schemeClr val="accent1"/>
-          </a:lnRef>
-          <a:fillRef idx="3">
-            <a:schemeClr val="accent1"/>
-          </a:fillRef>
-          <a:effectRef idx="2">
-            <a:schemeClr val="accent1"/>
-          </a:effectRef>
-          <a:fontRef idx="minor">
-            <a:schemeClr val="lt1"/>
-          </a:fontRef>
-        </p:style>
-        <p:txBody>
-          <a:bodyPr rtlCol="0" anchor="ctr"/>
-          <a:lstStyle/>
-          <a:p>
-            <a:pPr algn="ctr"/>
-          </a:p>
-        </p:txBody>
-      </p:sp>
-      <p:sp>
-        <p:nvSpPr>
-          <p:cNvPr id="13" name="Rectangle 12"/>
-          <p:cNvSpPr/>
-          <p:nvPr/>
-        </p:nvSpPr>
-        <p:spPr>
-          <a:xfrm>
-            <a:off x="4283354" y="1655064"/>
-            <a:ext cx="3624986" cy="27432"/>
-          </a:xfrm>
-          <a:prstGeom prst="rect">
-            <a:avLst/>
-          </a:prstGeom>
-          <a:solidFill>
-            <a:srgbClr val="FFD000"/>
-          </a:solidFill>
-          <a:ln>
-            <a:noFill/>
-          </a:ln>
-        </p:spPr>
-        <p:style>
-          <a:lnRef idx="1">
-            <a:schemeClr val="accent1"/>
-          </a:lnRef>
-          <a:fillRef idx="3">
-            <a:schemeClr val="accent1"/>
-          </a:fillRef>
-          <a:effectRef idx="2">
-            <a:schemeClr val="accent1"/>
-          </a:effectRef>
-          <a:fontRef idx="minor">
-            <a:schemeClr val="lt1"/>
-          </a:fontRef>
-        </p:style>
-        <p:txBody>
-          <a:bodyPr rtlCol="0" anchor="ctr"/>
-          <a:lstStyle/>
-          <a:p>
-            <a:pPr algn="ctr"/>
-          </a:p>
-        </p:txBody>
-      </p:sp>
-      <p:pic>
-        <p:nvPicPr>
-          <p:cNvPr id="14" name="Picture 13" descr="google_docs.png"/>
-          <p:cNvPicPr>
-            <a:picLocks noChangeAspect="1"/>
-          </p:cNvPicPr>
-          <p:nvPr/>
-        </p:nvPicPr>
-        <p:blipFill>
-          <a:blip r:embed="rId3"/>
-          <a:stretch>
-            <a:fillRect/>
-          </a:stretch>
-        </p:blipFill>
-        <p:spPr>
-          <a:xfrm>
-            <a:off x="5469483" y="1847087"/>
-            <a:ext cx="1252728" cy="1252728"/>
-          </a:xfrm>
-          <a:prstGeom prst="rect">
-            <a:avLst/>
-          </a:prstGeom>
-        </p:spPr>
-      </p:pic>
-      <p:sp>
-        <p:nvSpPr>
-          <p:cNvPr id="15" name="TextBox 14"/>
+              <a:t>Clase 3 · Metodologias tradicionales</a:t>
+            </a:r>
+          </a:p>
+        </p:txBody>
+      </p:sp>
+      <p:sp>
+        <p:nvSpPr>
+          <p:cNvPr id="5" name="TextBox 4"/>
           <p:cNvSpPr txBox="1"/>
           <p:nvPr/>
         </p:nvSpPr>
         <p:spPr>
           <a:xfrm>
-            <a:off x="4356506" y="3191256"/>
-            <a:ext cx="3478682" cy="621792"/>
-          </a:xfrm>
-          <a:prstGeom prst="rect">
-            <a:avLst/>
-          </a:prstGeom>
-          <a:noFill/>
-        </p:spPr>
-        <p:txBody>
-          <a:bodyPr wrap="square" anchor="t"/>
-          <a:lstStyle/>
-          <a:p>
-            <a:pPr algn="ctr"/>
-            <a:r>
-              <a:rPr sz="1300" b="1" i="0">
-                <a:solidFill>
-                  <a:srgbClr val="095292"/>
-                </a:solidFill>
-                <a:latin typeface="Calibri"/>
-              </a:rPr>
-              <a:t>google docs</a:t>
-            </a:r>
-          </a:p>
-          <a:p>
-            <a:pPr algn="ctr">
-              <a:spcBef>
-                <a:spcPts val="200"/>
-              </a:spcBef>
-            </a:pPr>
-            <a:r>
-              <a:rPr sz="1000" b="0" i="0">
-                <a:solidFill>
-                  <a:srgbClr val="666666"/>
-                </a:solidFill>
-                <a:latin typeface="Calibri"/>
-              </a:rPr>
-              <a:t>Documentos del paquete de diseño</a:t>
-            </a:r>
-          </a:p>
-        </p:txBody>
-      </p:sp>
-      <p:sp>
-        <p:nvSpPr>
-          <p:cNvPr id="16" name="Rounded Rectangle 15"/>
-          <p:cNvSpPr/>
-          <p:nvPr/>
-        </p:nvSpPr>
-        <p:spPr>
-          <a:xfrm>
-            <a:off x="8109508" y="1591056"/>
-            <a:ext cx="3624986" cy="2331720"/>
-          </a:xfrm>
-          <a:prstGeom prst="roundRect">
-            <a:avLst>
-              <a:gd name="adj" fmla="val 12000"/>
-            </a:avLst>
-          </a:prstGeom>
-          <a:solidFill>
-            <a:srgbClr val="F2F2F2"/>
-          </a:solidFill>
-          <a:ln>
-            <a:noFill/>
-          </a:ln>
-        </p:spPr>
-        <p:style>
-          <a:lnRef idx="1">
-            <a:schemeClr val="accent1"/>
-          </a:lnRef>
-          <a:fillRef idx="3">
-            <a:schemeClr val="accent1"/>
-          </a:fillRef>
-          <a:effectRef idx="2">
-            <a:schemeClr val="accent1"/>
-          </a:effectRef>
-          <a:fontRef idx="minor">
-            <a:schemeClr val="lt1"/>
-          </a:fontRef>
-        </p:style>
-        <p:txBody>
-          <a:bodyPr rtlCol="0" anchor="ctr"/>
-          <a:lstStyle/>
-          <a:p>
-            <a:pPr algn="ctr"/>
-          </a:p>
-        </p:txBody>
-      </p:sp>
-      <p:sp>
-        <p:nvSpPr>
-          <p:cNvPr id="17" name="Rectangle 16"/>
-          <p:cNvSpPr/>
-          <p:nvPr/>
-        </p:nvSpPr>
-        <p:spPr>
-          <a:xfrm>
-            <a:off x="8109508" y="1591056"/>
-            <a:ext cx="3624986" cy="64008"/>
-          </a:xfrm>
-          <a:prstGeom prst="rect">
-            <a:avLst/>
-          </a:prstGeom>
-          <a:solidFill>
-            <a:srgbClr val="095292"/>
-          </a:solidFill>
-          <a:ln>
-            <a:noFill/>
-          </a:ln>
-        </p:spPr>
-        <p:style>
-          <a:lnRef idx="1">
-            <a:schemeClr val="accent1"/>
-          </a:lnRef>
-          <a:fillRef idx="3">
-            <a:schemeClr val="accent1"/>
-          </a:fillRef>
-          <a:effectRef idx="2">
-            <a:schemeClr val="accent1"/>
-          </a:effectRef>
-          <a:fontRef idx="minor">
-            <a:schemeClr val="lt1"/>
-          </a:fontRef>
-        </p:style>
-        <p:txBody>
-          <a:bodyPr rtlCol="0" anchor="ctr"/>
-          <a:lstStyle/>
-          <a:p>
-            <a:pPr algn="ctr"/>
-          </a:p>
-        </p:txBody>
-      </p:sp>
-      <p:sp>
-        <p:nvSpPr>
-          <p:cNvPr id="18" name="Rectangle 17"/>
-          <p:cNvSpPr/>
-          <p:nvPr/>
-        </p:nvSpPr>
-        <p:spPr>
-          <a:xfrm>
-            <a:off x="8109508" y="1655064"/>
-            <a:ext cx="3624986" cy="27432"/>
-          </a:xfrm>
-          <a:prstGeom prst="rect">
-            <a:avLst/>
-          </a:prstGeom>
-          <a:solidFill>
-            <a:srgbClr val="FFD000"/>
-          </a:solidFill>
-          <a:ln>
-            <a:noFill/>
-          </a:ln>
-        </p:spPr>
-        <p:style>
-          <a:lnRef idx="1">
-            <a:schemeClr val="accent1"/>
-          </a:lnRef>
-          <a:fillRef idx="3">
-            <a:schemeClr val="accent1"/>
-          </a:fillRef>
-          <a:effectRef idx="2">
-            <a:schemeClr val="accent1"/>
-          </a:effectRef>
-          <a:fontRef idx="minor">
-            <a:schemeClr val="lt1"/>
-          </a:fontRef>
-        </p:style>
-        <p:txBody>
-          <a:bodyPr rtlCol="0" anchor="ctr"/>
-          <a:lstStyle/>
-          <a:p>
-            <a:pPr algn="ctr"/>
-          </a:p>
-        </p:txBody>
-      </p:sp>
-      <p:pic>
-        <p:nvPicPr>
-          <p:cNvPr id="19" name="Picture 18" descr="examlab.png"/>
-          <p:cNvPicPr>
-            <a:picLocks noChangeAspect="1"/>
-          </p:cNvPicPr>
-          <p:nvPr/>
-        </p:nvPicPr>
-        <p:blipFill>
-          <a:blip r:embed="rId4"/>
-          <a:stretch>
-            <a:fillRect/>
-          </a:stretch>
-        </p:blipFill>
-        <p:spPr>
-          <a:xfrm>
-            <a:off x="9295638" y="1847087"/>
-            <a:ext cx="1252728" cy="1252728"/>
-          </a:xfrm>
-          <a:prstGeom prst="rect">
-            <a:avLst/>
-          </a:prstGeom>
-        </p:spPr>
-      </p:pic>
-      <p:sp>
-        <p:nvSpPr>
-          <p:cNvPr id="20" name="TextBox 19"/>
-          <p:cNvSpPr txBox="1"/>
-          <p:nvPr/>
-        </p:nvSpPr>
-        <p:spPr>
-          <a:xfrm>
-            <a:off x="8182660" y="3191256"/>
-            <a:ext cx="3478682" cy="621792"/>
-          </a:xfrm>
-          <a:prstGeom prst="rect">
-            <a:avLst/>
-          </a:prstGeom>
-          <a:noFill/>
-        </p:spPr>
-        <p:txBody>
-          <a:bodyPr wrap="square" anchor="t"/>
-          <a:lstStyle/>
-          <a:p>
-            <a:pPr algn="ctr"/>
-            <a:r>
-              <a:rPr sz="1300" b="1" i="0">
-                <a:solidFill>
-                  <a:srgbClr val="095292"/>
-                </a:solidFill>
-                <a:latin typeface="Calibri"/>
-              </a:rPr>
-              <a:t>la plataforma del curso</a:t>
-            </a:r>
-          </a:p>
-          <a:p>
-            <a:pPr algn="ctr">
-              <a:spcBef>
-                <a:spcPts val="200"/>
-              </a:spcBef>
-            </a:pPr>
-            <a:r>
-              <a:rPr sz="1000" b="0" i="0">
-                <a:solidFill>
-                  <a:srgbClr val="666666"/>
-                </a:solidFill>
-                <a:latin typeface="Calibri"/>
-              </a:rPr>
-              <a:t>Entrega del taller · en la fecha que indique el docente</a:t>
-            </a:r>
-          </a:p>
-        </p:txBody>
-      </p:sp>
-      <p:sp>
-        <p:nvSpPr>
-          <p:cNvPr id="21" name="TextBox 20"/>
-          <p:cNvSpPr txBox="1"/>
-          <p:nvPr/>
-        </p:nvSpPr>
-        <p:spPr>
-          <a:xfrm>
-            <a:off x="11185855" y="6473952"/>
-            <a:ext cx="640080" cy="274320"/>
+            <a:off x="457200" y="3017520"/>
+            <a:ext cx="11277295" cy="1645920"/>
           </a:xfrm>
           <a:prstGeom prst="rect">
             <a:avLst/>
@@ -6314,141 +6271,65 @@
           </a:bodyPr>
           <a:lstStyle/>
           <a:p>
-            <a:pPr algn="r"/>
-            <a:r>
-              <a:rPr sz="1100" b="0" i="0">
-                <a:solidFill>
-                  <a:srgbClr val="666666"/>
-                </a:solidFill>
-                <a:latin typeface="Calibri"/>
-              </a:rPr>
-              <a:t>14</a:t>
-            </a:r>
-          </a:p>
-        </p:txBody>
-      </p:sp>
-    </p:spTree>
-  </p:cSld>
-  <p:clrMapOvr>
-    <a:masterClrMapping/>
-  </p:clrMapOvr>
-</p:sld>
-</file>
-
-<file path=ppt/slides/slide15.xml><?xml version="1.0" encoding="utf-8"?>
-<p:sld xmlns:a="http://schemas.openxmlformats.org/drawingml/2006/main" xmlns:p="http://schemas.openxmlformats.org/presentationml/2006/main" xmlns:r="http://schemas.openxmlformats.org/officeDocument/2006/relationships">
-  <p:cSld>
-    <p:bg>
-      <p:bgPr>
-        <a:solidFill>
-          <a:srgbClr val="FFFFFF"/>
-        </a:solidFill>
-        <a:effectLst/>
-      </p:bgPr>
-    </p:bg>
-    <p:spTree>
-      <p:nvGrpSpPr>
-        <p:cNvPr id="1" name=""/>
-        <p:cNvGrpSpPr/>
-        <p:nvPr/>
-      </p:nvGrpSpPr>
-      <p:grpSpPr/>
-      <p:sp>
-        <p:nvSpPr>
-          <p:cNvPr id="2" name="Rectangle 1"/>
-          <p:cNvSpPr/>
-          <p:nvPr/>
-        </p:nvSpPr>
-        <p:spPr>
-          <a:xfrm>
-            <a:off x="0" y="0"/>
-            <a:ext cx="12191695" cy="960120"/>
-          </a:xfrm>
-          <a:prstGeom prst="rect">
-            <a:avLst/>
-          </a:prstGeom>
-          <a:solidFill>
-            <a:srgbClr val="095292"/>
-          </a:solidFill>
-          <a:ln>
-            <a:noFill/>
-          </a:ln>
-        </p:spPr>
-        <p:style>
-          <a:lnRef idx="1">
-            <a:schemeClr val="accent1"/>
-          </a:lnRef>
-          <a:fillRef idx="3">
-            <a:schemeClr val="accent1"/>
-          </a:fillRef>
-          <a:effectRef idx="2">
-            <a:schemeClr val="accent1"/>
-          </a:effectRef>
-          <a:fontRef idx="minor">
-            <a:schemeClr val="lt1"/>
-          </a:fontRef>
-        </p:style>
-        <p:txBody>
-          <a:bodyPr rtlCol="0" anchor="ctr"/>
-          <a:lstStyle/>
-          <a:p>
-            <a:pPr algn="ctr"/>
-          </a:p>
-        </p:txBody>
-      </p:sp>
-      <p:sp>
-        <p:nvSpPr>
-          <p:cNvPr id="3" name="Rectangle 2"/>
-          <p:cNvSpPr/>
-          <p:nvPr/>
-        </p:nvSpPr>
-        <p:spPr>
-          <a:xfrm>
-            <a:off x="0" y="960120"/>
-            <a:ext cx="12191695" cy="41148"/>
-          </a:xfrm>
-          <a:prstGeom prst="rect">
-            <a:avLst/>
-          </a:prstGeom>
-          <a:solidFill>
-            <a:srgbClr val="FFD000"/>
-          </a:solidFill>
-          <a:ln>
-            <a:noFill/>
-          </a:ln>
-        </p:spPr>
-        <p:style>
-          <a:lnRef idx="1">
-            <a:schemeClr val="accent1"/>
-          </a:lnRef>
-          <a:fillRef idx="3">
-            <a:schemeClr val="accent1"/>
-          </a:fillRef>
-          <a:effectRef idx="2">
-            <a:schemeClr val="accent1"/>
-          </a:effectRef>
-          <a:fontRef idx="minor">
-            <a:schemeClr val="lt1"/>
-          </a:fontRef>
-        </p:style>
-        <p:txBody>
-          <a:bodyPr rtlCol="0" anchor="ctr"/>
-          <a:lstStyle/>
-          <a:p>
-            <a:pPr algn="ctr"/>
-          </a:p>
-        </p:txBody>
-      </p:sp>
-      <p:sp>
-        <p:nvSpPr>
-          <p:cNvPr id="4" name="TextBox 3"/>
+            <a:pPr algn="ctr">
+              <a:spcAft>
+                <a:spcPts val="600"/>
+              </a:spcAft>
+            </a:pPr>
+            <a:r>
+              <a:rPr sz="1600" b="0" i="0">
+                <a:solidFill>
+                  <a:srgbClr val="333333"/>
+                </a:solidFill>
+                <a:latin typeface="Calibri"/>
+              </a:rPr>
+              <a:t>Cascada y modelo en V: cuando el plano se firma antes de levantar el muro</a:t>
+            </a:r>
+          </a:p>
+          <a:p>
+            <a:pPr algn="ctr">
+              <a:spcAft>
+                <a:spcPts val="600"/>
+              </a:spcAft>
+            </a:pPr>
+            <a:r>
+              <a:rPr sz="1600" b="0" i="0">
+                <a:solidFill>
+                  <a:srgbClr val="333333"/>
+                </a:solidFill>
+                <a:latin typeface="Calibri"/>
+              </a:rPr>
+              <a:t>Repasen las laminas de teoria: cada concepto esta completo</a:t>
+            </a:r>
+          </a:p>
+          <a:p>
+            <a:pPr algn="ctr">
+              <a:spcAft>
+                <a:spcPts val="600"/>
+              </a:spcAft>
+            </a:pPr>
+            <a:r>
+              <a:rPr sz="1600" b="0" i="0">
+                <a:solidFill>
+                  <a:srgbClr val="333333"/>
+                </a:solidFill>
+                <a:latin typeface="Calibri"/>
+              </a:rPr>
+              <a:t>Siguiente clase: continuamos con el siguiente tema</a:t>
+            </a:r>
+          </a:p>
+        </p:txBody>
+      </p:sp>
+      <p:sp>
+        <p:nvSpPr>
+          <p:cNvPr id="6" name="TextBox 5"/>
           <p:cNvSpPr txBox="1"/>
           <p:nvPr/>
         </p:nvSpPr>
         <p:spPr>
           <a:xfrm>
-            <a:off x="457200" y="164592"/>
-            <a:ext cx="11277295" cy="502920"/>
+            <a:off x="457200" y="4754880"/>
+            <a:ext cx="11277295" cy="640080"/>
           </a:xfrm>
           <a:prstGeom prst="rect">
             <a:avLst/>
@@ -6461,2430 +6342,15 @@
           </a:bodyPr>
           <a:lstStyle/>
           <a:p>
-            <a:r>
-              <a:rPr sz="2600" b="1" i="0">
-                <a:solidFill>
-                  <a:srgbClr val="FFFFFF"/>
-                </a:solidFill>
-                <a:latin typeface="Calibri"/>
-              </a:rPr>
-              <a:t>Taller PI — por que importa</a:t>
-            </a:r>
-          </a:p>
-        </p:txBody>
-      </p:sp>
-      <p:sp>
-        <p:nvSpPr>
-          <p:cNvPr id="5" name="TextBox 4"/>
-          <p:cNvSpPr txBox="1"/>
-          <p:nvPr/>
-        </p:nvSpPr>
-        <p:spPr>
-          <a:xfrm>
-            <a:off x="457200" y="1170432"/>
-            <a:ext cx="11277295" cy="5230368"/>
-          </a:xfrm>
-          <a:prstGeom prst="rect">
-            <a:avLst/>
-          </a:prstGeom>
-          <a:noFill/>
-        </p:spPr>
-        <p:txBody>
-          <a:bodyPr wrap="square">
-            <a:spAutoFit/>
-          </a:bodyPr>
-          <a:lstStyle/>
-          <a:p>
-            <a:pPr>
-              <a:spcAft>
-                <a:spcPts val="800"/>
-              </a:spcAft>
-            </a:pPr>
-            <a:r>
-              <a:rPr sz="2000" b="0" i="0">
-                <a:solidFill>
-                  <a:srgbClr val="333333"/>
-                </a:solidFill>
-                <a:latin typeface="Calibri"/>
-              </a:rPr>
-              <a:t>–   </a:t>
-            </a:r>
+            <a:pPr algn="ctr"/>
             <a:r>
               <a:rPr sz="2000" b="1" i="0">
                 <a:solidFill>
-                  <a:srgbClr val="333333"/>
-                </a:solidFill>
-                <a:latin typeface="Calibri"/>
-              </a:rPr>
-              <a:t>Por que importa al PI:</a:t>
-            </a:r>
-            <a:r>
-              <a:rPr sz="2000" b="0" i="0">
-                <a:solidFill>
-                  <a:srgbClr val="333333"/>
-                </a:solidFill>
-                <a:latin typeface="Calibri"/>
-              </a:rPr>
-              <a:t> si Huellitas exige aprobar todo el diseño antes de que Programacion II escriba una linea, este es exactamente el paquete de documentos que el equipo tendria que entregar y defender.</a:t>
-            </a:r>
-          </a:p>
-          <a:p>
-            <a:pPr>
-              <a:spcAft>
-                <a:spcPts val="800"/>
-              </a:spcAft>
-            </a:pPr>
-            <a:r>
-              <a:rPr sz="2000" b="0" i="0">
-                <a:solidFill>
-                  <a:srgbClr val="333333"/>
-                </a:solidFill>
-                <a:latin typeface="Calibri"/>
-              </a:rPr>
-              <a:t>–   La clase pasada quedo el mapa de fases; hoy se aprende a cerrar una fase de manera formal, con version, aprobacion y trazabilidad hacia las pruebas.</a:t>
-            </a:r>
-          </a:p>
-          <a:p>
-            <a:pPr>
-              <a:spcAft>
-                <a:spcPts val="800"/>
-              </a:spcAft>
-            </a:pPr>
-            <a:r>
-              <a:rPr sz="2000" b="0" i="0">
-                <a:solidFill>
-                  <a:srgbClr val="333333"/>
-                </a:solidFill>
-                <a:latin typeface="Calibri"/>
-              </a:rPr>
-              <a:t>–   Este es el enfoque que sostiene la ruta del estudiante que solo cursa Seminario: su producto final es un documento de diseño formal, que es lo que en la industria se contrata y se factura.</a:t>
-            </a:r>
-          </a:p>
-        </p:txBody>
-      </p:sp>
-      <p:sp>
-        <p:nvSpPr>
-          <p:cNvPr id="6" name="TextBox 5"/>
-          <p:cNvSpPr txBox="1"/>
-          <p:nvPr/>
-        </p:nvSpPr>
-        <p:spPr>
-          <a:xfrm>
-            <a:off x="11185855" y="6473952"/>
-            <a:ext cx="640080" cy="274320"/>
-          </a:xfrm>
-          <a:prstGeom prst="rect">
-            <a:avLst/>
-          </a:prstGeom>
-          <a:noFill/>
-        </p:spPr>
-        <p:txBody>
-          <a:bodyPr wrap="square">
-            <a:spAutoFit/>
-          </a:bodyPr>
-          <a:lstStyle/>
-          <a:p>
-            <a:pPr algn="r"/>
-            <a:r>
-              <a:rPr sz="1100" b="0" i="0">
-                <a:solidFill>
-                  <a:srgbClr val="666666"/>
-                </a:solidFill>
-                <a:latin typeface="Calibri"/>
-              </a:rPr>
-              <a:t>15</a:t>
-            </a:r>
-          </a:p>
-        </p:txBody>
-      </p:sp>
-    </p:spTree>
-  </p:cSld>
-  <p:clrMapOvr>
-    <a:masterClrMapping/>
-  </p:clrMapOvr>
-</p:sld>
-</file>
-
-<file path=ppt/slides/slide16.xml><?xml version="1.0" encoding="utf-8"?>
-<p:sld xmlns:a="http://schemas.openxmlformats.org/drawingml/2006/main" xmlns:p="http://schemas.openxmlformats.org/presentationml/2006/main" xmlns:r="http://schemas.openxmlformats.org/officeDocument/2006/relationships">
-  <p:cSld>
-    <p:bg>
-      <p:bgPr>
-        <a:solidFill>
-          <a:srgbClr val="FFFFFF"/>
-        </a:solidFill>
-        <a:effectLst/>
-      </p:bgPr>
-    </p:bg>
-    <p:spTree>
-      <p:nvGrpSpPr>
-        <p:cNvPr id="1" name=""/>
-        <p:cNvGrpSpPr/>
-        <p:nvPr/>
-      </p:nvGrpSpPr>
-      <p:grpSpPr/>
-      <p:sp>
-        <p:nvSpPr>
-          <p:cNvPr id="2" name="Rectangle 1"/>
-          <p:cNvSpPr/>
-          <p:nvPr/>
-        </p:nvSpPr>
-        <p:spPr>
-          <a:xfrm>
-            <a:off x="0" y="0"/>
-            <a:ext cx="12191695" cy="960120"/>
-          </a:xfrm>
-          <a:prstGeom prst="rect">
-            <a:avLst/>
-          </a:prstGeom>
-          <a:solidFill>
-            <a:srgbClr val="095292"/>
-          </a:solidFill>
-          <a:ln>
-            <a:noFill/>
-          </a:ln>
-        </p:spPr>
-        <p:style>
-          <a:lnRef idx="1">
-            <a:schemeClr val="accent1"/>
-          </a:lnRef>
-          <a:fillRef idx="3">
-            <a:schemeClr val="accent1"/>
-          </a:fillRef>
-          <a:effectRef idx="2">
-            <a:schemeClr val="accent1"/>
-          </a:effectRef>
-          <a:fontRef idx="minor">
-            <a:schemeClr val="lt1"/>
-          </a:fontRef>
-        </p:style>
-        <p:txBody>
-          <a:bodyPr rtlCol="0" anchor="ctr"/>
-          <a:lstStyle/>
-          <a:p>
-            <a:pPr algn="ctr"/>
-          </a:p>
-        </p:txBody>
-      </p:sp>
-      <p:sp>
-        <p:nvSpPr>
-          <p:cNvPr id="3" name="Rectangle 2"/>
-          <p:cNvSpPr/>
-          <p:nvPr/>
-        </p:nvSpPr>
-        <p:spPr>
-          <a:xfrm>
-            <a:off x="0" y="960120"/>
-            <a:ext cx="12191695" cy="41148"/>
-          </a:xfrm>
-          <a:prstGeom prst="rect">
-            <a:avLst/>
-          </a:prstGeom>
-          <a:solidFill>
-            <a:srgbClr val="FFD000"/>
-          </a:solidFill>
-          <a:ln>
-            <a:noFill/>
-          </a:ln>
-        </p:spPr>
-        <p:style>
-          <a:lnRef idx="1">
-            <a:schemeClr val="accent1"/>
-          </a:lnRef>
-          <a:fillRef idx="3">
-            <a:schemeClr val="accent1"/>
-          </a:fillRef>
-          <a:effectRef idx="2">
-            <a:schemeClr val="accent1"/>
-          </a:effectRef>
-          <a:fontRef idx="minor">
-            <a:schemeClr val="lt1"/>
-          </a:fontRef>
-        </p:style>
-        <p:txBody>
-          <a:bodyPr rtlCol="0" anchor="ctr"/>
-          <a:lstStyle/>
-          <a:p>
-            <a:pPr algn="ctr"/>
-          </a:p>
-        </p:txBody>
-      </p:sp>
-      <p:sp>
-        <p:nvSpPr>
-          <p:cNvPr id="4" name="TextBox 3"/>
-          <p:cNvSpPr txBox="1"/>
-          <p:nvPr/>
-        </p:nvSpPr>
-        <p:spPr>
-          <a:xfrm>
-            <a:off x="457200" y="164592"/>
-            <a:ext cx="11277295" cy="502920"/>
-          </a:xfrm>
-          <a:prstGeom prst="rect">
-            <a:avLst/>
-          </a:prstGeom>
-          <a:noFill/>
-        </p:spPr>
-        <p:txBody>
-          <a:bodyPr wrap="square">
-            <a:spAutoFit/>
-          </a:bodyPr>
-          <a:lstStyle/>
-          <a:p>
-            <a:r>
-              <a:rPr sz="2600" b="1" i="0">
-                <a:solidFill>
-                  <a:srgbClr val="FFFFFF"/>
-                </a:solidFill>
-                <a:latin typeface="Calibri"/>
-              </a:rPr>
-              <a:t>Taller PI — punto de partida</a:t>
-            </a:r>
-          </a:p>
-        </p:txBody>
-      </p:sp>
-      <p:sp>
-        <p:nvSpPr>
-          <p:cNvPr id="5" name="TextBox 4"/>
-          <p:cNvSpPr txBox="1"/>
-          <p:nvPr/>
-        </p:nvSpPr>
-        <p:spPr>
-          <a:xfrm>
-            <a:off x="457200" y="1170432"/>
-            <a:ext cx="11277295" cy="5230368"/>
-          </a:xfrm>
-          <a:prstGeom prst="rect">
-            <a:avLst/>
-          </a:prstGeom>
-          <a:noFill/>
-        </p:spPr>
-        <p:txBody>
-          <a:bodyPr wrap="square">
-            <a:spAutoFit/>
-          </a:bodyPr>
-          <a:lstStyle/>
-          <a:p>
-            <a:pPr>
-              <a:spcAft>
-                <a:spcPts val="800"/>
-              </a:spcAft>
-            </a:pPr>
-            <a:r>
-              <a:rPr sz="2000" b="0" i="0">
-                <a:solidFill>
-                  <a:srgbClr val="333333"/>
-                </a:solidFill>
-                <a:latin typeface="Calibri"/>
-              </a:rPr>
-              <a:t>–   El equipo ya tiene una lista cruda de necesidades de Huellitas, pero escrita en frases sueltas tipo 'que sea rapido' y 'que no se pierdan las fichas', sin ID, sin version y sin quien lo pidio.</a:t>
-            </a:r>
-          </a:p>
-          <a:p>
-            <a:pPr>
-              <a:spcAft>
-                <a:spcPts val="800"/>
-              </a:spcAft>
-            </a:pPr>
-            <a:r>
-              <a:rPr sz="2000" b="0" i="0">
-                <a:solidFill>
-                  <a:srgbClr val="333333"/>
-                </a:solidFill>
-                <a:latin typeface="Calibri"/>
-              </a:rPr>
-              <a:t>–   La administradora de la clinica avisa que solo dispone de dos reuniones en todo el semestre, asi que no habra a quien preguntarle cada semana.</a:t>
-            </a:r>
-          </a:p>
-          <a:p>
-            <a:pPr>
-              <a:spcAft>
-                <a:spcPts val="800"/>
-              </a:spcAft>
-            </a:pPr>
-            <a:r>
-              <a:rPr sz="2000" b="0" i="0">
-                <a:solidFill>
-                  <a:srgbClr val="333333"/>
-                </a:solidFill>
-                <a:latin typeface="Calibri"/>
-              </a:rPr>
-              <a:t>–   Nadie ha escrito todavia una sola prueba, y la idea instalada en el grupo es que las pruebas se piensan al final, cuando ya haya algo que probar.</a:t>
-            </a:r>
-          </a:p>
-        </p:txBody>
-      </p:sp>
-      <p:sp>
-        <p:nvSpPr>
-          <p:cNvPr id="6" name="TextBox 5"/>
-          <p:cNvSpPr txBox="1"/>
-          <p:nvPr/>
-        </p:nvSpPr>
-        <p:spPr>
-          <a:xfrm>
-            <a:off x="11185855" y="6473952"/>
-            <a:ext cx="640080" cy="274320"/>
-          </a:xfrm>
-          <a:prstGeom prst="rect">
-            <a:avLst/>
-          </a:prstGeom>
-          <a:noFill/>
-        </p:spPr>
-        <p:txBody>
-          <a:bodyPr wrap="square">
-            <a:spAutoFit/>
-          </a:bodyPr>
-          <a:lstStyle/>
-          <a:p>
-            <a:pPr algn="r"/>
-            <a:r>
-              <a:rPr sz="1100" b="0" i="0">
-                <a:solidFill>
-                  <a:srgbClr val="666666"/>
-                </a:solidFill>
-                <a:latin typeface="Calibri"/>
-              </a:rPr>
-              <a:t>16</a:t>
-            </a:r>
-          </a:p>
-        </p:txBody>
-      </p:sp>
-    </p:spTree>
-  </p:cSld>
-  <p:clrMapOvr>
-    <a:masterClrMapping/>
-  </p:clrMapOvr>
-</p:sld>
-</file>
-
-<file path=ppt/slides/slide17.xml><?xml version="1.0" encoding="utf-8"?>
-<p:sld xmlns:a="http://schemas.openxmlformats.org/drawingml/2006/main" xmlns:p="http://schemas.openxmlformats.org/presentationml/2006/main" xmlns:r="http://schemas.openxmlformats.org/officeDocument/2006/relationships">
-  <p:cSld>
-    <p:bg>
-      <p:bgPr>
-        <a:solidFill>
-          <a:srgbClr val="FFFFFF"/>
-        </a:solidFill>
-        <a:effectLst/>
-      </p:bgPr>
-    </p:bg>
-    <p:spTree>
-      <p:nvGrpSpPr>
-        <p:cNvPr id="1" name=""/>
-        <p:cNvGrpSpPr/>
-        <p:nvPr/>
-      </p:nvGrpSpPr>
-      <p:grpSpPr/>
-      <p:sp>
-        <p:nvSpPr>
-          <p:cNvPr id="2" name="Rectangle 1"/>
-          <p:cNvSpPr/>
-          <p:nvPr/>
-        </p:nvSpPr>
-        <p:spPr>
-          <a:xfrm>
-            <a:off x="0" y="0"/>
-            <a:ext cx="12191695" cy="960120"/>
-          </a:xfrm>
-          <a:prstGeom prst="rect">
-            <a:avLst/>
-          </a:prstGeom>
-          <a:solidFill>
-            <a:srgbClr val="095292"/>
-          </a:solidFill>
-          <a:ln>
-            <a:noFill/>
-          </a:ln>
-        </p:spPr>
-        <p:style>
-          <a:lnRef idx="1">
-            <a:schemeClr val="accent1"/>
-          </a:lnRef>
-          <a:fillRef idx="3">
-            <a:schemeClr val="accent1"/>
-          </a:fillRef>
-          <a:effectRef idx="2">
-            <a:schemeClr val="accent1"/>
-          </a:effectRef>
-          <a:fontRef idx="minor">
-            <a:schemeClr val="lt1"/>
-          </a:fontRef>
-        </p:style>
-        <p:txBody>
-          <a:bodyPr rtlCol="0" anchor="ctr"/>
-          <a:lstStyle/>
-          <a:p>
-            <a:pPr algn="ctr"/>
-          </a:p>
-        </p:txBody>
-      </p:sp>
-      <p:sp>
-        <p:nvSpPr>
-          <p:cNvPr id="3" name="Rectangle 2"/>
-          <p:cNvSpPr/>
-          <p:nvPr/>
-        </p:nvSpPr>
-        <p:spPr>
-          <a:xfrm>
-            <a:off x="0" y="960120"/>
-            <a:ext cx="12191695" cy="41148"/>
-          </a:xfrm>
-          <a:prstGeom prst="rect">
-            <a:avLst/>
-          </a:prstGeom>
-          <a:solidFill>
-            <a:srgbClr val="FFD000"/>
-          </a:solidFill>
-          <a:ln>
-            <a:noFill/>
-          </a:ln>
-        </p:spPr>
-        <p:style>
-          <a:lnRef idx="1">
-            <a:schemeClr val="accent1"/>
-          </a:lnRef>
-          <a:fillRef idx="3">
-            <a:schemeClr val="accent1"/>
-          </a:fillRef>
-          <a:effectRef idx="2">
-            <a:schemeClr val="accent1"/>
-          </a:effectRef>
-          <a:fontRef idx="minor">
-            <a:schemeClr val="lt1"/>
-          </a:fontRef>
-        </p:style>
-        <p:txBody>
-          <a:bodyPr rtlCol="0" anchor="ctr"/>
-          <a:lstStyle/>
-          <a:p>
-            <a:pPr algn="ctr"/>
-          </a:p>
-        </p:txBody>
-      </p:sp>
-      <p:sp>
-        <p:nvSpPr>
-          <p:cNvPr id="4" name="TextBox 3"/>
-          <p:cNvSpPr txBox="1"/>
-          <p:nvPr/>
-        </p:nvSpPr>
-        <p:spPr>
-          <a:xfrm>
-            <a:off x="457200" y="164592"/>
-            <a:ext cx="11277295" cy="502920"/>
-          </a:xfrm>
-          <a:prstGeom prst="rect">
-            <a:avLst/>
-          </a:prstGeom>
-          <a:noFill/>
-        </p:spPr>
-        <p:txBody>
-          <a:bodyPr wrap="square">
-            <a:spAutoFit/>
-          </a:bodyPr>
-          <a:lstStyle/>
-          <a:p>
-            <a:r>
-              <a:rPr sz="2600" b="1" i="0">
-                <a:solidFill>
-                  <a:srgbClr val="FFFFFF"/>
-                </a:solidFill>
-                <a:latin typeface="Calibri"/>
-              </a:rPr>
-              <a:t>Taller PI — pasos guiados</a:t>
-            </a:r>
-          </a:p>
-        </p:txBody>
-      </p:sp>
-      <p:sp>
-        <p:nvSpPr>
-          <p:cNvPr id="5" name="Rounded Rectangle 4"/>
-          <p:cNvSpPr/>
-          <p:nvPr/>
-        </p:nvSpPr>
-        <p:spPr>
-          <a:xfrm>
-            <a:off x="457200" y="1234440"/>
-            <a:ext cx="11277295" cy="950976"/>
-          </a:xfrm>
-          <a:prstGeom prst="roundRect">
-            <a:avLst>
-              <a:gd name="adj" fmla="val 12000"/>
-            </a:avLst>
-          </a:prstGeom>
-          <a:solidFill>
-            <a:srgbClr val="F2F2F2"/>
-          </a:solidFill>
-          <a:ln>
-            <a:noFill/>
-          </a:ln>
-        </p:spPr>
-        <p:style>
-          <a:lnRef idx="1">
-            <a:schemeClr val="accent1"/>
-          </a:lnRef>
-          <a:fillRef idx="3">
-            <a:schemeClr val="accent1"/>
-          </a:fillRef>
-          <a:effectRef idx="2">
-            <a:schemeClr val="accent1"/>
-          </a:effectRef>
-          <a:fontRef idx="minor">
-            <a:schemeClr val="lt1"/>
-          </a:fontRef>
-        </p:style>
-        <p:txBody>
-          <a:bodyPr rtlCol="0" anchor="ctr"/>
-          <a:lstStyle/>
-          <a:p>
-            <a:pPr algn="ctr"/>
-          </a:p>
-        </p:txBody>
-      </p:sp>
-      <p:sp>
-        <p:nvSpPr>
-          <p:cNvPr id="6" name="Rounded Rectangle 5"/>
-          <p:cNvSpPr/>
-          <p:nvPr/>
-        </p:nvSpPr>
-        <p:spPr>
-          <a:xfrm>
-            <a:off x="594360" y="1490472"/>
-            <a:ext cx="438912" cy="438912"/>
-          </a:xfrm>
-          <a:prstGeom prst="roundRect">
-            <a:avLst>
-              <a:gd name="adj" fmla="val 12000"/>
-            </a:avLst>
-          </a:prstGeom>
-          <a:solidFill>
-            <a:srgbClr val="095292"/>
-          </a:solidFill>
-          <a:ln>
-            <a:noFill/>
-          </a:ln>
-        </p:spPr>
-        <p:style>
-          <a:lnRef idx="1">
-            <a:schemeClr val="accent1"/>
-          </a:lnRef>
-          <a:fillRef idx="3">
-            <a:schemeClr val="accent1"/>
-          </a:fillRef>
-          <a:effectRef idx="2">
-            <a:schemeClr val="accent1"/>
-          </a:effectRef>
-          <a:fontRef idx="minor">
-            <a:schemeClr val="lt1"/>
-          </a:fontRef>
-        </p:style>
-        <p:txBody>
-          <a:bodyPr rtlCol="0" anchor="ctr"/>
-          <a:lstStyle/>
-          <a:p>
-            <a:pPr algn="ctr"/>
-          </a:p>
-        </p:txBody>
-      </p:sp>
-      <p:sp>
-        <p:nvSpPr>
-          <p:cNvPr id="7" name="TextBox 6"/>
-          <p:cNvSpPr txBox="1"/>
-          <p:nvPr/>
-        </p:nvSpPr>
-        <p:spPr>
-          <a:xfrm>
-            <a:off x="594360" y="1490472"/>
-            <a:ext cx="438912" cy="438912"/>
-          </a:xfrm>
-          <a:prstGeom prst="rect">
-            <a:avLst/>
-          </a:prstGeom>
-          <a:noFill/>
-        </p:spPr>
-        <p:txBody>
-          <a:bodyPr wrap="square" anchor="ctr"/>
-          <a:lstStyle/>
-          <a:p>
-            <a:pPr algn="ctr"/>
-            <a:r>
-              <a:rPr sz="1600" b="1" i="0">
-                <a:solidFill>
-                  <a:srgbClr val="FFFFFF"/>
-                </a:solidFill>
-                <a:latin typeface="Calibri"/>
-              </a:rPr>
-              <a:t>1</a:t>
-            </a:r>
-          </a:p>
-        </p:txBody>
-      </p:sp>
-      <p:sp>
-        <p:nvSpPr>
-          <p:cNvPr id="8" name="TextBox 7"/>
-          <p:cNvSpPr txBox="1"/>
-          <p:nvPr/>
-        </p:nvSpPr>
-        <p:spPr>
-          <a:xfrm>
-            <a:off x="1188720" y="1325880"/>
-            <a:ext cx="10271455" cy="786384"/>
-          </a:xfrm>
-          <a:prstGeom prst="rect">
-            <a:avLst/>
-          </a:prstGeom>
-          <a:noFill/>
-        </p:spPr>
-        <p:txBody>
-          <a:bodyPr wrap="square" anchor="ctr"/>
-          <a:lstStyle/>
-          <a:p>
-            <a:r>
-              <a:rPr sz="1400" b="1" i="0">
-                <a:solidFill>
-                  <a:srgbClr val="095292"/>
-                </a:solidFill>
-                <a:latin typeface="Calibri"/>
-              </a:rPr>
-              <a:t>En Google Docs escriba el indice del ERS de VetCare con al menos estas secciones numeradas: 1. Proposito y alcance, 2. Glosario del dominio veterinario, 3. Requisitos funcionales, 4. Requisitos no funcionales, 5. Reglas de negocio, 6. Matriz de trazabilidad, 7. Control de versiones y aprobaciones.</a:t>
-            </a:r>
-          </a:p>
-        </p:txBody>
-      </p:sp>
-      <p:sp>
-        <p:nvSpPr>
-          <p:cNvPr id="9" name="Rounded Rectangle 8"/>
-          <p:cNvSpPr/>
-          <p:nvPr/>
-        </p:nvSpPr>
-        <p:spPr>
-          <a:xfrm>
-            <a:off x="457200" y="2276856"/>
-            <a:ext cx="11277295" cy="950976"/>
-          </a:xfrm>
-          <a:prstGeom prst="roundRect">
-            <a:avLst>
-              <a:gd name="adj" fmla="val 12000"/>
-            </a:avLst>
-          </a:prstGeom>
-          <a:solidFill>
-            <a:srgbClr val="E8F4FA"/>
-          </a:solidFill>
-          <a:ln>
-            <a:noFill/>
-          </a:ln>
-        </p:spPr>
-        <p:style>
-          <a:lnRef idx="1">
-            <a:schemeClr val="accent1"/>
-          </a:lnRef>
-          <a:fillRef idx="3">
-            <a:schemeClr val="accent1"/>
-          </a:fillRef>
-          <a:effectRef idx="2">
-            <a:schemeClr val="accent1"/>
-          </a:effectRef>
-          <a:fontRef idx="minor">
-            <a:schemeClr val="lt1"/>
-          </a:fontRef>
-        </p:style>
-        <p:txBody>
-          <a:bodyPr rtlCol="0" anchor="ctr"/>
-          <a:lstStyle/>
-          <a:p>
-            <a:pPr algn="ctr"/>
-          </a:p>
-        </p:txBody>
-      </p:sp>
-      <p:sp>
-        <p:nvSpPr>
-          <p:cNvPr id="10" name="Rounded Rectangle 9"/>
-          <p:cNvSpPr/>
-          <p:nvPr/>
-        </p:nvSpPr>
-        <p:spPr>
-          <a:xfrm>
-            <a:off x="594360" y="2532888"/>
-            <a:ext cx="438912" cy="438912"/>
-          </a:xfrm>
-          <a:prstGeom prst="roundRect">
-            <a:avLst>
-              <a:gd name="adj" fmla="val 12000"/>
-            </a:avLst>
-          </a:prstGeom>
-          <a:solidFill>
-            <a:srgbClr val="095292"/>
-          </a:solidFill>
-          <a:ln>
-            <a:noFill/>
-          </a:ln>
-        </p:spPr>
-        <p:style>
-          <a:lnRef idx="1">
-            <a:schemeClr val="accent1"/>
-          </a:lnRef>
-          <a:fillRef idx="3">
-            <a:schemeClr val="accent1"/>
-          </a:fillRef>
-          <a:effectRef idx="2">
-            <a:schemeClr val="accent1"/>
-          </a:effectRef>
-          <a:fontRef idx="minor">
-            <a:schemeClr val="lt1"/>
-          </a:fontRef>
-        </p:style>
-        <p:txBody>
-          <a:bodyPr rtlCol="0" anchor="ctr"/>
-          <a:lstStyle/>
-          <a:p>
-            <a:pPr algn="ctr"/>
-          </a:p>
-        </p:txBody>
-      </p:sp>
-      <p:sp>
-        <p:nvSpPr>
-          <p:cNvPr id="11" name="TextBox 10"/>
-          <p:cNvSpPr txBox="1"/>
-          <p:nvPr/>
-        </p:nvSpPr>
-        <p:spPr>
-          <a:xfrm>
-            <a:off x="594360" y="2532888"/>
-            <a:ext cx="438912" cy="438912"/>
-          </a:xfrm>
-          <a:prstGeom prst="rect">
-            <a:avLst/>
-          </a:prstGeom>
-          <a:noFill/>
-        </p:spPr>
-        <p:txBody>
-          <a:bodyPr wrap="square" anchor="ctr"/>
-          <a:lstStyle/>
-          <a:p>
-            <a:pPr algn="ctr"/>
-            <a:r>
-              <a:rPr sz="1600" b="1" i="0">
-                <a:solidFill>
-                  <a:srgbClr val="FFFFFF"/>
-                </a:solidFill>
-                <a:latin typeface="Calibri"/>
-              </a:rPr>
-              <a:t>2</a:t>
-            </a:r>
-          </a:p>
-        </p:txBody>
-      </p:sp>
-      <p:sp>
-        <p:nvSpPr>
-          <p:cNvPr id="12" name="TextBox 11"/>
-          <p:cNvSpPr txBox="1"/>
-          <p:nvPr/>
-        </p:nvSpPr>
-        <p:spPr>
-          <a:xfrm>
-            <a:off x="1188720" y="2368296"/>
-            <a:ext cx="10271455" cy="786384"/>
-          </a:xfrm>
-          <a:prstGeom prst="rect">
-            <a:avLst/>
-          </a:prstGeom>
-          <a:noFill/>
-        </p:spPr>
-        <p:txBody>
-          <a:bodyPr wrap="square" anchor="ctr"/>
-          <a:lstStyle/>
-          <a:p>
-            <a:r>
-              <a:rPr sz="1400" b="1" i="0">
-                <a:solidFill>
-                  <a:srgbClr val="095292"/>
-                </a:solidFill>
-                <a:latin typeface="Calibri"/>
-              </a:rPr>
-              <a:t>Escriba cuatro requisitos de VetCare en formato de ficha completa (ID, nombre, fuente, prioridad, estabilidad, descripcion, precondicion, criterio de aceptacion, version y estado); al menos uno debe ser no funcional y al menos uno debe declarar dependencia de otro.</a:t>
-            </a:r>
-          </a:p>
-        </p:txBody>
-      </p:sp>
-      <p:sp>
-        <p:nvSpPr>
-          <p:cNvPr id="13" name="Rounded Rectangle 12"/>
-          <p:cNvSpPr/>
-          <p:nvPr/>
-        </p:nvSpPr>
-        <p:spPr>
-          <a:xfrm>
-            <a:off x="457200" y="3319272"/>
-            <a:ext cx="11277295" cy="950976"/>
-          </a:xfrm>
-          <a:prstGeom prst="roundRect">
-            <a:avLst>
-              <a:gd name="adj" fmla="val 12000"/>
-            </a:avLst>
-          </a:prstGeom>
-          <a:solidFill>
-            <a:srgbClr val="F2F2F2"/>
-          </a:solidFill>
-          <a:ln>
-            <a:noFill/>
-          </a:ln>
-        </p:spPr>
-        <p:style>
-          <a:lnRef idx="1">
-            <a:schemeClr val="accent1"/>
-          </a:lnRef>
-          <a:fillRef idx="3">
-            <a:schemeClr val="accent1"/>
-          </a:fillRef>
-          <a:effectRef idx="2">
-            <a:schemeClr val="accent1"/>
-          </a:effectRef>
-          <a:fontRef idx="minor">
-            <a:schemeClr val="lt1"/>
-          </a:fontRef>
-        </p:style>
-        <p:txBody>
-          <a:bodyPr rtlCol="0" anchor="ctr"/>
-          <a:lstStyle/>
-          <a:p>
-            <a:pPr algn="ctr"/>
-          </a:p>
-        </p:txBody>
-      </p:sp>
-      <p:sp>
-        <p:nvSpPr>
-          <p:cNvPr id="14" name="Rounded Rectangle 13"/>
-          <p:cNvSpPr/>
-          <p:nvPr/>
-        </p:nvSpPr>
-        <p:spPr>
-          <a:xfrm>
-            <a:off x="594360" y="3575304"/>
-            <a:ext cx="438912" cy="438912"/>
-          </a:xfrm>
-          <a:prstGeom prst="roundRect">
-            <a:avLst>
-              <a:gd name="adj" fmla="val 12000"/>
-            </a:avLst>
-          </a:prstGeom>
-          <a:solidFill>
-            <a:srgbClr val="095292"/>
-          </a:solidFill>
-          <a:ln>
-            <a:noFill/>
-          </a:ln>
-        </p:spPr>
-        <p:style>
-          <a:lnRef idx="1">
-            <a:schemeClr val="accent1"/>
-          </a:lnRef>
-          <a:fillRef idx="3">
-            <a:schemeClr val="accent1"/>
-          </a:fillRef>
-          <a:effectRef idx="2">
-            <a:schemeClr val="accent1"/>
-          </a:effectRef>
-          <a:fontRef idx="minor">
-            <a:schemeClr val="lt1"/>
-          </a:fontRef>
-        </p:style>
-        <p:txBody>
-          <a:bodyPr rtlCol="0" anchor="ctr"/>
-          <a:lstStyle/>
-          <a:p>
-            <a:pPr algn="ctr"/>
-          </a:p>
-        </p:txBody>
-      </p:sp>
-      <p:sp>
-        <p:nvSpPr>
-          <p:cNvPr id="15" name="TextBox 14"/>
-          <p:cNvSpPr txBox="1"/>
-          <p:nvPr/>
-        </p:nvSpPr>
-        <p:spPr>
-          <a:xfrm>
-            <a:off x="594360" y="3575304"/>
-            <a:ext cx="438912" cy="438912"/>
-          </a:xfrm>
-          <a:prstGeom prst="rect">
-            <a:avLst/>
-          </a:prstGeom>
-          <a:noFill/>
-        </p:spPr>
-        <p:txBody>
-          <a:bodyPr wrap="square" anchor="ctr"/>
-          <a:lstStyle/>
-          <a:p>
-            <a:pPr algn="ctr"/>
-            <a:r>
-              <a:rPr sz="1600" b="1" i="0">
-                <a:solidFill>
-                  <a:srgbClr val="FFFFFF"/>
-                </a:solidFill>
-                <a:latin typeface="Calibri"/>
-              </a:rPr>
-              <a:t>3</a:t>
-            </a:r>
-          </a:p>
-        </p:txBody>
-      </p:sp>
-      <p:sp>
-        <p:nvSpPr>
-          <p:cNvPr id="16" name="TextBox 15"/>
-          <p:cNvSpPr txBox="1"/>
-          <p:nvPr/>
-        </p:nvSpPr>
-        <p:spPr>
-          <a:xfrm>
-            <a:off x="1188720" y="3410712"/>
-            <a:ext cx="10271455" cy="786384"/>
-          </a:xfrm>
-          <a:prstGeom prst="rect">
-            <a:avLst/>
-          </a:prstGeom>
-          <a:noFill/>
-        </p:spPr>
-        <p:txBody>
-          <a:bodyPr wrap="square" anchor="ctr"/>
-          <a:lstStyle/>
-          <a:p>
-            <a:r>
-              <a:rPr sz="1400" b="1" i="0">
-                <a:solidFill>
-                  <a:srgbClr val="095292"/>
-                </a:solidFill>
-                <a:latin typeface="Calibri"/>
-              </a:rPr>
-              <a:t>Construya la matriz en V en una tabla de cuatro columnas: Fase de la izquierda / Artefacto / Nivel de prueba emparejado / Caso de prueba de VetCare que lo verifica, y asegurese de que cada uno de sus cuatro requisitos aparezca con su codigo de prueba.</a:t>
-            </a:r>
-          </a:p>
-        </p:txBody>
-      </p:sp>
-      <p:sp>
-        <p:nvSpPr>
-          <p:cNvPr id="17" name="Rounded Rectangle 16"/>
-          <p:cNvSpPr/>
-          <p:nvPr/>
-        </p:nvSpPr>
-        <p:spPr>
-          <a:xfrm>
-            <a:off x="457200" y="4361688"/>
-            <a:ext cx="11277295" cy="950976"/>
-          </a:xfrm>
-          <a:prstGeom prst="roundRect">
-            <a:avLst>
-              <a:gd name="adj" fmla="val 12000"/>
-            </a:avLst>
-          </a:prstGeom>
-          <a:solidFill>
-            <a:srgbClr val="E8F4FA"/>
-          </a:solidFill>
-          <a:ln>
-            <a:noFill/>
-          </a:ln>
-        </p:spPr>
-        <p:style>
-          <a:lnRef idx="1">
-            <a:schemeClr val="accent1"/>
-          </a:lnRef>
-          <a:fillRef idx="3">
-            <a:schemeClr val="accent1"/>
-          </a:fillRef>
-          <a:effectRef idx="2">
-            <a:schemeClr val="accent1"/>
-          </a:effectRef>
-          <a:fontRef idx="minor">
-            <a:schemeClr val="lt1"/>
-          </a:fontRef>
-        </p:style>
-        <p:txBody>
-          <a:bodyPr rtlCol="0" anchor="ctr"/>
-          <a:lstStyle/>
-          <a:p>
-            <a:pPr algn="ctr"/>
-          </a:p>
-        </p:txBody>
-      </p:sp>
-      <p:sp>
-        <p:nvSpPr>
-          <p:cNvPr id="18" name="Rounded Rectangle 17"/>
-          <p:cNvSpPr/>
-          <p:nvPr/>
-        </p:nvSpPr>
-        <p:spPr>
-          <a:xfrm>
-            <a:off x="594360" y="4617720"/>
-            <a:ext cx="438912" cy="438912"/>
-          </a:xfrm>
-          <a:prstGeom prst="roundRect">
-            <a:avLst>
-              <a:gd name="adj" fmla="val 12000"/>
-            </a:avLst>
-          </a:prstGeom>
-          <a:solidFill>
-            <a:srgbClr val="095292"/>
-          </a:solidFill>
-          <a:ln>
-            <a:noFill/>
-          </a:ln>
-        </p:spPr>
-        <p:style>
-          <a:lnRef idx="1">
-            <a:schemeClr val="accent1"/>
-          </a:lnRef>
-          <a:fillRef idx="3">
-            <a:schemeClr val="accent1"/>
-          </a:fillRef>
-          <a:effectRef idx="2">
-            <a:schemeClr val="accent1"/>
-          </a:effectRef>
-          <a:fontRef idx="minor">
-            <a:schemeClr val="lt1"/>
-          </a:fontRef>
-        </p:style>
-        <p:txBody>
-          <a:bodyPr rtlCol="0" anchor="ctr"/>
-          <a:lstStyle/>
-          <a:p>
-            <a:pPr algn="ctr"/>
-          </a:p>
-        </p:txBody>
-      </p:sp>
-      <p:sp>
-        <p:nvSpPr>
-          <p:cNvPr id="19" name="TextBox 18"/>
-          <p:cNvSpPr txBox="1"/>
-          <p:nvPr/>
-        </p:nvSpPr>
-        <p:spPr>
-          <a:xfrm>
-            <a:off x="594360" y="4617720"/>
-            <a:ext cx="438912" cy="438912"/>
-          </a:xfrm>
-          <a:prstGeom prst="rect">
-            <a:avLst/>
-          </a:prstGeom>
-          <a:noFill/>
-        </p:spPr>
-        <p:txBody>
-          <a:bodyPr wrap="square" anchor="ctr"/>
-          <a:lstStyle/>
-          <a:p>
-            <a:pPr algn="ctr"/>
-            <a:r>
-              <a:rPr sz="1600" b="1" i="0">
-                <a:solidFill>
-                  <a:srgbClr val="FFFFFF"/>
-                </a:solidFill>
-                <a:latin typeface="Calibri"/>
-              </a:rPr>
-              <a:t>4</a:t>
-            </a:r>
-          </a:p>
-        </p:txBody>
-      </p:sp>
-      <p:sp>
-        <p:nvSpPr>
-          <p:cNvPr id="20" name="TextBox 19"/>
-          <p:cNvSpPr txBox="1"/>
-          <p:nvPr/>
-        </p:nvSpPr>
-        <p:spPr>
-          <a:xfrm>
-            <a:off x="1188720" y="4453128"/>
-            <a:ext cx="10271455" cy="786384"/>
-          </a:xfrm>
-          <a:prstGeom prst="rect">
-            <a:avLst/>
-          </a:prstGeom>
-          <a:noFill/>
-        </p:spPr>
-        <p:txBody>
-          <a:bodyPr wrap="square" anchor="ctr"/>
-          <a:lstStyle/>
-          <a:p>
-            <a:r>
-              <a:rPr sz="1500" b="1" i="0">
-                <a:solidFill>
-                  <a:srgbClr val="095292"/>
-                </a:solidFill>
-                <a:latin typeface="Calibri"/>
-              </a:rPr>
-              <a:t>En draw.io dibuje el modelo en V de VetCare con las fases de bajada y de subida, y trace lineas punteadas horizontales que unan cada fase con su nivel de prueba; rotule al menos dos de esas lineas con el ID del requisito y el ID del caso de prueba.</a:t>
-            </a:r>
-          </a:p>
-        </p:txBody>
-      </p:sp>
-      <p:sp>
-        <p:nvSpPr>
-          <p:cNvPr id="21" name="Rounded Rectangle 20"/>
-          <p:cNvSpPr/>
-          <p:nvPr/>
-        </p:nvSpPr>
-        <p:spPr>
-          <a:xfrm>
-            <a:off x="457200" y="5404104"/>
-            <a:ext cx="11277295" cy="950976"/>
-          </a:xfrm>
-          <a:prstGeom prst="roundRect">
-            <a:avLst>
-              <a:gd name="adj" fmla="val 12000"/>
-            </a:avLst>
-          </a:prstGeom>
-          <a:solidFill>
-            <a:srgbClr val="F2F2F2"/>
-          </a:solidFill>
-          <a:ln>
-            <a:noFill/>
-          </a:ln>
-        </p:spPr>
-        <p:style>
-          <a:lnRef idx="1">
-            <a:schemeClr val="accent1"/>
-          </a:lnRef>
-          <a:fillRef idx="3">
-            <a:schemeClr val="accent1"/>
-          </a:fillRef>
-          <a:effectRef idx="2">
-            <a:schemeClr val="accent1"/>
-          </a:effectRef>
-          <a:fontRef idx="minor">
-            <a:schemeClr val="lt1"/>
-          </a:fontRef>
-        </p:style>
-        <p:txBody>
-          <a:bodyPr rtlCol="0" anchor="ctr"/>
-          <a:lstStyle/>
-          <a:p>
-            <a:pPr algn="ctr"/>
-          </a:p>
-        </p:txBody>
-      </p:sp>
-      <p:sp>
-        <p:nvSpPr>
-          <p:cNvPr id="22" name="Rounded Rectangle 21"/>
-          <p:cNvSpPr/>
-          <p:nvPr/>
-        </p:nvSpPr>
-        <p:spPr>
-          <a:xfrm>
-            <a:off x="594360" y="5660136"/>
-            <a:ext cx="438912" cy="438912"/>
-          </a:xfrm>
-          <a:prstGeom prst="roundRect">
-            <a:avLst>
-              <a:gd name="adj" fmla="val 12000"/>
-            </a:avLst>
-          </a:prstGeom>
-          <a:solidFill>
-            <a:srgbClr val="095292"/>
-          </a:solidFill>
-          <a:ln>
-            <a:noFill/>
-          </a:ln>
-        </p:spPr>
-        <p:style>
-          <a:lnRef idx="1">
-            <a:schemeClr val="accent1"/>
-          </a:lnRef>
-          <a:fillRef idx="3">
-            <a:schemeClr val="accent1"/>
-          </a:fillRef>
-          <a:effectRef idx="2">
-            <a:schemeClr val="accent1"/>
-          </a:effectRef>
-          <a:fontRef idx="minor">
-            <a:schemeClr val="lt1"/>
-          </a:fontRef>
-        </p:style>
-        <p:txBody>
-          <a:bodyPr rtlCol="0" anchor="ctr"/>
-          <a:lstStyle/>
-          <a:p>
-            <a:pPr algn="ctr"/>
-          </a:p>
-        </p:txBody>
-      </p:sp>
-      <p:sp>
-        <p:nvSpPr>
-          <p:cNvPr id="23" name="TextBox 22"/>
-          <p:cNvSpPr txBox="1"/>
-          <p:nvPr/>
-        </p:nvSpPr>
-        <p:spPr>
-          <a:xfrm>
-            <a:off x="594360" y="5660136"/>
-            <a:ext cx="438912" cy="438912"/>
-          </a:xfrm>
-          <a:prstGeom prst="rect">
-            <a:avLst/>
-          </a:prstGeom>
-          <a:noFill/>
-        </p:spPr>
-        <p:txBody>
-          <a:bodyPr wrap="square" anchor="ctr"/>
-          <a:lstStyle/>
-          <a:p>
-            <a:pPr algn="ctr"/>
-            <a:r>
-              <a:rPr sz="1600" b="1" i="0">
-                <a:solidFill>
-                  <a:srgbClr val="FFFFFF"/>
-                </a:solidFill>
-                <a:latin typeface="Calibri"/>
-              </a:rPr>
-              <a:t>5</a:t>
-            </a:r>
-          </a:p>
-        </p:txBody>
-      </p:sp>
-      <p:sp>
-        <p:nvSpPr>
-          <p:cNvPr id="24" name="TextBox 23"/>
-          <p:cNvSpPr txBox="1"/>
-          <p:nvPr/>
-        </p:nvSpPr>
-        <p:spPr>
-          <a:xfrm>
-            <a:off x="1188720" y="5495544"/>
-            <a:ext cx="10271455" cy="786384"/>
-          </a:xfrm>
-          <a:prstGeom prst="rect">
-            <a:avLst/>
-          </a:prstGeom>
-          <a:noFill/>
-        </p:spPr>
-        <p:txBody>
-          <a:bodyPr wrap="square" anchor="ctr"/>
-          <a:lstStyle/>
-          <a:p>
-            <a:r>
-              <a:rPr sz="1400" b="1" i="0">
-                <a:solidFill>
-                  <a:srgbClr val="095292"/>
-                </a:solidFill>
-                <a:latin typeface="Calibri"/>
-              </a:rPr>
-              <a:t>Diligencie el formato de solicitud de cambio con este caso real: la clinica pide, ya aprobada la linea base, que la busqueda tambien funcione por numero de microchip; describa el requisito afectado, el impacto en diseño y pruebas, y la decision (aprobar, aplazar o rechazar) con su justificacion. Exporte todo a PDF y suba a la plataforma del curso.</a:t>
-            </a:r>
-          </a:p>
-        </p:txBody>
-      </p:sp>
-      <p:sp>
-        <p:nvSpPr>
-          <p:cNvPr id="25" name="TextBox 24"/>
-          <p:cNvSpPr txBox="1"/>
-          <p:nvPr/>
-        </p:nvSpPr>
-        <p:spPr>
-          <a:xfrm>
-            <a:off x="11185855" y="6473952"/>
-            <a:ext cx="640080" cy="274320"/>
-          </a:xfrm>
-          <a:prstGeom prst="rect">
-            <a:avLst/>
-          </a:prstGeom>
-          <a:noFill/>
-        </p:spPr>
-        <p:txBody>
-          <a:bodyPr wrap="square">
-            <a:spAutoFit/>
-          </a:bodyPr>
-          <a:lstStyle/>
-          <a:p>
-            <a:pPr algn="r"/>
-            <a:r>
-              <a:rPr sz="1100" b="0" i="0">
-                <a:solidFill>
-                  <a:srgbClr val="666666"/>
-                </a:solidFill>
-                <a:latin typeface="Calibri"/>
-              </a:rPr>
-              <a:t>17</a:t>
-            </a:r>
-          </a:p>
-        </p:txBody>
-      </p:sp>
-    </p:spTree>
-  </p:cSld>
-  <p:clrMapOvr>
-    <a:masterClrMapping/>
-  </p:clrMapOvr>
-</p:sld>
-</file>
-
-<file path=ppt/slides/slide18.xml><?xml version="1.0" encoding="utf-8"?>
-<p:sld xmlns:a="http://schemas.openxmlformats.org/drawingml/2006/main" xmlns:p="http://schemas.openxmlformats.org/presentationml/2006/main" xmlns:r="http://schemas.openxmlformats.org/officeDocument/2006/relationships">
-  <p:cSld>
-    <p:bg>
-      <p:bgPr>
-        <a:solidFill>
-          <a:srgbClr val="FFFFFF"/>
-        </a:solidFill>
-        <a:effectLst/>
-      </p:bgPr>
-    </p:bg>
-    <p:spTree>
-      <p:nvGrpSpPr>
-        <p:cNvPr id="1" name=""/>
-        <p:cNvGrpSpPr/>
-        <p:nvPr/>
-      </p:nvGrpSpPr>
-      <p:grpSpPr/>
-      <p:sp>
-        <p:nvSpPr>
-          <p:cNvPr id="2" name="Rectangle 1"/>
-          <p:cNvSpPr/>
-          <p:nvPr/>
-        </p:nvSpPr>
-        <p:spPr>
-          <a:xfrm>
-            <a:off x="0" y="0"/>
-            <a:ext cx="12191695" cy="960120"/>
-          </a:xfrm>
-          <a:prstGeom prst="rect">
-            <a:avLst/>
-          </a:prstGeom>
-          <a:solidFill>
-            <a:srgbClr val="095292"/>
-          </a:solidFill>
-          <a:ln>
-            <a:noFill/>
-          </a:ln>
-        </p:spPr>
-        <p:style>
-          <a:lnRef idx="1">
-            <a:schemeClr val="accent1"/>
-          </a:lnRef>
-          <a:fillRef idx="3">
-            <a:schemeClr val="accent1"/>
-          </a:fillRef>
-          <a:effectRef idx="2">
-            <a:schemeClr val="accent1"/>
-          </a:effectRef>
-          <a:fontRef idx="minor">
-            <a:schemeClr val="lt1"/>
-          </a:fontRef>
-        </p:style>
-        <p:txBody>
-          <a:bodyPr rtlCol="0" anchor="ctr"/>
-          <a:lstStyle/>
-          <a:p>
-            <a:pPr algn="ctr"/>
-          </a:p>
-        </p:txBody>
-      </p:sp>
-      <p:sp>
-        <p:nvSpPr>
-          <p:cNvPr id="3" name="Rectangle 2"/>
-          <p:cNvSpPr/>
-          <p:nvPr/>
-        </p:nvSpPr>
-        <p:spPr>
-          <a:xfrm>
-            <a:off x="0" y="960120"/>
-            <a:ext cx="12191695" cy="41148"/>
-          </a:xfrm>
-          <a:prstGeom prst="rect">
-            <a:avLst/>
-          </a:prstGeom>
-          <a:solidFill>
-            <a:srgbClr val="FFD000"/>
-          </a:solidFill>
-          <a:ln>
-            <a:noFill/>
-          </a:ln>
-        </p:spPr>
-        <p:style>
-          <a:lnRef idx="1">
-            <a:schemeClr val="accent1"/>
-          </a:lnRef>
-          <a:fillRef idx="3">
-            <a:schemeClr val="accent1"/>
-          </a:fillRef>
-          <a:effectRef idx="2">
-            <a:schemeClr val="accent1"/>
-          </a:effectRef>
-          <a:fontRef idx="minor">
-            <a:schemeClr val="lt1"/>
-          </a:fontRef>
-        </p:style>
-        <p:txBody>
-          <a:bodyPr rtlCol="0" anchor="ctr"/>
-          <a:lstStyle/>
-          <a:p>
-            <a:pPr algn="ctr"/>
-          </a:p>
-        </p:txBody>
-      </p:sp>
-      <p:sp>
-        <p:nvSpPr>
-          <p:cNvPr id="4" name="TextBox 3"/>
-          <p:cNvSpPr txBox="1"/>
-          <p:nvPr/>
-        </p:nvSpPr>
-        <p:spPr>
-          <a:xfrm>
-            <a:off x="457200" y="164592"/>
-            <a:ext cx="11277295" cy="502920"/>
-          </a:xfrm>
-          <a:prstGeom prst="rect">
-            <a:avLst/>
-          </a:prstGeom>
-          <a:noFill/>
-        </p:spPr>
-        <p:txBody>
-          <a:bodyPr wrap="square">
-            <a:spAutoFit/>
-          </a:bodyPr>
-          <a:lstStyle/>
-          <a:p>
-            <a:r>
-              <a:rPr sz="2600" b="1" i="0">
-                <a:solidFill>
-                  <a:srgbClr val="FFFFFF"/>
-                </a:solidFill>
-                <a:latin typeface="Calibri"/>
-              </a:rPr>
-              <a:t>Antes de entregar — autochequeo</a:t>
-            </a:r>
-          </a:p>
-        </p:txBody>
-      </p:sp>
-      <p:sp>
-        <p:nvSpPr>
-          <p:cNvPr id="5" name="Rounded Rectangle 4"/>
-          <p:cNvSpPr/>
-          <p:nvPr/>
-        </p:nvSpPr>
-        <p:spPr>
-          <a:xfrm>
-            <a:off x="457200" y="1261872"/>
-            <a:ext cx="11277295" cy="566928"/>
-          </a:xfrm>
-          <a:prstGeom prst="roundRect">
-            <a:avLst>
-              <a:gd name="adj" fmla="val 12000"/>
-            </a:avLst>
-          </a:prstGeom>
-          <a:solidFill>
-            <a:srgbClr val="F2F2F2"/>
-          </a:solidFill>
-          <a:ln>
-            <a:noFill/>
-          </a:ln>
-        </p:spPr>
-        <p:style>
-          <a:lnRef idx="1">
-            <a:schemeClr val="accent1"/>
-          </a:lnRef>
-          <a:fillRef idx="3">
-            <a:schemeClr val="accent1"/>
-          </a:fillRef>
-          <a:effectRef idx="2">
-            <a:schemeClr val="accent1"/>
-          </a:effectRef>
-          <a:fontRef idx="minor">
-            <a:schemeClr val="lt1"/>
-          </a:fontRef>
-        </p:style>
-        <p:txBody>
-          <a:bodyPr rtlCol="0" anchor="ctr"/>
-          <a:lstStyle/>
-          <a:p>
-            <a:pPr algn="ctr"/>
-          </a:p>
-        </p:txBody>
-      </p:sp>
-      <p:sp>
-        <p:nvSpPr>
-          <p:cNvPr id="6" name="Rectangle 5"/>
-          <p:cNvSpPr/>
-          <p:nvPr/>
-        </p:nvSpPr>
-        <p:spPr>
-          <a:xfrm>
-            <a:off x="640080" y="1408175"/>
-            <a:ext cx="274320" cy="274320"/>
-          </a:xfrm>
-          <a:prstGeom prst="rect">
-            <a:avLst/>
-          </a:prstGeom>
-          <a:solidFill>
-            <a:srgbClr val="FFFFFF"/>
-          </a:solidFill>
-          <a:ln>
-            <a:solidFill>
-              <a:srgbClr val="333333"/>
-            </a:solidFill>
-          </a:ln>
-        </p:spPr>
-        <p:style>
-          <a:lnRef idx="1">
-            <a:schemeClr val="accent1"/>
-          </a:lnRef>
-          <a:fillRef idx="3">
-            <a:schemeClr val="accent1"/>
-          </a:fillRef>
-          <a:effectRef idx="2">
-            <a:schemeClr val="accent1"/>
-          </a:effectRef>
-          <a:fontRef idx="minor">
-            <a:schemeClr val="lt1"/>
-          </a:fontRef>
-        </p:style>
-        <p:txBody>
-          <a:bodyPr rtlCol="0" anchor="ctr"/>
-          <a:lstStyle/>
-          <a:p>
-            <a:pPr algn="ctr"/>
-          </a:p>
-        </p:txBody>
-      </p:sp>
-      <p:sp>
-        <p:nvSpPr>
-          <p:cNvPr id="7" name="Rectangle 6"/>
-          <p:cNvSpPr/>
-          <p:nvPr/>
-        </p:nvSpPr>
-        <p:spPr>
-          <a:xfrm>
-            <a:off x="640080" y="1408175"/>
-            <a:ext cx="73152" cy="274320"/>
-          </a:xfrm>
-          <a:prstGeom prst="rect">
-            <a:avLst/>
-          </a:prstGeom>
-          <a:solidFill>
-            <a:srgbClr val="269CCB"/>
-          </a:solidFill>
-          <a:ln>
-            <a:noFill/>
-          </a:ln>
-        </p:spPr>
-        <p:style>
-          <a:lnRef idx="1">
-            <a:schemeClr val="accent1"/>
-          </a:lnRef>
-          <a:fillRef idx="3">
-            <a:schemeClr val="accent1"/>
-          </a:fillRef>
-          <a:effectRef idx="2">
-            <a:schemeClr val="accent1"/>
-          </a:effectRef>
-          <a:fontRef idx="minor">
-            <a:schemeClr val="lt1"/>
-          </a:fontRef>
-        </p:style>
-        <p:txBody>
-          <a:bodyPr rtlCol="0" anchor="ctr"/>
-          <a:lstStyle/>
-          <a:p>
-            <a:pPr algn="ctr"/>
-          </a:p>
-        </p:txBody>
-      </p:sp>
-      <p:sp>
-        <p:nvSpPr>
-          <p:cNvPr id="8" name="TextBox 7"/>
-          <p:cNvSpPr txBox="1"/>
-          <p:nvPr/>
-        </p:nvSpPr>
-        <p:spPr>
-          <a:xfrm>
-            <a:off x="1097280" y="1353312"/>
-            <a:ext cx="10362895" cy="402336"/>
-          </a:xfrm>
-          <a:prstGeom prst="rect">
-            <a:avLst/>
-          </a:prstGeom>
-          <a:noFill/>
-        </p:spPr>
-        <p:txBody>
-          <a:bodyPr wrap="square" anchor="ctr"/>
-          <a:lstStyle/>
-          <a:p>
-            <a:r>
-              <a:rPr sz="1500" b="0" i="0">
-                <a:solidFill>
-                  <a:srgbClr val="333333"/>
-                </a:solidFill>
-                <a:latin typeface="Calibri"/>
-              </a:rPr>
-              <a:t>Su criterio de aceptacion se puede medir con un cronometro, un contador o un si/no, o depende de que la veterinaria este de buen genio ese dia?</a:t>
-            </a:r>
-          </a:p>
-        </p:txBody>
-      </p:sp>
-      <p:sp>
-        <p:nvSpPr>
-          <p:cNvPr id="9" name="Rounded Rectangle 8"/>
-          <p:cNvSpPr/>
-          <p:nvPr/>
-        </p:nvSpPr>
-        <p:spPr>
-          <a:xfrm>
-            <a:off x="457200" y="1938528"/>
-            <a:ext cx="11277295" cy="566928"/>
-          </a:xfrm>
-          <a:prstGeom prst="roundRect">
-            <a:avLst>
-              <a:gd name="adj" fmla="val 12000"/>
-            </a:avLst>
-          </a:prstGeom>
-          <a:solidFill>
-            <a:srgbClr val="F2F2F2"/>
-          </a:solidFill>
-          <a:ln>
-            <a:noFill/>
-          </a:ln>
-        </p:spPr>
-        <p:style>
-          <a:lnRef idx="1">
-            <a:schemeClr val="accent1"/>
-          </a:lnRef>
-          <a:fillRef idx="3">
-            <a:schemeClr val="accent1"/>
-          </a:fillRef>
-          <a:effectRef idx="2">
-            <a:schemeClr val="accent1"/>
-          </a:effectRef>
-          <a:fontRef idx="minor">
-            <a:schemeClr val="lt1"/>
-          </a:fontRef>
-        </p:style>
-        <p:txBody>
-          <a:bodyPr rtlCol="0" anchor="ctr"/>
-          <a:lstStyle/>
-          <a:p>
-            <a:pPr algn="ctr"/>
-          </a:p>
-        </p:txBody>
-      </p:sp>
-      <p:sp>
-        <p:nvSpPr>
-          <p:cNvPr id="10" name="Rectangle 9"/>
-          <p:cNvSpPr/>
-          <p:nvPr/>
-        </p:nvSpPr>
-        <p:spPr>
-          <a:xfrm>
-            <a:off x="640080" y="2084832"/>
-            <a:ext cx="274320" cy="274320"/>
-          </a:xfrm>
-          <a:prstGeom prst="rect">
-            <a:avLst/>
-          </a:prstGeom>
-          <a:solidFill>
-            <a:srgbClr val="FFFFFF"/>
-          </a:solidFill>
-          <a:ln>
-            <a:solidFill>
-              <a:srgbClr val="333333"/>
-            </a:solidFill>
-          </a:ln>
-        </p:spPr>
-        <p:style>
-          <a:lnRef idx="1">
-            <a:schemeClr val="accent1"/>
-          </a:lnRef>
-          <a:fillRef idx="3">
-            <a:schemeClr val="accent1"/>
-          </a:fillRef>
-          <a:effectRef idx="2">
-            <a:schemeClr val="accent1"/>
-          </a:effectRef>
-          <a:fontRef idx="minor">
-            <a:schemeClr val="lt1"/>
-          </a:fontRef>
-        </p:style>
-        <p:txBody>
-          <a:bodyPr rtlCol="0" anchor="ctr"/>
-          <a:lstStyle/>
-          <a:p>
-            <a:pPr algn="ctr"/>
-          </a:p>
-        </p:txBody>
-      </p:sp>
-      <p:sp>
-        <p:nvSpPr>
-          <p:cNvPr id="11" name="Rectangle 10"/>
-          <p:cNvSpPr/>
-          <p:nvPr/>
-        </p:nvSpPr>
-        <p:spPr>
-          <a:xfrm>
-            <a:off x="640080" y="2084832"/>
-            <a:ext cx="73152" cy="274320"/>
-          </a:xfrm>
-          <a:prstGeom prst="rect">
-            <a:avLst/>
-          </a:prstGeom>
-          <a:solidFill>
-            <a:srgbClr val="269CCB"/>
-          </a:solidFill>
-          <a:ln>
-            <a:noFill/>
-          </a:ln>
-        </p:spPr>
-        <p:style>
-          <a:lnRef idx="1">
-            <a:schemeClr val="accent1"/>
-          </a:lnRef>
-          <a:fillRef idx="3">
-            <a:schemeClr val="accent1"/>
-          </a:fillRef>
-          <a:effectRef idx="2">
-            <a:schemeClr val="accent1"/>
-          </a:effectRef>
-          <a:fontRef idx="minor">
-            <a:schemeClr val="lt1"/>
-          </a:fontRef>
-        </p:style>
-        <p:txBody>
-          <a:bodyPr rtlCol="0" anchor="ctr"/>
-          <a:lstStyle/>
-          <a:p>
-            <a:pPr algn="ctr"/>
-          </a:p>
-        </p:txBody>
-      </p:sp>
-      <p:sp>
-        <p:nvSpPr>
-          <p:cNvPr id="12" name="TextBox 11"/>
-          <p:cNvSpPr txBox="1"/>
-          <p:nvPr/>
-        </p:nvSpPr>
-        <p:spPr>
-          <a:xfrm>
-            <a:off x="1097280" y="2029968"/>
-            <a:ext cx="10362895" cy="402336"/>
-          </a:xfrm>
-          <a:prstGeom prst="rect">
-            <a:avLst/>
-          </a:prstGeom>
-          <a:noFill/>
-        </p:spPr>
-        <p:txBody>
-          <a:bodyPr wrap="square" anchor="ctr"/>
-          <a:lstStyle/>
-          <a:p>
-            <a:r>
-              <a:rPr sz="1500" b="0" i="0">
-                <a:solidFill>
-                  <a:srgbClr val="333333"/>
-                </a:solidFill>
-                <a:latin typeface="Calibri"/>
-              </a:rPr>
-              <a:t>Si mañana entra un estudiante nuevo al equipo, podria saber solo leyendo el documento quien pidio cada requisito y en que version se aprobo?</a:t>
-            </a:r>
-          </a:p>
-        </p:txBody>
-      </p:sp>
-      <p:sp>
-        <p:nvSpPr>
-          <p:cNvPr id="13" name="Rounded Rectangle 12"/>
-          <p:cNvSpPr/>
-          <p:nvPr/>
-        </p:nvSpPr>
-        <p:spPr>
-          <a:xfrm>
-            <a:off x="457200" y="2615184"/>
-            <a:ext cx="11277295" cy="566928"/>
-          </a:xfrm>
-          <a:prstGeom prst="roundRect">
-            <a:avLst>
-              <a:gd name="adj" fmla="val 12000"/>
-            </a:avLst>
-          </a:prstGeom>
-          <a:solidFill>
-            <a:srgbClr val="F2F2F2"/>
-          </a:solidFill>
-          <a:ln>
-            <a:noFill/>
-          </a:ln>
-        </p:spPr>
-        <p:style>
-          <a:lnRef idx="1">
-            <a:schemeClr val="accent1"/>
-          </a:lnRef>
-          <a:fillRef idx="3">
-            <a:schemeClr val="accent1"/>
-          </a:fillRef>
-          <a:effectRef idx="2">
-            <a:schemeClr val="accent1"/>
-          </a:effectRef>
-          <a:fontRef idx="minor">
-            <a:schemeClr val="lt1"/>
-          </a:fontRef>
-        </p:style>
-        <p:txBody>
-          <a:bodyPr rtlCol="0" anchor="ctr"/>
-          <a:lstStyle/>
-          <a:p>
-            <a:pPr algn="ctr"/>
-          </a:p>
-        </p:txBody>
-      </p:sp>
-      <p:sp>
-        <p:nvSpPr>
-          <p:cNvPr id="14" name="Rectangle 13"/>
-          <p:cNvSpPr/>
-          <p:nvPr/>
-        </p:nvSpPr>
-        <p:spPr>
-          <a:xfrm>
-            <a:off x="640080" y="2761488"/>
-            <a:ext cx="274320" cy="274320"/>
-          </a:xfrm>
-          <a:prstGeom prst="rect">
-            <a:avLst/>
-          </a:prstGeom>
-          <a:solidFill>
-            <a:srgbClr val="FFFFFF"/>
-          </a:solidFill>
-          <a:ln>
-            <a:solidFill>
-              <a:srgbClr val="333333"/>
-            </a:solidFill>
-          </a:ln>
-        </p:spPr>
-        <p:style>
-          <a:lnRef idx="1">
-            <a:schemeClr val="accent1"/>
-          </a:lnRef>
-          <a:fillRef idx="3">
-            <a:schemeClr val="accent1"/>
-          </a:fillRef>
-          <a:effectRef idx="2">
-            <a:schemeClr val="accent1"/>
-          </a:effectRef>
-          <a:fontRef idx="minor">
-            <a:schemeClr val="lt1"/>
-          </a:fontRef>
-        </p:style>
-        <p:txBody>
-          <a:bodyPr rtlCol="0" anchor="ctr"/>
-          <a:lstStyle/>
-          <a:p>
-            <a:pPr algn="ctr"/>
-          </a:p>
-        </p:txBody>
-      </p:sp>
-      <p:sp>
-        <p:nvSpPr>
-          <p:cNvPr id="15" name="Rectangle 14"/>
-          <p:cNvSpPr/>
-          <p:nvPr/>
-        </p:nvSpPr>
-        <p:spPr>
-          <a:xfrm>
-            <a:off x="640080" y="2761488"/>
-            <a:ext cx="73152" cy="274320"/>
-          </a:xfrm>
-          <a:prstGeom prst="rect">
-            <a:avLst/>
-          </a:prstGeom>
-          <a:solidFill>
-            <a:srgbClr val="269CCB"/>
-          </a:solidFill>
-          <a:ln>
-            <a:noFill/>
-          </a:ln>
-        </p:spPr>
-        <p:style>
-          <a:lnRef idx="1">
-            <a:schemeClr val="accent1"/>
-          </a:lnRef>
-          <a:fillRef idx="3">
-            <a:schemeClr val="accent1"/>
-          </a:fillRef>
-          <a:effectRef idx="2">
-            <a:schemeClr val="accent1"/>
-          </a:effectRef>
-          <a:fontRef idx="minor">
-            <a:schemeClr val="lt1"/>
-          </a:fontRef>
-        </p:style>
-        <p:txBody>
-          <a:bodyPr rtlCol="0" anchor="ctr"/>
-          <a:lstStyle/>
-          <a:p>
-            <a:pPr algn="ctr"/>
-          </a:p>
-        </p:txBody>
-      </p:sp>
-      <p:sp>
-        <p:nvSpPr>
-          <p:cNvPr id="16" name="TextBox 15"/>
-          <p:cNvSpPr txBox="1"/>
-          <p:nvPr/>
-        </p:nvSpPr>
-        <p:spPr>
-          <a:xfrm>
-            <a:off x="1097280" y="2706624"/>
-            <a:ext cx="10362895" cy="402336"/>
-          </a:xfrm>
-          <a:prstGeom prst="rect">
-            <a:avLst/>
-          </a:prstGeom>
-          <a:noFill/>
-        </p:spPr>
-        <p:txBody>
-          <a:bodyPr wrap="square" anchor="ctr"/>
-          <a:lstStyle/>
-          <a:p>
-            <a:r>
-              <a:rPr sz="1500" b="0" i="0">
-                <a:solidFill>
-                  <a:srgbClr val="333333"/>
-                </a:solidFill>
-                <a:latin typeface="Calibri"/>
-              </a:rPr>
-              <a:t>Hay algun requisito en su lista que no tenga ninguna prueba asociada? Si lo hay, como pensaba demostrarle a la clinica que ese requisito quedo cumplido?</a:t>
-            </a:r>
-          </a:p>
-        </p:txBody>
-      </p:sp>
-      <p:sp>
-        <p:nvSpPr>
-          <p:cNvPr id="17" name="TextBox 16"/>
-          <p:cNvSpPr txBox="1"/>
-          <p:nvPr/>
-        </p:nvSpPr>
-        <p:spPr>
-          <a:xfrm>
-            <a:off x="11185855" y="6473952"/>
-            <a:ext cx="640080" cy="274320"/>
-          </a:xfrm>
-          <a:prstGeom prst="rect">
-            <a:avLst/>
-          </a:prstGeom>
-          <a:noFill/>
-        </p:spPr>
-        <p:txBody>
-          <a:bodyPr wrap="square">
-            <a:spAutoFit/>
-          </a:bodyPr>
-          <a:lstStyle/>
-          <a:p>
-            <a:pPr algn="r"/>
-            <a:r>
-              <a:rPr sz="1100" b="0" i="0">
-                <a:solidFill>
-                  <a:srgbClr val="666666"/>
-                </a:solidFill>
-                <a:latin typeface="Calibri"/>
-              </a:rPr>
-              <a:t>18</a:t>
-            </a:r>
-          </a:p>
-        </p:txBody>
-      </p:sp>
-    </p:spTree>
-  </p:cSld>
-  <p:clrMapOvr>
-    <a:masterClrMapping/>
-  </p:clrMapOvr>
-</p:sld>
-</file>
-
-<file path=ppt/slides/slide19.xml><?xml version="1.0" encoding="utf-8"?>
-<p:sld xmlns:a="http://schemas.openxmlformats.org/drawingml/2006/main" xmlns:p="http://schemas.openxmlformats.org/presentationml/2006/main" xmlns:r="http://schemas.openxmlformats.org/officeDocument/2006/relationships">
-  <p:cSld>
-    <p:bg>
-      <p:bgPr>
-        <a:solidFill>
-          <a:srgbClr val="FFFFFF"/>
-        </a:solidFill>
-        <a:effectLst/>
-      </p:bgPr>
-    </p:bg>
-    <p:spTree>
-      <p:nvGrpSpPr>
-        <p:cNvPr id="1" name=""/>
-        <p:cNvGrpSpPr/>
-        <p:nvPr/>
-      </p:nvGrpSpPr>
-      <p:grpSpPr/>
-      <p:sp>
-        <p:nvSpPr>
-          <p:cNvPr id="2" name="Rectangle 1"/>
-          <p:cNvSpPr/>
-          <p:nvPr/>
-        </p:nvSpPr>
-        <p:spPr>
-          <a:xfrm>
-            <a:off x="0" y="0"/>
-            <a:ext cx="12191695" cy="960120"/>
-          </a:xfrm>
-          <a:prstGeom prst="rect">
-            <a:avLst/>
-          </a:prstGeom>
-          <a:solidFill>
-            <a:srgbClr val="095292"/>
-          </a:solidFill>
-          <a:ln>
-            <a:noFill/>
-          </a:ln>
-        </p:spPr>
-        <p:style>
-          <a:lnRef idx="1">
-            <a:schemeClr val="accent1"/>
-          </a:lnRef>
-          <a:fillRef idx="3">
-            <a:schemeClr val="accent1"/>
-          </a:fillRef>
-          <a:effectRef idx="2">
-            <a:schemeClr val="accent1"/>
-          </a:effectRef>
-          <a:fontRef idx="minor">
-            <a:schemeClr val="lt1"/>
-          </a:fontRef>
-        </p:style>
-        <p:txBody>
-          <a:bodyPr rtlCol="0" anchor="ctr"/>
-          <a:lstStyle/>
-          <a:p>
-            <a:pPr algn="ctr"/>
-          </a:p>
-        </p:txBody>
-      </p:sp>
-      <p:sp>
-        <p:nvSpPr>
-          <p:cNvPr id="3" name="Rectangle 2"/>
-          <p:cNvSpPr/>
-          <p:nvPr/>
-        </p:nvSpPr>
-        <p:spPr>
-          <a:xfrm>
-            <a:off x="0" y="960120"/>
-            <a:ext cx="12191695" cy="41148"/>
-          </a:xfrm>
-          <a:prstGeom prst="rect">
-            <a:avLst/>
-          </a:prstGeom>
-          <a:solidFill>
-            <a:srgbClr val="FFD000"/>
-          </a:solidFill>
-          <a:ln>
-            <a:noFill/>
-          </a:ln>
-        </p:spPr>
-        <p:style>
-          <a:lnRef idx="1">
-            <a:schemeClr val="accent1"/>
-          </a:lnRef>
-          <a:fillRef idx="3">
-            <a:schemeClr val="accent1"/>
-          </a:fillRef>
-          <a:effectRef idx="2">
-            <a:schemeClr val="accent1"/>
-          </a:effectRef>
-          <a:fontRef idx="minor">
-            <a:schemeClr val="lt1"/>
-          </a:fontRef>
-        </p:style>
-        <p:txBody>
-          <a:bodyPr rtlCol="0" anchor="ctr"/>
-          <a:lstStyle/>
-          <a:p>
-            <a:pPr algn="ctr"/>
-          </a:p>
-        </p:txBody>
-      </p:sp>
-      <p:sp>
-        <p:nvSpPr>
-          <p:cNvPr id="4" name="TextBox 3"/>
-          <p:cNvSpPr txBox="1"/>
-          <p:nvPr/>
-        </p:nvSpPr>
-        <p:spPr>
-          <a:xfrm>
-            <a:off x="457200" y="164592"/>
-            <a:ext cx="11277295" cy="502920"/>
-          </a:xfrm>
-          <a:prstGeom prst="rect">
-            <a:avLst/>
-          </a:prstGeom>
-          <a:noFill/>
-        </p:spPr>
-        <p:txBody>
-          <a:bodyPr wrap="square">
-            <a:spAutoFit/>
-          </a:bodyPr>
-          <a:lstStyle/>
-          <a:p>
-            <a:r>
-              <a:rPr sz="2600" b="1" i="0">
-                <a:solidFill>
-                  <a:srgbClr val="FFFFFF"/>
-                </a:solidFill>
-                <a:latin typeface="Calibri"/>
-              </a:rPr>
-              <a:t>Criterios de exito / entregable</a:t>
-            </a:r>
-          </a:p>
-        </p:txBody>
-      </p:sp>
-      <p:sp>
-        <p:nvSpPr>
-          <p:cNvPr id="5" name="TextBox 4"/>
-          <p:cNvSpPr txBox="1"/>
-          <p:nvPr/>
-        </p:nvSpPr>
-        <p:spPr>
-          <a:xfrm>
-            <a:off x="457200" y="1170432"/>
-            <a:ext cx="11277295" cy="5230368"/>
-          </a:xfrm>
-          <a:prstGeom prst="rect">
-            <a:avLst/>
-          </a:prstGeom>
-          <a:noFill/>
-        </p:spPr>
-        <p:txBody>
-          <a:bodyPr wrap="square">
-            <a:spAutoFit/>
-          </a:bodyPr>
-          <a:lstStyle/>
-          <a:p>
-            <a:pPr>
-              <a:spcAft>
-                <a:spcPts val="800"/>
-              </a:spcAft>
-            </a:pPr>
-            <a:r>
-              <a:rPr sz="2000" b="0" i="0">
-                <a:solidFill>
-                  <a:srgbClr val="333333"/>
-                </a:solidFill>
-                <a:latin typeface="Calibri"/>
-              </a:rPr>
-              <a:t>–   </a:t>
-            </a:r>
-            <a:r>
-              <a:rPr sz="2000" b="1" i="0">
-                <a:solidFill>
-                  <a:srgbClr val="333333"/>
-                </a:solidFill>
-                <a:latin typeface="Calibri"/>
-              </a:rPr>
-              <a:t>Entregable:</a:t>
-            </a:r>
-            <a:r>
-              <a:rPr sz="2000" b="0" i="0">
-                <a:solidFill>
-                  <a:srgbClr val="333333"/>
-                </a:solidFill>
-                <a:latin typeface="Calibri"/>
-              </a:rPr>
-              <a:t> Un documento en Google Docs con el indice del ERS de VetCare, cuatro requisitos escritos en formato de ficha con version y linea base, la matriz en V (requisito - nivel de prueba - criterio de aceptacion) y un formato de solicitud de cambio diligenciado; mas el diagrama en V dibujado en draw.io y subido a la plataforma del curso.</a:t>
-            </a:r>
-          </a:p>
-          <a:p>
-            <a:pPr>
-              <a:spcAft>
-                <a:spcPts val="800"/>
-              </a:spcAft>
-            </a:pPr>
-            <a:r>
-              <a:rPr sz="2000" b="0" i="0">
-                <a:solidFill>
-                  <a:srgbClr val="333333"/>
-                </a:solidFill>
-                <a:latin typeface="Calibri"/>
-              </a:rPr>
-              <a:t>–   </a:t>
-            </a:r>
-            <a:r>
-              <a:rPr sz="2000" b="1" i="0">
-                <a:solidFill>
-                  <a:srgbClr val="333333"/>
-                </a:solidFill>
-                <a:latin typeface="Calibri"/>
-              </a:rPr>
-              <a:t>Exito:</a:t>
-            </a:r>
-            <a:r>
-              <a:rPr sz="2000" b="0" i="0">
-                <a:solidFill>
-                  <a:srgbClr val="333333"/>
-                </a:solidFill>
-                <a:latin typeface="Calibri"/>
-              </a:rPr>
-              <a:t> Cada requisito tiene ID unico, fuente identificada, version, estado y un criterio de aceptacion medible (con numero, tiempo o cantidad), no una opinion.</a:t>
-            </a:r>
-          </a:p>
-          <a:p>
-            <a:pPr>
-              <a:spcAft>
-                <a:spcPts val="800"/>
-              </a:spcAft>
-            </a:pPr>
-            <a:r>
-              <a:rPr sz="2000" b="0" i="0">
-                <a:solidFill>
-                  <a:srgbClr val="333333"/>
-                </a:solidFill>
-                <a:latin typeface="Calibri"/>
-              </a:rPr>
-              <a:t>–   </a:t>
-            </a:r>
-            <a:r>
-              <a:rPr sz="2000" b="1" i="0">
-                <a:solidFill>
-                  <a:srgbClr val="333333"/>
-                </a:solidFill>
-                <a:latin typeface="Calibri"/>
-              </a:rPr>
-              <a:t>Exito:</a:t>
-            </a:r>
-            <a:r>
-              <a:rPr sz="2000" b="0" i="0">
-                <a:solidFill>
-                  <a:srgbClr val="333333"/>
-                </a:solidFill>
-                <a:latin typeface="Calibri"/>
-              </a:rPr>
-              <a:t> La matriz en V empareja cada fase de la izquierda con su nivel de prueba a la derecha y no deja ningun requisito sin su caso de prueba asociado.</a:t>
-            </a:r>
-          </a:p>
-          <a:p>
-            <a:pPr>
-              <a:spcAft>
-                <a:spcPts val="800"/>
-              </a:spcAft>
-            </a:pPr>
-            <a:r>
-              <a:rPr sz="2000" b="0" i="0">
-                <a:solidFill>
-                  <a:srgbClr val="333333"/>
-                </a:solidFill>
-                <a:latin typeface="Calibri"/>
-              </a:rPr>
-              <a:t>–   </a:t>
-            </a:r>
-            <a:r>
-              <a:rPr sz="2000" b="1" i="0">
-                <a:solidFill>
-                  <a:srgbClr val="333333"/>
-                </a:solidFill>
-                <a:latin typeface="Calibri"/>
-              </a:rPr>
-              <a:t>Exito:</a:t>
-            </a:r>
-            <a:r>
-              <a:rPr sz="2000" b="0" i="0">
-                <a:solidFill>
-                  <a:srgbClr val="333333"/>
-                </a:solidFill>
-                <a:latin typeface="Calibri"/>
-              </a:rPr>
-              <a:t> El diagrama en draw.io muestra las dos ramas de la V y al menos dos lineas de trazabilidad rotuladas con IDs reales de VetCare.</a:t>
-            </a:r>
-          </a:p>
-          <a:p>
-            <a:pPr>
-              <a:spcAft>
-                <a:spcPts val="800"/>
-              </a:spcAft>
-            </a:pPr>
-            <a:r>
-              <a:rPr sz="2000" b="0" i="0">
-                <a:solidFill>
-                  <a:srgbClr val="333333"/>
-                </a:solidFill>
-                <a:latin typeface="Calibri"/>
-              </a:rPr>
-              <a:t>–   </a:t>
-            </a:r>
-            <a:r>
-              <a:rPr sz="2000" b="1" i="0">
-                <a:solidFill>
-                  <a:srgbClr val="333333"/>
-                </a:solidFill>
-                <a:latin typeface="Calibri"/>
-              </a:rPr>
-              <a:t>Exito:</a:t>
-            </a:r>
-            <a:r>
-              <a:rPr sz="2000" b="0" i="0">
-                <a:solidFill>
-                  <a:srgbClr val="333333"/>
-                </a:solidFill>
-                <a:latin typeface="Calibri"/>
-              </a:rPr>
-              <a:t> La solicitud de cambio identifica el requisito afectado, el impacto en diseño y pruebas y una decision justificada, no un simple 'si, se agrega'.</a:t>
-            </a:r>
-          </a:p>
-          <a:p>
-            <a:pPr>
-              <a:spcAft>
-                <a:spcPts val="800"/>
-              </a:spcAft>
-            </a:pPr>
-            <a:r>
-              <a:rPr sz="2000" b="0" i="0">
-                <a:solidFill>
-                  <a:srgbClr val="333333"/>
-                </a:solidFill>
-                <a:latin typeface="Calibri"/>
-              </a:rPr>
-              <a:t>–   </a:t>
-            </a:r>
-            <a:r>
-              <a:rPr sz="2000" b="1" i="0">
-                <a:solidFill>
-                  <a:srgbClr val="333333"/>
-                </a:solidFill>
-                <a:latin typeface="Calibri"/>
-              </a:rPr>
-              <a:t>Entrega en la plataforma del curso</a:t>
-            </a:r>
-            <a:r>
-              <a:rPr sz="2000" b="0" i="0">
-                <a:solidFill>
-                  <a:srgbClr val="333333"/>
-                </a:solidFill>
-                <a:latin typeface="Calibri"/>
-              </a:rPr>
-              <a:t> — en la fecha que indique el docente.</a:t>
-            </a:r>
-          </a:p>
-        </p:txBody>
-      </p:sp>
-      <p:sp>
-        <p:nvSpPr>
-          <p:cNvPr id="6" name="TextBox 5"/>
-          <p:cNvSpPr txBox="1"/>
-          <p:nvPr/>
-        </p:nvSpPr>
-        <p:spPr>
-          <a:xfrm>
-            <a:off x="11185855" y="6473952"/>
-            <a:ext cx="640080" cy="274320"/>
-          </a:xfrm>
-          <a:prstGeom prst="rect">
-            <a:avLst/>
-          </a:prstGeom>
-          <a:noFill/>
-        </p:spPr>
-        <p:txBody>
-          <a:bodyPr wrap="square">
-            <a:spAutoFit/>
-          </a:bodyPr>
-          <a:lstStyle/>
-          <a:p>
-            <a:pPr algn="r"/>
-            <a:r>
-              <a:rPr sz="1100" b="0" i="0">
-                <a:solidFill>
-                  <a:srgbClr val="666666"/>
-                </a:solidFill>
-                <a:latin typeface="Calibri"/>
-              </a:rPr>
-              <a:t>19</a:t>
+                  <a:srgbClr val="269CCB"/>
+                </a:solidFill>
+                <a:latin typeface="Calibri"/>
+              </a:rPr>
+              <a:t>Teoria al servicio del diseño</a:t>
             </a:r>
           </a:p>
         </p:txBody>
@@ -9030,7 +6496,7 @@
                 </a:solidFill>
                 <a:latin typeface="Calibri"/>
               </a:rPr>
-              <a:t>Encuadre de hoy · Objetivo del PI</a:t>
+              <a:t>Encuadre de hoy</a:t>
             </a:r>
           </a:p>
         </p:txBody>
@@ -9078,7 +6544,7 @@
                 </a:solidFill>
                 <a:latin typeface="Calibri"/>
               </a:rPr>
-              <a:t>Hoy avanzamos VetCare en:</a:t>
+              <a:t>Tema:</a:t>
             </a:r>
             <a:r>
               <a:rPr sz="2000" b="0" i="0">
@@ -9087,7 +6553,7 @@
                 </a:solidFill>
                 <a:latin typeface="Calibri"/>
               </a:rPr>
-              <a:t> Queda listo el indice del documento formal de diseño de VetCare y la matriz en V que amarra cada requisito con la prueba que lo va a verificar.</a:t>
+              <a:t> Metodologias tradicionales</a:t>
             </a:r>
           </a:p>
           <a:p>
@@ -9103,34 +6569,7 @@
                 </a:solidFill>
                 <a:latin typeface="Calibri"/>
               </a:rPr>
-              <a:t>–   Herramienta: </a:t>
-            </a:r>
-            <a:r>
-              <a:rPr sz="2000" b="1" i="0">
-                <a:solidFill>
-                  <a:srgbClr val="333333"/>
-                </a:solidFill>
-                <a:latin typeface="Calibri"/>
-              </a:rPr>
-              <a:t>draw.io · Google Docs</a:t>
-            </a:r>
-            <a:r>
-              <a:rPr sz="2000" b="0" i="0">
-                <a:solidFill>
-                  <a:srgbClr val="333333"/>
-                </a:solidFill>
-                <a:latin typeface="Calibri"/>
-              </a:rPr>
-              <a:t> · Bloque </a:t>
-            </a:r>
-            <a:r>
-              <a:rPr sz="2000" b="1" i="0">
-                <a:solidFill>
-                  <a:srgbClr val="333333"/>
-                </a:solidFill>
-                <a:latin typeface="Calibri"/>
-              </a:rPr>
-              <a:t>120 min</a:t>
+              <a:t>–   Cascada y modelo en V: cuando el plano se firma antes de levantar el muro</a:t>
             </a:r>
           </a:p>
           <a:p>
@@ -9146,7 +6585,7 @@
                 </a:solidFill>
                 <a:latin typeface="Calibri"/>
               </a:rPr>
-              <a:t>–   </a:t>
+              <a:t>–   Herramienta del tema: </a:t>
             </a:r>
             <a:r>
               <a:rPr sz="2000" b="1" i="0">
@@ -9155,7 +6594,7 @@
                 </a:solidFill>
                 <a:latin typeface="Calibri"/>
               </a:rPr>
-              <a:t>Entregable de hoy:</a:t>
+              <a:t>draw.io · Google Docs</a:t>
             </a:r>
             <a:r>
               <a:rPr sz="2000" b="0" i="0">
@@ -9164,7 +6603,16 @@
                 </a:solidFill>
                 <a:latin typeface="Calibri"/>
               </a:rPr>
-              <a:t> Un documento en Google Docs con el indice del ERS de VetCare, cuatro requisitos escritos en formato de ficha con version y linea base, la matriz en V (requisito - nivel de prueba - criterio de aceptacion) y un formato de solicitud de cambio diligenciado; mas el diagrama en V dibujado en draw.io y subido a la plataforma del curso.</a:t>
+              <a:t> · Bloque </a:t>
+            </a:r>
+            <a:r>
+              <a:rPr sz="2000" b="1" i="0">
+                <a:solidFill>
+                  <a:srgbClr val="333333"/>
+                </a:solidFill>
+                <a:latin typeface="Calibri"/>
+              </a:rPr>
+              <a:t>120 min</a:t>
             </a:r>
           </a:p>
           <a:p>
@@ -9180,7 +6628,7 @@
                 </a:solidFill>
                 <a:latin typeface="Calibri"/>
               </a:rPr>
-              <a:t>–   La teoria esta al servicio del producto: al salir, VetCare avanzo.</a:t>
+              <a:t>–   Ejemplo de toda la clase: VetCare, el sistema de la clinica «Huellitas».</a:t>
             </a:r>
           </a:p>
         </p:txBody>
@@ -9216,833 +6664,6 @@
                 <a:latin typeface="Calibri"/>
               </a:rPr>
               <a:t>2</a:t>
-            </a:r>
-          </a:p>
-        </p:txBody>
-      </p:sp>
-    </p:spTree>
-  </p:cSld>
-  <p:clrMapOvr>
-    <a:masterClrMapping/>
-  </p:clrMapOvr>
-</p:sld>
-</file>
-
-<file path=ppt/slides/slide20.xml><?xml version="1.0" encoding="utf-8"?>
-<p:sld xmlns:a="http://schemas.openxmlformats.org/drawingml/2006/main" xmlns:p="http://schemas.openxmlformats.org/presentationml/2006/main" xmlns:r="http://schemas.openxmlformats.org/officeDocument/2006/relationships">
-  <p:cSld>
-    <p:bg>
-      <p:bgPr>
-        <a:solidFill>
-          <a:srgbClr val="FFFFFF"/>
-        </a:solidFill>
-        <a:effectLst/>
-      </p:bgPr>
-    </p:bg>
-    <p:spTree>
-      <p:nvGrpSpPr>
-        <p:cNvPr id="1" name=""/>
-        <p:cNvGrpSpPr/>
-        <p:nvPr/>
-      </p:nvGrpSpPr>
-      <p:grpSpPr/>
-      <p:sp>
-        <p:nvSpPr>
-          <p:cNvPr id="2" name="Rectangle 1"/>
-          <p:cNvSpPr/>
-          <p:nvPr/>
-        </p:nvSpPr>
-        <p:spPr>
-          <a:xfrm>
-            <a:off x="0" y="0"/>
-            <a:ext cx="12191695" cy="960120"/>
-          </a:xfrm>
-          <a:prstGeom prst="rect">
-            <a:avLst/>
-          </a:prstGeom>
-          <a:solidFill>
-            <a:srgbClr val="095292"/>
-          </a:solidFill>
-          <a:ln>
-            <a:noFill/>
-          </a:ln>
-        </p:spPr>
-        <p:style>
-          <a:lnRef idx="1">
-            <a:schemeClr val="accent1"/>
-          </a:lnRef>
-          <a:fillRef idx="3">
-            <a:schemeClr val="accent1"/>
-          </a:fillRef>
-          <a:effectRef idx="2">
-            <a:schemeClr val="accent1"/>
-          </a:effectRef>
-          <a:fontRef idx="minor">
-            <a:schemeClr val="lt1"/>
-          </a:fontRef>
-        </p:style>
-        <p:txBody>
-          <a:bodyPr rtlCol="0" anchor="ctr"/>
-          <a:lstStyle/>
-          <a:p>
-            <a:pPr algn="ctr"/>
-          </a:p>
-        </p:txBody>
-      </p:sp>
-      <p:sp>
-        <p:nvSpPr>
-          <p:cNvPr id="3" name="Rectangle 2"/>
-          <p:cNvSpPr/>
-          <p:nvPr/>
-        </p:nvSpPr>
-        <p:spPr>
-          <a:xfrm>
-            <a:off x="0" y="960120"/>
-            <a:ext cx="12191695" cy="41148"/>
-          </a:xfrm>
-          <a:prstGeom prst="rect">
-            <a:avLst/>
-          </a:prstGeom>
-          <a:solidFill>
-            <a:srgbClr val="FFD000"/>
-          </a:solidFill>
-          <a:ln>
-            <a:noFill/>
-          </a:ln>
-        </p:spPr>
-        <p:style>
-          <a:lnRef idx="1">
-            <a:schemeClr val="accent1"/>
-          </a:lnRef>
-          <a:fillRef idx="3">
-            <a:schemeClr val="accent1"/>
-          </a:fillRef>
-          <a:effectRef idx="2">
-            <a:schemeClr val="accent1"/>
-          </a:effectRef>
-          <a:fontRef idx="minor">
-            <a:schemeClr val="lt1"/>
-          </a:fontRef>
-        </p:style>
-        <p:txBody>
-          <a:bodyPr rtlCol="0" anchor="ctr"/>
-          <a:lstStyle/>
-          <a:p>
-            <a:pPr algn="ctr"/>
-          </a:p>
-        </p:txBody>
-      </p:sp>
-      <p:sp>
-        <p:nvSpPr>
-          <p:cNvPr id="4" name="TextBox 3"/>
-          <p:cNvSpPr txBox="1"/>
-          <p:nvPr/>
-        </p:nvSpPr>
-        <p:spPr>
-          <a:xfrm>
-            <a:off x="457200" y="164592"/>
-            <a:ext cx="11277295" cy="502920"/>
-          </a:xfrm>
-          <a:prstGeom prst="rect">
-            <a:avLst/>
-          </a:prstGeom>
-          <a:noFill/>
-        </p:spPr>
-        <p:txBody>
-          <a:bodyPr wrap="square">
-            <a:spAutoFit/>
-          </a:bodyPr>
-          <a:lstStyle/>
-          <a:p>
-            <a:r>
-              <a:rPr sz="2600" b="1" i="0">
-                <a:solidFill>
-                  <a:srgbClr val="FFFFFF"/>
-                </a:solidFill>
-                <a:latin typeface="Calibri"/>
-              </a:rPr>
-              <a:t>Para el PI esta semana</a:t>
-            </a:r>
-          </a:p>
-        </p:txBody>
-      </p:sp>
-      <p:sp>
-        <p:nvSpPr>
-          <p:cNvPr id="5" name="Rounded Rectangle 4"/>
-          <p:cNvSpPr/>
-          <p:nvPr/>
-        </p:nvSpPr>
-        <p:spPr>
-          <a:xfrm>
-            <a:off x="457200" y="1261872"/>
-            <a:ext cx="11277295" cy="1051560"/>
-          </a:xfrm>
-          <a:prstGeom prst="roundRect">
-            <a:avLst>
-              <a:gd name="adj" fmla="val 12000"/>
-            </a:avLst>
-          </a:prstGeom>
-          <a:solidFill>
-            <a:srgbClr val="E8F4FA"/>
-          </a:solidFill>
-          <a:ln>
-            <a:noFill/>
-          </a:ln>
-        </p:spPr>
-        <p:style>
-          <a:lnRef idx="1">
-            <a:schemeClr val="accent1"/>
-          </a:lnRef>
-          <a:fillRef idx="3">
-            <a:schemeClr val="accent1"/>
-          </a:fillRef>
-          <a:effectRef idx="2">
-            <a:schemeClr val="accent1"/>
-          </a:effectRef>
-          <a:fontRef idx="minor">
-            <a:schemeClr val="lt1"/>
-          </a:fontRef>
-        </p:style>
-        <p:txBody>
-          <a:bodyPr rtlCol="0" anchor="ctr"/>
-          <a:lstStyle/>
-          <a:p>
-            <a:pPr algn="ctr"/>
-          </a:p>
-        </p:txBody>
-      </p:sp>
-      <p:sp>
-        <p:nvSpPr>
-          <p:cNvPr id="6" name="Rectangle 5"/>
-          <p:cNvSpPr/>
-          <p:nvPr/>
-        </p:nvSpPr>
-        <p:spPr>
-          <a:xfrm>
-            <a:off x="457200" y="1261872"/>
-            <a:ext cx="128016" cy="1051560"/>
-          </a:xfrm>
-          <a:prstGeom prst="rect">
-            <a:avLst/>
-          </a:prstGeom>
-          <a:solidFill>
-            <a:srgbClr val="269CCB"/>
-          </a:solidFill>
-          <a:ln>
-            <a:noFill/>
-          </a:ln>
-        </p:spPr>
-        <p:style>
-          <a:lnRef idx="1">
-            <a:schemeClr val="accent1"/>
-          </a:lnRef>
-          <a:fillRef idx="3">
-            <a:schemeClr val="accent1"/>
-          </a:fillRef>
-          <a:effectRef idx="2">
-            <a:schemeClr val="accent1"/>
-          </a:effectRef>
-          <a:fontRef idx="minor">
-            <a:schemeClr val="lt1"/>
-          </a:fontRef>
-        </p:style>
-        <p:txBody>
-          <a:bodyPr rtlCol="0" anchor="ctr"/>
-          <a:lstStyle/>
-          <a:p>
-            <a:pPr algn="ctr"/>
-          </a:p>
-        </p:txBody>
-      </p:sp>
-      <p:sp>
-        <p:nvSpPr>
-          <p:cNvPr id="7" name="TextBox 6"/>
-          <p:cNvSpPr txBox="1"/>
-          <p:nvPr/>
-        </p:nvSpPr>
-        <p:spPr>
-          <a:xfrm>
-            <a:off x="777240" y="1399031"/>
-            <a:ext cx="10774375" cy="822959"/>
-          </a:xfrm>
-          <a:prstGeom prst="rect">
-            <a:avLst/>
-          </a:prstGeom>
-          <a:noFill/>
-        </p:spPr>
-        <p:txBody>
-          <a:bodyPr wrap="square">
-            <a:spAutoFit/>
-          </a:bodyPr>
-          <a:lstStyle/>
-          <a:p>
-            <a:r>
-              <a:rPr sz="1200" b="1" i="0">
-                <a:solidFill>
-                  <a:srgbClr val="269CCB"/>
-                </a:solidFill>
-                <a:latin typeface="Calibri"/>
-              </a:rPr>
-              <a:t>Info</a:t>
-            </a:r>
-          </a:p>
-          <a:p>
-            <a:pPr>
-              <a:spcBef>
-                <a:spcPts val="400"/>
-              </a:spcBef>
-            </a:pPr>
-            <a:r>
-              <a:rPr sz="1400" b="0" i="0">
-                <a:solidFill>
-                  <a:srgbClr val="333333"/>
-                </a:solidFill>
-                <a:latin typeface="Calibri"/>
-              </a:rPr>
-              <a:t>Hito: Queda listo el indice del documento formal de diseño de VetCare y la matriz en V que amarra cada requisito con la prueba que lo va a verificar.</a:t>
-            </a:r>
-          </a:p>
-        </p:txBody>
-      </p:sp>
-      <p:sp>
-        <p:nvSpPr>
-          <p:cNvPr id="8" name="Rounded Rectangle 7"/>
-          <p:cNvSpPr/>
-          <p:nvPr/>
-        </p:nvSpPr>
-        <p:spPr>
-          <a:xfrm>
-            <a:off x="457200" y="2478024"/>
-            <a:ext cx="11277295" cy="1051560"/>
-          </a:xfrm>
-          <a:prstGeom prst="roundRect">
-            <a:avLst>
-              <a:gd name="adj" fmla="val 12000"/>
-            </a:avLst>
-          </a:prstGeom>
-          <a:solidFill>
-            <a:srgbClr val="FFF8E1"/>
-          </a:solidFill>
-          <a:ln>
-            <a:noFill/>
-          </a:ln>
-        </p:spPr>
-        <p:style>
-          <a:lnRef idx="1">
-            <a:schemeClr val="accent1"/>
-          </a:lnRef>
-          <a:fillRef idx="3">
-            <a:schemeClr val="accent1"/>
-          </a:fillRef>
-          <a:effectRef idx="2">
-            <a:schemeClr val="accent1"/>
-          </a:effectRef>
-          <a:fontRef idx="minor">
-            <a:schemeClr val="lt1"/>
-          </a:fontRef>
-        </p:style>
-        <p:txBody>
-          <a:bodyPr rtlCol="0" anchor="ctr"/>
-          <a:lstStyle/>
-          <a:p>
-            <a:pPr algn="ctr"/>
-          </a:p>
-        </p:txBody>
-      </p:sp>
-      <p:sp>
-        <p:nvSpPr>
-          <p:cNvPr id="9" name="Rectangle 8"/>
-          <p:cNvSpPr/>
-          <p:nvPr/>
-        </p:nvSpPr>
-        <p:spPr>
-          <a:xfrm>
-            <a:off x="457200" y="2478024"/>
-            <a:ext cx="128016" cy="1051560"/>
-          </a:xfrm>
-          <a:prstGeom prst="rect">
-            <a:avLst/>
-          </a:prstGeom>
-          <a:solidFill>
-            <a:srgbClr val="FFD000"/>
-          </a:solidFill>
-          <a:ln>
-            <a:noFill/>
-          </a:ln>
-        </p:spPr>
-        <p:style>
-          <a:lnRef idx="1">
-            <a:schemeClr val="accent1"/>
-          </a:lnRef>
-          <a:fillRef idx="3">
-            <a:schemeClr val="accent1"/>
-          </a:fillRef>
-          <a:effectRef idx="2">
-            <a:schemeClr val="accent1"/>
-          </a:effectRef>
-          <a:fontRef idx="minor">
-            <a:schemeClr val="lt1"/>
-          </a:fontRef>
-        </p:style>
-        <p:txBody>
-          <a:bodyPr rtlCol="0" anchor="ctr"/>
-          <a:lstStyle/>
-          <a:p>
-            <a:pPr algn="ctr"/>
-          </a:p>
-        </p:txBody>
-      </p:sp>
-      <p:sp>
-        <p:nvSpPr>
-          <p:cNvPr id="10" name="TextBox 9"/>
-          <p:cNvSpPr txBox="1"/>
-          <p:nvPr/>
-        </p:nvSpPr>
-        <p:spPr>
-          <a:xfrm>
-            <a:off x="777240" y="2615184"/>
-            <a:ext cx="10774375" cy="822959"/>
-          </a:xfrm>
-          <a:prstGeom prst="rect">
-            <a:avLst/>
-          </a:prstGeom>
-          <a:noFill/>
-        </p:spPr>
-        <p:txBody>
-          <a:bodyPr wrap="square">
-            <a:spAutoFit/>
-          </a:bodyPr>
-          <a:lstStyle/>
-          <a:p>
-            <a:r>
-              <a:rPr sz="1200" b="1" i="0">
-                <a:solidFill>
-                  <a:srgbClr val="FFD000"/>
-                </a:solidFill>
-                <a:latin typeface="Calibri"/>
-              </a:rPr>
-              <a:t>Aclaración</a:t>
-            </a:r>
-          </a:p>
-          <a:p>
-            <a:pPr>
-              <a:spcBef>
-                <a:spcPts val="400"/>
-              </a:spcBef>
-            </a:pPr>
-            <a:r>
-              <a:rPr sz="1400" b="0" i="0">
-                <a:solidFill>
-                  <a:srgbClr val="333333"/>
-                </a:solidFill>
-                <a:latin typeface="Calibri"/>
-              </a:rPr>
-              <a:t>Enunciado completo: Clases/Proyecto Integrador/ (VetCare).</a:t>
-            </a:r>
-          </a:p>
-        </p:txBody>
-      </p:sp>
-      <p:sp>
-        <p:nvSpPr>
-          <p:cNvPr id="11" name="Rounded Rectangle 10"/>
-          <p:cNvSpPr/>
-          <p:nvPr/>
-        </p:nvSpPr>
-        <p:spPr>
-          <a:xfrm>
-            <a:off x="457200" y="3694176"/>
-            <a:ext cx="11277295" cy="1051560"/>
-          </a:xfrm>
-          <a:prstGeom prst="roundRect">
-            <a:avLst>
-              <a:gd name="adj" fmla="val 12000"/>
-            </a:avLst>
-          </a:prstGeom>
-          <a:solidFill>
-            <a:srgbClr val="FBE4E4"/>
-          </a:solidFill>
-          <a:ln>
-            <a:noFill/>
-          </a:ln>
-        </p:spPr>
-        <p:style>
-          <a:lnRef idx="1">
-            <a:schemeClr val="accent1"/>
-          </a:lnRef>
-          <a:fillRef idx="3">
-            <a:schemeClr val="accent1"/>
-          </a:fillRef>
-          <a:effectRef idx="2">
-            <a:schemeClr val="accent1"/>
-          </a:effectRef>
-          <a:fontRef idx="minor">
-            <a:schemeClr val="lt1"/>
-          </a:fontRef>
-        </p:style>
-        <p:txBody>
-          <a:bodyPr rtlCol="0" anchor="ctr"/>
-          <a:lstStyle/>
-          <a:p>
-            <a:pPr algn="ctr"/>
-          </a:p>
-        </p:txBody>
-      </p:sp>
-      <p:sp>
-        <p:nvSpPr>
-          <p:cNvPr id="12" name="Rectangle 11"/>
-          <p:cNvSpPr/>
-          <p:nvPr/>
-        </p:nvSpPr>
-        <p:spPr>
-          <a:xfrm>
-            <a:off x="457200" y="3694176"/>
-            <a:ext cx="128016" cy="1051560"/>
-          </a:xfrm>
-          <a:prstGeom prst="rect">
-            <a:avLst/>
-          </a:prstGeom>
-          <a:solidFill>
-            <a:srgbClr val="A02030"/>
-          </a:solidFill>
-          <a:ln>
-            <a:noFill/>
-          </a:ln>
-        </p:spPr>
-        <p:style>
-          <a:lnRef idx="1">
-            <a:schemeClr val="accent1"/>
-          </a:lnRef>
-          <a:fillRef idx="3">
-            <a:schemeClr val="accent1"/>
-          </a:fillRef>
-          <a:effectRef idx="2">
-            <a:schemeClr val="accent1"/>
-          </a:effectRef>
-          <a:fontRef idx="minor">
-            <a:schemeClr val="lt1"/>
-          </a:fontRef>
-        </p:style>
-        <p:txBody>
-          <a:bodyPr rtlCol="0" anchor="ctr"/>
-          <a:lstStyle/>
-          <a:p>
-            <a:pPr algn="ctr"/>
-          </a:p>
-        </p:txBody>
-      </p:sp>
-      <p:sp>
-        <p:nvSpPr>
-          <p:cNvPr id="13" name="TextBox 12"/>
-          <p:cNvSpPr txBox="1"/>
-          <p:nvPr/>
-        </p:nvSpPr>
-        <p:spPr>
-          <a:xfrm>
-            <a:off x="777240" y="3831336"/>
-            <a:ext cx="10774375" cy="822959"/>
-          </a:xfrm>
-          <a:prstGeom prst="rect">
-            <a:avLst/>
-          </a:prstGeom>
-          <a:noFill/>
-        </p:spPr>
-        <p:txBody>
-          <a:bodyPr wrap="square">
-            <a:spAutoFit/>
-          </a:bodyPr>
-          <a:lstStyle/>
-          <a:p>
-            <a:r>
-              <a:rPr sz="1200" b="1" i="0">
-                <a:solidFill>
-                  <a:srgbClr val="A02030"/>
-                </a:solidFill>
-                <a:latin typeface="Calibri"/>
-              </a:rPr>
-              <a:t>Atención</a:t>
-            </a:r>
-          </a:p>
-          <a:p>
-            <a:pPr>
-              <a:spcBef>
-                <a:spcPts val="400"/>
-              </a:spcBef>
-            </a:pPr>
-            <a:r>
-              <a:rPr sz="1400" b="0" i="0">
-                <a:solidFill>
-                  <a:srgbClr val="333333"/>
-                </a:solidFill>
-                <a:latin typeface="Calibri"/>
-              </a:rPr>
-              <a:t>Entrega del taller, si el docente lo asigna · en la fecha que indique el docente.</a:t>
-            </a:r>
-          </a:p>
-        </p:txBody>
-      </p:sp>
-      <p:sp>
-        <p:nvSpPr>
-          <p:cNvPr id="14" name="TextBox 13"/>
-          <p:cNvSpPr txBox="1"/>
-          <p:nvPr/>
-        </p:nvSpPr>
-        <p:spPr>
-          <a:xfrm>
-            <a:off x="11185855" y="6473952"/>
-            <a:ext cx="640080" cy="274320"/>
-          </a:xfrm>
-          <a:prstGeom prst="rect">
-            <a:avLst/>
-          </a:prstGeom>
-          <a:noFill/>
-        </p:spPr>
-        <p:txBody>
-          <a:bodyPr wrap="square">
-            <a:spAutoFit/>
-          </a:bodyPr>
-          <a:lstStyle/>
-          <a:p>
-            <a:pPr algn="r"/>
-            <a:r>
-              <a:rPr sz="1100" b="0" i="0">
-                <a:solidFill>
-                  <a:srgbClr val="666666"/>
-                </a:solidFill>
-                <a:latin typeface="Calibri"/>
-              </a:rPr>
-              <a:t>20</a:t>
-            </a:r>
-          </a:p>
-        </p:txBody>
-      </p:sp>
-    </p:spTree>
-  </p:cSld>
-  <p:clrMapOvr>
-    <a:masterClrMapping/>
-  </p:clrMapOvr>
-</p:sld>
-</file>
-
-<file path=ppt/slides/slide21.xml><?xml version="1.0" encoding="utf-8"?>
-<p:sld xmlns:a="http://schemas.openxmlformats.org/drawingml/2006/main" xmlns:p="http://schemas.openxmlformats.org/presentationml/2006/main" xmlns:r="http://schemas.openxmlformats.org/officeDocument/2006/relationships">
-  <p:cSld>
-    <p:bg>
-      <p:bgPr>
-        <a:solidFill>
-          <a:srgbClr val="FFFFFF"/>
-        </a:solidFill>
-        <a:effectLst/>
-      </p:bgPr>
-    </p:bg>
-    <p:spTree>
-      <p:nvGrpSpPr>
-        <p:cNvPr id="1" name=""/>
-        <p:cNvGrpSpPr/>
-        <p:nvPr/>
-      </p:nvGrpSpPr>
-      <p:grpSpPr/>
-      <p:sp>
-        <p:nvSpPr>
-          <p:cNvPr id="2" name="Rectangle 1"/>
-          <p:cNvSpPr/>
-          <p:nvPr/>
-        </p:nvSpPr>
-        <p:spPr>
-          <a:xfrm>
-            <a:off x="0" y="0"/>
-            <a:ext cx="12191695" cy="164592"/>
-          </a:xfrm>
-          <a:prstGeom prst="rect">
-            <a:avLst/>
-          </a:prstGeom>
-          <a:solidFill>
-            <a:srgbClr val="269CCB"/>
-          </a:solidFill>
-          <a:ln>
-            <a:noFill/>
-          </a:ln>
-        </p:spPr>
-        <p:style>
-          <a:lnRef idx="1">
-            <a:schemeClr val="accent1"/>
-          </a:lnRef>
-          <a:fillRef idx="3">
-            <a:schemeClr val="accent1"/>
-          </a:fillRef>
-          <a:effectRef idx="2">
-            <a:schemeClr val="accent1"/>
-          </a:effectRef>
-          <a:fontRef idx="minor">
-            <a:schemeClr val="lt1"/>
-          </a:fontRef>
-        </p:style>
-        <p:txBody>
-          <a:bodyPr rtlCol="0" anchor="ctr"/>
-          <a:lstStyle/>
-          <a:p>
-            <a:pPr algn="ctr"/>
-          </a:p>
-        </p:txBody>
-      </p:sp>
-      <p:pic>
-        <p:nvPicPr>
-          <p:cNvPr id="3" name="Picture 2" descr="logo_uniajc_color.png"/>
-          <p:cNvPicPr>
-            <a:picLocks noChangeAspect="1"/>
-          </p:cNvPicPr>
-          <p:nvPr/>
-        </p:nvPicPr>
-        <p:blipFill>
-          <a:blip r:embed="rId2"/>
-          <a:stretch>
-            <a:fillRect/>
-          </a:stretch>
-        </p:blipFill>
-        <p:spPr>
-          <a:xfrm>
-            <a:off x="10271455" y="5998464"/>
-            <a:ext cx="1463040" cy="643233"/>
-          </a:xfrm>
-          <a:prstGeom prst="rect">
-            <a:avLst/>
-          </a:prstGeom>
-        </p:spPr>
-      </p:pic>
-      <p:sp>
-        <p:nvSpPr>
-          <p:cNvPr id="4" name="TextBox 3"/>
-          <p:cNvSpPr txBox="1"/>
-          <p:nvPr/>
-        </p:nvSpPr>
-        <p:spPr>
-          <a:xfrm>
-            <a:off x="457200" y="1737360"/>
-            <a:ext cx="11277295" cy="1097280"/>
-          </a:xfrm>
-          <a:prstGeom prst="rect">
-            <a:avLst/>
-          </a:prstGeom>
-          <a:noFill/>
-        </p:spPr>
-        <p:txBody>
-          <a:bodyPr wrap="square" anchor="ctr"/>
-          <a:lstStyle/>
-          <a:p>
-            <a:pPr algn="ctr"/>
-            <a:r>
-              <a:rPr sz="3400" b="1" i="0">
-                <a:solidFill>
-                  <a:srgbClr val="095292"/>
-                </a:solidFill>
-                <a:latin typeface="Calibri"/>
-              </a:rPr>
-              <a:t>Clase 3 · VetCare avanza</a:t>
-            </a:r>
-          </a:p>
-        </p:txBody>
-      </p:sp>
-      <p:sp>
-        <p:nvSpPr>
-          <p:cNvPr id="5" name="TextBox 4"/>
-          <p:cNvSpPr txBox="1"/>
-          <p:nvPr/>
-        </p:nvSpPr>
-        <p:spPr>
-          <a:xfrm>
-            <a:off x="457200" y="3017520"/>
-            <a:ext cx="11277295" cy="1645920"/>
-          </a:xfrm>
-          <a:prstGeom prst="rect">
-            <a:avLst/>
-          </a:prstGeom>
-          <a:noFill/>
-        </p:spPr>
-        <p:txBody>
-          <a:bodyPr wrap="square">
-            <a:spAutoFit/>
-          </a:bodyPr>
-          <a:lstStyle/>
-          <a:p>
-            <a:pPr algn="ctr">
-              <a:spcAft>
-                <a:spcPts val="600"/>
-              </a:spcAft>
-            </a:pPr>
-            <a:r>
-              <a:rPr sz="1600" b="0" i="0">
-                <a:solidFill>
-                  <a:srgbClr val="333333"/>
-                </a:solidFill>
-                <a:latin typeface="Calibri"/>
-              </a:rPr>
-              <a:t>Queda listo el indice del documento formal de diseño de VetCare y la matriz en V que amarra cada requisito con la prueba que lo va a verificar.</a:t>
-            </a:r>
-          </a:p>
-          <a:p>
-            <a:pPr algn="ctr">
-              <a:spcAft>
-                <a:spcPts val="600"/>
-              </a:spcAft>
-            </a:pPr>
-            <a:r>
-              <a:rPr sz="1600" b="0" i="0">
-                <a:solidFill>
-                  <a:srgbClr val="333333"/>
-                </a:solidFill>
-                <a:latin typeface="Calibri"/>
-              </a:rPr>
-              <a:t>Entregable: Un documento en Google Docs con el indice del ERS de VetCare, cuatro requisitos escritos en formato de ficha con version y linea base, la matriz en V (requisito - nivel de prueba - criterio de aceptacion) y un formato de solicitud de cambio diligenciado; mas el diagrama en V dibujado en draw.io y subido a la plataforma del curso.</a:t>
-            </a:r>
-          </a:p>
-          <a:p>
-            <a:pPr algn="ctr">
-              <a:spcAft>
-                <a:spcPts val="600"/>
-              </a:spcAft>
-            </a:pPr>
-            <a:r>
-              <a:rPr sz="1600" b="0" i="0">
-                <a:solidFill>
-                  <a:srgbClr val="333333"/>
-                </a:solidFill>
-                <a:latin typeface="Calibri"/>
-              </a:rPr>
-              <a:t>Siguiente clase: continuamos el hilo del PI</a:t>
-            </a:r>
-          </a:p>
-        </p:txBody>
-      </p:sp>
-      <p:sp>
-        <p:nvSpPr>
-          <p:cNvPr id="6" name="TextBox 5"/>
-          <p:cNvSpPr txBox="1"/>
-          <p:nvPr/>
-        </p:nvSpPr>
-        <p:spPr>
-          <a:xfrm>
-            <a:off x="457200" y="4754880"/>
-            <a:ext cx="11277295" cy="640080"/>
-          </a:xfrm>
-          <a:prstGeom prst="rect">
-            <a:avLst/>
-          </a:prstGeom>
-          <a:noFill/>
-        </p:spPr>
-        <p:txBody>
-          <a:bodyPr wrap="square">
-            <a:spAutoFit/>
-          </a:bodyPr>
-          <a:lstStyle/>
-          <a:p>
-            <a:pPr algn="ctr"/>
-            <a:r>
-              <a:rPr sz="2000" b="1" i="0">
-                <a:solidFill>
-                  <a:srgbClr val="269CCB"/>
-                </a:solidFill>
-                <a:latin typeface="Calibri"/>
-              </a:rPr>
-              <a:t>Teoria al servicio del proyecto</a:t>
             </a:r>
           </a:p>
         </p:txBody>
@@ -10346,7 +6967,7 @@
                 </a:solidFill>
                 <a:latin typeface="Calibri"/>
               </a:rPr>
-              <a:t>Encuadre y repaso del avance</a:t>
+              <a:t>Encuadre y repaso</a:t>
             </a:r>
           </a:p>
         </p:txBody>
@@ -10691,7 +7312,7 @@
                 </a:solidFill>
                 <a:latin typeface="Calibri"/>
               </a:rPr>
-              <a:t>Taller guiado = avance del PI</a:t>
+              <a:t>Practica (opcional, guia en la carpeta)</a:t>
             </a:r>
           </a:p>
         </p:txBody>
@@ -10806,7 +7427,7 @@
                 </a:solidFill>
                 <a:latin typeface="Calibri"/>
               </a:rPr>
-              <a:t>Criterios de exito y cierre</a:t>
+              <a:t>Sintesis y cierre</a:t>
             </a:r>
           </a:p>
         </p:txBody>
@@ -12833,4 +9454,324 @@
   </a:objectDefaults>
   <a:extraClrSchemeLst/>
 </a:theme>
+</file>
+
+<file path=ppt/theme/theme2.xml><?xml version="1.0" encoding="utf-8"?>
+<a:theme xmlns:a="http://schemas.openxmlformats.org/drawingml/2006/main" name="Office Theme">
+  <a:themeElements>
+    <a:clrScheme name="Office">
+      <a:dk1>
+        <a:sysClr val="windowText" lastClr="000000"/>
+      </a:dk1>
+      <a:lt1>
+        <a:sysClr val="window" lastClr="FFFFFF"/>
+      </a:lt1>
+      <a:dk2>
+        <a:srgbClr val="1F497D"/>
+      </a:dk2>
+      <a:lt2>
+        <a:srgbClr val="EEECE1"/>
+      </a:lt2>
+      <a:accent1>
+        <a:srgbClr val="4F81BD"/>
+      </a:accent1>
+      <a:accent2>
+        <a:srgbClr val="C0504D"/>
+      </a:accent2>
+      <a:accent3>
+        <a:srgbClr val="9BBB59"/>
+      </a:accent3>
+      <a:accent4>
+        <a:srgbClr val="8064A2"/>
+      </a:accent4>
+      <a:accent5>
+        <a:srgbClr val="4BACC6"/>
+      </a:accent5>
+      <a:accent6>
+        <a:srgbClr val="F79646"/>
+      </a:accent6>
+      <a:hlink>
+        <a:srgbClr val="0000FF"/>
+      </a:hlink>
+      <a:folHlink>
+        <a:srgbClr val="800080"/>
+      </a:folHlink>
+    </a:clrScheme>
+    <a:fontScheme name="Office">
+      <a:majorFont>
+        <a:latin typeface="Calibri"/>
+        <a:ea typeface=""/>
+        <a:cs typeface=""/>
+        <a:font script="Jpan" typeface="ＭＳ Ｐゴシック"/>
+        <a:font script="Hang" typeface="맑은 고딕"/>
+        <a:font script="Hans" typeface="宋体"/>
+        <a:font script="Hant" typeface="新細明體"/>
+        <a:font script="Arab" typeface="Times New Roman"/>
+        <a:font script="Hebr" typeface="Times New Roman"/>
+        <a:font script="Thai" typeface="Angsana New"/>
+        <a:font script="Ethi" typeface="Nyala"/>
+        <a:font script="Beng" typeface="Vrinda"/>
+        <a:font script="Gujr" typeface="Shruti"/>
+        <a:font script="Khmr" typeface="MoolBoran"/>
+        <a:font script="Knda" typeface="Tunga"/>
+        <a:font script="Guru" typeface="Raavi"/>
+        <a:font script="Cans" typeface="Euphemia"/>
+        <a:font script="Cher" typeface="Plantagenet Cherokee"/>
+        <a:font script="Yiii" typeface="Microsoft Yi Baiti"/>
+        <a:font script="Tibt" typeface="Microsoft Himalaya"/>
+        <a:font script="Thaa" typeface="MV Boli"/>
+        <a:font script="Deva" typeface="Mangal"/>
+        <a:font script="Telu" typeface="Gautami"/>
+        <a:font script="Taml" typeface="Latha"/>
+        <a:font script="Syrc" typeface="Estrangelo Edessa"/>
+        <a:font script="Orya" typeface="Kalinga"/>
+        <a:font script="Mlym" typeface="Kartika"/>
+        <a:font script="Laoo" typeface="DokChampa"/>
+        <a:font script="Sinh" typeface="Iskoola Pota"/>
+        <a:font script="Mong" typeface="Mongolian Baiti"/>
+        <a:font script="Viet" typeface="Times New Roman"/>
+        <a:font script="Uigh" typeface="Microsoft Uighur"/>
+        <a:font script="Geor" typeface="Sylfaen"/>
+      </a:majorFont>
+      <a:minorFont>
+        <a:latin typeface="Calibri"/>
+        <a:ea typeface=""/>
+        <a:cs typeface=""/>
+        <a:font script="Jpan" typeface="ＭＳ Ｐゴシック"/>
+        <a:font script="Hang" typeface="맑은 고딕"/>
+        <a:font script="Hans" typeface="宋体"/>
+        <a:font script="Hant" typeface="新細明體"/>
+        <a:font script="Arab" typeface="Arial"/>
+        <a:font script="Hebr" typeface="Arial"/>
+        <a:font script="Thai" typeface="Cordia New"/>
+        <a:font script="Ethi" typeface="Nyala"/>
+        <a:font script="Beng" typeface="Vrinda"/>
+        <a:font script="Gujr" typeface="Shruti"/>
+        <a:font script="Khmr" typeface="DaunPenh"/>
+        <a:font script="Knda" typeface="Tunga"/>
+        <a:font script="Guru" typeface="Raavi"/>
+        <a:font script="Cans" typeface="Euphemia"/>
+        <a:font script="Cher" typeface="Plantagenet Cherokee"/>
+        <a:font script="Yiii" typeface="Microsoft Yi Baiti"/>
+        <a:font script="Tibt" typeface="Microsoft Himalaya"/>
+        <a:font script="Thaa" typeface="MV Boli"/>
+        <a:font script="Deva" typeface="Mangal"/>
+        <a:font script="Telu" typeface="Gautami"/>
+        <a:font script="Taml" typeface="Latha"/>
+        <a:font script="Syrc" typeface="Estrangelo Edessa"/>
+        <a:font script="Orya" typeface="Kalinga"/>
+        <a:font script="Mlym" typeface="Kartika"/>
+        <a:font script="Laoo" typeface="DokChampa"/>
+        <a:font script="Sinh" typeface="Iskoola Pota"/>
+        <a:font script="Mong" typeface="Mongolian Baiti"/>
+        <a:font script="Viet" typeface="Arial"/>
+        <a:font script="Uigh" typeface="Microsoft Uighur"/>
+        <a:font script="Geor" typeface="Sylfaen"/>
+      </a:minorFont>
+    </a:fontScheme>
+    <a:fmtScheme name="Office">
+      <a:fillStyleLst>
+        <a:solidFill>
+          <a:schemeClr val="phClr"/>
+        </a:solidFill>
+        <a:gradFill rotWithShape="1">
+          <a:gsLst>
+            <a:gs pos="0">
+              <a:schemeClr val="phClr">
+                <a:tint val="50000"/>
+                <a:satMod val="300000"/>
+              </a:schemeClr>
+            </a:gs>
+            <a:gs pos="35000">
+              <a:schemeClr val="phClr">
+                <a:tint val="37000"/>
+                <a:satMod val="300000"/>
+              </a:schemeClr>
+            </a:gs>
+            <a:gs pos="100000">
+              <a:schemeClr val="phClr">
+                <a:tint val="15000"/>
+                <a:satMod val="350000"/>
+              </a:schemeClr>
+            </a:gs>
+          </a:gsLst>
+          <a:lin ang="16200000" scaled="1"/>
+        </a:gradFill>
+        <a:gradFill rotWithShape="1">
+          <a:gsLst>
+            <a:gs pos="0">
+              <a:schemeClr val="phClr">
+                <a:tint val="100000"/>
+                <a:shade val="100000"/>
+                <a:satMod val="130000"/>
+              </a:schemeClr>
+            </a:gs>
+            <a:gs pos="100000">
+              <a:schemeClr val="phClr">
+                <a:tint val="50000"/>
+                <a:shade val="100000"/>
+                <a:satMod val="350000"/>
+              </a:schemeClr>
+            </a:gs>
+          </a:gsLst>
+          <a:lin ang="16200000" scaled="0"/>
+        </a:gradFill>
+      </a:fillStyleLst>
+      <a:lnStyleLst>
+        <a:ln w="9525" cap="flat" cmpd="sng" algn="ctr">
+          <a:solidFill>
+            <a:schemeClr val="phClr">
+              <a:shade val="95000"/>
+              <a:satMod val="105000"/>
+            </a:schemeClr>
+          </a:solidFill>
+          <a:prstDash val="solid"/>
+        </a:ln>
+        <a:ln w="25400" cap="flat" cmpd="sng" algn="ctr">
+          <a:solidFill>
+            <a:schemeClr val="phClr"/>
+          </a:solidFill>
+          <a:prstDash val="solid"/>
+        </a:ln>
+        <a:ln w="38100" cap="flat" cmpd="sng" algn="ctr">
+          <a:solidFill>
+            <a:schemeClr val="phClr"/>
+          </a:solidFill>
+          <a:prstDash val="solid"/>
+        </a:ln>
+      </a:lnStyleLst>
+      <a:effectStyleLst>
+        <a:effectStyle>
+          <a:effectLst>
+            <a:outerShdw blurRad="40000" dist="20000" dir="5400000" rotWithShape="0">
+              <a:srgbClr val="000000">
+                <a:alpha val="38000"/>
+              </a:srgbClr>
+            </a:outerShdw>
+          </a:effectLst>
+        </a:effectStyle>
+        <a:effectStyle>
+          <a:effectLst>
+            <a:outerShdw blurRad="40000" dist="23000" dir="5400000" rotWithShape="0">
+              <a:srgbClr val="000000">
+                <a:alpha val="35000"/>
+              </a:srgbClr>
+            </a:outerShdw>
+          </a:effectLst>
+        </a:effectStyle>
+        <a:effectStyle>
+          <a:effectLst>
+            <a:outerShdw blurRad="40000" dist="23000" dir="5400000" rotWithShape="0">
+              <a:srgbClr val="000000">
+                <a:alpha val="35000"/>
+              </a:srgbClr>
+            </a:outerShdw>
+          </a:effectLst>
+          <a:scene3d>
+            <a:camera prst="orthographicFront">
+              <a:rot lat="0" lon="0" rev="0"/>
+            </a:camera>
+            <a:lightRig rig="threePt" dir="t">
+              <a:rot lat="0" lon="0" rev="1200000"/>
+            </a:lightRig>
+          </a:scene3d>
+          <a:sp3d>
+            <a:bevelT w="63500" h="25400"/>
+          </a:sp3d>
+        </a:effectStyle>
+      </a:effectStyleLst>
+      <a:bgFillStyleLst>
+        <a:solidFill>
+          <a:schemeClr val="phClr"/>
+        </a:solidFill>
+        <a:gradFill rotWithShape="1">
+          <a:gsLst>
+            <a:gs pos="0">
+              <a:schemeClr val="phClr">
+                <a:tint val="40000"/>
+                <a:satMod val="350000"/>
+              </a:schemeClr>
+            </a:gs>
+            <a:gs pos="40000">
+              <a:schemeClr val="phClr">
+                <a:tint val="45000"/>
+                <a:shade val="99000"/>
+                <a:satMod val="350000"/>
+              </a:schemeClr>
+            </a:gs>
+            <a:gs pos="100000">
+              <a:schemeClr val="phClr">
+                <a:shade val="20000"/>
+                <a:satMod val="255000"/>
+              </a:schemeClr>
+            </a:gs>
+          </a:gsLst>
+          <a:path path="circle">
+            <a:fillToRect l="50000" t="-80000" r="50000" b="180000"/>
+          </a:path>
+        </a:gradFill>
+        <a:gradFill rotWithShape="1">
+          <a:gsLst>
+            <a:gs pos="0">
+              <a:schemeClr val="phClr">
+                <a:tint val="80000"/>
+                <a:satMod val="300000"/>
+              </a:schemeClr>
+            </a:gs>
+            <a:gs pos="100000">
+              <a:schemeClr val="phClr">
+                <a:shade val="30000"/>
+                <a:satMod val="200000"/>
+              </a:schemeClr>
+            </a:gs>
+          </a:gsLst>
+          <a:path path="circle">
+            <a:fillToRect l="50000" t="50000" r="50000" b="50000"/>
+          </a:path>
+        </a:gradFill>
+      </a:bgFillStyleLst>
+    </a:fmtScheme>
+  </a:themeElements>
+  <a:objectDefaults>
+    <a:spDef>
+      <a:spPr/>
+      <a:bodyPr/>
+      <a:lstStyle/>
+      <a:style>
+        <a:lnRef idx="1">
+          <a:schemeClr val="accent1"/>
+        </a:lnRef>
+        <a:fillRef idx="3">
+          <a:schemeClr val="accent1"/>
+        </a:fillRef>
+        <a:effectRef idx="2">
+          <a:schemeClr val="accent1"/>
+        </a:effectRef>
+        <a:fontRef idx="minor">
+          <a:schemeClr val="lt1"/>
+        </a:fontRef>
+      </a:style>
+    </a:spDef>
+    <a:lnDef>
+      <a:spPr/>
+      <a:bodyPr/>
+      <a:lstStyle/>
+      <a:style>
+        <a:lnRef idx="2">
+          <a:schemeClr val="accent1"/>
+        </a:lnRef>
+        <a:fillRef idx="0">
+          <a:schemeClr val="accent1"/>
+        </a:fillRef>
+        <a:effectRef idx="1">
+          <a:schemeClr val="accent1"/>
+        </a:effectRef>
+        <a:fontRef idx="minor">
+          <a:schemeClr val="tx1"/>
+        </a:fontRef>
+      </a:style>
+    </a:lnDef>
+  </a:objectDefaults>
+  <a:extraClrSchemeLst/>
+</a:theme>
 </file>
--- a/Seminario de Sistemas/Clases/Clase 3 - Metodologias tradicionales/Presentacion.pptx
+++ b/Seminario de Sistemas/Clases/Clase 3 - Metodologias tradicionales/Presentacion.pptx
@@ -19,6 +19,7 @@
     <p:sldId id="267" r:id="rId19"/>
     <p:sldId id="268" r:id="rId20"/>
     <p:sldId id="269" r:id="rId21"/>
+    <p:sldId id="270" r:id="rId22"/>
   </p:sldIdLst>
   <p:sldSz cx="12191695" cy="6858000" type="screen4x3"/>
   <p:notesSz cx="6858000" cy="9144000"/>
@@ -4249,141 +4250,21 @@
                 </a:solidFill>
                 <a:latin typeface="Calibri"/>
               </a:rPr>
-              <a:t>El modelo en V con trazabilidad</a:t>
-            </a:r>
-          </a:p>
-        </p:txBody>
-      </p:sp>
-      <p:sp>
-        <p:nvSpPr>
-          <p:cNvPr id="5" name="Rounded Rectangle 4"/>
-          <p:cNvSpPr/>
-          <p:nvPr/>
-        </p:nvSpPr>
-        <p:spPr>
-          <a:xfrm>
-            <a:off x="457200" y="1261872"/>
-            <a:ext cx="11277295" cy="5093208"/>
-          </a:xfrm>
-          <a:prstGeom prst="roundRect">
-            <a:avLst>
-              <a:gd name="adj" fmla="val 12000"/>
-            </a:avLst>
-          </a:prstGeom>
-          <a:solidFill>
-            <a:srgbClr val="1E2A38"/>
-          </a:solidFill>
-          <a:ln>
-            <a:noFill/>
-          </a:ln>
-        </p:spPr>
-        <p:style>
-          <a:lnRef idx="1">
-            <a:schemeClr val="accent1"/>
-          </a:lnRef>
-          <a:fillRef idx="3">
-            <a:schemeClr val="accent1"/>
-          </a:fillRef>
-          <a:effectRef idx="2">
-            <a:schemeClr val="accent1"/>
-          </a:effectRef>
-          <a:fontRef idx="minor">
-            <a:schemeClr val="lt1"/>
-          </a:fontRef>
-        </p:style>
-        <p:txBody>
-          <a:bodyPr rtlCol="0" anchor="ctr"/>
-          <a:lstStyle/>
-          <a:p>
-            <a:pPr algn="ctr"/>
-          </a:p>
-        </p:txBody>
-      </p:sp>
-      <p:sp>
-        <p:nvSpPr>
-          <p:cNvPr id="6" name="Rectangle 5"/>
-          <p:cNvSpPr/>
-          <p:nvPr/>
-        </p:nvSpPr>
-        <p:spPr>
-          <a:xfrm>
-            <a:off x="457200" y="1261872"/>
-            <a:ext cx="11277295" cy="320040"/>
-          </a:xfrm>
-          <a:prstGeom prst="rect">
-            <a:avLst/>
-          </a:prstGeom>
-          <a:solidFill>
-            <a:srgbClr val="095292"/>
-          </a:solidFill>
-          <a:ln>
-            <a:noFill/>
-          </a:ln>
-        </p:spPr>
-        <p:style>
-          <a:lnRef idx="1">
-            <a:schemeClr val="accent1"/>
-          </a:lnRef>
-          <a:fillRef idx="3">
-            <a:schemeClr val="accent1"/>
-          </a:fillRef>
-          <a:effectRef idx="2">
-            <a:schemeClr val="accent1"/>
-          </a:effectRef>
-          <a:fontRef idx="minor">
-            <a:schemeClr val="lt1"/>
-          </a:fontRef>
-        </p:style>
-        <p:txBody>
-          <a:bodyPr rtlCol="0" anchor="ctr"/>
-          <a:lstStyle/>
-          <a:p>
-            <a:pPr algn="ctr"/>
-          </a:p>
-        </p:txBody>
-      </p:sp>
-      <p:sp>
-        <p:nvSpPr>
-          <p:cNvPr id="7" name="TextBox 6"/>
+              <a:t>En el mundo tradicional la documentacion no acompaña al producto: en...</a:t>
+            </a:r>
+          </a:p>
+        </p:txBody>
+      </p:sp>
+      <p:sp>
+        <p:nvSpPr>
+          <p:cNvPr id="5" name="TextBox 4"/>
           <p:cNvSpPr txBox="1"/>
           <p:nvPr/>
         </p:nvSpPr>
         <p:spPr>
           <a:xfrm>
-            <a:off x="685800" y="1307592"/>
-            <a:ext cx="10820095" cy="256032"/>
-          </a:xfrm>
-          <a:prstGeom prst="rect">
-            <a:avLst/>
-          </a:prstGeom>
-          <a:noFill/>
-        </p:spPr>
-        <p:txBody>
-          <a:bodyPr wrap="square" anchor="ctr"/>
-          <a:lstStyle/>
-          <a:p>
-            <a:r>
-              <a:rPr sz="1000" b="1" i="0">
-                <a:solidFill>
-                  <a:srgbClr val="269CCB"/>
-                </a:solidFill>
-                <a:latin typeface="Calibri"/>
-              </a:rPr>
-              <a:t>● ● ●</a:t>
-            </a:r>
-          </a:p>
-        </p:txBody>
-      </p:sp>
-      <p:sp>
-        <p:nvSpPr>
-          <p:cNvPr id="8" name="TextBox 7"/>
-          <p:cNvSpPr txBox="1"/>
-          <p:nvPr/>
-        </p:nvSpPr>
-        <p:spPr>
-          <a:xfrm>
-            <a:off x="777240" y="1719072"/>
-            <a:ext cx="10637215" cy="4453128"/>
+            <a:off x="457200" y="1170432"/>
+            <a:ext cx="11277295" cy="5230368"/>
           </a:xfrm>
           <a:prstGeom prst="rect">
             <a:avLst/>
@@ -4398,280 +4279,56 @@
           <a:p>
             <a:pPr>
               <a:spcAft>
-                <a:spcPts val="371"/>
+                <a:spcPts val="800"/>
               </a:spcAft>
             </a:pPr>
             <a:r>
-              <a:rPr sz="1300" b="0" i="0">
-                <a:solidFill>
-                  <a:srgbClr val="FFFFFF"/>
-                </a:solidFill>
-                <a:latin typeface="Calibri"/>
-              </a:rPr>
-              <a:t>flowchart TB</a:t>
+              <a:rPr sz="2000" b="0" i="0">
+                <a:solidFill>
+                  <a:srgbClr val="333333"/>
+                </a:solidFill>
+                <a:latin typeface="Calibri"/>
+              </a:rPr>
+              <a:t>–   En el mundo tradicional la documentacion no acompaña al producto: en buena parte ES el producto contratado.</a:t>
             </a:r>
           </a:p>
           <a:p>
             <a:pPr>
               <a:spcAft>
-                <a:spcPts val="371"/>
+                <a:spcPts val="800"/>
               </a:spcAft>
             </a:pPr>
             <a:r>
-              <a:rPr sz="1300" b="0" i="0">
-                <a:solidFill>
-                  <a:srgbClr val="FFFFFF"/>
-                </a:solidFill>
-                <a:latin typeface="Calibri"/>
-              </a:rPr>
-              <a:t>  R[Requisitos] --&gt; AF[Analisis funcional]</a:t>
+              <a:rPr sz="2000" b="0" i="0">
+                <a:solidFill>
+                  <a:srgbClr val="333333"/>
+                </a:solidFill>
+                <a:latin typeface="Calibri"/>
+              </a:rPr>
+              <a:t>–   Los artefactos tipicos son la Especificacion de Requisitos de Software (ERS o SRS, con estructura tipo IEEE 830 / ISO 29148), el Documento de Diseño (SDD), la matriz de trazabilidad que muestra que cada requisito tiene diseño y prueba, y el acta de aprobacion.</a:t>
             </a:r>
           </a:p>
           <a:p>
             <a:pPr>
               <a:spcAft>
-                <a:spcPts val="371"/>
+                <a:spcPts val="800"/>
               </a:spcAft>
             </a:pPr>
             <a:r>
-              <a:rPr sz="1300" b="0" i="0">
-                <a:solidFill>
-                  <a:srgbClr val="FFFFFF"/>
-                </a:solidFill>
-                <a:latin typeface="Calibri"/>
-              </a:rPr>
-              <a:t>  AF --&gt; DA[Diseno de arquitectura]</a:t>
-            </a:r>
-          </a:p>
-          <a:p>
-            <a:pPr>
-              <a:spcAft>
-                <a:spcPts val="371"/>
-              </a:spcAft>
-            </a:pPr>
-            <a:r>
-              <a:rPr sz="1300" b="0" i="0">
-                <a:solidFill>
-                  <a:srgbClr val="FFFFFF"/>
-                </a:solidFill>
-                <a:latin typeface="Calibri"/>
-              </a:rPr>
-              <a:t>  DA --&gt; DD[Diseno detallado]</a:t>
-            </a:r>
-          </a:p>
-          <a:p>
-            <a:pPr>
-              <a:spcAft>
-                <a:spcPts val="371"/>
-              </a:spcAft>
-            </a:pPr>
-            <a:r>
-              <a:rPr sz="1300" b="0" i="0">
-                <a:solidFill>
-                  <a:srgbClr val="FFFFFF"/>
-                </a:solidFill>
-                <a:latin typeface="Calibri"/>
-              </a:rPr>
-              <a:t>  DD --&gt; COD[Codificacion]</a:t>
-            </a:r>
-          </a:p>
-          <a:p>
-            <a:pPr>
-              <a:spcAft>
-                <a:spcPts val="371"/>
-              </a:spcAft>
-            </a:pPr>
-            <a:r>
-              <a:rPr sz="1300" b="0" i="0">
-                <a:solidFill>
-                  <a:srgbClr val="FFFFFF"/>
-                </a:solidFill>
-                <a:latin typeface="Calibri"/>
-              </a:rPr>
-              <a:t>  COD --&gt; PU[Pruebas unitarias]</a:t>
-            </a:r>
-          </a:p>
-          <a:p>
-            <a:pPr>
-              <a:spcAft>
-                <a:spcPts val="371"/>
-              </a:spcAft>
-            </a:pPr>
-            <a:r>
-              <a:rPr sz="1300" b="0" i="0">
-                <a:solidFill>
-                  <a:srgbClr val="FFFFFF"/>
-                </a:solidFill>
-                <a:latin typeface="Calibri"/>
-              </a:rPr>
-              <a:t>  PU --&gt; PI[Pruebas de integracion]</a:t>
-            </a:r>
-          </a:p>
-          <a:p>
-            <a:pPr>
-              <a:spcAft>
-                <a:spcPts val="371"/>
-              </a:spcAft>
-            </a:pPr>
-            <a:r>
-              <a:rPr sz="1300" b="0" i="0">
-                <a:solidFill>
-                  <a:srgbClr val="FFFFFF"/>
-                </a:solidFill>
-                <a:latin typeface="Calibri"/>
-              </a:rPr>
-              <a:t>  PI --&gt; PS[Pruebas de sistema]</a:t>
-            </a:r>
-          </a:p>
-          <a:p>
-            <a:pPr>
-              <a:spcAft>
-                <a:spcPts val="371"/>
-              </a:spcAft>
-            </a:pPr>
-            <a:r>
-              <a:rPr sz="1300" b="0" i="0">
-                <a:solidFill>
-                  <a:srgbClr val="FFFFFF"/>
-                </a:solidFill>
-                <a:latin typeface="Calibri"/>
-              </a:rPr>
-              <a:t>  PS --&gt; PA[Pruebas de aceptacion]</a:t>
-            </a:r>
-          </a:p>
-          <a:p>
-            <a:pPr>
-              <a:spcAft>
-                <a:spcPts val="371"/>
-              </a:spcAft>
-            </a:pPr>
-            <a:r>
-              <a:rPr sz="1300" b="0" i="0">
-                <a:solidFill>
-                  <a:srgbClr val="FFFFFF"/>
-                </a:solidFill>
-                <a:latin typeface="Calibri"/>
-              </a:rPr>
-              <a:t/>
-            </a:r>
-          </a:p>
-          <a:p>
-            <a:pPr>
-              <a:spcAft>
-                <a:spcPts val="371"/>
-              </a:spcAft>
-            </a:pPr>
-            <a:r>
-              <a:rPr sz="1300" b="0" i="0">
-                <a:solidFill>
-                  <a:srgbClr val="FFFFFF"/>
-                </a:solidFill>
-                <a:latin typeface="Calibri"/>
-              </a:rPr>
-              <a:t>  R  -.verifica.-&gt; PA</a:t>
-            </a:r>
-          </a:p>
-          <a:p>
-            <a:pPr>
-              <a:spcAft>
-                <a:spcPts val="371"/>
-              </a:spcAft>
-            </a:pPr>
-            <a:r>
-              <a:rPr sz="1300" b="0" i="0">
-                <a:solidFill>
-                  <a:srgbClr val="FFFFFF"/>
-                </a:solidFill>
-                <a:latin typeface="Calibri"/>
-              </a:rPr>
-              <a:t>  AF -.verifica.-&gt; PS</a:t>
-            </a:r>
-          </a:p>
-          <a:p>
-            <a:pPr>
-              <a:spcAft>
-                <a:spcPts val="371"/>
-              </a:spcAft>
-            </a:pPr>
-            <a:r>
-              <a:rPr sz="1300" b="0" i="0">
-                <a:solidFill>
-                  <a:srgbClr val="FFFFFF"/>
-                </a:solidFill>
-                <a:latin typeface="Calibri"/>
-              </a:rPr>
-              <a:t>  DA -.verifica.-&gt; PI</a:t>
-            </a:r>
-          </a:p>
-          <a:p>
-            <a:pPr>
-              <a:spcAft>
-                <a:spcPts val="371"/>
-              </a:spcAft>
-            </a:pPr>
-            <a:r>
-              <a:rPr sz="1300" b="0" i="0">
-                <a:solidFill>
-                  <a:srgbClr val="FFFFFF"/>
-                </a:solidFill>
-                <a:latin typeface="Calibri"/>
-              </a:rPr>
-              <a:t>  DD -.verifica.-&gt; PU</a:t>
-            </a:r>
-          </a:p>
-          <a:p>
-            <a:pPr>
-              <a:spcAft>
-                <a:spcPts val="371"/>
-              </a:spcAft>
-            </a:pPr>
-            <a:r>
-              <a:rPr sz="1300" b="0" i="0">
-                <a:solidFill>
-                  <a:srgbClr val="FFFFFF"/>
-                </a:solidFill>
-                <a:latin typeface="Calibri"/>
-              </a:rPr>
-              <a:t/>
-            </a:r>
-          </a:p>
-          <a:p>
-            <a:pPr>
-              <a:spcAft>
-                <a:spcPts val="371"/>
-              </a:spcAft>
-            </a:pPr>
-            <a:r>
-              <a:rPr sz="1300" b="0" i="0">
-                <a:solidFill>
-                  <a:srgbClr val="FFFFFF"/>
-                </a:solidFill>
-                <a:latin typeface="Calibri"/>
-              </a:rPr>
-              <a:t>%% Las lineas punteadas SON el modelo en V: cada nivel de diseno tiene</a:t>
-            </a:r>
-          </a:p>
-          <a:p>
-            <a:pPr>
-              <a:spcAft>
-                <a:spcPts val="371"/>
-              </a:spcAft>
-            </a:pPr>
-            <a:r>
-              <a:rPr sz="1300" b="0" i="0">
-                <a:solidFill>
-                  <a:srgbClr val="FFFFFF"/>
-                </a:solidFill>
-                <a:latin typeface="Calibri"/>
-              </a:rPr>
-              <a:t>%% su nivel de prueba. Sin ellas es una U y no trazabilidad.</a:t>
-            </a:r>
-          </a:p>
-        </p:txBody>
-      </p:sp>
-      <p:sp>
-        <p:nvSpPr>
-          <p:cNvPr id="9" name="TextBox 8"/>
+              <a:rPr sz="2000" b="0" i="0">
+                <a:solidFill>
+                  <a:srgbClr val="333333"/>
+                </a:solidFill>
+                <a:latin typeface="Calibri"/>
+              </a:rPr>
+              <a:t>–   Para el estudiante que solo cursa Seminario de Sistemas esto es una gran noticia: su producto final -documento de diseño mas prototipo navegable- es exactamente el tipo de producto que se factura en un proyecto tradicional, y por eso su ruta es completa y no una version reducida del curso.</a:t>
+            </a:r>
+          </a:p>
+        </p:txBody>
+      </p:sp>
+      <p:sp>
+        <p:nvSpPr>
+          <p:cNvPr id="6" name="TextBox 5"/>
           <p:cNvSpPr txBox="1"/>
           <p:nvPr/>
         </p:nvSpPr>
@@ -4845,7 +4502,7 @@
                 </a:solidFill>
                 <a:latin typeface="Calibri"/>
               </a:rPr>
-              <a:t>La solicitud de cambio sobre linea base</a:t>
+              <a:t>El modelo en V con trazabilidad</a:t>
             </a:r>
           </a:p>
         </p:txBody>
@@ -4994,225 +4651,273 @@
           <a:p>
             <a:pPr>
               <a:spcAft>
-                <a:spcPts val="400"/>
+                <a:spcPts val="371"/>
               </a:spcAft>
             </a:pPr>
             <a:r>
-              <a:rPr sz="1400" b="0" i="0">
+              <a:rPr sz="1300" b="0" i="0">
                 <a:solidFill>
                   <a:srgbClr val="FFFFFF"/>
                 </a:solidFill>
                 <a:latin typeface="Calibri"/>
               </a:rPr>
-              <a:t>SC-001  Solicitud de cambio</a:t>
+              <a:t>flowchart TB</a:t>
             </a:r>
           </a:p>
           <a:p>
             <a:pPr>
               <a:spcAft>
-                <a:spcPts val="400"/>
+                <a:spcPts val="371"/>
               </a:spcAft>
             </a:pPr>
             <a:r>
-              <a:rPr sz="1400" b="0" i="0">
+              <a:rPr sz="1300" b="0" i="0">
                 <a:solidFill>
                   <a:srgbClr val="FFFFFF"/>
                 </a:solidFill>
                 <a:latin typeface="Calibri"/>
               </a:rPr>
-              <a:t/>
+              <a:t>  R[Requisitos] --&gt; AF[Analisis funcional]</a:t>
             </a:r>
           </a:p>
           <a:p>
             <a:pPr>
               <a:spcAft>
-                <a:spcPts val="400"/>
+                <a:spcPts val="371"/>
               </a:spcAft>
             </a:pPr>
             <a:r>
-              <a:rPr sz="1400" b="0" i="0">
+              <a:rPr sz="1300" b="0" i="0">
                 <a:solidFill>
                   <a:srgbClr val="FFFFFF"/>
                 </a:solidFill>
                 <a:latin typeface="Calibri"/>
               </a:rPr>
-              <a:t>Documento afectado: ERS VetCare v1.0 (linea base aprobada 20/08/2026)</a:t>
+              <a:t>  AF --&gt; DA[Diseno de arquitectura]</a:t>
             </a:r>
           </a:p>
           <a:p>
             <a:pPr>
               <a:spcAft>
-                <a:spcPts val="400"/>
+                <a:spcPts val="371"/>
               </a:spcAft>
             </a:pPr>
             <a:r>
-              <a:rPr sz="1400" b="0" i="0">
+              <a:rPr sz="1300" b="0" i="0">
                 <a:solidFill>
                   <a:srgbClr val="FFFFFF"/>
                 </a:solidFill>
                 <a:latin typeface="Calibri"/>
               </a:rPr>
-              <a:t>Solicita:           Dr. Ramirez</a:t>
+              <a:t>  DA --&gt; DD[Diseno detallado]</a:t>
             </a:r>
           </a:p>
           <a:p>
             <a:pPr>
               <a:spcAft>
-                <a:spcPts val="400"/>
+                <a:spcPts val="371"/>
               </a:spcAft>
             </a:pPr>
             <a:r>
-              <a:rPr sz="1400" b="0" i="0">
+              <a:rPr sz="1300" b="0" i="0">
                 <a:solidFill>
                   <a:srgbClr val="FFFFFF"/>
                 </a:solidFill>
                 <a:latin typeface="Calibri"/>
               </a:rPr>
-              <a:t>Cambio pedido:      agregar recordatorio por WhatsApp al agendar</a:t>
+              <a:t>  DD --&gt; COD[Codificacion]</a:t>
             </a:r>
           </a:p>
           <a:p>
             <a:pPr>
               <a:spcAft>
-                <a:spcPts val="400"/>
+                <a:spcPts val="371"/>
               </a:spcAft>
             </a:pPr>
             <a:r>
-              <a:rPr sz="1400" b="0" i="0">
+              <a:rPr sz="1300" b="0" i="0">
                 <a:solidFill>
                   <a:srgbClr val="FFFFFF"/>
                 </a:solidFill>
                 <a:latin typeface="Calibri"/>
               </a:rPr>
-              <a:t>Requisitos tocados: RF-03 (agendar cita), RNF-02 (disponibilidad)</a:t>
+              <a:t>  COD --&gt; PU[Pruebas unitarias]</a:t>
             </a:r>
           </a:p>
           <a:p>
             <a:pPr>
               <a:spcAft>
-                <a:spcPts val="400"/>
+                <a:spcPts val="371"/>
               </a:spcAft>
             </a:pPr>
             <a:r>
-              <a:rPr sz="1400" b="0" i="0">
+              <a:rPr sz="1300" b="0" i="0">
                 <a:solidFill>
                   <a:srgbClr val="FFFFFF"/>
                 </a:solidFill>
                 <a:latin typeface="Calibri"/>
               </a:rPr>
-              <a:t>Impacto en alcance: +1 RF nuevo, +1 integracion externa</a:t>
+              <a:t>  PU --&gt; PIN[Pruebas de integracion]</a:t>
             </a:r>
           </a:p>
           <a:p>
             <a:pPr>
               <a:spcAft>
-                <a:spcPts val="400"/>
+                <a:spcPts val="371"/>
               </a:spcAft>
             </a:pPr>
             <a:r>
-              <a:rPr sz="1400" b="0" i="0">
+              <a:rPr sz="1300" b="0" i="0">
                 <a:solidFill>
                   <a:srgbClr val="FFFFFF"/>
                 </a:solidFill>
                 <a:latin typeface="Calibri"/>
               </a:rPr>
-              <a:t>Impacto en plan:    +1 sprint de diseno</a:t>
+              <a:t>  PIN --&gt; PS[Pruebas de sistema]</a:t>
             </a:r>
           </a:p>
           <a:p>
             <a:pPr>
               <a:spcAft>
-                <a:spcPts val="400"/>
+                <a:spcPts val="371"/>
               </a:spcAft>
             </a:pPr>
             <a:r>
-              <a:rPr sz="1400" b="0" i="0">
+              <a:rPr sz="1300" b="0" i="0">
                 <a:solidFill>
                   <a:srgbClr val="FFFFFF"/>
                 </a:solidFill>
                 <a:latin typeface="Calibri"/>
               </a:rPr>
-              <a:t>Decision:           &lt;aprobada | rechazada | diferida&gt;  por &lt;quien&gt;</a:t>
+              <a:t>  PS --&gt; PA[Pruebas de aceptacion]</a:t>
             </a:r>
           </a:p>
           <a:p>
             <a:pPr>
               <a:spcAft>
-                <a:spcPts val="400"/>
+                <a:spcPts val="371"/>
               </a:spcAft>
             </a:pPr>
             <a:r>
-              <a:rPr sz="1400" b="0" i="0">
+              <a:rPr sz="1300" b="0" i="0">
                 <a:solidFill>
                   <a:srgbClr val="FFFFFF"/>
                 </a:solidFill>
                 <a:latin typeface="Calibri"/>
               </a:rPr>
-              <a:t>Nueva version:      ERS VetCare v1.1</a:t>
+              <a:t/>
             </a:r>
           </a:p>
           <a:p>
             <a:pPr>
               <a:spcAft>
-                <a:spcPts val="400"/>
+                <a:spcPts val="371"/>
               </a:spcAft>
             </a:pPr>
             <a:r>
-              <a:rPr sz="1400" b="0" i="0">
+              <a:rPr sz="1300" b="0" i="0">
                 <a:solidFill>
                   <a:srgbClr val="FFFFFF"/>
                 </a:solidFill>
                 <a:latin typeface="Calibri"/>
               </a:rPr>
-              <a:t/>
+              <a:t>  R  -.verifica.-&gt; PA</a:t>
             </a:r>
           </a:p>
           <a:p>
             <a:pPr>
               <a:spcAft>
-                <a:spcPts val="400"/>
+                <a:spcPts val="371"/>
               </a:spcAft>
             </a:pPr>
             <a:r>
-              <a:rPr sz="1400" b="0" i="0">
+              <a:rPr sz="1300" b="0" i="0">
                 <a:solidFill>
                   <a:srgbClr val="FFFFFF"/>
                 </a:solidFill>
                 <a:latin typeface="Calibri"/>
               </a:rPr>
-              <a:t>-- Tener linea base no significa que no se pueda cambiar: significa que</a:t>
+              <a:t>  AF -.verifica.-&gt; PS</a:t>
             </a:r>
           </a:p>
           <a:p>
             <a:pPr>
               <a:spcAft>
-                <a:spcPts val="400"/>
+                <a:spcPts val="371"/>
               </a:spcAft>
             </a:pPr>
             <a:r>
-              <a:rPr sz="1400" b="0" i="0">
+              <a:rPr sz="1300" b="0" i="0">
                 <a:solidFill>
                   <a:srgbClr val="FFFFFF"/>
                 </a:solidFill>
                 <a:latin typeface="Calibri"/>
               </a:rPr>
-              <a:t>-- el cambio deja RASTRO y sube la version. Editar el v1.0 en silencio</a:t>
+              <a:t>  DA -.verifica.-&gt; PIN</a:t>
             </a:r>
           </a:p>
           <a:p>
             <a:pPr>
               <a:spcAft>
-                <a:spcPts val="400"/>
+                <a:spcPts val="371"/>
               </a:spcAft>
             </a:pPr>
             <a:r>
-              <a:rPr sz="1400" b="0" i="0">
+              <a:rPr sz="1300" b="0" i="0">
                 <a:solidFill>
                   <a:srgbClr val="FFFFFF"/>
                 </a:solidFill>
                 <a:latin typeface="Calibri"/>
               </a:rPr>
-              <a:t>-- es lo que rompe la trazabilidad.</a:t>
+              <a:t>  DD -.verifica.-&gt; PU</a:t>
+            </a:r>
+          </a:p>
+          <a:p>
+            <a:pPr>
+              <a:spcAft>
+                <a:spcPts val="371"/>
+              </a:spcAft>
+            </a:pPr>
+            <a:r>
+              <a:rPr sz="1300" b="0" i="0">
+                <a:solidFill>
+                  <a:srgbClr val="FFFFFF"/>
+                </a:solidFill>
+                <a:latin typeface="Calibri"/>
+              </a:rPr>
+              <a:t/>
+            </a:r>
+          </a:p>
+          <a:p>
+            <a:pPr>
+              <a:spcAft>
+                <a:spcPts val="371"/>
+              </a:spcAft>
+            </a:pPr>
+            <a:r>
+              <a:rPr sz="1300" b="0" i="0">
+                <a:solidFill>
+                  <a:srgbClr val="FFFFFF"/>
+                </a:solidFill>
+                <a:latin typeface="Calibri"/>
+              </a:rPr>
+              <a:t>%% Las lineas punteadas SON el modelo en V: cada nivel de diseno tiene</a:t>
+            </a:r>
+          </a:p>
+          <a:p>
+            <a:pPr>
+              <a:spcAft>
+                <a:spcPts val="371"/>
+              </a:spcAft>
+            </a:pPr>
+            <a:r>
+              <a:rPr sz="1300" b="0" i="0">
+                <a:solidFill>
+                  <a:srgbClr val="FFFFFF"/>
+                </a:solidFill>
+                <a:latin typeface="Calibri"/>
+              </a:rPr>
+              <a:t>%% su nivel de prueba. Sin ellas es una U y no trazabilidad.</a:t>
             </a:r>
           </a:p>
         </p:txBody>
@@ -5393,7 +5098,7 @@
                 </a:solidFill>
                 <a:latin typeface="Calibri"/>
               </a:rPr>
-              <a:t>Ficha formal de requisito de VetCare (asi se ve un requisito con linea base)</a:t>
+              <a:t>La solicitud de cambio sobre linea base</a:t>
             </a:r>
           </a:p>
         </p:txBody>
@@ -5407,7 +5112,7 @@
         <p:spPr>
           <a:xfrm>
             <a:off x="457200" y="1261872"/>
-            <a:ext cx="11277295" cy="4773168"/>
+            <a:ext cx="11277295" cy="5093208"/>
           </a:xfrm>
           <a:prstGeom prst="roundRect">
             <a:avLst>
@@ -5527,7 +5232,7 @@
         <p:spPr>
           <a:xfrm>
             <a:off x="777240" y="1719072"/>
-            <a:ext cx="10637215" cy="4133087"/>
+            <a:ext cx="10637215" cy="4453128"/>
           </a:xfrm>
           <a:prstGeom prst="rect">
             <a:avLst/>
@@ -5552,7 +5257,7 @@
                 </a:solidFill>
                 <a:latin typeface="Calibri"/>
               </a:rPr>
-              <a:t>ID: RF-03            Version: 1.2      Estado: Aprobado (linea base 27/08)</a:t>
+              <a:t>SC-001  Solicitud de cambio</a:t>
             </a:r>
           </a:p>
           <a:p>
@@ -5568,7 +5273,7 @@
                 </a:solidFill>
                 <a:latin typeface="Calibri"/>
               </a:rPr>
-              <a:t>Nombre: Buscar la historia clinica de un paciente</a:t>
+              <a:t/>
             </a:r>
           </a:p>
           <a:p>
@@ -5584,7 +5289,7 @@
                 </a:solidFill>
                 <a:latin typeface="Calibri"/>
               </a:rPr>
-              <a:t>Fuente: Dra. Marcela Rios, medica veterinaria de Huellitas</a:t>
+              <a:t>Documento afectado: ERS Clinica v1.0 (linea base aprobada 20/08/2026)</a:t>
             </a:r>
           </a:p>
           <a:p>
@@ -5600,7 +5305,7 @@
                 </a:solidFill>
                 <a:latin typeface="Calibri"/>
               </a:rPr>
-              <a:t>Prioridad: Alta      Estabilidad: Alta      Modulo: Historia clinica</a:t>
+              <a:t>Solicita:           Dr. Ramirez</a:t>
             </a:r>
           </a:p>
           <a:p>
@@ -5616,7 +5321,7 @@
                 </a:solidFill>
                 <a:latin typeface="Calibri"/>
               </a:rPr>
-              <a:t>Descripcion: El sistema debe permitir buscar la historia clinica de un</a:t>
+              <a:t>Cambio pedido:      agregar recordatorio por WhatsApp al agendar</a:t>
             </a:r>
           </a:p>
           <a:p>
@@ -5632,7 +5337,7 @@
                 </a:solidFill>
                 <a:latin typeface="Calibri"/>
               </a:rPr>
-              <a:t>  paciente por nombre de la mascota, por documento del propietario o por</a:t>
+              <a:t>Requisitos tocados: RF-03 (agendar cita), RNF-02 (disponibilidad)</a:t>
             </a:r>
           </a:p>
           <a:p>
@@ -5648,7 +5353,7 @@
                 </a:solidFill>
                 <a:latin typeface="Calibri"/>
               </a:rPr>
-              <a:t>  codigo de ficha, mostrando las ultimas tres consultas registradas.</a:t>
+              <a:t>Impacto en alcance: +1 RF nuevo, +1 integracion externa</a:t>
             </a:r>
           </a:p>
           <a:p>
@@ -5664,7 +5369,7 @@
                 </a:solidFill>
                 <a:latin typeface="Calibri"/>
               </a:rPr>
-              <a:t>Precondicion: el paciente esta registrado y el usuario tiene rol Veterinario.</a:t>
+              <a:t>Impacto en plan:    +1 sprint de diseno</a:t>
             </a:r>
           </a:p>
           <a:p>
@@ -5680,7 +5385,7 @@
                 </a:solidFill>
                 <a:latin typeface="Calibri"/>
               </a:rPr>
-              <a:t>Criterio de aceptacion: con 5.000 fichas cargadas el resultado se muestra</a:t>
+              <a:t>Decision:           &lt;aprobada | rechazada | diferida&gt;  por &lt;quien&gt;</a:t>
             </a:r>
           </a:p>
           <a:p>
@@ -5696,7 +5401,7 @@
                 </a:solidFill>
                 <a:latin typeface="Calibri"/>
               </a:rPr>
-              <a:t>  en menos de 3 segundos y en maximo 3 clics desde el tablero principal.</a:t>
+              <a:t>Nueva version:      ERS Clinica v1.1</a:t>
             </a:r>
           </a:p>
           <a:p>
@@ -5712,7 +5417,7 @@
                 </a:solidFill>
                 <a:latin typeface="Calibri"/>
               </a:rPr>
-              <a:t>Depende de: RF-01 (registrar paciente), RNF-02 (tiempo de respuesta)</a:t>
+              <a:t/>
             </a:r>
           </a:p>
           <a:p>
@@ -5728,7 +5433,7 @@
                 </a:solidFill>
                 <a:latin typeface="Calibri"/>
               </a:rPr>
-              <a:t>Verificado por: CP-ACEP-07 (prueba de aceptacion)</a:t>
+              <a:t>-- Tener linea base no significa que no se pueda cambiar: significa que</a:t>
             </a:r>
           </a:p>
           <a:p>
@@ -5744,7 +5449,7 @@
                 </a:solidFill>
                 <a:latin typeface="Calibri"/>
               </a:rPr>
-              <a:t>Historial: v1.1 se agrega busqueda por documento (SC-002)</a:t>
+              <a:t>-- el cambio deja RASTRO y sube la version. Editar el v1.0 en silencio</a:t>
             </a:r>
           </a:p>
           <a:p>
@@ -5760,7 +5465,7 @@
                 </a:solidFill>
                 <a:latin typeface="Calibri"/>
               </a:rPr>
-              <a:t>           v1.2 se agrega busqueda por microchip (SC-004, aprobada)</a:t>
+              <a:t>-- es lo que rompe la trazabilidad.</a:t>
             </a:r>
           </a:p>
         </p:txBody>
@@ -5768,41 +5473,6 @@
       <p:sp>
         <p:nvSpPr>
           <p:cNvPr id="9" name="TextBox 8"/>
-          <p:cNvSpPr txBox="1"/>
-          <p:nvPr/>
-        </p:nvSpPr>
-        <p:spPr>
-          <a:xfrm>
-            <a:off x="457200" y="6080760"/>
-            <a:ext cx="11277295" cy="320040"/>
-          </a:xfrm>
-          <a:prstGeom prst="rect">
-            <a:avLst/>
-          </a:prstGeom>
-          <a:noFill/>
-        </p:spPr>
-        <p:txBody>
-          <a:bodyPr wrap="square">
-            <a:spAutoFit/>
-          </a:bodyPr>
-          <a:lstStyle/>
-          <a:p>
-            <a:pPr algn="ctr"/>
-            <a:r>
-              <a:rPr sz="1200" b="0" i="1">
-                <a:solidFill>
-                  <a:srgbClr val="666666"/>
-                </a:solidFill>
-                <a:latin typeface="Calibri"/>
-              </a:rPr>
-              <a:t>En el enfoque tradicional un requisito no es una frase suelta: es una ficha con ID, version, criterio medible y la prueba que lo verifica.</a:t>
-            </a:r>
-          </a:p>
-        </p:txBody>
-      </p:sp>
-      <p:sp>
-        <p:nvSpPr>
-          <p:cNvPr id="10" name="TextBox 9"/>
           <p:cNvSpPr txBox="1"/>
           <p:nvPr/>
         </p:nvSpPr>
@@ -5976,21 +5646,141 @@
                 </a:solidFill>
                 <a:latin typeface="Calibri"/>
               </a:rPr>
-              <a:t>Demo del dia</a:t>
-            </a:r>
-          </a:p>
-        </p:txBody>
-      </p:sp>
-      <p:sp>
-        <p:nvSpPr>
-          <p:cNvPr id="5" name="TextBox 4"/>
+              <a:t>Ficha formal de requisito del sistema de la clinica (asi se ve un requisito con linea base)</a:t>
+            </a:r>
+          </a:p>
+        </p:txBody>
+      </p:sp>
+      <p:sp>
+        <p:nvSpPr>
+          <p:cNvPr id="5" name="Rounded Rectangle 4"/>
+          <p:cNvSpPr/>
+          <p:nvPr/>
+        </p:nvSpPr>
+        <p:spPr>
+          <a:xfrm>
+            <a:off x="457200" y="1261872"/>
+            <a:ext cx="11277295" cy="4773168"/>
+          </a:xfrm>
+          <a:prstGeom prst="roundRect">
+            <a:avLst>
+              <a:gd name="adj" fmla="val 12000"/>
+            </a:avLst>
+          </a:prstGeom>
+          <a:solidFill>
+            <a:srgbClr val="1E2A38"/>
+          </a:solidFill>
+          <a:ln>
+            <a:noFill/>
+          </a:ln>
+        </p:spPr>
+        <p:style>
+          <a:lnRef idx="1">
+            <a:schemeClr val="accent1"/>
+          </a:lnRef>
+          <a:fillRef idx="3">
+            <a:schemeClr val="accent1"/>
+          </a:fillRef>
+          <a:effectRef idx="2">
+            <a:schemeClr val="accent1"/>
+          </a:effectRef>
+          <a:fontRef idx="minor">
+            <a:schemeClr val="lt1"/>
+          </a:fontRef>
+        </p:style>
+        <p:txBody>
+          <a:bodyPr rtlCol="0" anchor="ctr"/>
+          <a:lstStyle/>
+          <a:p>
+            <a:pPr algn="ctr"/>
+          </a:p>
+        </p:txBody>
+      </p:sp>
+      <p:sp>
+        <p:nvSpPr>
+          <p:cNvPr id="6" name="Rectangle 5"/>
+          <p:cNvSpPr/>
+          <p:nvPr/>
+        </p:nvSpPr>
+        <p:spPr>
+          <a:xfrm>
+            <a:off x="457200" y="1261872"/>
+            <a:ext cx="11277295" cy="320040"/>
+          </a:xfrm>
+          <a:prstGeom prst="rect">
+            <a:avLst/>
+          </a:prstGeom>
+          <a:solidFill>
+            <a:srgbClr val="095292"/>
+          </a:solidFill>
+          <a:ln>
+            <a:noFill/>
+          </a:ln>
+        </p:spPr>
+        <p:style>
+          <a:lnRef idx="1">
+            <a:schemeClr val="accent1"/>
+          </a:lnRef>
+          <a:fillRef idx="3">
+            <a:schemeClr val="accent1"/>
+          </a:fillRef>
+          <a:effectRef idx="2">
+            <a:schemeClr val="accent1"/>
+          </a:effectRef>
+          <a:fontRef idx="minor">
+            <a:schemeClr val="lt1"/>
+          </a:fontRef>
+        </p:style>
+        <p:txBody>
+          <a:bodyPr rtlCol="0" anchor="ctr"/>
+          <a:lstStyle/>
+          <a:p>
+            <a:pPr algn="ctr"/>
+          </a:p>
+        </p:txBody>
+      </p:sp>
+      <p:sp>
+        <p:nvSpPr>
+          <p:cNvPr id="7" name="TextBox 6"/>
           <p:cNvSpPr txBox="1"/>
           <p:nvPr/>
         </p:nvSpPr>
         <p:spPr>
           <a:xfrm>
-            <a:off x="457200" y="1170432"/>
-            <a:ext cx="11277295" cy="5230368"/>
+            <a:off x="685800" y="1307592"/>
+            <a:ext cx="10820095" cy="256032"/>
+          </a:xfrm>
+          <a:prstGeom prst="rect">
+            <a:avLst/>
+          </a:prstGeom>
+          <a:noFill/>
+        </p:spPr>
+        <p:txBody>
+          <a:bodyPr wrap="square" anchor="ctr"/>
+          <a:lstStyle/>
+          <a:p>
+            <a:r>
+              <a:rPr sz="1000" b="1" i="0">
+                <a:solidFill>
+                  <a:srgbClr val="269CCB"/>
+                </a:solidFill>
+                <a:latin typeface="Calibri"/>
+              </a:rPr>
+              <a:t>● ● ●</a:t>
+            </a:r>
+          </a:p>
+        </p:txBody>
+      </p:sp>
+      <p:sp>
+        <p:nvSpPr>
+          <p:cNvPr id="8" name="TextBox 7"/>
+          <p:cNvSpPr txBox="1"/>
+          <p:nvPr/>
+        </p:nvSpPr>
+        <p:spPr>
+          <a:xfrm>
+            <a:off x="777240" y="1719072"/>
+            <a:ext cx="10637215" cy="4133087"/>
           </a:xfrm>
           <a:prstGeom prst="rect">
             <a:avLst/>
@@ -6005,92 +5795,267 @@
           <a:p>
             <a:pPr>
               <a:spcAft>
-                <a:spcPts val="800"/>
+                <a:spcPts val="400"/>
               </a:spcAft>
             </a:pPr>
             <a:r>
-              <a:rPr sz="2000" b="0" i="0">
-                <a:solidFill>
-                  <a:srgbClr val="333333"/>
-                </a:solidFill>
-                <a:latin typeface="Calibri"/>
-              </a:rPr>
-              <a:t>–   </a:t>
-            </a:r>
-            <a:r>
-              <a:rPr sz="2000" b="1" i="0">
-                <a:solidFill>
-                  <a:srgbClr val="333333"/>
-                </a:solidFill>
-                <a:latin typeface="Calibri"/>
-              </a:rPr>
-              <a:t>Herramienta:</a:t>
-            </a:r>
-            <a:r>
-              <a:rPr sz="2000" b="0" i="0">
-                <a:solidFill>
-                  <a:srgbClr val="333333"/>
-                </a:solidFill>
-                <a:latin typeface="Calibri"/>
-              </a:rPr>
-              <a:t> draw.io · Google Docs</a:t>
+              <a:rPr sz="1400" b="0" i="0">
+                <a:solidFill>
+                  <a:srgbClr val="FFFFFF"/>
+                </a:solidFill>
+                <a:latin typeface="Calibri"/>
+              </a:rPr>
+              <a:t>ID: RF-03            Version: 1.2      Estado: Aprobado (linea base 27/08)</a:t>
             </a:r>
           </a:p>
           <a:p>
             <a:pPr>
               <a:spcAft>
-                <a:spcPts val="800"/>
+                <a:spcPts val="400"/>
               </a:spcAft>
             </a:pPr>
             <a:r>
-              <a:rPr sz="2000" b="0" i="0">
-                <a:solidFill>
-                  <a:srgbClr val="333333"/>
-                </a:solidFill>
-                <a:latin typeface="Calibri"/>
-              </a:rPr>
-              <a:t>–   </a:t>
-            </a:r>
-            <a:r>
-              <a:rPr sz="2000" b="1" i="0">
-                <a:solidFill>
-                  <a:srgbClr val="333333"/>
-                </a:solidFill>
-                <a:latin typeface="Calibri"/>
-              </a:rPr>
-              <a:t>Demo:</a:t>
-            </a:r>
-            <a:r>
-              <a:rPr sz="2000" b="0" i="0">
-                <a:solidFill>
-                  <a:srgbClr val="333333"/>
-                </a:solidFill>
-                <a:latin typeface="Calibri"/>
-              </a:rPr>
-              <a:t> El docente dibuja en draw.io el modelo en V de VetCare y traza en vivo la linea punteada que conecta el requisito RF-03 'buscar historial' con su prueba de aceptacion CP-ACEP-07.</a:t>
+              <a:rPr sz="1400" b="0" i="0">
+                <a:solidFill>
+                  <a:srgbClr val="FFFFFF"/>
+                </a:solidFill>
+                <a:latin typeface="Calibri"/>
+              </a:rPr>
+              <a:t>Nombre: Buscar la historia clinica de un paciente</a:t>
             </a:r>
           </a:p>
           <a:p>
             <a:pPr>
               <a:spcAft>
-                <a:spcPts val="800"/>
+                <a:spcPts val="400"/>
               </a:spcAft>
             </a:pPr>
             <a:r>
-              <a:rPr sz="2000" b="0" i="0">
-                <a:solidFill>
-                  <a:srgbClr val="333333"/>
-                </a:solidFill>
-                <a:latin typeface="Calibri"/>
-              </a:rPr>
-              <a:t>–   Mismo dominio VetCare — no otro ejemplo. Aqui se diseña, no se programa.</a:t>
-            </a:r>
-          </a:p>
-        </p:txBody>
-      </p:sp>
-      <p:sp>
-        <p:nvSpPr>
-          <p:cNvPr id="6" name="TextBox 5"/>
+              <a:rPr sz="1400" b="0" i="0">
+                <a:solidFill>
+                  <a:srgbClr val="FFFFFF"/>
+                </a:solidFill>
+                <a:latin typeface="Calibri"/>
+              </a:rPr>
+              <a:t>Fuente: Dra. Marcela Rios, medica veterinaria de la clinica</a:t>
+            </a:r>
+          </a:p>
+          <a:p>
+            <a:pPr>
+              <a:spcAft>
+                <a:spcPts val="400"/>
+              </a:spcAft>
+            </a:pPr>
+            <a:r>
+              <a:rPr sz="1400" b="0" i="0">
+                <a:solidFill>
+                  <a:srgbClr val="FFFFFF"/>
+                </a:solidFill>
+                <a:latin typeface="Calibri"/>
+              </a:rPr>
+              <a:t>Prioridad: Alta      Estabilidad: Alta      Modulo: Historia clinica</a:t>
+            </a:r>
+          </a:p>
+          <a:p>
+            <a:pPr>
+              <a:spcAft>
+                <a:spcPts val="400"/>
+              </a:spcAft>
+            </a:pPr>
+            <a:r>
+              <a:rPr sz="1400" b="0" i="0">
+                <a:solidFill>
+                  <a:srgbClr val="FFFFFF"/>
+                </a:solidFill>
+                <a:latin typeface="Calibri"/>
+              </a:rPr>
+              <a:t>Descripcion: El sistema debe permitir buscar la historia clinica de un</a:t>
+            </a:r>
+          </a:p>
+          <a:p>
+            <a:pPr>
+              <a:spcAft>
+                <a:spcPts val="400"/>
+              </a:spcAft>
+            </a:pPr>
+            <a:r>
+              <a:rPr sz="1400" b="0" i="0">
+                <a:solidFill>
+                  <a:srgbClr val="FFFFFF"/>
+                </a:solidFill>
+                <a:latin typeface="Calibri"/>
+              </a:rPr>
+              <a:t>  paciente por nombre de la mascota, por documento del propietario o por</a:t>
+            </a:r>
+          </a:p>
+          <a:p>
+            <a:pPr>
+              <a:spcAft>
+                <a:spcPts val="400"/>
+              </a:spcAft>
+            </a:pPr>
+            <a:r>
+              <a:rPr sz="1400" b="0" i="0">
+                <a:solidFill>
+                  <a:srgbClr val="FFFFFF"/>
+                </a:solidFill>
+                <a:latin typeface="Calibri"/>
+              </a:rPr>
+              <a:t>  codigo de ficha, mostrando las ultimas tres consultas registradas.</a:t>
+            </a:r>
+          </a:p>
+          <a:p>
+            <a:pPr>
+              <a:spcAft>
+                <a:spcPts val="400"/>
+              </a:spcAft>
+            </a:pPr>
+            <a:r>
+              <a:rPr sz="1400" b="0" i="0">
+                <a:solidFill>
+                  <a:srgbClr val="FFFFFF"/>
+                </a:solidFill>
+                <a:latin typeface="Calibri"/>
+              </a:rPr>
+              <a:t>Precondicion: el paciente esta registrado y el usuario tiene rol Veterinario.</a:t>
+            </a:r>
+          </a:p>
+          <a:p>
+            <a:pPr>
+              <a:spcAft>
+                <a:spcPts val="400"/>
+              </a:spcAft>
+            </a:pPr>
+            <a:r>
+              <a:rPr sz="1400" b="0" i="0">
+                <a:solidFill>
+                  <a:srgbClr val="FFFFFF"/>
+                </a:solidFill>
+                <a:latin typeface="Calibri"/>
+              </a:rPr>
+              <a:t>Criterio de aceptacion: con 5.000 fichas cargadas el resultado se muestra</a:t>
+            </a:r>
+          </a:p>
+          <a:p>
+            <a:pPr>
+              <a:spcAft>
+                <a:spcPts val="400"/>
+              </a:spcAft>
+            </a:pPr>
+            <a:r>
+              <a:rPr sz="1400" b="0" i="0">
+                <a:solidFill>
+                  <a:srgbClr val="FFFFFF"/>
+                </a:solidFill>
+                <a:latin typeface="Calibri"/>
+              </a:rPr>
+              <a:t>  en menos de 3 segundos y en maximo 3 clics desde el tablero principal.</a:t>
+            </a:r>
+          </a:p>
+          <a:p>
+            <a:pPr>
+              <a:spcAft>
+                <a:spcPts val="400"/>
+              </a:spcAft>
+            </a:pPr>
+            <a:r>
+              <a:rPr sz="1400" b="0" i="0">
+                <a:solidFill>
+                  <a:srgbClr val="FFFFFF"/>
+                </a:solidFill>
+                <a:latin typeface="Calibri"/>
+              </a:rPr>
+              <a:t>Depende de: RF-01 (registrar paciente), RNF-02 (tiempo de respuesta)</a:t>
+            </a:r>
+          </a:p>
+          <a:p>
+            <a:pPr>
+              <a:spcAft>
+                <a:spcPts val="400"/>
+              </a:spcAft>
+            </a:pPr>
+            <a:r>
+              <a:rPr sz="1400" b="0" i="0">
+                <a:solidFill>
+                  <a:srgbClr val="FFFFFF"/>
+                </a:solidFill>
+                <a:latin typeface="Calibri"/>
+              </a:rPr>
+              <a:t>Verificado por: CP-ACEP-07 (prueba de aceptacion)</a:t>
+            </a:r>
+          </a:p>
+          <a:p>
+            <a:pPr>
+              <a:spcAft>
+                <a:spcPts val="400"/>
+              </a:spcAft>
+            </a:pPr>
+            <a:r>
+              <a:rPr sz="1400" b="0" i="0">
+                <a:solidFill>
+                  <a:srgbClr val="FFFFFF"/>
+                </a:solidFill>
+                <a:latin typeface="Calibri"/>
+              </a:rPr>
+              <a:t>Historial: v1.1 se agrega busqueda por documento (SC-002)</a:t>
+            </a:r>
+          </a:p>
+          <a:p>
+            <a:pPr>
+              <a:spcAft>
+                <a:spcPts val="400"/>
+              </a:spcAft>
+            </a:pPr>
+            <a:r>
+              <a:rPr sz="1400" b="0" i="0">
+                <a:solidFill>
+                  <a:srgbClr val="FFFFFF"/>
+                </a:solidFill>
+                <a:latin typeface="Calibri"/>
+              </a:rPr>
+              <a:t>           v1.2 se agrega busqueda por microchip (SC-004, aprobada)</a:t>
+            </a:r>
+          </a:p>
+        </p:txBody>
+      </p:sp>
+      <p:sp>
+        <p:nvSpPr>
+          <p:cNvPr id="9" name="TextBox 8"/>
+          <p:cNvSpPr txBox="1"/>
+          <p:nvPr/>
+        </p:nvSpPr>
+        <p:spPr>
+          <a:xfrm>
+            <a:off x="457200" y="6080760"/>
+            <a:ext cx="11277295" cy="320040"/>
+          </a:xfrm>
+          <a:prstGeom prst="rect">
+            <a:avLst/>
+          </a:prstGeom>
+          <a:noFill/>
+        </p:spPr>
+        <p:txBody>
+          <a:bodyPr wrap="square">
+            <a:spAutoFit/>
+          </a:bodyPr>
+          <a:lstStyle/>
+          <a:p>
+            <a:pPr algn="ctr"/>
+            <a:r>
+              <a:rPr sz="1200" b="0" i="1">
+                <a:solidFill>
+                  <a:srgbClr val="666666"/>
+                </a:solidFill>
+                <a:latin typeface="Calibri"/>
+              </a:rPr>
+              <a:t>En el enfoque tradicional un requisito no es una frase suelta: es una ficha con ID, version, criterio medible y la prueba que lo verifica.</a:t>
+            </a:r>
+          </a:p>
+        </p:txBody>
+      </p:sp>
+      <p:sp>
+        <p:nvSpPr>
+          <p:cNvPr id="10" name="TextBox 9"/>
           <p:cNvSpPr txBox="1"/>
           <p:nvPr/>
         </p:nvSpPr>
@@ -6158,6 +6123,294 @@
         <p:spPr>
           <a:xfrm>
             <a:off x="0" y="0"/>
+            <a:ext cx="12191695" cy="960120"/>
+          </a:xfrm>
+          <a:prstGeom prst="rect">
+            <a:avLst/>
+          </a:prstGeom>
+          <a:solidFill>
+            <a:srgbClr val="095292"/>
+          </a:solidFill>
+          <a:ln>
+            <a:noFill/>
+          </a:ln>
+        </p:spPr>
+        <p:style>
+          <a:lnRef idx="1">
+            <a:schemeClr val="accent1"/>
+          </a:lnRef>
+          <a:fillRef idx="3">
+            <a:schemeClr val="accent1"/>
+          </a:fillRef>
+          <a:effectRef idx="2">
+            <a:schemeClr val="accent1"/>
+          </a:effectRef>
+          <a:fontRef idx="minor">
+            <a:schemeClr val="lt1"/>
+          </a:fontRef>
+        </p:style>
+        <p:txBody>
+          <a:bodyPr rtlCol="0" anchor="ctr"/>
+          <a:lstStyle/>
+          <a:p>
+            <a:pPr algn="ctr"/>
+          </a:p>
+        </p:txBody>
+      </p:sp>
+      <p:sp>
+        <p:nvSpPr>
+          <p:cNvPr id="3" name="Rectangle 2"/>
+          <p:cNvSpPr/>
+          <p:nvPr/>
+        </p:nvSpPr>
+        <p:spPr>
+          <a:xfrm>
+            <a:off x="0" y="960120"/>
+            <a:ext cx="12191695" cy="41148"/>
+          </a:xfrm>
+          <a:prstGeom prst="rect">
+            <a:avLst/>
+          </a:prstGeom>
+          <a:solidFill>
+            <a:srgbClr val="FFD000"/>
+          </a:solidFill>
+          <a:ln>
+            <a:noFill/>
+          </a:ln>
+        </p:spPr>
+        <p:style>
+          <a:lnRef idx="1">
+            <a:schemeClr val="accent1"/>
+          </a:lnRef>
+          <a:fillRef idx="3">
+            <a:schemeClr val="accent1"/>
+          </a:fillRef>
+          <a:effectRef idx="2">
+            <a:schemeClr val="accent1"/>
+          </a:effectRef>
+          <a:fontRef idx="minor">
+            <a:schemeClr val="lt1"/>
+          </a:fontRef>
+        </p:style>
+        <p:txBody>
+          <a:bodyPr rtlCol="0" anchor="ctr"/>
+          <a:lstStyle/>
+          <a:p>
+            <a:pPr algn="ctr"/>
+          </a:p>
+        </p:txBody>
+      </p:sp>
+      <p:sp>
+        <p:nvSpPr>
+          <p:cNvPr id="4" name="TextBox 3"/>
+          <p:cNvSpPr txBox="1"/>
+          <p:nvPr/>
+        </p:nvSpPr>
+        <p:spPr>
+          <a:xfrm>
+            <a:off x="457200" y="164592"/>
+            <a:ext cx="11277295" cy="502920"/>
+          </a:xfrm>
+          <a:prstGeom prst="rect">
+            <a:avLst/>
+          </a:prstGeom>
+          <a:noFill/>
+        </p:spPr>
+        <p:txBody>
+          <a:bodyPr wrap="square">
+            <a:spAutoFit/>
+          </a:bodyPr>
+          <a:lstStyle/>
+          <a:p>
+            <a:r>
+              <a:rPr sz="2600" b="1" i="0">
+                <a:solidFill>
+                  <a:srgbClr val="FFFFFF"/>
+                </a:solidFill>
+                <a:latin typeface="Calibri"/>
+              </a:rPr>
+              <a:t>Demo del dia</a:t>
+            </a:r>
+          </a:p>
+        </p:txBody>
+      </p:sp>
+      <p:sp>
+        <p:nvSpPr>
+          <p:cNvPr id="5" name="TextBox 4"/>
+          <p:cNvSpPr txBox="1"/>
+          <p:nvPr/>
+        </p:nvSpPr>
+        <p:spPr>
+          <a:xfrm>
+            <a:off x="457200" y="1170432"/>
+            <a:ext cx="11277295" cy="5230368"/>
+          </a:xfrm>
+          <a:prstGeom prst="rect">
+            <a:avLst/>
+          </a:prstGeom>
+          <a:noFill/>
+        </p:spPr>
+        <p:txBody>
+          <a:bodyPr wrap="square">
+            <a:spAutoFit/>
+          </a:bodyPr>
+          <a:lstStyle/>
+          <a:p>
+            <a:pPr>
+              <a:spcAft>
+                <a:spcPts val="800"/>
+              </a:spcAft>
+            </a:pPr>
+            <a:r>
+              <a:rPr sz="2000" b="0" i="0">
+                <a:solidFill>
+                  <a:srgbClr val="333333"/>
+                </a:solidFill>
+                <a:latin typeface="Calibri"/>
+              </a:rPr>
+              <a:t>–   </a:t>
+            </a:r>
+            <a:r>
+              <a:rPr sz="2000" b="1" i="0">
+                <a:solidFill>
+                  <a:srgbClr val="333333"/>
+                </a:solidFill>
+                <a:latin typeface="Calibri"/>
+              </a:rPr>
+              <a:t>Herramienta:</a:t>
+            </a:r>
+            <a:r>
+              <a:rPr sz="2000" b="0" i="0">
+                <a:solidFill>
+                  <a:srgbClr val="333333"/>
+                </a:solidFill>
+                <a:latin typeface="Calibri"/>
+              </a:rPr>
+              <a:t> draw.io · Google Docs</a:t>
+            </a:r>
+          </a:p>
+          <a:p>
+            <a:pPr>
+              <a:spcAft>
+                <a:spcPts val="800"/>
+              </a:spcAft>
+            </a:pPr>
+            <a:r>
+              <a:rPr sz="2000" b="0" i="0">
+                <a:solidFill>
+                  <a:srgbClr val="333333"/>
+                </a:solidFill>
+                <a:latin typeface="Calibri"/>
+              </a:rPr>
+              <a:t>–   </a:t>
+            </a:r>
+            <a:r>
+              <a:rPr sz="2000" b="1" i="0">
+                <a:solidFill>
+                  <a:srgbClr val="333333"/>
+                </a:solidFill>
+                <a:latin typeface="Calibri"/>
+              </a:rPr>
+              <a:t>Demo:</a:t>
+            </a:r>
+            <a:r>
+              <a:rPr sz="2000" b="0" i="0">
+                <a:solidFill>
+                  <a:srgbClr val="333333"/>
+                </a:solidFill>
+                <a:latin typeface="Calibri"/>
+              </a:rPr>
+              <a:t> El docente dibuja en draw.io el modelo en V del sistema de la clinica y traza en vivo la linea punteada que conecta el requisito RF-03 'buscar historial' con su prueba de aceptacion CP-ACEP-07.</a:t>
+            </a:r>
+          </a:p>
+          <a:p>
+            <a:pPr>
+              <a:spcAft>
+                <a:spcPts val="800"/>
+              </a:spcAft>
+            </a:pPr>
+            <a:r>
+              <a:rPr sz="2000" b="0" i="0">
+                <a:solidFill>
+                  <a:srgbClr val="333333"/>
+                </a:solidFill>
+                <a:latin typeface="Calibri"/>
+              </a:rPr>
+              <a:t>–   Mismo dominio: la clinica veterinaria — no otro ejemplo. Aqui se diseña, no se programa.</a:t>
+            </a:r>
+          </a:p>
+        </p:txBody>
+      </p:sp>
+      <p:sp>
+        <p:nvSpPr>
+          <p:cNvPr id="6" name="TextBox 5"/>
+          <p:cNvSpPr txBox="1"/>
+          <p:nvPr/>
+        </p:nvSpPr>
+        <p:spPr>
+          <a:xfrm>
+            <a:off x="11185855" y="6473952"/>
+            <a:ext cx="640080" cy="274320"/>
+          </a:xfrm>
+          <a:prstGeom prst="rect">
+            <a:avLst/>
+          </a:prstGeom>
+          <a:noFill/>
+        </p:spPr>
+        <p:txBody>
+          <a:bodyPr wrap="square">
+            <a:spAutoFit/>
+          </a:bodyPr>
+          <a:lstStyle/>
+          <a:p>
+            <a:pPr algn="r"/>
+            <a:r>
+              <a:rPr sz="1100" b="0" i="0">
+                <a:solidFill>
+                  <a:srgbClr val="666666"/>
+                </a:solidFill>
+                <a:latin typeface="Calibri"/>
+              </a:rPr>
+              <a:t>14</a:t>
+            </a:r>
+          </a:p>
+        </p:txBody>
+      </p:sp>
+    </p:spTree>
+  </p:cSld>
+  <p:clrMapOvr>
+    <a:masterClrMapping/>
+  </p:clrMapOvr>
+</p:sld>
+</file>
+
+<file path=ppt/slides/slide15.xml><?xml version="1.0" encoding="utf-8"?>
+<p:sld xmlns:a="http://schemas.openxmlformats.org/drawingml/2006/main" xmlns:p="http://schemas.openxmlformats.org/presentationml/2006/main" xmlns:r="http://schemas.openxmlformats.org/officeDocument/2006/relationships">
+  <p:cSld>
+    <p:bg>
+      <p:bgPr>
+        <a:solidFill>
+          <a:srgbClr val="FFFFFF"/>
+        </a:solidFill>
+        <a:effectLst/>
+      </p:bgPr>
+    </p:bg>
+    <p:spTree>
+      <p:nvGrpSpPr>
+        <p:cNvPr id="1" name=""/>
+        <p:cNvGrpSpPr/>
+        <p:nvPr/>
+      </p:nvGrpSpPr>
+      <p:grpSpPr/>
+      <p:sp>
+        <p:nvSpPr>
+          <p:cNvPr id="2" name="Rectangle 1"/>
+          <p:cNvSpPr/>
+          <p:nvPr/>
+        </p:nvSpPr>
+        <p:spPr>
+          <a:xfrm>
+            <a:off x="0" y="0"/>
             <a:ext cx="12191695" cy="164592"/>
           </a:xfrm>
           <a:prstGeom prst="rect">
@@ -6628,7 +6881,7 @@
                 </a:solidFill>
                 <a:latin typeface="Calibri"/>
               </a:rPr>
-              <a:t>–   Ejemplo de toda la clase: VetCare, el sistema de la clinica «Huellitas».</a:t>
+              <a:t>–   Ejemplo de toda la clase: el sistema de una clinica veterinaria.</a:t>
             </a:r>
           </a:p>
         </p:txBody>
@@ -7197,7 +7450,7 @@
                 </a:solidFill>
                 <a:latin typeface="Calibri"/>
               </a:rPr>
-              <a:t>Demo en vivo sobre VetCare</a:t>
+              <a:t>Demo en vivo sobre la clinica</a:t>
             </a:r>
           </a:p>
         </p:txBody>
@@ -7968,7 +8221,7 @@
                 </a:solidFill>
                 <a:latin typeface="Calibri"/>
               </a:rPr>
-              <a:t>–   Trasladado a VetCare: si Huellitas aprueba que la busqueda se hace por nombre de la mascota y por documento del propietario, ese acuerdo queda escrito, fechado y versionado</a:t>
+              <a:t>–   Trasladado a la clinica: si la clinica aprueba que la busqueda se hace por nombre de la mascota y por documento del propietario, ese acuerdo queda escrito, fechado y versionado</a:t>
             </a:r>
           </a:p>
           <a:p>
@@ -8236,7 +8489,7 @@
                 </a:solidFill>
                 <a:latin typeface="Calibri"/>
               </a:rPr>
-              <a:t>–   En VetCare, cuando se escribe el requisito RF-03 'la veterinaria busca la historia clinica por nombre o por documento'</a:t>
+              <a:t>–   En el sistema de la clinica, cuando se escribe el requisito RF-03 'la veterinaria busca la historia clinica por nombre o por documento'</a:t>
             </a:r>
           </a:p>
           <a:p>
@@ -8520,7 +8773,23 @@
                 </a:solidFill>
                 <a:latin typeface="Calibri"/>
               </a:rPr>
-              <a:t>–   En VetCare hay partes que caben perfecto en este enfoque: los datos basicos de un paciente casi no cambian, y si mañana la clinica conecta facturacion electronica, las reglas de esa parte vienen impuestas por la norma y no se negocian con el cliente.</a:t>
+              <a:t>–   En el sistema de la clinica hay partes que caben perfecto en este enfoque: los datos basicos de un paciente casi no cambian</a:t>
+            </a:r>
+          </a:p>
+          <a:p>
+            <a:pPr>
+              <a:spcAft>
+                <a:spcPts val="800"/>
+              </a:spcAft>
+            </a:pPr>
+            <a:r>
+              <a:rPr sz="2000" b="0" i="0">
+                <a:solidFill>
+                  <a:srgbClr val="333333"/>
+                </a:solidFill>
+                <a:latin typeface="Calibri"/>
+              </a:rPr>
+              <a:t>–   Y si mañana la clinica conecta facturacion electronica, las reglas de esa parte vienen impuestas por la norma y no se negocian con el cliente.</a:t>
             </a:r>
           </a:p>
           <a:p>
@@ -8717,7 +8986,7 @@
                 </a:solidFill>
                 <a:latin typeface="Calibri"/>
               </a:rPr>
-              <a:t>Cuando NO tienen sentido?</a:t>
+              <a:t>Cuando NO tienen sentido? (1/2)</a:t>
             </a:r>
           </a:p>
         </p:txBody>
@@ -8789,38 +9058,6 @@
                 <a:latin typeface="Calibri"/>
               </a:rPr>
               <a:t>–   El costo de corregir crece de forma brutal a medida que se avanza: cambiar una frase en el documento de requisitos vale casi nada; cambiar la misma idea cuando ya hay diseño, codigo y datos migrados puede costar semanas.</a:t>
-            </a:r>
-          </a:p>
-          <a:p>
-            <a:pPr>
-              <a:spcAft>
-                <a:spcPts val="800"/>
-              </a:spcAft>
-            </a:pPr>
-            <a:r>
-              <a:rPr sz="2000" b="0" i="0">
-                <a:solidFill>
-                  <a:srgbClr val="333333"/>
-                </a:solidFill>
-                <a:latin typeface="Calibri"/>
-              </a:rPr>
-              <a:t>–   En VetCare esto se ve clarito con el tablero de metricas: la administradora dice 'quiero ver cuantos pacientes atendemos', pero cuando vea el primer grafico va a pedir por especie, por veterinario y por mes.</a:t>
-            </a:r>
-          </a:p>
-          <a:p>
-            <a:pPr>
-              <a:spcAft>
-                <a:spcPts val="800"/>
-              </a:spcAft>
-            </a:pPr>
-            <a:r>
-              <a:rPr sz="2000" b="0" i="0">
-                <a:solidFill>
-                  <a:srgbClr val="333333"/>
-                </a:solidFill>
-                <a:latin typeface="Calibri"/>
-              </a:rPr>
-              <a:t>–   Congelar ese requisito en la semana dos es congelar una suposicion.</a:t>
             </a:r>
           </a:p>
         </p:txBody>
@@ -9001,7 +9238,7 @@
                 </a:solidFill>
                 <a:latin typeface="Calibri"/>
               </a:rPr>
-              <a:t>En el mundo tradicional la documentacion no acompaña al producto: en...</a:t>
+              <a:t>Cuando NO tienen sentido? (2/2)</a:t>
             </a:r>
           </a:p>
         </p:txBody>
@@ -9040,7 +9277,7 @@
                 </a:solidFill>
                 <a:latin typeface="Calibri"/>
               </a:rPr>
-              <a:t>–   En el mundo tradicional la documentacion no acompaña al producto: en buena parte ES el producto contratado.</a:t>
+              <a:t>–   En el sistema de la clinica esto se ve clarito con el tablero de metricas: la administradora dice 'quiero ver cuantos pacientes atendemos', pero cuando vea el primer grafico va a pedir por especie, por veterinario y por mes.</a:t>
             </a:r>
           </a:p>
           <a:p>
@@ -9056,39 +9293,7 @@
                 </a:solidFill>
                 <a:latin typeface="Calibri"/>
               </a:rPr>
-              <a:t>–   Los entregables tipicos son la Especificacion de Requisitos de Software (ERS o SRS, con estructura tipo IEEE 830 / ISO 29148)</a:t>
-            </a:r>
-          </a:p>
-          <a:p>
-            <a:pPr>
-              <a:spcAft>
-                <a:spcPts val="800"/>
-              </a:spcAft>
-            </a:pPr>
-            <a:r>
-              <a:rPr sz="2000" b="0" i="0">
-                <a:solidFill>
-                  <a:srgbClr val="333333"/>
-                </a:solidFill>
-                <a:latin typeface="Calibri"/>
-              </a:rPr>
-              <a:t>–   El Documento de Diseño (SDD), la matriz de trazabilidad que muestra que cada requisito tiene diseño y prueba, y el acta de aprobacion.</a:t>
-            </a:r>
-          </a:p>
-          <a:p>
-            <a:pPr>
-              <a:spcAft>
-                <a:spcPts val="800"/>
-              </a:spcAft>
-            </a:pPr>
-            <a:r>
-              <a:rPr sz="2000" b="0" i="0">
-                <a:solidFill>
-                  <a:srgbClr val="333333"/>
-                </a:solidFill>
-                <a:latin typeface="Calibri"/>
-              </a:rPr>
-              <a:t>–   Para el estudiante que solo cursa Seminario de Sistemas esto es una gran noticia: su entregable final -documento de diseño mas prototipo navegable- es exactamente el tipo de producto que se factura en un proyecto tradicional, y por eso su ruta es completa y no una version reducida del curso.</a:t>
+              <a:t>–   Congelar ese requisito en la semana dos es congelar una suposicion.</a:t>
             </a:r>
           </a:p>
         </p:txBody>

--- a/Seminario de Sistemas/Clases/Clase 3 - Metodologias tradicionales/Presentacion.pptx
+++ b/Seminario de Sistemas/Clases/Clase 3 - Metodologias tradicionales/Presentacion.pptx
@@ -19,7 +19,6 @@
     <p:sldId id="267" r:id="rId19"/>
     <p:sldId id="268" r:id="rId20"/>
     <p:sldId id="269" r:id="rId21"/>
-    <p:sldId id="270" r:id="rId22"/>
   </p:sldIdLst>
   <p:sldSz cx="12191695" cy="6858000" type="screen4x3"/>
   <p:notesSz cx="6858000" cy="9144000"/>
@@ -4250,21 +4249,141 @@
                 </a:solidFill>
                 <a:latin typeface="Calibri"/>
               </a:rPr>
-              <a:t>En el mundo tradicional la documentacion no acompaña al producto: en...</a:t>
-            </a:r>
-          </a:p>
-        </p:txBody>
-      </p:sp>
-      <p:sp>
-        <p:nvSpPr>
-          <p:cNvPr id="5" name="TextBox 4"/>
+              <a:t>El modelo en V con trazabilidad</a:t>
+            </a:r>
+          </a:p>
+        </p:txBody>
+      </p:sp>
+      <p:sp>
+        <p:nvSpPr>
+          <p:cNvPr id="5" name="Rounded Rectangle 4"/>
+          <p:cNvSpPr/>
+          <p:nvPr/>
+        </p:nvSpPr>
+        <p:spPr>
+          <a:xfrm>
+            <a:off x="457200" y="1261872"/>
+            <a:ext cx="11277295" cy="5093208"/>
+          </a:xfrm>
+          <a:prstGeom prst="roundRect">
+            <a:avLst>
+              <a:gd name="adj" fmla="val 12000"/>
+            </a:avLst>
+          </a:prstGeom>
+          <a:solidFill>
+            <a:srgbClr val="1E2A38"/>
+          </a:solidFill>
+          <a:ln>
+            <a:noFill/>
+          </a:ln>
+        </p:spPr>
+        <p:style>
+          <a:lnRef idx="1">
+            <a:schemeClr val="accent1"/>
+          </a:lnRef>
+          <a:fillRef idx="3">
+            <a:schemeClr val="accent1"/>
+          </a:fillRef>
+          <a:effectRef idx="2">
+            <a:schemeClr val="accent1"/>
+          </a:effectRef>
+          <a:fontRef idx="minor">
+            <a:schemeClr val="lt1"/>
+          </a:fontRef>
+        </p:style>
+        <p:txBody>
+          <a:bodyPr rtlCol="0" anchor="ctr"/>
+          <a:lstStyle/>
+          <a:p>
+            <a:pPr algn="ctr"/>
+          </a:p>
+        </p:txBody>
+      </p:sp>
+      <p:sp>
+        <p:nvSpPr>
+          <p:cNvPr id="6" name="Rectangle 5"/>
+          <p:cNvSpPr/>
+          <p:nvPr/>
+        </p:nvSpPr>
+        <p:spPr>
+          <a:xfrm>
+            <a:off x="457200" y="1261872"/>
+            <a:ext cx="11277295" cy="320040"/>
+          </a:xfrm>
+          <a:prstGeom prst="rect">
+            <a:avLst/>
+          </a:prstGeom>
+          <a:solidFill>
+            <a:srgbClr val="095292"/>
+          </a:solidFill>
+          <a:ln>
+            <a:noFill/>
+          </a:ln>
+        </p:spPr>
+        <p:style>
+          <a:lnRef idx="1">
+            <a:schemeClr val="accent1"/>
+          </a:lnRef>
+          <a:fillRef idx="3">
+            <a:schemeClr val="accent1"/>
+          </a:fillRef>
+          <a:effectRef idx="2">
+            <a:schemeClr val="accent1"/>
+          </a:effectRef>
+          <a:fontRef idx="minor">
+            <a:schemeClr val="lt1"/>
+          </a:fontRef>
+        </p:style>
+        <p:txBody>
+          <a:bodyPr rtlCol="0" anchor="ctr"/>
+          <a:lstStyle/>
+          <a:p>
+            <a:pPr algn="ctr"/>
+          </a:p>
+        </p:txBody>
+      </p:sp>
+      <p:sp>
+        <p:nvSpPr>
+          <p:cNvPr id="7" name="TextBox 6"/>
           <p:cNvSpPr txBox="1"/>
           <p:nvPr/>
         </p:nvSpPr>
         <p:spPr>
           <a:xfrm>
-            <a:off x="457200" y="1170432"/>
-            <a:ext cx="11277295" cy="5230368"/>
+            <a:off x="685800" y="1307592"/>
+            <a:ext cx="10820095" cy="256032"/>
+          </a:xfrm>
+          <a:prstGeom prst="rect">
+            <a:avLst/>
+          </a:prstGeom>
+          <a:noFill/>
+        </p:spPr>
+        <p:txBody>
+          <a:bodyPr wrap="square" anchor="ctr"/>
+          <a:lstStyle/>
+          <a:p>
+            <a:r>
+              <a:rPr sz="1000" b="1" i="0">
+                <a:solidFill>
+                  <a:srgbClr val="269CCB"/>
+                </a:solidFill>
+                <a:latin typeface="Calibri"/>
+              </a:rPr>
+              <a:t>● ● ●</a:t>
+            </a:r>
+          </a:p>
+        </p:txBody>
+      </p:sp>
+      <p:sp>
+        <p:nvSpPr>
+          <p:cNvPr id="8" name="TextBox 7"/>
+          <p:cNvSpPr txBox="1"/>
+          <p:nvPr/>
+        </p:nvSpPr>
+        <p:spPr>
+          <a:xfrm>
+            <a:off x="777240" y="1719072"/>
+            <a:ext cx="10637215" cy="4453128"/>
           </a:xfrm>
           <a:prstGeom prst="rect">
             <a:avLst/>
@@ -4279,56 +4398,280 @@
           <a:p>
             <a:pPr>
               <a:spcAft>
-                <a:spcPts val="800"/>
+                <a:spcPts val="371"/>
               </a:spcAft>
             </a:pPr>
             <a:r>
-              <a:rPr sz="2000" b="0" i="0">
-                <a:solidFill>
-                  <a:srgbClr val="333333"/>
-                </a:solidFill>
-                <a:latin typeface="Calibri"/>
-              </a:rPr>
-              <a:t>–   En el mundo tradicional la documentacion no acompaña al producto: en buena parte ES el producto contratado.</a:t>
+              <a:rPr sz="1300" b="0" i="0">
+                <a:solidFill>
+                  <a:srgbClr val="FFFFFF"/>
+                </a:solidFill>
+                <a:latin typeface="Calibri"/>
+              </a:rPr>
+              <a:t>flowchart TB</a:t>
             </a:r>
           </a:p>
           <a:p>
             <a:pPr>
               <a:spcAft>
-                <a:spcPts val="800"/>
+                <a:spcPts val="371"/>
               </a:spcAft>
             </a:pPr>
             <a:r>
-              <a:rPr sz="2000" b="0" i="0">
-                <a:solidFill>
-                  <a:srgbClr val="333333"/>
-                </a:solidFill>
-                <a:latin typeface="Calibri"/>
-              </a:rPr>
-              <a:t>–   Los artefactos tipicos son la Especificacion de Requisitos de Software (ERS o SRS, con estructura tipo IEEE 830 / ISO 29148), el Documento de Diseño (SDD), la matriz de trazabilidad que muestra que cada requisito tiene diseño y prueba, y el acta de aprobacion.</a:t>
+              <a:rPr sz="1300" b="0" i="0">
+                <a:solidFill>
+                  <a:srgbClr val="FFFFFF"/>
+                </a:solidFill>
+                <a:latin typeface="Calibri"/>
+              </a:rPr>
+              <a:t>  R[Requisitos] --&gt; AF[Analisis funcional]</a:t>
             </a:r>
           </a:p>
           <a:p>
             <a:pPr>
               <a:spcAft>
-                <a:spcPts val="800"/>
+                <a:spcPts val="371"/>
               </a:spcAft>
             </a:pPr>
             <a:r>
-              <a:rPr sz="2000" b="0" i="0">
-                <a:solidFill>
-                  <a:srgbClr val="333333"/>
-                </a:solidFill>
-                <a:latin typeface="Calibri"/>
-              </a:rPr>
-              <a:t>–   Para el estudiante que solo cursa Seminario de Sistemas esto es una gran noticia: su producto final -documento de diseño mas prototipo navegable- es exactamente el tipo de producto que se factura en un proyecto tradicional, y por eso su ruta es completa y no una version reducida del curso.</a:t>
-            </a:r>
-          </a:p>
-        </p:txBody>
-      </p:sp>
-      <p:sp>
-        <p:nvSpPr>
-          <p:cNvPr id="6" name="TextBox 5"/>
+              <a:rPr sz="1300" b="0" i="0">
+                <a:solidFill>
+                  <a:srgbClr val="FFFFFF"/>
+                </a:solidFill>
+                <a:latin typeface="Calibri"/>
+              </a:rPr>
+              <a:t>  AF --&gt; DA[Diseno de arquitectura]</a:t>
+            </a:r>
+          </a:p>
+          <a:p>
+            <a:pPr>
+              <a:spcAft>
+                <a:spcPts val="371"/>
+              </a:spcAft>
+            </a:pPr>
+            <a:r>
+              <a:rPr sz="1300" b="0" i="0">
+                <a:solidFill>
+                  <a:srgbClr val="FFFFFF"/>
+                </a:solidFill>
+                <a:latin typeface="Calibri"/>
+              </a:rPr>
+              <a:t>  DA --&gt; DD[Diseno detallado]</a:t>
+            </a:r>
+          </a:p>
+          <a:p>
+            <a:pPr>
+              <a:spcAft>
+                <a:spcPts val="371"/>
+              </a:spcAft>
+            </a:pPr>
+            <a:r>
+              <a:rPr sz="1300" b="0" i="0">
+                <a:solidFill>
+                  <a:srgbClr val="FFFFFF"/>
+                </a:solidFill>
+                <a:latin typeface="Calibri"/>
+              </a:rPr>
+              <a:t>  DD --&gt; COD[Codificacion]</a:t>
+            </a:r>
+          </a:p>
+          <a:p>
+            <a:pPr>
+              <a:spcAft>
+                <a:spcPts val="371"/>
+              </a:spcAft>
+            </a:pPr>
+            <a:r>
+              <a:rPr sz="1300" b="0" i="0">
+                <a:solidFill>
+                  <a:srgbClr val="FFFFFF"/>
+                </a:solidFill>
+                <a:latin typeface="Calibri"/>
+              </a:rPr>
+              <a:t>  COD --&gt; PU[Pruebas unitarias]</a:t>
+            </a:r>
+          </a:p>
+          <a:p>
+            <a:pPr>
+              <a:spcAft>
+                <a:spcPts val="371"/>
+              </a:spcAft>
+            </a:pPr>
+            <a:r>
+              <a:rPr sz="1300" b="0" i="0">
+                <a:solidFill>
+                  <a:srgbClr val="FFFFFF"/>
+                </a:solidFill>
+                <a:latin typeface="Calibri"/>
+              </a:rPr>
+              <a:t>  PU --&gt; PIN[Pruebas de integracion]</a:t>
+            </a:r>
+          </a:p>
+          <a:p>
+            <a:pPr>
+              <a:spcAft>
+                <a:spcPts val="371"/>
+              </a:spcAft>
+            </a:pPr>
+            <a:r>
+              <a:rPr sz="1300" b="0" i="0">
+                <a:solidFill>
+                  <a:srgbClr val="FFFFFF"/>
+                </a:solidFill>
+                <a:latin typeface="Calibri"/>
+              </a:rPr>
+              <a:t>  PIN --&gt; PS[Pruebas de sistema]</a:t>
+            </a:r>
+          </a:p>
+          <a:p>
+            <a:pPr>
+              <a:spcAft>
+                <a:spcPts val="371"/>
+              </a:spcAft>
+            </a:pPr>
+            <a:r>
+              <a:rPr sz="1300" b="0" i="0">
+                <a:solidFill>
+                  <a:srgbClr val="FFFFFF"/>
+                </a:solidFill>
+                <a:latin typeface="Calibri"/>
+              </a:rPr>
+              <a:t>  PS --&gt; PA[Pruebas de aceptacion]</a:t>
+            </a:r>
+          </a:p>
+          <a:p>
+            <a:pPr>
+              <a:spcAft>
+                <a:spcPts val="371"/>
+              </a:spcAft>
+            </a:pPr>
+            <a:r>
+              <a:rPr sz="1300" b="0" i="0">
+                <a:solidFill>
+                  <a:srgbClr val="FFFFFF"/>
+                </a:solidFill>
+                <a:latin typeface="Calibri"/>
+              </a:rPr>
+              <a:t/>
+            </a:r>
+          </a:p>
+          <a:p>
+            <a:pPr>
+              <a:spcAft>
+                <a:spcPts val="371"/>
+              </a:spcAft>
+            </a:pPr>
+            <a:r>
+              <a:rPr sz="1300" b="0" i="0">
+                <a:solidFill>
+                  <a:srgbClr val="FFFFFF"/>
+                </a:solidFill>
+                <a:latin typeface="Calibri"/>
+              </a:rPr>
+              <a:t>  R  -.verifica.-&gt; PA</a:t>
+            </a:r>
+          </a:p>
+          <a:p>
+            <a:pPr>
+              <a:spcAft>
+                <a:spcPts val="371"/>
+              </a:spcAft>
+            </a:pPr>
+            <a:r>
+              <a:rPr sz="1300" b="0" i="0">
+                <a:solidFill>
+                  <a:srgbClr val="FFFFFF"/>
+                </a:solidFill>
+                <a:latin typeface="Calibri"/>
+              </a:rPr>
+              <a:t>  AF -.verifica.-&gt; PS</a:t>
+            </a:r>
+          </a:p>
+          <a:p>
+            <a:pPr>
+              <a:spcAft>
+                <a:spcPts val="371"/>
+              </a:spcAft>
+            </a:pPr>
+            <a:r>
+              <a:rPr sz="1300" b="0" i="0">
+                <a:solidFill>
+                  <a:srgbClr val="FFFFFF"/>
+                </a:solidFill>
+                <a:latin typeface="Calibri"/>
+              </a:rPr>
+              <a:t>  DA -.verifica.-&gt; PIN</a:t>
+            </a:r>
+          </a:p>
+          <a:p>
+            <a:pPr>
+              <a:spcAft>
+                <a:spcPts val="371"/>
+              </a:spcAft>
+            </a:pPr>
+            <a:r>
+              <a:rPr sz="1300" b="0" i="0">
+                <a:solidFill>
+                  <a:srgbClr val="FFFFFF"/>
+                </a:solidFill>
+                <a:latin typeface="Calibri"/>
+              </a:rPr>
+              <a:t>  DD -.verifica.-&gt; PU</a:t>
+            </a:r>
+          </a:p>
+          <a:p>
+            <a:pPr>
+              <a:spcAft>
+                <a:spcPts val="371"/>
+              </a:spcAft>
+            </a:pPr>
+            <a:r>
+              <a:rPr sz="1300" b="0" i="0">
+                <a:solidFill>
+                  <a:srgbClr val="FFFFFF"/>
+                </a:solidFill>
+                <a:latin typeface="Calibri"/>
+              </a:rPr>
+              <a:t/>
+            </a:r>
+          </a:p>
+          <a:p>
+            <a:pPr>
+              <a:spcAft>
+                <a:spcPts val="371"/>
+              </a:spcAft>
+            </a:pPr>
+            <a:r>
+              <a:rPr sz="1300" b="0" i="0">
+                <a:solidFill>
+                  <a:srgbClr val="FFFFFF"/>
+                </a:solidFill>
+                <a:latin typeface="Calibri"/>
+              </a:rPr>
+              <a:t>%% Las lineas punteadas SON el modelo en V: cada nivel de diseno tiene</a:t>
+            </a:r>
+          </a:p>
+          <a:p>
+            <a:pPr>
+              <a:spcAft>
+                <a:spcPts val="371"/>
+              </a:spcAft>
+            </a:pPr>
+            <a:r>
+              <a:rPr sz="1300" b="0" i="0">
+                <a:solidFill>
+                  <a:srgbClr val="FFFFFF"/>
+                </a:solidFill>
+                <a:latin typeface="Calibri"/>
+              </a:rPr>
+              <a:t>%% su nivel de prueba. Sin ellas es una U y no trazabilidad.</a:t>
+            </a:r>
+          </a:p>
+        </p:txBody>
+      </p:sp>
+      <p:sp>
+        <p:nvSpPr>
+          <p:cNvPr id="9" name="TextBox 8"/>
           <p:cNvSpPr txBox="1"/>
           <p:nvPr/>
         </p:nvSpPr>
@@ -4502,7 +4845,7 @@
                 </a:solidFill>
                 <a:latin typeface="Calibri"/>
               </a:rPr>
-              <a:t>El modelo en V con trazabilidad</a:t>
+              <a:t>La solicitud de cambio sobre linea base</a:t>
             </a:r>
           </a:p>
         </p:txBody>
@@ -4651,273 +4994,225 @@
           <a:p>
             <a:pPr>
               <a:spcAft>
-                <a:spcPts val="371"/>
+                <a:spcPts val="400"/>
               </a:spcAft>
             </a:pPr>
             <a:r>
-              <a:rPr sz="1300" b="0" i="0">
+              <a:rPr sz="1400" b="0" i="0">
                 <a:solidFill>
                   <a:srgbClr val="FFFFFF"/>
                 </a:solidFill>
                 <a:latin typeface="Calibri"/>
               </a:rPr>
-              <a:t>flowchart TB</a:t>
+              <a:t>SC-001  Solicitud de cambio</a:t>
             </a:r>
           </a:p>
           <a:p>
             <a:pPr>
               <a:spcAft>
-                <a:spcPts val="371"/>
+                <a:spcPts val="400"/>
               </a:spcAft>
             </a:pPr>
             <a:r>
-              <a:rPr sz="1300" b="0" i="0">
+              <a:rPr sz="1400" b="0" i="0">
                 <a:solidFill>
                   <a:srgbClr val="FFFFFF"/>
                 </a:solidFill>
                 <a:latin typeface="Calibri"/>
               </a:rPr>
-              <a:t>  R[Requisitos] --&gt; AF[Analisis funcional]</a:t>
+              <a:t/>
             </a:r>
           </a:p>
           <a:p>
             <a:pPr>
               <a:spcAft>
-                <a:spcPts val="371"/>
+                <a:spcPts val="400"/>
               </a:spcAft>
             </a:pPr>
             <a:r>
-              <a:rPr sz="1300" b="0" i="0">
+              <a:rPr sz="1400" b="0" i="0">
                 <a:solidFill>
                   <a:srgbClr val="FFFFFF"/>
                 </a:solidFill>
                 <a:latin typeface="Calibri"/>
               </a:rPr>
-              <a:t>  AF --&gt; DA[Diseno de arquitectura]</a:t>
+              <a:t>Documento afectado: ERS Clinica v1.0 (linea base aprobada 20/08/2026)</a:t>
             </a:r>
           </a:p>
           <a:p>
             <a:pPr>
               <a:spcAft>
-                <a:spcPts val="371"/>
+                <a:spcPts val="400"/>
               </a:spcAft>
             </a:pPr>
             <a:r>
-              <a:rPr sz="1300" b="0" i="0">
+              <a:rPr sz="1400" b="0" i="0">
                 <a:solidFill>
                   <a:srgbClr val="FFFFFF"/>
                 </a:solidFill>
                 <a:latin typeface="Calibri"/>
               </a:rPr>
-              <a:t>  DA --&gt; DD[Diseno detallado]</a:t>
+              <a:t>Solicita:           Dr. Ramirez</a:t>
             </a:r>
           </a:p>
           <a:p>
             <a:pPr>
               <a:spcAft>
-                <a:spcPts val="371"/>
+                <a:spcPts val="400"/>
               </a:spcAft>
             </a:pPr>
             <a:r>
-              <a:rPr sz="1300" b="0" i="0">
+              <a:rPr sz="1400" b="0" i="0">
                 <a:solidFill>
                   <a:srgbClr val="FFFFFF"/>
                 </a:solidFill>
                 <a:latin typeface="Calibri"/>
               </a:rPr>
-              <a:t>  DD --&gt; COD[Codificacion]</a:t>
+              <a:t>Cambio pedido:      agregar recordatorio por WhatsApp al agendar</a:t>
             </a:r>
           </a:p>
           <a:p>
             <a:pPr>
               <a:spcAft>
-                <a:spcPts val="371"/>
+                <a:spcPts val="400"/>
               </a:spcAft>
             </a:pPr>
             <a:r>
-              <a:rPr sz="1300" b="0" i="0">
+              <a:rPr sz="1400" b="0" i="0">
                 <a:solidFill>
                   <a:srgbClr val="FFFFFF"/>
                 </a:solidFill>
                 <a:latin typeface="Calibri"/>
               </a:rPr>
-              <a:t>  COD --&gt; PU[Pruebas unitarias]</a:t>
+              <a:t>Requisitos tocados: RF-03 (agendar cita), RNF-02 (disponibilidad)</a:t>
             </a:r>
           </a:p>
           <a:p>
             <a:pPr>
               <a:spcAft>
-                <a:spcPts val="371"/>
+                <a:spcPts val="400"/>
               </a:spcAft>
             </a:pPr>
             <a:r>
-              <a:rPr sz="1300" b="0" i="0">
+              <a:rPr sz="1400" b="0" i="0">
                 <a:solidFill>
                   <a:srgbClr val="FFFFFF"/>
                 </a:solidFill>
                 <a:latin typeface="Calibri"/>
               </a:rPr>
-              <a:t>  PU --&gt; PIN[Pruebas de integracion]</a:t>
+              <a:t>Impacto en alcance: +1 RF nuevo, +1 integracion externa</a:t>
             </a:r>
           </a:p>
           <a:p>
             <a:pPr>
               <a:spcAft>
-                <a:spcPts val="371"/>
+                <a:spcPts val="400"/>
               </a:spcAft>
             </a:pPr>
             <a:r>
-              <a:rPr sz="1300" b="0" i="0">
+              <a:rPr sz="1400" b="0" i="0">
                 <a:solidFill>
                   <a:srgbClr val="FFFFFF"/>
                 </a:solidFill>
                 <a:latin typeface="Calibri"/>
               </a:rPr>
-              <a:t>  PIN --&gt; PS[Pruebas de sistema]</a:t>
+              <a:t>Impacto en plan:    +1 sprint de diseno</a:t>
             </a:r>
           </a:p>
           <a:p>
             <a:pPr>
               <a:spcAft>
-                <a:spcPts val="371"/>
+                <a:spcPts val="400"/>
               </a:spcAft>
             </a:pPr>
             <a:r>
-              <a:rPr sz="1300" b="0" i="0">
+              <a:rPr sz="1400" b="0" i="0">
                 <a:solidFill>
                   <a:srgbClr val="FFFFFF"/>
                 </a:solidFill>
                 <a:latin typeface="Calibri"/>
               </a:rPr>
-              <a:t>  PS --&gt; PA[Pruebas de aceptacion]</a:t>
+              <a:t>Decision:           &lt;aprobada | rechazada | diferida&gt;  por &lt;quien&gt;</a:t>
             </a:r>
           </a:p>
           <a:p>
             <a:pPr>
               <a:spcAft>
-                <a:spcPts val="371"/>
+                <a:spcPts val="400"/>
               </a:spcAft>
             </a:pPr>
             <a:r>
-              <a:rPr sz="1300" b="0" i="0">
+              <a:rPr sz="1400" b="0" i="0">
                 <a:solidFill>
                   <a:srgbClr val="FFFFFF"/>
                 </a:solidFill>
                 <a:latin typeface="Calibri"/>
               </a:rPr>
-              <a:t/>
+              <a:t>Nueva version:      ERS Clinica v1.1</a:t>
             </a:r>
           </a:p>
           <a:p>
             <a:pPr>
               <a:spcAft>
-                <a:spcPts val="371"/>
+                <a:spcPts val="400"/>
               </a:spcAft>
             </a:pPr>
             <a:r>
-              <a:rPr sz="1300" b="0" i="0">
+              <a:rPr sz="1400" b="0" i="0">
                 <a:solidFill>
                   <a:srgbClr val="FFFFFF"/>
                 </a:solidFill>
                 <a:latin typeface="Calibri"/>
               </a:rPr>
-              <a:t>  R  -.verifica.-&gt; PA</a:t>
+              <a:t/>
             </a:r>
           </a:p>
           <a:p>
             <a:pPr>
               <a:spcAft>
-                <a:spcPts val="371"/>
+                <a:spcPts val="400"/>
               </a:spcAft>
             </a:pPr>
             <a:r>
-              <a:rPr sz="1300" b="0" i="0">
+              <a:rPr sz="1400" b="0" i="0">
                 <a:solidFill>
                   <a:srgbClr val="FFFFFF"/>
                 </a:solidFill>
                 <a:latin typeface="Calibri"/>
               </a:rPr>
-              <a:t>  AF -.verifica.-&gt; PS</a:t>
+              <a:t>-- Tener linea base no significa que no se pueda cambiar: significa que</a:t>
             </a:r>
           </a:p>
           <a:p>
             <a:pPr>
               <a:spcAft>
-                <a:spcPts val="371"/>
+                <a:spcPts val="400"/>
               </a:spcAft>
             </a:pPr>
             <a:r>
-              <a:rPr sz="1300" b="0" i="0">
+              <a:rPr sz="1400" b="0" i="0">
                 <a:solidFill>
                   <a:srgbClr val="FFFFFF"/>
                 </a:solidFill>
                 <a:latin typeface="Calibri"/>
               </a:rPr>
-              <a:t>  DA -.verifica.-&gt; PIN</a:t>
+              <a:t>-- el cambio deja RASTRO y sube la version. Editar el v1.0 en silencio</a:t>
             </a:r>
           </a:p>
           <a:p>
             <a:pPr>
               <a:spcAft>
-                <a:spcPts val="371"/>
+                <a:spcPts val="400"/>
               </a:spcAft>
             </a:pPr>
             <a:r>
-              <a:rPr sz="1300" b="0" i="0">
+              <a:rPr sz="1400" b="0" i="0">
                 <a:solidFill>
                   <a:srgbClr val="FFFFFF"/>
                 </a:solidFill>
                 <a:latin typeface="Calibri"/>
               </a:rPr>
-              <a:t>  DD -.verifica.-&gt; PU</a:t>
-            </a:r>
-          </a:p>
-          <a:p>
-            <a:pPr>
-              <a:spcAft>
-                <a:spcPts val="371"/>
-              </a:spcAft>
-            </a:pPr>
-            <a:r>
-              <a:rPr sz="1300" b="0" i="0">
-                <a:solidFill>
-                  <a:srgbClr val="FFFFFF"/>
-                </a:solidFill>
-                <a:latin typeface="Calibri"/>
-              </a:rPr>
-              <a:t/>
-            </a:r>
-          </a:p>
-          <a:p>
-            <a:pPr>
-              <a:spcAft>
-                <a:spcPts val="371"/>
-              </a:spcAft>
-            </a:pPr>
-            <a:r>
-              <a:rPr sz="1300" b="0" i="0">
-                <a:solidFill>
-                  <a:srgbClr val="FFFFFF"/>
-                </a:solidFill>
-                <a:latin typeface="Calibri"/>
-              </a:rPr>
-              <a:t>%% Las lineas punteadas SON el modelo en V: cada nivel de diseno tiene</a:t>
-            </a:r>
-          </a:p>
-          <a:p>
-            <a:pPr>
-              <a:spcAft>
-                <a:spcPts val="371"/>
-              </a:spcAft>
-            </a:pPr>
-            <a:r>
-              <a:rPr sz="1300" b="0" i="0">
-                <a:solidFill>
-                  <a:srgbClr val="FFFFFF"/>
-                </a:solidFill>
-                <a:latin typeface="Calibri"/>
-              </a:rPr>
-              <a:t>%% su nivel de prueba. Sin ellas es una U y no trazabilidad.</a:t>
+              <a:t>-- es lo que rompe la trazabilidad.</a:t>
             </a:r>
           </a:p>
         </p:txBody>
@@ -5098,7 +5393,7 @@
                 </a:solidFill>
                 <a:latin typeface="Calibri"/>
               </a:rPr>
-              <a:t>La solicitud de cambio sobre linea base</a:t>
+              <a:t>Ficha formal de requisito de la clinica (asi se ve un requisito con linea base)</a:t>
             </a:r>
           </a:p>
         </p:txBody>
@@ -5112,7 +5407,7 @@
         <p:spPr>
           <a:xfrm>
             <a:off x="457200" y="1261872"/>
-            <a:ext cx="11277295" cy="5093208"/>
+            <a:ext cx="11277295" cy="4773168"/>
           </a:xfrm>
           <a:prstGeom prst="roundRect">
             <a:avLst>
@@ -5232,7 +5527,7 @@
         <p:spPr>
           <a:xfrm>
             <a:off x="777240" y="1719072"/>
-            <a:ext cx="10637215" cy="4453128"/>
+            <a:ext cx="10637215" cy="4133087"/>
           </a:xfrm>
           <a:prstGeom prst="rect">
             <a:avLst/>
@@ -5257,7 +5552,7 @@
                 </a:solidFill>
                 <a:latin typeface="Calibri"/>
               </a:rPr>
-              <a:t>SC-001  Solicitud de cambio</a:t>
+              <a:t>ID: RF-03            Version: 1.2      Estado: Aprobado (linea base 27/08)</a:t>
             </a:r>
           </a:p>
           <a:p>
@@ -5273,7 +5568,7 @@
                 </a:solidFill>
                 <a:latin typeface="Calibri"/>
               </a:rPr>
-              <a:t/>
+              <a:t>Nombre: Buscar la historia clinica de un paciente</a:t>
             </a:r>
           </a:p>
           <a:p>
@@ -5289,7 +5584,7 @@
                 </a:solidFill>
                 <a:latin typeface="Calibri"/>
               </a:rPr>
-              <a:t>Documento afectado: ERS Clinica v1.0 (linea base aprobada 20/08/2026)</a:t>
+              <a:t>Fuente: Dra. Marcela Rios, medica veterinaria de la clinica</a:t>
             </a:r>
           </a:p>
           <a:p>
@@ -5305,7 +5600,7 @@
                 </a:solidFill>
                 <a:latin typeface="Calibri"/>
               </a:rPr>
-              <a:t>Solicita:           Dr. Ramirez</a:t>
+              <a:t>Prioridad: Alta      Estabilidad: Alta      Modulo: Historia clinica</a:t>
             </a:r>
           </a:p>
           <a:p>
@@ -5321,7 +5616,7 @@
                 </a:solidFill>
                 <a:latin typeface="Calibri"/>
               </a:rPr>
-              <a:t>Cambio pedido:      agregar recordatorio por WhatsApp al agendar</a:t>
+              <a:t>Descripcion: El sistema debe permitir buscar la historia clinica de un</a:t>
             </a:r>
           </a:p>
           <a:p>
@@ -5337,7 +5632,7 @@
                 </a:solidFill>
                 <a:latin typeface="Calibri"/>
               </a:rPr>
-              <a:t>Requisitos tocados: RF-03 (agendar cita), RNF-02 (disponibilidad)</a:t>
+              <a:t>  paciente por nombre de la mascota, por documento del propietario o por</a:t>
             </a:r>
           </a:p>
           <a:p>
@@ -5353,7 +5648,7 @@
                 </a:solidFill>
                 <a:latin typeface="Calibri"/>
               </a:rPr>
-              <a:t>Impacto en alcance: +1 RF nuevo, +1 integracion externa</a:t>
+              <a:t>  codigo de ficha, mostrando las ultimas tres consultas registradas.</a:t>
             </a:r>
           </a:p>
           <a:p>
@@ -5369,7 +5664,7 @@
                 </a:solidFill>
                 <a:latin typeface="Calibri"/>
               </a:rPr>
-              <a:t>Impacto en plan:    +1 sprint de diseno</a:t>
+              <a:t>Precondicion: el paciente esta registrado y el usuario tiene rol Veterinario.</a:t>
             </a:r>
           </a:p>
           <a:p>
@@ -5385,7 +5680,7 @@
                 </a:solidFill>
                 <a:latin typeface="Calibri"/>
               </a:rPr>
-              <a:t>Decision:           &lt;aprobada | rechazada | diferida&gt;  por &lt;quien&gt;</a:t>
+              <a:t>Criterio de aceptacion: con 5.000 fichas cargadas el resultado se muestra</a:t>
             </a:r>
           </a:p>
           <a:p>
@@ -5401,7 +5696,7 @@
                 </a:solidFill>
                 <a:latin typeface="Calibri"/>
               </a:rPr>
-              <a:t>Nueva version:      ERS Clinica v1.1</a:t>
+              <a:t>  en menos de 3 segundos y en maximo 3 clics desde el tablero principal.</a:t>
             </a:r>
           </a:p>
           <a:p>
@@ -5417,7 +5712,7 @@
                 </a:solidFill>
                 <a:latin typeface="Calibri"/>
               </a:rPr>
-              <a:t/>
+              <a:t>Depende de: RF-01 (registrar paciente), RNF-02 (tiempo de respuesta)</a:t>
             </a:r>
           </a:p>
           <a:p>
@@ -5433,7 +5728,7 @@
                 </a:solidFill>
                 <a:latin typeface="Calibri"/>
               </a:rPr>
-              <a:t>-- Tener linea base no significa que no se pueda cambiar: significa que</a:t>
+              <a:t>Verificado por: CP-ACEP-07 (prueba de aceptacion)</a:t>
             </a:r>
           </a:p>
           <a:p>
@@ -5449,7 +5744,7 @@
                 </a:solidFill>
                 <a:latin typeface="Calibri"/>
               </a:rPr>
-              <a:t>-- el cambio deja RASTRO y sube la version. Editar el v1.0 en silencio</a:t>
+              <a:t>Historial: v1.1 se agrega busqueda por documento (SC-002)</a:t>
             </a:r>
           </a:p>
           <a:p>
@@ -5465,7 +5760,7 @@
                 </a:solidFill>
                 <a:latin typeface="Calibri"/>
               </a:rPr>
-              <a:t>-- es lo que rompe la trazabilidad.</a:t>
+              <a:t>           v1.2 se agrega busqueda por microchip (SC-004, aprobada)</a:t>
             </a:r>
           </a:p>
         </p:txBody>
@@ -5473,6 +5768,41 @@
       <p:sp>
         <p:nvSpPr>
           <p:cNvPr id="9" name="TextBox 8"/>
+          <p:cNvSpPr txBox="1"/>
+          <p:nvPr/>
+        </p:nvSpPr>
+        <p:spPr>
+          <a:xfrm>
+            <a:off x="457200" y="6080760"/>
+            <a:ext cx="11277295" cy="320040"/>
+          </a:xfrm>
+          <a:prstGeom prst="rect">
+            <a:avLst/>
+          </a:prstGeom>
+          <a:noFill/>
+        </p:spPr>
+        <p:txBody>
+          <a:bodyPr wrap="square">
+            <a:spAutoFit/>
+          </a:bodyPr>
+          <a:lstStyle/>
+          <a:p>
+            <a:pPr algn="ctr"/>
+            <a:r>
+              <a:rPr sz="1200" b="0" i="1">
+                <a:solidFill>
+                  <a:srgbClr val="666666"/>
+                </a:solidFill>
+                <a:latin typeface="Calibri"/>
+              </a:rPr>
+              <a:t>En el enfoque tradicional un requisito no es una frase suelta: es una ficha con ID, version, criterio medible y la prueba que lo verifica.</a:t>
+            </a:r>
+          </a:p>
+        </p:txBody>
+      </p:sp>
+      <p:sp>
+        <p:nvSpPr>
+          <p:cNvPr id="10" name="TextBox 9"/>
           <p:cNvSpPr txBox="1"/>
           <p:nvPr/>
         </p:nvSpPr>
@@ -5646,141 +5976,21 @@
                 </a:solidFill>
                 <a:latin typeface="Calibri"/>
               </a:rPr>
-              <a:t>Ficha formal de requisito del sistema de la clinica (asi se ve un requisito con linea base)</a:t>
-            </a:r>
-          </a:p>
-        </p:txBody>
-      </p:sp>
-      <p:sp>
-        <p:nvSpPr>
-          <p:cNvPr id="5" name="Rounded Rectangle 4"/>
-          <p:cNvSpPr/>
-          <p:nvPr/>
-        </p:nvSpPr>
-        <p:spPr>
-          <a:xfrm>
-            <a:off x="457200" y="1261872"/>
-            <a:ext cx="11277295" cy="4773168"/>
-          </a:xfrm>
-          <a:prstGeom prst="roundRect">
-            <a:avLst>
-              <a:gd name="adj" fmla="val 12000"/>
-            </a:avLst>
-          </a:prstGeom>
-          <a:solidFill>
-            <a:srgbClr val="1E2A38"/>
-          </a:solidFill>
-          <a:ln>
-            <a:noFill/>
-          </a:ln>
-        </p:spPr>
-        <p:style>
-          <a:lnRef idx="1">
-            <a:schemeClr val="accent1"/>
-          </a:lnRef>
-          <a:fillRef idx="3">
-            <a:schemeClr val="accent1"/>
-          </a:fillRef>
-          <a:effectRef idx="2">
-            <a:schemeClr val="accent1"/>
-          </a:effectRef>
-          <a:fontRef idx="minor">
-            <a:schemeClr val="lt1"/>
-          </a:fontRef>
-        </p:style>
-        <p:txBody>
-          <a:bodyPr rtlCol="0" anchor="ctr"/>
-          <a:lstStyle/>
-          <a:p>
-            <a:pPr algn="ctr"/>
-          </a:p>
-        </p:txBody>
-      </p:sp>
-      <p:sp>
-        <p:nvSpPr>
-          <p:cNvPr id="6" name="Rectangle 5"/>
-          <p:cNvSpPr/>
-          <p:nvPr/>
-        </p:nvSpPr>
-        <p:spPr>
-          <a:xfrm>
-            <a:off x="457200" y="1261872"/>
-            <a:ext cx="11277295" cy="320040"/>
-          </a:xfrm>
-          <a:prstGeom prst="rect">
-            <a:avLst/>
-          </a:prstGeom>
-          <a:solidFill>
-            <a:srgbClr val="095292"/>
-          </a:solidFill>
-          <a:ln>
-            <a:noFill/>
-          </a:ln>
-        </p:spPr>
-        <p:style>
-          <a:lnRef idx="1">
-            <a:schemeClr val="accent1"/>
-          </a:lnRef>
-          <a:fillRef idx="3">
-            <a:schemeClr val="accent1"/>
-          </a:fillRef>
-          <a:effectRef idx="2">
-            <a:schemeClr val="accent1"/>
-          </a:effectRef>
-          <a:fontRef idx="minor">
-            <a:schemeClr val="lt1"/>
-          </a:fontRef>
-        </p:style>
-        <p:txBody>
-          <a:bodyPr rtlCol="0" anchor="ctr"/>
-          <a:lstStyle/>
-          <a:p>
-            <a:pPr algn="ctr"/>
-          </a:p>
-        </p:txBody>
-      </p:sp>
-      <p:sp>
-        <p:nvSpPr>
-          <p:cNvPr id="7" name="TextBox 6"/>
+              <a:t>Demo del dia</a:t>
+            </a:r>
+          </a:p>
+        </p:txBody>
+      </p:sp>
+      <p:sp>
+        <p:nvSpPr>
+          <p:cNvPr id="5" name="TextBox 4"/>
           <p:cNvSpPr txBox="1"/>
           <p:nvPr/>
         </p:nvSpPr>
         <p:spPr>
           <a:xfrm>
-            <a:off x="685800" y="1307592"/>
-            <a:ext cx="10820095" cy="256032"/>
-          </a:xfrm>
-          <a:prstGeom prst="rect">
-            <a:avLst/>
-          </a:prstGeom>
-          <a:noFill/>
-        </p:spPr>
-        <p:txBody>
-          <a:bodyPr wrap="square" anchor="ctr"/>
-          <a:lstStyle/>
-          <a:p>
-            <a:r>
-              <a:rPr sz="1000" b="1" i="0">
-                <a:solidFill>
-                  <a:srgbClr val="269CCB"/>
-                </a:solidFill>
-                <a:latin typeface="Calibri"/>
-              </a:rPr>
-              <a:t>● ● ●</a:t>
-            </a:r>
-          </a:p>
-        </p:txBody>
-      </p:sp>
-      <p:sp>
-        <p:nvSpPr>
-          <p:cNvPr id="8" name="TextBox 7"/>
-          <p:cNvSpPr txBox="1"/>
-          <p:nvPr/>
-        </p:nvSpPr>
-        <p:spPr>
-          <a:xfrm>
-            <a:off x="777240" y="1719072"/>
-            <a:ext cx="10637215" cy="4133087"/>
+            <a:off x="457200" y="1170432"/>
+            <a:ext cx="11277295" cy="5230368"/>
           </a:xfrm>
           <a:prstGeom prst="rect">
             <a:avLst/>
@@ -5795,267 +6005,92 @@
           <a:p>
             <a:pPr>
               <a:spcAft>
-                <a:spcPts val="400"/>
+                <a:spcPts val="800"/>
               </a:spcAft>
             </a:pPr>
             <a:r>
-              <a:rPr sz="1400" b="0" i="0">
-                <a:solidFill>
-                  <a:srgbClr val="FFFFFF"/>
-                </a:solidFill>
-                <a:latin typeface="Calibri"/>
-              </a:rPr>
-              <a:t>ID: RF-03            Version: 1.2      Estado: Aprobado (linea base 27/08)</a:t>
+              <a:rPr sz="2000" b="0" i="0">
+                <a:solidFill>
+                  <a:srgbClr val="333333"/>
+                </a:solidFill>
+                <a:latin typeface="Calibri"/>
+              </a:rPr>
+              <a:t>–   </a:t>
+            </a:r>
+            <a:r>
+              <a:rPr sz="2000" b="1" i="0">
+                <a:solidFill>
+                  <a:srgbClr val="333333"/>
+                </a:solidFill>
+                <a:latin typeface="Calibri"/>
+              </a:rPr>
+              <a:t>Herramienta:</a:t>
+            </a:r>
+            <a:r>
+              <a:rPr sz="2000" b="0" i="0">
+                <a:solidFill>
+                  <a:srgbClr val="333333"/>
+                </a:solidFill>
+                <a:latin typeface="Calibri"/>
+              </a:rPr>
+              <a:t> draw.io · Google Docs</a:t>
             </a:r>
           </a:p>
           <a:p>
             <a:pPr>
               <a:spcAft>
-                <a:spcPts val="400"/>
+                <a:spcPts val="800"/>
               </a:spcAft>
             </a:pPr>
             <a:r>
-              <a:rPr sz="1400" b="0" i="0">
-                <a:solidFill>
-                  <a:srgbClr val="FFFFFF"/>
-                </a:solidFill>
-                <a:latin typeface="Calibri"/>
-              </a:rPr>
-              <a:t>Nombre: Buscar la historia clinica de un paciente</a:t>
+              <a:rPr sz="2000" b="0" i="0">
+                <a:solidFill>
+                  <a:srgbClr val="333333"/>
+                </a:solidFill>
+                <a:latin typeface="Calibri"/>
+              </a:rPr>
+              <a:t>–   </a:t>
+            </a:r>
+            <a:r>
+              <a:rPr sz="2000" b="1" i="0">
+                <a:solidFill>
+                  <a:srgbClr val="333333"/>
+                </a:solidFill>
+                <a:latin typeface="Calibri"/>
+              </a:rPr>
+              <a:t>Demo:</a:t>
+            </a:r>
+            <a:r>
+              <a:rPr sz="2000" b="0" i="0">
+                <a:solidFill>
+                  <a:srgbClr val="333333"/>
+                </a:solidFill>
+                <a:latin typeface="Calibri"/>
+              </a:rPr>
+              <a:t> Se dibuja en draw.io el modelo en V de la clinica y traza en vivo la linea punteada que conecta el requisito RF-03 'buscar historial' con su prueba de aceptacion CP-ACEP-07.</a:t>
             </a:r>
           </a:p>
           <a:p>
             <a:pPr>
               <a:spcAft>
-                <a:spcPts val="400"/>
+                <a:spcPts val="800"/>
               </a:spcAft>
             </a:pPr>
             <a:r>
-              <a:rPr sz="1400" b="0" i="0">
-                <a:solidFill>
-                  <a:srgbClr val="FFFFFF"/>
-                </a:solidFill>
-                <a:latin typeface="Calibri"/>
-              </a:rPr>
-              <a:t>Fuente: Dra. Marcela Rios, medica veterinaria de la clinica</a:t>
-            </a:r>
-          </a:p>
-          <a:p>
-            <a:pPr>
-              <a:spcAft>
-                <a:spcPts val="400"/>
-              </a:spcAft>
-            </a:pPr>
-            <a:r>
-              <a:rPr sz="1400" b="0" i="0">
-                <a:solidFill>
-                  <a:srgbClr val="FFFFFF"/>
-                </a:solidFill>
-                <a:latin typeface="Calibri"/>
-              </a:rPr>
-              <a:t>Prioridad: Alta      Estabilidad: Alta      Modulo: Historia clinica</a:t>
-            </a:r>
-          </a:p>
-          <a:p>
-            <a:pPr>
-              <a:spcAft>
-                <a:spcPts val="400"/>
-              </a:spcAft>
-            </a:pPr>
-            <a:r>
-              <a:rPr sz="1400" b="0" i="0">
-                <a:solidFill>
-                  <a:srgbClr val="FFFFFF"/>
-                </a:solidFill>
-                <a:latin typeface="Calibri"/>
-              </a:rPr>
-              <a:t>Descripcion: El sistema debe permitir buscar la historia clinica de un</a:t>
-            </a:r>
-          </a:p>
-          <a:p>
-            <a:pPr>
-              <a:spcAft>
-                <a:spcPts val="400"/>
-              </a:spcAft>
-            </a:pPr>
-            <a:r>
-              <a:rPr sz="1400" b="0" i="0">
-                <a:solidFill>
-                  <a:srgbClr val="FFFFFF"/>
-                </a:solidFill>
-                <a:latin typeface="Calibri"/>
-              </a:rPr>
-              <a:t>  paciente por nombre de la mascota, por documento del propietario o por</a:t>
-            </a:r>
-          </a:p>
-          <a:p>
-            <a:pPr>
-              <a:spcAft>
-                <a:spcPts val="400"/>
-              </a:spcAft>
-            </a:pPr>
-            <a:r>
-              <a:rPr sz="1400" b="0" i="0">
-                <a:solidFill>
-                  <a:srgbClr val="FFFFFF"/>
-                </a:solidFill>
-                <a:latin typeface="Calibri"/>
-              </a:rPr>
-              <a:t>  codigo de ficha, mostrando las ultimas tres consultas registradas.</a:t>
-            </a:r>
-          </a:p>
-          <a:p>
-            <a:pPr>
-              <a:spcAft>
-                <a:spcPts val="400"/>
-              </a:spcAft>
-            </a:pPr>
-            <a:r>
-              <a:rPr sz="1400" b="0" i="0">
-                <a:solidFill>
-                  <a:srgbClr val="FFFFFF"/>
-                </a:solidFill>
-                <a:latin typeface="Calibri"/>
-              </a:rPr>
-              <a:t>Precondicion: el paciente esta registrado y el usuario tiene rol Veterinario.</a:t>
-            </a:r>
-          </a:p>
-          <a:p>
-            <a:pPr>
-              <a:spcAft>
-                <a:spcPts val="400"/>
-              </a:spcAft>
-            </a:pPr>
-            <a:r>
-              <a:rPr sz="1400" b="0" i="0">
-                <a:solidFill>
-                  <a:srgbClr val="FFFFFF"/>
-                </a:solidFill>
-                <a:latin typeface="Calibri"/>
-              </a:rPr>
-              <a:t>Criterio de aceptacion: con 5.000 fichas cargadas el resultado se muestra</a:t>
-            </a:r>
-          </a:p>
-          <a:p>
-            <a:pPr>
-              <a:spcAft>
-                <a:spcPts val="400"/>
-              </a:spcAft>
-            </a:pPr>
-            <a:r>
-              <a:rPr sz="1400" b="0" i="0">
-                <a:solidFill>
-                  <a:srgbClr val="FFFFFF"/>
-                </a:solidFill>
-                <a:latin typeface="Calibri"/>
-              </a:rPr>
-              <a:t>  en menos de 3 segundos y en maximo 3 clics desde el tablero principal.</a:t>
-            </a:r>
-          </a:p>
-          <a:p>
-            <a:pPr>
-              <a:spcAft>
-                <a:spcPts val="400"/>
-              </a:spcAft>
-            </a:pPr>
-            <a:r>
-              <a:rPr sz="1400" b="0" i="0">
-                <a:solidFill>
-                  <a:srgbClr val="FFFFFF"/>
-                </a:solidFill>
-                <a:latin typeface="Calibri"/>
-              </a:rPr>
-              <a:t>Depende de: RF-01 (registrar paciente), RNF-02 (tiempo de respuesta)</a:t>
-            </a:r>
-          </a:p>
-          <a:p>
-            <a:pPr>
-              <a:spcAft>
-                <a:spcPts val="400"/>
-              </a:spcAft>
-            </a:pPr>
-            <a:r>
-              <a:rPr sz="1400" b="0" i="0">
-                <a:solidFill>
-                  <a:srgbClr val="FFFFFF"/>
-                </a:solidFill>
-                <a:latin typeface="Calibri"/>
-              </a:rPr>
-              <a:t>Verificado por: CP-ACEP-07 (prueba de aceptacion)</a:t>
-            </a:r>
-          </a:p>
-          <a:p>
-            <a:pPr>
-              <a:spcAft>
-                <a:spcPts val="400"/>
-              </a:spcAft>
-            </a:pPr>
-            <a:r>
-              <a:rPr sz="1400" b="0" i="0">
-                <a:solidFill>
-                  <a:srgbClr val="FFFFFF"/>
-                </a:solidFill>
-                <a:latin typeface="Calibri"/>
-              </a:rPr>
-              <a:t>Historial: v1.1 se agrega busqueda por documento (SC-002)</a:t>
-            </a:r>
-          </a:p>
-          <a:p>
-            <a:pPr>
-              <a:spcAft>
-                <a:spcPts val="400"/>
-              </a:spcAft>
-            </a:pPr>
-            <a:r>
-              <a:rPr sz="1400" b="0" i="0">
-                <a:solidFill>
-                  <a:srgbClr val="FFFFFF"/>
-                </a:solidFill>
-                <a:latin typeface="Calibri"/>
-              </a:rPr>
-              <a:t>           v1.2 se agrega busqueda por microchip (SC-004, aprobada)</a:t>
-            </a:r>
-          </a:p>
-        </p:txBody>
-      </p:sp>
-      <p:sp>
-        <p:nvSpPr>
-          <p:cNvPr id="9" name="TextBox 8"/>
-          <p:cNvSpPr txBox="1"/>
-          <p:nvPr/>
-        </p:nvSpPr>
-        <p:spPr>
-          <a:xfrm>
-            <a:off x="457200" y="6080760"/>
-            <a:ext cx="11277295" cy="320040"/>
-          </a:xfrm>
-          <a:prstGeom prst="rect">
-            <a:avLst/>
-          </a:prstGeom>
-          <a:noFill/>
-        </p:spPr>
-        <p:txBody>
-          <a:bodyPr wrap="square">
-            <a:spAutoFit/>
-          </a:bodyPr>
-          <a:lstStyle/>
-          <a:p>
-            <a:pPr algn="ctr"/>
-            <a:r>
-              <a:rPr sz="1200" b="0" i="1">
-                <a:solidFill>
-                  <a:srgbClr val="666666"/>
-                </a:solidFill>
-                <a:latin typeface="Calibri"/>
-              </a:rPr>
-              <a:t>En el enfoque tradicional un requisito no es una frase suelta: es una ficha con ID, version, criterio medible y la prueba que lo verifica.</a:t>
-            </a:r>
-          </a:p>
-        </p:txBody>
-      </p:sp>
-      <p:sp>
-        <p:nvSpPr>
-          <p:cNvPr id="10" name="TextBox 9"/>
+              <a:rPr sz="2000" b="0" i="0">
+                <a:solidFill>
+                  <a:srgbClr val="333333"/>
+                </a:solidFill>
+                <a:latin typeface="Calibri"/>
+              </a:rPr>
+              <a:t>–   Mismo dominio: la clinica veterinaria — no otro ejemplo. Aqui se diseña, no se programa.</a:t>
+            </a:r>
+          </a:p>
+        </p:txBody>
+      </p:sp>
+      <p:sp>
+        <p:nvSpPr>
+          <p:cNvPr id="6" name="TextBox 5"/>
           <p:cNvSpPr txBox="1"/>
           <p:nvPr/>
         </p:nvSpPr>
@@ -6123,294 +6158,6 @@
         <p:spPr>
           <a:xfrm>
             <a:off x="0" y="0"/>
-            <a:ext cx="12191695" cy="960120"/>
-          </a:xfrm>
-          <a:prstGeom prst="rect">
-            <a:avLst/>
-          </a:prstGeom>
-          <a:solidFill>
-            <a:srgbClr val="095292"/>
-          </a:solidFill>
-          <a:ln>
-            <a:noFill/>
-          </a:ln>
-        </p:spPr>
-        <p:style>
-          <a:lnRef idx="1">
-            <a:schemeClr val="accent1"/>
-          </a:lnRef>
-          <a:fillRef idx="3">
-            <a:schemeClr val="accent1"/>
-          </a:fillRef>
-          <a:effectRef idx="2">
-            <a:schemeClr val="accent1"/>
-          </a:effectRef>
-          <a:fontRef idx="minor">
-            <a:schemeClr val="lt1"/>
-          </a:fontRef>
-        </p:style>
-        <p:txBody>
-          <a:bodyPr rtlCol="0" anchor="ctr"/>
-          <a:lstStyle/>
-          <a:p>
-            <a:pPr algn="ctr"/>
-          </a:p>
-        </p:txBody>
-      </p:sp>
-      <p:sp>
-        <p:nvSpPr>
-          <p:cNvPr id="3" name="Rectangle 2"/>
-          <p:cNvSpPr/>
-          <p:nvPr/>
-        </p:nvSpPr>
-        <p:spPr>
-          <a:xfrm>
-            <a:off x="0" y="960120"/>
-            <a:ext cx="12191695" cy="41148"/>
-          </a:xfrm>
-          <a:prstGeom prst="rect">
-            <a:avLst/>
-          </a:prstGeom>
-          <a:solidFill>
-            <a:srgbClr val="FFD000"/>
-          </a:solidFill>
-          <a:ln>
-            <a:noFill/>
-          </a:ln>
-        </p:spPr>
-        <p:style>
-          <a:lnRef idx="1">
-            <a:schemeClr val="accent1"/>
-          </a:lnRef>
-          <a:fillRef idx="3">
-            <a:schemeClr val="accent1"/>
-          </a:fillRef>
-          <a:effectRef idx="2">
-            <a:schemeClr val="accent1"/>
-          </a:effectRef>
-          <a:fontRef idx="minor">
-            <a:schemeClr val="lt1"/>
-          </a:fontRef>
-        </p:style>
-        <p:txBody>
-          <a:bodyPr rtlCol="0" anchor="ctr"/>
-          <a:lstStyle/>
-          <a:p>
-            <a:pPr algn="ctr"/>
-          </a:p>
-        </p:txBody>
-      </p:sp>
-      <p:sp>
-        <p:nvSpPr>
-          <p:cNvPr id="4" name="TextBox 3"/>
-          <p:cNvSpPr txBox="1"/>
-          <p:nvPr/>
-        </p:nvSpPr>
-        <p:spPr>
-          <a:xfrm>
-            <a:off x="457200" y="164592"/>
-            <a:ext cx="11277295" cy="502920"/>
-          </a:xfrm>
-          <a:prstGeom prst="rect">
-            <a:avLst/>
-          </a:prstGeom>
-          <a:noFill/>
-        </p:spPr>
-        <p:txBody>
-          <a:bodyPr wrap="square">
-            <a:spAutoFit/>
-          </a:bodyPr>
-          <a:lstStyle/>
-          <a:p>
-            <a:r>
-              <a:rPr sz="2600" b="1" i="0">
-                <a:solidFill>
-                  <a:srgbClr val="FFFFFF"/>
-                </a:solidFill>
-                <a:latin typeface="Calibri"/>
-              </a:rPr>
-              <a:t>Demo del dia</a:t>
-            </a:r>
-          </a:p>
-        </p:txBody>
-      </p:sp>
-      <p:sp>
-        <p:nvSpPr>
-          <p:cNvPr id="5" name="TextBox 4"/>
-          <p:cNvSpPr txBox="1"/>
-          <p:nvPr/>
-        </p:nvSpPr>
-        <p:spPr>
-          <a:xfrm>
-            <a:off x="457200" y="1170432"/>
-            <a:ext cx="11277295" cy="5230368"/>
-          </a:xfrm>
-          <a:prstGeom prst="rect">
-            <a:avLst/>
-          </a:prstGeom>
-          <a:noFill/>
-        </p:spPr>
-        <p:txBody>
-          <a:bodyPr wrap="square">
-            <a:spAutoFit/>
-          </a:bodyPr>
-          <a:lstStyle/>
-          <a:p>
-            <a:pPr>
-              <a:spcAft>
-                <a:spcPts val="800"/>
-              </a:spcAft>
-            </a:pPr>
-            <a:r>
-              <a:rPr sz="2000" b="0" i="0">
-                <a:solidFill>
-                  <a:srgbClr val="333333"/>
-                </a:solidFill>
-                <a:latin typeface="Calibri"/>
-              </a:rPr>
-              <a:t>–   </a:t>
-            </a:r>
-            <a:r>
-              <a:rPr sz="2000" b="1" i="0">
-                <a:solidFill>
-                  <a:srgbClr val="333333"/>
-                </a:solidFill>
-                <a:latin typeface="Calibri"/>
-              </a:rPr>
-              <a:t>Herramienta:</a:t>
-            </a:r>
-            <a:r>
-              <a:rPr sz="2000" b="0" i="0">
-                <a:solidFill>
-                  <a:srgbClr val="333333"/>
-                </a:solidFill>
-                <a:latin typeface="Calibri"/>
-              </a:rPr>
-              <a:t> draw.io · Google Docs</a:t>
-            </a:r>
-          </a:p>
-          <a:p>
-            <a:pPr>
-              <a:spcAft>
-                <a:spcPts val="800"/>
-              </a:spcAft>
-            </a:pPr>
-            <a:r>
-              <a:rPr sz="2000" b="0" i="0">
-                <a:solidFill>
-                  <a:srgbClr val="333333"/>
-                </a:solidFill>
-                <a:latin typeface="Calibri"/>
-              </a:rPr>
-              <a:t>–   </a:t>
-            </a:r>
-            <a:r>
-              <a:rPr sz="2000" b="1" i="0">
-                <a:solidFill>
-                  <a:srgbClr val="333333"/>
-                </a:solidFill>
-                <a:latin typeface="Calibri"/>
-              </a:rPr>
-              <a:t>Demo:</a:t>
-            </a:r>
-            <a:r>
-              <a:rPr sz="2000" b="0" i="0">
-                <a:solidFill>
-                  <a:srgbClr val="333333"/>
-                </a:solidFill>
-                <a:latin typeface="Calibri"/>
-              </a:rPr>
-              <a:t> El docente dibuja en draw.io el modelo en V del sistema de la clinica y traza en vivo la linea punteada que conecta el requisito RF-03 'buscar historial' con su prueba de aceptacion CP-ACEP-07.</a:t>
-            </a:r>
-          </a:p>
-          <a:p>
-            <a:pPr>
-              <a:spcAft>
-                <a:spcPts val="800"/>
-              </a:spcAft>
-            </a:pPr>
-            <a:r>
-              <a:rPr sz="2000" b="0" i="0">
-                <a:solidFill>
-                  <a:srgbClr val="333333"/>
-                </a:solidFill>
-                <a:latin typeface="Calibri"/>
-              </a:rPr>
-              <a:t>–   Mismo dominio: la clinica veterinaria — no otro ejemplo. Aqui se diseña, no se programa.</a:t>
-            </a:r>
-          </a:p>
-        </p:txBody>
-      </p:sp>
-      <p:sp>
-        <p:nvSpPr>
-          <p:cNvPr id="6" name="TextBox 5"/>
-          <p:cNvSpPr txBox="1"/>
-          <p:nvPr/>
-        </p:nvSpPr>
-        <p:spPr>
-          <a:xfrm>
-            <a:off x="11185855" y="6473952"/>
-            <a:ext cx="640080" cy="274320"/>
-          </a:xfrm>
-          <a:prstGeom prst="rect">
-            <a:avLst/>
-          </a:prstGeom>
-          <a:noFill/>
-        </p:spPr>
-        <p:txBody>
-          <a:bodyPr wrap="square">
-            <a:spAutoFit/>
-          </a:bodyPr>
-          <a:lstStyle/>
-          <a:p>
-            <a:pPr algn="r"/>
-            <a:r>
-              <a:rPr sz="1100" b="0" i="0">
-                <a:solidFill>
-                  <a:srgbClr val="666666"/>
-                </a:solidFill>
-                <a:latin typeface="Calibri"/>
-              </a:rPr>
-              <a:t>14</a:t>
-            </a:r>
-          </a:p>
-        </p:txBody>
-      </p:sp>
-    </p:spTree>
-  </p:cSld>
-  <p:clrMapOvr>
-    <a:masterClrMapping/>
-  </p:clrMapOvr>
-</p:sld>
-</file>
-
-<file path=ppt/slides/slide15.xml><?xml version="1.0" encoding="utf-8"?>
-<p:sld xmlns:a="http://schemas.openxmlformats.org/drawingml/2006/main" xmlns:p="http://schemas.openxmlformats.org/presentationml/2006/main" xmlns:r="http://schemas.openxmlformats.org/officeDocument/2006/relationships">
-  <p:cSld>
-    <p:bg>
-      <p:bgPr>
-        <a:solidFill>
-          <a:srgbClr val="FFFFFF"/>
-        </a:solidFill>
-        <a:effectLst/>
-      </p:bgPr>
-    </p:bg>
-    <p:spTree>
-      <p:nvGrpSpPr>
-        <p:cNvPr id="1" name=""/>
-        <p:cNvGrpSpPr/>
-        <p:nvPr/>
-      </p:nvGrpSpPr>
-      <p:grpSpPr/>
-      <p:sp>
-        <p:nvSpPr>
-          <p:cNvPr id="2" name="Rectangle 1"/>
-          <p:cNvSpPr/>
-          <p:nvPr/>
-        </p:nvSpPr>
-        <p:spPr>
-          <a:xfrm>
-            <a:off x="0" y="0"/>
             <a:ext cx="12191695" cy="164592"/>
           </a:xfrm>
           <a:prstGeom prst="rect">
@@ -8004,6 +7751,22 @@
               <a:t>–   La idea de fondo es sencilla y muy usada en ingenieria civil: corregir un plano cuesta una borrada, corregir un muro construido cuesta demoler.</a:t>
             </a:r>
           </a:p>
+          <a:p>
+            <a:pPr>
+              <a:spcAft>
+                <a:spcPts val="800"/>
+              </a:spcAft>
+            </a:pPr>
+            <a:r>
+              <a:rPr sz="2000" b="0" i="0">
+                <a:solidFill>
+                  <a:srgbClr val="333333"/>
+                </a:solidFill>
+                <a:latin typeface="Calibri"/>
+              </a:rPr>
+              <a:t>–   Trasladado a la clinica: si la clinica aprueba que la busqueda se hace por nombre de la mascota y por documento del propietario, ese acuerdo queda escrito, fechado y versionado</a:t>
+            </a:r>
+          </a:p>
         </p:txBody>
       </p:sp>
       <p:sp>
@@ -8221,7 +7984,7 @@
                 </a:solidFill>
                 <a:latin typeface="Calibri"/>
               </a:rPr>
-              <a:t>–   Trasladado a la clinica: si la clinica aprueba que la busqueda se hace por nombre de la mascota y por documento del propietario, ese acuerdo queda escrito, fechado y versionado</a:t>
+              <a:t>–   Y a partir de ahi el equipo diseña con la tranquilidad de que el piso no se le va a mover.</a:t>
             </a:r>
           </a:p>
           <a:p>
@@ -8237,7 +8000,39 @@
                 </a:solidFill>
                 <a:latin typeface="Calibri"/>
               </a:rPr>
-              <a:t>–   Y a partir de ahi el equipo diseña con la tranquilidad de que el piso no se le va a mover.</a:t>
+              <a:t>–   Ese documento aprobado se llama linea base: cualquier cambio posterior pasa por una solicitud formal que evalua su impacto en costo y tiempo antes de aceptarse.</a:t>
+            </a:r>
+          </a:p>
+          <a:p>
+            <a:pPr>
+              <a:spcAft>
+                <a:spcPts val="800"/>
+              </a:spcAft>
+            </a:pPr>
+            <a:r>
+              <a:rPr sz="2000" b="0" i="0">
+                <a:solidFill>
+                  <a:srgbClr val="333333"/>
+                </a:solidFill>
+                <a:latin typeface="Calibri"/>
+              </a:rPr>
+              <a:t>–   Si a mitad del diseño la clinica pide buscar tambien por numero de microchip, el cambio no se improvisa: se registra, se estima y, si se aprueba, se publica una nueva version del documento.</a:t>
+            </a:r>
+          </a:p>
+          <a:p>
+            <a:pPr>
+              <a:spcAft>
+                <a:spcPts val="800"/>
+              </a:spcAft>
+            </a:pPr>
+            <a:r>
+              <a:rPr sz="2000" b="0" i="0">
+                <a:solidFill>
+                  <a:srgbClr val="333333"/>
+                </a:solidFill>
+                <a:latin typeface="Calibri"/>
+              </a:rPr>
+              <a:t>–   El error comun es confundir rigidez con disciplina: cascada si admite cambios, pero con trazabilidad.</a:t>
             </a:r>
           </a:p>
         </p:txBody>
@@ -8489,7 +8284,7 @@
                 </a:solidFill>
                 <a:latin typeface="Calibri"/>
               </a:rPr>
-              <a:t>–   En el sistema de la clinica, cuando se escribe el requisito RF-03 'la veterinaria busca la historia clinica por nombre o por documento'</a:t>
+              <a:t>–   En la clinica, cuando se escribe el requisito RF-03 'la veterinaria busca la historia clinica por nombre o por documento'</a:t>
             </a:r>
           </a:p>
           <a:p>
@@ -8773,23 +8568,7 @@
                 </a:solidFill>
                 <a:latin typeface="Calibri"/>
               </a:rPr>
-              <a:t>–   En el sistema de la clinica hay partes que caben perfecto en este enfoque: los datos basicos de un paciente casi no cambian</a:t>
-            </a:r>
-          </a:p>
-          <a:p>
-            <a:pPr>
-              <a:spcAft>
-                <a:spcPts val="800"/>
-              </a:spcAft>
-            </a:pPr>
-            <a:r>
-              <a:rPr sz="2000" b="0" i="0">
-                <a:solidFill>
-                  <a:srgbClr val="333333"/>
-                </a:solidFill>
-                <a:latin typeface="Calibri"/>
-              </a:rPr>
-              <a:t>–   Y si mañana la clinica conecta facturacion electronica, las reglas de esa parte vienen impuestas por la norma y no se negocian con el cliente.</a:t>
+              <a:t>–   En la clinica hay partes que caben perfecto en este enfoque: los datos basicos de un paciente casi no cambian, y si mañana la clinica conecta facturacion electronica, las reglas de esa parte vienen impuestas por la norma y no se negocian con el cliente.</a:t>
             </a:r>
           </a:p>
           <a:p>
@@ -8986,7 +8765,7 @@
                 </a:solidFill>
                 <a:latin typeface="Calibri"/>
               </a:rPr>
-              <a:t>Cuando NO tienen sentido? (1/2)</a:t>
+              <a:t>Cuando NO tienen sentido?</a:t>
             </a:r>
           </a:p>
         </p:txBody>
@@ -9058,6 +8837,38 @@
                 <a:latin typeface="Calibri"/>
               </a:rPr>
               <a:t>–   El costo de corregir crece de forma brutal a medida que se avanza: cambiar una frase en el documento de requisitos vale casi nada; cambiar la misma idea cuando ya hay diseño, codigo y datos migrados puede costar semanas.</a:t>
+            </a:r>
+          </a:p>
+          <a:p>
+            <a:pPr>
+              <a:spcAft>
+                <a:spcPts val="800"/>
+              </a:spcAft>
+            </a:pPr>
+            <a:r>
+              <a:rPr sz="2000" b="0" i="0">
+                <a:solidFill>
+                  <a:srgbClr val="333333"/>
+                </a:solidFill>
+                <a:latin typeface="Calibri"/>
+              </a:rPr>
+              <a:t>–   En la clinica esto se ve clarito con el tablero de metricas: la administradora dice 'quiero ver cuantos pacientes atendemos', pero cuando vea el primer grafico va a pedir por especie, por veterinario y por mes.</a:t>
+            </a:r>
+          </a:p>
+          <a:p>
+            <a:pPr>
+              <a:spcAft>
+                <a:spcPts val="800"/>
+              </a:spcAft>
+            </a:pPr>
+            <a:r>
+              <a:rPr sz="2000" b="0" i="0">
+                <a:solidFill>
+                  <a:srgbClr val="333333"/>
+                </a:solidFill>
+                <a:latin typeface="Calibri"/>
+              </a:rPr>
+              <a:t>–   Congelar ese requisito en la semana dos es congelar una suposicion.</a:t>
             </a:r>
           </a:p>
         </p:txBody>
@@ -9238,7 +9049,7 @@
                 </a:solidFill>
                 <a:latin typeface="Calibri"/>
               </a:rPr>
-              <a:t>Cuando NO tienen sentido? (2/2)</a:t>
+              <a:t>En el mundo tradicional la documentacion no acompaña al producto: en...</a:t>
             </a:r>
           </a:p>
         </p:txBody>
@@ -9277,7 +9088,7 @@
                 </a:solidFill>
                 <a:latin typeface="Calibri"/>
               </a:rPr>
-              <a:t>–   En el sistema de la clinica esto se ve clarito con el tablero de metricas: la administradora dice 'quiero ver cuantos pacientes atendemos', pero cuando vea el primer grafico va a pedir por especie, por veterinario y por mes.</a:t>
+              <a:t>–   En el mundo tradicional la documentacion no acompaña al producto: en buena parte ES el producto contratado.</a:t>
             </a:r>
           </a:p>
           <a:p>
@@ -9293,7 +9104,23 @@
                 </a:solidFill>
                 <a:latin typeface="Calibri"/>
               </a:rPr>
-              <a:t>–   Congelar ese requisito en la semana dos es congelar una suposicion.</a:t>
+              <a:t>–   Los artefactos tipicos son la Especificacion de Requisitos de Software (ERS o SRS, con estructura tipo IEEE 830 / ISO 29148), el Documento de Diseño (SDD), la matriz de trazabilidad que muestra que cada requisito tiene diseño y prueba, y el acta de aprobacion.</a:t>
+            </a:r>
+          </a:p>
+          <a:p>
+            <a:pPr>
+              <a:spcAft>
+                <a:spcPts val="800"/>
+              </a:spcAft>
+            </a:pPr>
+            <a:r>
+              <a:rPr sz="2000" b="0" i="0">
+                <a:solidFill>
+                  <a:srgbClr val="333333"/>
+                </a:solidFill>
+                <a:latin typeface="Calibri"/>
+              </a:rPr>
+              <a:t>–   Para el estudiante que solo cursa Seminario de Sistemas esto es una gran noticia: su producto final -documento de diseño mas prototipo navegable- es exactamente el tipo de producto que se factura en un proyecto tradicional, y por eso su ruta es completa y no una version reducida del curso.</a:t>
             </a:r>
           </a:p>
         </p:txBody>

--- a/Seminario de Sistemas/Clases/Clase 3 - Metodologias tradicionales/Presentacion.pptx
+++ b/Seminario de Sistemas/Clases/Clase 3 - Metodologias tradicionales/Presentacion.pptx
@@ -999,94 +999,6 @@
           <a:p>
             <a:r>
               <a:t>Cada documento tiene numero de version, fecha, autor y aprobador, y todo cambio entra por una solicitud formal donde se evalua impacto en alcance, tiempo y costo antes de aceptarla.</a:t>
-            </a:r>
-          </a:p>
-        </p:txBody>
-      </p:sp>
-      <p:sp>
-        <p:nvSpPr>
-          <p:cNvPr id="4" name="Slide Number Placeholder 3"/>
-          <p:cNvSpPr>
-            <a:spLocks noGrp="1"/>
-          </p:cNvSpPr>
-          <p:nvPr>
-            <p:ph type="sldNum" idx="5" sz="quarter"/>
-          </p:nvPr>
-        </p:nvSpPr>
-        <p:spPr/>
-      </p:sp>
-    </p:spTree>
-  </p:cSld>
-  <p:clrMapOvr>
-    <a:masterClrMapping/>
-  </p:clrMapOvr>
-</p:notes>
-</file>
-
-<file path=ppt/notesSlides/notesSlide6.xml><?xml version="1.0" encoding="utf-8"?>
-<p:notes xmlns:a="http://schemas.openxmlformats.org/drawingml/2006/main" xmlns:p="http://schemas.openxmlformats.org/presentationml/2006/main" xmlns:r="http://schemas.openxmlformats.org/officeDocument/2006/relationships">
-  <p:cSld>
-    <p:spTree>
-      <p:nvGrpSpPr>
-        <p:cNvPr id="1" name=""/>
-        <p:cNvGrpSpPr/>
-        <p:nvPr/>
-      </p:nvGrpSpPr>
-      <p:grpSpPr>
-        <a:xfrm>
-          <a:off x="0" y="0"/>
-          <a:ext cx="0" cy="0"/>
-          <a:chOff x="0" y="0"/>
-          <a:chExt cx="0" cy="0"/>
-        </a:xfrm>
-      </p:grpSpPr>
-      <p:sp>
-        <p:nvSpPr>
-          <p:cNvPr id="2" name="Slide Image Placeholder 1"/>
-          <p:cNvSpPr>
-            <a:spLocks noGrp="1"/>
-          </p:cNvSpPr>
-          <p:nvPr>
-            <p:ph type="sldImg" idx="2"/>
-          </p:nvPr>
-        </p:nvSpPr>
-        <p:spPr/>
-      </p:sp>
-      <p:sp>
-        <p:nvSpPr>
-          <p:cNvPr id="3" name="Notes Placeholder 2"/>
-          <p:cNvSpPr>
-            <a:spLocks noGrp="1"/>
-          </p:cNvSpPr>
-          <p:nvPr>
-            <p:ph type="body" idx="3" sz="quarter"/>
-          </p:nvPr>
-        </p:nvSpPr>
-        <p:spPr/>
-        <p:txBody>
-          <a:bodyPr/>
-          <a:lstStyle/>
-          <a:p>
-            <a:r>
-              <a:t>TEXTO COMPLETO DE LA LÁMINA (se proyecta resumido):</a:t>
-            </a:r>
-          </a:p>
-          <a:p/>
-          <a:p>
-            <a:r>
-              <a:t>Herramienta: draw.io · Google Docs</a:t>
-            </a:r>
-          </a:p>
-          <a:p/>
-          <a:p>
-            <a:r>
-              <a:t>Demo: Se dibuja en draw.io el modelo en V de la clinica y traza en vivo la linea punteada que conecta el requisito RF-03 'buscar historial' con su prueba de aceptacion CP-ACEP-07.</a:t>
-            </a:r>
-          </a:p>
-          <a:p/>
-          <a:p>
-            <a:r>
-              <a:t>Mismo dominio: la clinica veterinaria — no otro ejemplo. Aqui se diseña, no se programa.</a:t>
             </a:r>
           </a:p>
         </p:txBody>
@@ -5729,83 +5641,14 @@
       </p:sp>
       <p:sp>
         <p:nvSpPr>
-          <p:cNvPr id="5" name="Rounded Rectangle 4"/>
-          <p:cNvSpPr/>
+          <p:cNvPr id="5" name="TextBox 4"/>
+          <p:cNvSpPr txBox="1"/>
           <p:nvPr/>
         </p:nvSpPr>
         <p:spPr>
           <a:xfrm>
-            <a:off x="5797149" y="1573813"/>
-            <a:ext cx="6010497" cy="4057845"/>
-          </a:xfrm>
-          <a:prstGeom prst="roundRect">
-            <a:avLst>
-              <a:gd name="adj" fmla="val 4000"/>
-            </a:avLst>
-          </a:prstGeom>
-          <a:solidFill>
-            <a:srgbClr val="E8EEF4"/>
-          </a:solidFill>
-          <a:ln>
-            <a:noFill/>
-          </a:ln>
-        </p:spPr>
-        <p:style>
-          <a:lnRef idx="1">
-            <a:schemeClr val="accent1"/>
-          </a:lnRef>
-          <a:fillRef idx="3">
-            <a:schemeClr val="accent1"/>
-          </a:fillRef>
-          <a:effectRef idx="2">
-            <a:schemeClr val="accent1"/>
-          </a:effectRef>
-          <a:fontRef idx="minor">
-            <a:schemeClr val="lt1"/>
-          </a:fontRef>
-        </p:style>
-        <p:txBody>
-          <a:bodyPr rtlCol="0" anchor="ctr"/>
-          <a:lstStyle/>
-          <a:p>
-            <a:pPr algn="ctr"/>
-          </a:p>
-        </p:txBody>
-      </p:sp>
-      <p:pic>
-        <p:nvPicPr>
-          <p:cNvPr id="6" name="Picture 5" descr="laptop-code-live-demo.jpg"/>
-          <p:cNvPicPr>
-            <a:picLocks noChangeAspect="1"/>
-          </p:cNvPicPr>
-          <p:nvPr/>
-        </p:nvPicPr>
-        <p:blipFill>
-          <a:blip r:embed="rId2"/>
-          <a:stretch>
-            <a:fillRect/>
-          </a:stretch>
-        </p:blipFill>
-        <p:spPr>
-          <a:xfrm>
-            <a:off x="5870301" y="1646965"/>
-            <a:ext cx="5864193" cy="3911541"/>
-          </a:xfrm>
-          <a:prstGeom prst="rect">
-            <a:avLst/>
-          </a:prstGeom>
-        </p:spPr>
-      </p:pic>
-      <p:sp>
-        <p:nvSpPr>
-          <p:cNvPr id="7" name="TextBox 6"/>
-          <p:cNvSpPr txBox="1"/>
-          <p:nvPr/>
-        </p:nvSpPr>
-        <p:spPr>
-          <a:xfrm>
-            <a:off x="5870301" y="5961888"/>
-            <a:ext cx="5864193" cy="320040"/>
+            <a:off x="457200" y="1170432"/>
+            <a:ext cx="11277295" cy="5230368"/>
           </a:xfrm>
           <a:prstGeom prst="rect">
             <a:avLst/>
@@ -5818,41 +5661,6 @@
           </a:bodyPr>
           <a:lstStyle/>
           <a:p>
-            <a:pPr algn="ctr"/>
-            <a:r>
-              <a:rPr sz="1100" b="0" i="1">
-                <a:solidFill>
-                  <a:srgbClr val="666666"/>
-                </a:solidFill>
-                <a:latin typeface="Calibri"/>
-              </a:rPr>
-              <a:t>Foto: olia danilevich · Pexels</a:t>
-            </a:r>
-          </a:p>
-        </p:txBody>
-      </p:sp>
-      <p:sp>
-        <p:nvSpPr>
-          <p:cNvPr id="8" name="TextBox 7"/>
-          <p:cNvSpPr txBox="1"/>
-          <p:nvPr/>
-        </p:nvSpPr>
-        <p:spPr>
-          <a:xfrm>
-            <a:off x="457200" y="1353312"/>
-            <a:ext cx="5093061" cy="5047488"/>
-          </a:xfrm>
-          <a:prstGeom prst="rect">
-            <a:avLst/>
-          </a:prstGeom>
-          <a:noFill/>
-        </p:spPr>
-        <p:txBody>
-          <a:bodyPr wrap="square">
-            <a:spAutoFit/>
-          </a:bodyPr>
-          <a:lstStyle/>
-          <a:p>
             <a:pPr>
               <a:spcAft>
                 <a:spcPts val="800"/>
@@ -5910,6 +5718,15 @@
               </a:rPr>
               <a:t>Demo:</a:t>
             </a:r>
+            <a:r>
+              <a:rPr sz="2000" b="0" i="0">
+                <a:solidFill>
+                  <a:srgbClr val="333333"/>
+                </a:solidFill>
+                <a:latin typeface="Calibri"/>
+              </a:rPr>
+              <a:t> Se dibuja en draw.io el modelo en V de la clinica y traza en vivo la linea punteada que conecta el requisito RF-03 'buscar historial' con su prueba de aceptacion CP-ACEP-07.</a:t>
+            </a:r>
           </a:p>
           <a:p>
             <a:pPr>
@@ -5931,7 +5748,7 @@
       </p:sp>
       <p:sp>
         <p:nvSpPr>
-          <p:cNvPr id="9" name="TextBox 8"/>
+          <p:cNvPr id="6" name="TextBox 5"/>
           <p:cNvSpPr txBox="1"/>
           <p:nvPr/>
         </p:nvSpPr>
@@ -6344,83 +6161,14 @@
       </p:sp>
       <p:sp>
         <p:nvSpPr>
-          <p:cNvPr id="5" name="Rounded Rectangle 4"/>
-          <p:cNvSpPr/>
+          <p:cNvPr id="5" name="TextBox 4"/>
+          <p:cNvSpPr txBox="1"/>
           <p:nvPr/>
         </p:nvSpPr>
         <p:spPr>
           <a:xfrm>
-            <a:off x="5797149" y="1573813"/>
-            <a:ext cx="6010497" cy="4057845"/>
-          </a:xfrm>
-          <a:prstGeom prst="roundRect">
-            <a:avLst>
-              <a:gd name="adj" fmla="val 4000"/>
-            </a:avLst>
-          </a:prstGeom>
-          <a:solidFill>
-            <a:srgbClr val="E8EEF4"/>
-          </a:solidFill>
-          <a:ln>
-            <a:noFill/>
-          </a:ln>
-        </p:spPr>
-        <p:style>
-          <a:lnRef idx="1">
-            <a:schemeClr val="accent1"/>
-          </a:lnRef>
-          <a:fillRef idx="3">
-            <a:schemeClr val="accent1"/>
-          </a:fillRef>
-          <a:effectRef idx="2">
-            <a:schemeClr val="accent1"/>
-          </a:effectRef>
-          <a:fontRef idx="minor">
-            <a:schemeClr val="lt1"/>
-          </a:fontRef>
-        </p:style>
-        <p:txBody>
-          <a:bodyPr rtlCol="0" anchor="ctr"/>
-          <a:lstStyle/>
-          <a:p>
-            <a:pPr algn="ctr"/>
-          </a:p>
-        </p:txBody>
-      </p:sp>
-      <p:pic>
-        <p:nvPicPr>
-          <p:cNvPr id="6" name="Picture 5" descr="notebook-planning-desk-coffee.jpg"/>
-          <p:cNvPicPr>
-            <a:picLocks noChangeAspect="1"/>
-          </p:cNvPicPr>
-          <p:nvPr/>
-        </p:nvPicPr>
-        <p:blipFill>
-          <a:blip r:embed="rId2"/>
-          <a:stretch>
-            <a:fillRect/>
-          </a:stretch>
-        </p:blipFill>
-        <p:spPr>
-          <a:xfrm>
-            <a:off x="5870301" y="1646965"/>
-            <a:ext cx="5864193" cy="3911541"/>
-          </a:xfrm>
-          <a:prstGeom prst="rect">
-            <a:avLst/>
-          </a:prstGeom>
-        </p:spPr>
-      </p:pic>
-      <p:sp>
-        <p:nvSpPr>
-          <p:cNvPr id="7" name="TextBox 6"/>
-          <p:cNvSpPr txBox="1"/>
-          <p:nvPr/>
-        </p:nvSpPr>
-        <p:spPr>
-          <a:xfrm>
-            <a:off x="5870301" y="5961888"/>
-            <a:ext cx="5864193" cy="320040"/>
+            <a:off x="457200" y="1170432"/>
+            <a:ext cx="11277295" cy="5230368"/>
           </a:xfrm>
           <a:prstGeom prst="rect">
             <a:avLst/>
@@ -6433,41 +6181,6 @@
           </a:bodyPr>
           <a:lstStyle/>
           <a:p>
-            <a:pPr algn="ctr"/>
-            <a:r>
-              <a:rPr sz="1100" b="0" i="1">
-                <a:solidFill>
-                  <a:srgbClr val="666666"/>
-                </a:solidFill>
-                <a:latin typeface="Calibri"/>
-              </a:rPr>
-              <a:t>Foto: Cup of  Couple · Pexels</a:t>
-            </a:r>
-          </a:p>
-        </p:txBody>
-      </p:sp>
-      <p:sp>
-        <p:nvSpPr>
-          <p:cNvPr id="8" name="TextBox 7"/>
-          <p:cNvSpPr txBox="1"/>
-          <p:nvPr/>
-        </p:nvSpPr>
-        <p:spPr>
-          <a:xfrm>
-            <a:off x="457200" y="1353312"/>
-            <a:ext cx="5093061" cy="5047488"/>
-          </a:xfrm>
-          <a:prstGeom prst="rect">
-            <a:avLst/>
-          </a:prstGeom>
-          <a:noFill/>
-        </p:spPr>
-        <p:txBody>
-          <a:bodyPr wrap="square">
-            <a:spAutoFit/>
-          </a:bodyPr>
-          <a:lstStyle/>
-          <a:p>
             <a:pPr>
               <a:spcAft>
                 <a:spcPts val="800"/>
@@ -6580,7 +6293,7 @@
       </p:sp>
       <p:sp>
         <p:nvSpPr>
-          <p:cNvPr id="9" name="TextBox 8"/>
+          <p:cNvPr id="6" name="TextBox 5"/>
           <p:cNvSpPr txBox="1"/>
           <p:nvPr/>
         </p:nvSpPr>
@@ -15906,83 +15619,14 @@
       </p:sp>
       <p:sp>
         <p:nvSpPr>
-          <p:cNvPr id="5" name="Rounded Rectangle 4"/>
-          <p:cNvSpPr/>
+          <p:cNvPr id="5" name="TextBox 4"/>
+          <p:cNvSpPr txBox="1"/>
           <p:nvPr/>
         </p:nvSpPr>
         <p:spPr>
           <a:xfrm>
-            <a:off x="5797149" y="1573813"/>
-            <a:ext cx="6010497" cy="4057845"/>
-          </a:xfrm>
-          <a:prstGeom prst="roundRect">
-            <a:avLst>
-              <a:gd name="adj" fmla="val 4000"/>
-            </a:avLst>
-          </a:prstGeom>
-          <a:solidFill>
-            <a:srgbClr val="E8EEF4"/>
-          </a:solidFill>
-          <a:ln>
-            <a:noFill/>
-          </a:ln>
-        </p:spPr>
-        <p:style>
-          <a:lnRef idx="1">
-            <a:schemeClr val="accent1"/>
-          </a:lnRef>
-          <a:fillRef idx="3">
-            <a:schemeClr val="accent1"/>
-          </a:fillRef>
-          <a:effectRef idx="2">
-            <a:schemeClr val="accent1"/>
-          </a:effectRef>
-          <a:fontRef idx="minor">
-            <a:schemeClr val="lt1"/>
-          </a:fontRef>
-        </p:style>
-        <p:txBody>
-          <a:bodyPr rtlCol="0" anchor="ctr"/>
-          <a:lstStyle/>
-          <a:p>
-            <a:pPr algn="ctr"/>
-          </a:p>
-        </p:txBody>
-      </p:sp>
-      <p:pic>
-        <p:nvPicPr>
-          <p:cNvPr id="6" name="Picture 5" descr="signing-contract-documents.jpg"/>
-          <p:cNvPicPr>
-            <a:picLocks noChangeAspect="1"/>
-          </p:cNvPicPr>
-          <p:nvPr/>
-        </p:nvPicPr>
-        <p:blipFill>
-          <a:blip r:embed="rId2"/>
-          <a:stretch>
-            <a:fillRect/>
-          </a:stretch>
-        </p:blipFill>
-        <p:spPr>
-          <a:xfrm>
-            <a:off x="5870301" y="1646965"/>
-            <a:ext cx="5864193" cy="3911541"/>
-          </a:xfrm>
-          <a:prstGeom prst="rect">
-            <a:avLst/>
-          </a:prstGeom>
-        </p:spPr>
-      </p:pic>
-      <p:sp>
-        <p:nvSpPr>
-          <p:cNvPr id="7" name="TextBox 6"/>
-          <p:cNvSpPr txBox="1"/>
-          <p:nvPr/>
-        </p:nvSpPr>
-        <p:spPr>
-          <a:xfrm>
-            <a:off x="5870301" y="5961888"/>
-            <a:ext cx="5864193" cy="320040"/>
+            <a:off x="457200" y="1170432"/>
+            <a:ext cx="11277295" cy="5230368"/>
           </a:xfrm>
           <a:prstGeom prst="rect">
             <a:avLst/>
@@ -15995,41 +15639,6 @@
           </a:bodyPr>
           <a:lstStyle/>
           <a:p>
-            <a:pPr algn="ctr"/>
-            <a:r>
-              <a:rPr sz="1100" b="0" i="1">
-                <a:solidFill>
-                  <a:srgbClr val="666666"/>
-                </a:solidFill>
-                <a:latin typeface="Calibri"/>
-              </a:rPr>
-              <a:t>Foto: https://kaboompics.com/ · Pexels</a:t>
-            </a:r>
-          </a:p>
-        </p:txBody>
-      </p:sp>
-      <p:sp>
-        <p:nvSpPr>
-          <p:cNvPr id="8" name="TextBox 7"/>
-          <p:cNvSpPr txBox="1"/>
-          <p:nvPr/>
-        </p:nvSpPr>
-        <p:spPr>
-          <a:xfrm>
-            <a:off x="457200" y="1353312"/>
-            <a:ext cx="5093061" cy="5047488"/>
-          </a:xfrm>
-          <a:prstGeom prst="rect">
-            <a:avLst/>
-          </a:prstGeom>
-          <a:noFill/>
-        </p:spPr>
-        <p:txBody>
-          <a:bodyPr wrap="square">
-            <a:spAutoFit/>
-          </a:bodyPr>
-          <a:lstStyle/>
-          <a:p>
             <a:pPr>
               <a:spcAft>
                 <a:spcPts val="800"/>
@@ -16097,7 +15706,7 @@
       </p:sp>
       <p:sp>
         <p:nvSpPr>
-          <p:cNvPr id="9" name="TextBox 8"/>
+          <p:cNvPr id="6" name="TextBox 5"/>
           <p:cNvSpPr txBox="1"/>
           <p:nvPr/>
         </p:nvSpPr>

--- a/Seminario de Sistemas/Clases/Clase 3 - Metodologias tradicionales/Presentacion.pptx
+++ b/Seminario de Sistemas/Clases/Clase 3 - Metodologias tradicionales/Presentacion.pptx
@@ -999,6 +999,94 @@
           <a:p>
             <a:r>
               <a:t>Cada documento tiene numero de version, fecha, autor y aprobador, y todo cambio entra por una solicitud formal donde se evalua impacto en alcance, tiempo y costo antes de aceptarla.</a:t>
+            </a:r>
+          </a:p>
+        </p:txBody>
+      </p:sp>
+      <p:sp>
+        <p:nvSpPr>
+          <p:cNvPr id="4" name="Slide Number Placeholder 3"/>
+          <p:cNvSpPr>
+            <a:spLocks noGrp="1"/>
+          </p:cNvSpPr>
+          <p:nvPr>
+            <p:ph type="sldNum" idx="5" sz="quarter"/>
+          </p:nvPr>
+        </p:nvSpPr>
+        <p:spPr/>
+      </p:sp>
+    </p:spTree>
+  </p:cSld>
+  <p:clrMapOvr>
+    <a:masterClrMapping/>
+  </p:clrMapOvr>
+</p:notes>
+</file>
+
+<file path=ppt/notesSlides/notesSlide6.xml><?xml version="1.0" encoding="utf-8"?>
+<p:notes xmlns:a="http://schemas.openxmlformats.org/drawingml/2006/main" xmlns:p="http://schemas.openxmlformats.org/presentationml/2006/main" xmlns:r="http://schemas.openxmlformats.org/officeDocument/2006/relationships">
+  <p:cSld>
+    <p:spTree>
+      <p:nvGrpSpPr>
+        <p:cNvPr id="1" name=""/>
+        <p:cNvGrpSpPr/>
+        <p:nvPr/>
+      </p:nvGrpSpPr>
+      <p:grpSpPr>
+        <a:xfrm>
+          <a:off x="0" y="0"/>
+          <a:ext cx="0" cy="0"/>
+          <a:chOff x="0" y="0"/>
+          <a:chExt cx="0" cy="0"/>
+        </a:xfrm>
+      </p:grpSpPr>
+      <p:sp>
+        <p:nvSpPr>
+          <p:cNvPr id="2" name="Slide Image Placeholder 1"/>
+          <p:cNvSpPr>
+            <a:spLocks noGrp="1"/>
+          </p:cNvSpPr>
+          <p:nvPr>
+            <p:ph type="sldImg" idx="2"/>
+          </p:nvPr>
+        </p:nvSpPr>
+        <p:spPr/>
+      </p:sp>
+      <p:sp>
+        <p:nvSpPr>
+          <p:cNvPr id="3" name="Notes Placeholder 2"/>
+          <p:cNvSpPr>
+            <a:spLocks noGrp="1"/>
+          </p:cNvSpPr>
+          <p:nvPr>
+            <p:ph type="body" idx="3" sz="quarter"/>
+          </p:nvPr>
+        </p:nvSpPr>
+        <p:spPr/>
+        <p:txBody>
+          <a:bodyPr/>
+          <a:lstStyle/>
+          <a:p>
+            <a:r>
+              <a:t>TEXTO COMPLETO DE LA LÁMINA (se proyecta resumido):</a:t>
+            </a:r>
+          </a:p>
+          <a:p/>
+          <a:p>
+            <a:r>
+              <a:t>Herramienta: draw.io · Google Docs</a:t>
+            </a:r>
+          </a:p>
+          <a:p/>
+          <a:p>
+            <a:r>
+              <a:t>Demo: Se dibuja en draw.io el modelo en V de la clinica y traza en vivo la linea punteada que conecta el requisito RF-03 'buscar historial' con su prueba de aceptacion CP-ACEP-07.</a:t>
+            </a:r>
+          </a:p>
+          <a:p/>
+          <a:p>
+            <a:r>
+              <a:t>Mismo dominio: la clinica veterinaria — no otro ejemplo. Aqui se diseña, no se programa.</a:t>
             </a:r>
           </a:p>
         </p:txBody>
@@ -5641,14 +5729,83 @@
       </p:sp>
       <p:sp>
         <p:nvSpPr>
-          <p:cNvPr id="5" name="TextBox 4"/>
+          <p:cNvPr id="5" name="Rounded Rectangle 4"/>
+          <p:cNvSpPr/>
+          <p:nvPr/>
+        </p:nvSpPr>
+        <p:spPr>
+          <a:xfrm>
+            <a:off x="5797149" y="1343926"/>
+            <a:ext cx="6010497" cy="4837658"/>
+          </a:xfrm>
+          <a:prstGeom prst="roundRect">
+            <a:avLst>
+              <a:gd name="adj" fmla="val 4000"/>
+            </a:avLst>
+          </a:prstGeom>
+          <a:solidFill>
+            <a:srgbClr val="E8EEF4"/>
+          </a:solidFill>
+          <a:ln>
+            <a:noFill/>
+          </a:ln>
+        </p:spPr>
+        <p:style>
+          <a:lnRef idx="1">
+            <a:schemeClr val="accent1"/>
+          </a:lnRef>
+          <a:fillRef idx="3">
+            <a:schemeClr val="accent1"/>
+          </a:fillRef>
+          <a:effectRef idx="2">
+            <a:schemeClr val="accent1"/>
+          </a:effectRef>
+          <a:fontRef idx="minor">
+            <a:schemeClr val="lt1"/>
+          </a:fontRef>
+        </p:style>
+        <p:txBody>
+          <a:bodyPr rtlCol="0" anchor="ctr"/>
+          <a:lstStyle/>
+          <a:p>
+            <a:pPr algn="ctr"/>
+          </a:p>
+        </p:txBody>
+      </p:sp>
+      <p:pic>
+        <p:nvPicPr>
+          <p:cNvPr id="6" name="Picture 5" descr="ilus-demo-paso1.png"/>
+          <p:cNvPicPr>
+            <a:picLocks noChangeAspect="1"/>
+          </p:cNvPicPr>
+          <p:nvPr/>
+        </p:nvPicPr>
+        <p:blipFill>
+          <a:blip r:embed="rId2"/>
+          <a:stretch>
+            <a:fillRect/>
+          </a:stretch>
+        </p:blipFill>
+        <p:spPr>
+          <a:xfrm>
+            <a:off x="5870301" y="1417078"/>
+            <a:ext cx="5864193" cy="4691354"/>
+          </a:xfrm>
+          <a:prstGeom prst="rect">
+            <a:avLst/>
+          </a:prstGeom>
+        </p:spPr>
+      </p:pic>
+      <p:sp>
+        <p:nvSpPr>
+          <p:cNvPr id="7" name="TextBox 6"/>
           <p:cNvSpPr txBox="1"/>
           <p:nvPr/>
         </p:nvSpPr>
         <p:spPr>
           <a:xfrm>
-            <a:off x="457200" y="1170432"/>
-            <a:ext cx="11277295" cy="5230368"/>
+            <a:off x="457200" y="1353312"/>
+            <a:ext cx="5093061" cy="5047488"/>
           </a:xfrm>
           <a:prstGeom prst="rect">
             <a:avLst/>
@@ -5725,7 +5882,7 @@
                 </a:solidFill>
                 <a:latin typeface="Calibri"/>
               </a:rPr>
-              <a:t> Se dibuja en draw.io el modelo en V de la clinica y traza en vivo la linea punteada que conecta el requisito RF-03 'buscar historial' con su prueba de aceptacion CP-ACEP-07.</a:t>
+              <a:t> Se dibuja en draw.io el modelo en V de la clinica y traza en vivo la linea punteada que conecta el requisito RF-03 'buscar historial' con su…</a:t>
             </a:r>
           </a:p>
           <a:p>
@@ -5748,7 +5905,7 @@
       </p:sp>
       <p:sp>
         <p:nvSpPr>
-          <p:cNvPr id="6" name="TextBox 5"/>
+          <p:cNvPr id="8" name="TextBox 7"/>
           <p:cNvSpPr txBox="1"/>
           <p:nvPr/>
         </p:nvSpPr>
@@ -15619,14 +15776,83 @@
       </p:sp>
       <p:sp>
         <p:nvSpPr>
-          <p:cNvPr id="5" name="TextBox 4"/>
+          <p:cNvPr id="5" name="Rounded Rectangle 4"/>
+          <p:cNvSpPr/>
+          <p:nvPr/>
+        </p:nvSpPr>
+        <p:spPr>
+          <a:xfrm>
+            <a:off x="5797149" y="1343926"/>
+            <a:ext cx="6010497" cy="4837658"/>
+          </a:xfrm>
+          <a:prstGeom prst="roundRect">
+            <a:avLst>
+              <a:gd name="adj" fmla="val 4000"/>
+            </a:avLst>
+          </a:prstGeom>
+          <a:solidFill>
+            <a:srgbClr val="E8EEF4"/>
+          </a:solidFill>
+          <a:ln>
+            <a:noFill/>
+          </a:ln>
+        </p:spPr>
+        <p:style>
+          <a:lnRef idx="1">
+            <a:schemeClr val="accent1"/>
+          </a:lnRef>
+          <a:fillRef idx="3">
+            <a:schemeClr val="accent1"/>
+          </a:fillRef>
+          <a:effectRef idx="2">
+            <a:schemeClr val="accent1"/>
+          </a:effectRef>
+          <a:fontRef idx="minor">
+            <a:schemeClr val="lt1"/>
+          </a:fontRef>
+        </p:style>
+        <p:txBody>
+          <a:bodyPr rtlCol="0" anchor="ctr"/>
+          <a:lstStyle/>
+          <a:p>
+            <a:pPr algn="ctr"/>
+          </a:p>
+        </p:txBody>
+      </p:sp>
+      <p:pic>
+        <p:nvPicPr>
+          <p:cNvPr id="6" name="Picture 5" descr="ilus-cuando-tradicional-paso1.png"/>
+          <p:cNvPicPr>
+            <a:picLocks noChangeAspect="1"/>
+          </p:cNvPicPr>
+          <p:nvPr/>
+        </p:nvPicPr>
+        <p:blipFill>
+          <a:blip r:embed="rId2"/>
+          <a:stretch>
+            <a:fillRect/>
+          </a:stretch>
+        </p:blipFill>
+        <p:spPr>
+          <a:xfrm>
+            <a:off x="5870301" y="1417078"/>
+            <a:ext cx="5864193" cy="4691354"/>
+          </a:xfrm>
+          <a:prstGeom prst="rect">
+            <a:avLst/>
+          </a:prstGeom>
+        </p:spPr>
+      </p:pic>
+      <p:sp>
+        <p:nvSpPr>
+          <p:cNvPr id="7" name="TextBox 6"/>
           <p:cNvSpPr txBox="1"/>
           <p:nvPr/>
         </p:nvSpPr>
         <p:spPr>
           <a:xfrm>
-            <a:off x="457200" y="1170432"/>
-            <a:ext cx="11277295" cy="5230368"/>
+            <a:off x="457200" y="1353312"/>
+            <a:ext cx="5093061" cy="5047488"/>
           </a:xfrm>
           <a:prstGeom prst="rect">
             <a:avLst/>
@@ -15706,7 +15932,7 @@
       </p:sp>
       <p:sp>
         <p:nvSpPr>
-          <p:cNvPr id="6" name="TextBox 5"/>
+          <p:cNvPr id="8" name="TextBox 7"/>
           <p:cNvSpPr txBox="1"/>
           <p:nvPr/>
         </p:nvSpPr>

--- a/Seminario de Sistemas/Clases/Clase 3 - Metodologias tradicionales/Presentacion.pptx
+++ b/Seminario de Sistemas/Clases/Clase 3 - Metodologias tradicionales/Presentacion.pptx
@@ -13916,7 +13916,7 @@
         <p:spPr>
           <a:xfrm>
             <a:off x="457200" y="1261872"/>
-            <a:ext cx="11277295" cy="5076537"/>
+            <a:ext cx="6991923" cy="4745196"/>
           </a:xfrm>
           <a:prstGeom prst="roundRect">
             <a:avLst>
@@ -13961,7 +13961,7 @@
         <p:spPr>
           <a:xfrm>
             <a:off x="457200" y="1261872"/>
-            <a:ext cx="11277295" cy="365760"/>
+            <a:ext cx="6991923" cy="365760"/>
           </a:xfrm>
           <a:prstGeom prst="rect">
             <a:avLst/>
@@ -14133,7 +14133,7 @@
         <p:spPr>
           <a:xfrm>
             <a:off x="1371600" y="1298448"/>
-            <a:ext cx="10180015" cy="292608"/>
+            <a:ext cx="5894643" cy="292608"/>
           </a:xfrm>
           <a:prstGeom prst="rect">
             <a:avLst/>
@@ -14166,7 +14166,7 @@
         <p:spPr>
           <a:xfrm>
             <a:off x="685800" y="1719072"/>
-            <a:ext cx="502920" cy="4482177"/>
+            <a:ext cx="502920" cy="4150836"/>
           </a:xfrm>
           <a:prstGeom prst="rect">
             <a:avLst/>
@@ -14181,11 +14181,11 @@
           <a:p>
             <a:pPr algn="r">
               <a:spcAft>
-                <a:spcPts val="300"/>
+                <a:spcPts val="342"/>
               </a:spcAft>
             </a:pPr>
             <a:r>
-              <a:rPr sz="1400" i="0" b="0">
+              <a:rPr sz="1600" i="0" b="0">
                 <a:solidFill>
                   <a:srgbClr val="858585"/>
                 </a:solidFill>
@@ -14197,11 +14197,11 @@
           <a:p>
             <a:pPr algn="r">
               <a:spcAft>
-                <a:spcPts val="300"/>
+                <a:spcPts val="342"/>
               </a:spcAft>
             </a:pPr>
             <a:r>
-              <a:rPr sz="1400" i="0" b="0">
+              <a:rPr sz="1600" i="0" b="0">
                 <a:solidFill>
                   <a:srgbClr val="858585"/>
                 </a:solidFill>
@@ -14213,11 +14213,11 @@
           <a:p>
             <a:pPr algn="r">
               <a:spcAft>
-                <a:spcPts val="300"/>
+                <a:spcPts val="342"/>
               </a:spcAft>
             </a:pPr>
             <a:r>
-              <a:rPr sz="1400" i="0" b="0">
+              <a:rPr sz="1600" i="0" b="0">
                 <a:solidFill>
                   <a:srgbClr val="858585"/>
                 </a:solidFill>
@@ -14229,11 +14229,11 @@
           <a:p>
             <a:pPr algn="r">
               <a:spcAft>
-                <a:spcPts val="300"/>
+                <a:spcPts val="342"/>
               </a:spcAft>
             </a:pPr>
             <a:r>
-              <a:rPr sz="1400" i="0" b="0">
+              <a:rPr sz="1600" i="0" b="0">
                 <a:solidFill>
                   <a:srgbClr val="858585"/>
                 </a:solidFill>
@@ -14245,11 +14245,11 @@
           <a:p>
             <a:pPr algn="r">
               <a:spcAft>
-                <a:spcPts val="300"/>
+                <a:spcPts val="342"/>
               </a:spcAft>
             </a:pPr>
             <a:r>
-              <a:rPr sz="1400" i="0" b="0">
+              <a:rPr sz="1600" i="0" b="0">
                 <a:solidFill>
                   <a:srgbClr val="858585"/>
                 </a:solidFill>
@@ -14261,11 +14261,11 @@
           <a:p>
             <a:pPr algn="r">
               <a:spcAft>
-                <a:spcPts val="300"/>
+                <a:spcPts val="342"/>
               </a:spcAft>
             </a:pPr>
             <a:r>
-              <a:rPr sz="1400" i="0" b="0">
+              <a:rPr sz="1600" i="0" b="0">
                 <a:solidFill>
                   <a:srgbClr val="858585"/>
                 </a:solidFill>
@@ -14277,11 +14277,11 @@
           <a:p>
             <a:pPr algn="r">
               <a:spcAft>
-                <a:spcPts val="300"/>
+                <a:spcPts val="342"/>
               </a:spcAft>
             </a:pPr>
             <a:r>
-              <a:rPr sz="1400" i="0" b="0">
+              <a:rPr sz="1600" i="0" b="0">
                 <a:solidFill>
                   <a:srgbClr val="858585"/>
                 </a:solidFill>
@@ -14293,11 +14293,11 @@
           <a:p>
             <a:pPr algn="r">
               <a:spcAft>
-                <a:spcPts val="300"/>
+                <a:spcPts val="342"/>
               </a:spcAft>
             </a:pPr>
             <a:r>
-              <a:rPr sz="1400" i="0" b="0">
+              <a:rPr sz="1600" i="0" b="0">
                 <a:solidFill>
                   <a:srgbClr val="858585"/>
                 </a:solidFill>
@@ -14309,11 +14309,11 @@
           <a:p>
             <a:pPr algn="r">
               <a:spcAft>
-                <a:spcPts val="300"/>
+                <a:spcPts val="342"/>
               </a:spcAft>
             </a:pPr>
             <a:r>
-              <a:rPr sz="1400" i="0" b="0">
+              <a:rPr sz="1600" i="0" b="0">
                 <a:solidFill>
                   <a:srgbClr val="858585"/>
                 </a:solidFill>
@@ -14325,11 +14325,11 @@
           <a:p>
             <a:pPr algn="r">
               <a:spcAft>
-                <a:spcPts val="300"/>
+                <a:spcPts val="342"/>
               </a:spcAft>
             </a:pPr>
             <a:r>
-              <a:rPr sz="1400" i="0" b="0">
+              <a:rPr sz="1600" i="0" b="0">
                 <a:solidFill>
                   <a:srgbClr val="858585"/>
                 </a:solidFill>
@@ -14341,11 +14341,11 @@
           <a:p>
             <a:pPr algn="r">
               <a:spcAft>
-                <a:spcPts val="300"/>
+                <a:spcPts val="342"/>
               </a:spcAft>
             </a:pPr>
             <a:r>
-              <a:rPr sz="1400" i="0" b="0">
+              <a:rPr sz="1600" i="0" b="0">
                 <a:solidFill>
                   <a:srgbClr val="858585"/>
                 </a:solidFill>
@@ -14357,11 +14357,11 @@
           <a:p>
             <a:pPr algn="r">
               <a:spcAft>
-                <a:spcPts val="300"/>
+                <a:spcPts val="342"/>
               </a:spcAft>
             </a:pPr>
             <a:r>
-              <a:rPr sz="1400" i="0" b="0">
+              <a:rPr sz="1600" i="0" b="0">
                 <a:solidFill>
                   <a:srgbClr val="858585"/>
                 </a:solidFill>
@@ -14373,11 +14373,11 @@
           <a:p>
             <a:pPr algn="r">
               <a:spcAft>
-                <a:spcPts val="300"/>
+                <a:spcPts val="342"/>
               </a:spcAft>
             </a:pPr>
             <a:r>
-              <a:rPr sz="1400" i="0" b="0">
+              <a:rPr sz="1600" i="0" b="0">
                 <a:solidFill>
                   <a:srgbClr val="858585"/>
                 </a:solidFill>
@@ -14389,65 +14389,17 @@
           <a:p>
             <a:pPr algn="r">
               <a:spcAft>
-                <a:spcPts val="300"/>
+                <a:spcPts val="342"/>
               </a:spcAft>
             </a:pPr>
             <a:r>
-              <a:rPr sz="1400" i="0" b="0">
+              <a:rPr sz="1600" i="0" b="0">
                 <a:solidFill>
                   <a:srgbClr val="858585"/>
                 </a:solidFill>
                 <a:latin typeface="Consolas"/>
               </a:rPr>
               <a:t>14</a:t>
-            </a:r>
-          </a:p>
-          <a:p>
-            <a:pPr algn="r">
-              <a:spcAft>
-                <a:spcPts val="300"/>
-              </a:spcAft>
-            </a:pPr>
-            <a:r>
-              <a:rPr sz="1400" i="0" b="0">
-                <a:solidFill>
-                  <a:srgbClr val="858585"/>
-                </a:solidFill>
-                <a:latin typeface="Consolas"/>
-              </a:rPr>
-              <a:t>15</a:t>
-            </a:r>
-          </a:p>
-          <a:p>
-            <a:pPr algn="r">
-              <a:spcAft>
-                <a:spcPts val="300"/>
-              </a:spcAft>
-            </a:pPr>
-            <a:r>
-              <a:rPr sz="1400" i="0" b="0">
-                <a:solidFill>
-                  <a:srgbClr val="858585"/>
-                </a:solidFill>
-                <a:latin typeface="Consolas"/>
-              </a:rPr>
-              <a:t>16</a:t>
-            </a:r>
-          </a:p>
-          <a:p>
-            <a:pPr algn="r">
-              <a:spcAft>
-                <a:spcPts val="300"/>
-              </a:spcAft>
-            </a:pPr>
-            <a:r>
-              <a:rPr sz="1400" i="0" b="0">
-                <a:solidFill>
-                  <a:srgbClr val="858585"/>
-                </a:solidFill>
-                <a:latin typeface="Consolas"/>
-              </a:rPr>
-              <a:t>17</a:t>
             </a:r>
           </a:p>
         </p:txBody>
@@ -14461,7 +14413,7 @@
         <p:spPr>
           <a:xfrm>
             <a:off x="1188720" y="1719072"/>
-            <a:ext cx="10271455" cy="4482177"/>
+            <a:ext cx="5986083" cy="4150836"/>
           </a:xfrm>
           <a:prstGeom prst="rect">
             <a:avLst/>
@@ -14476,11 +14428,11 @@
           <a:p>
             <a:pPr>
               <a:spcAft>
-                <a:spcPts val="300"/>
+                <a:spcPts val="342"/>
               </a:spcAft>
             </a:pPr>
             <a:r>
-              <a:rPr sz="1400" i="0" b="0">
+              <a:rPr sz="1600" i="0" b="0">
                 <a:solidFill>
                   <a:srgbClr val="D4D4D4"/>
                 </a:solidFill>
@@ -14489,7 +14441,7 @@
               <a:t>flowchart</a:t>
             </a:r>
             <a:r>
-              <a:rPr sz="1400" i="0" b="0">
+              <a:rPr sz="1600" i="0" b="0">
                 <a:solidFill>
                   <a:srgbClr val="D4D4D4"/>
                 </a:solidFill>
@@ -14498,7 +14450,7 @@
               <a:t> </a:t>
             </a:r>
             <a:r>
-              <a:rPr sz="1400" i="0" b="0">
+              <a:rPr sz="1600" i="0" b="0">
                 <a:solidFill>
                   <a:srgbClr val="D4D4D4"/>
                 </a:solidFill>
@@ -14510,11 +14462,11 @@
           <a:p>
             <a:pPr>
               <a:spcAft>
-                <a:spcPts val="300"/>
+                <a:spcPts val="342"/>
               </a:spcAft>
             </a:pPr>
             <a:r>
-              <a:rPr sz="1400" i="0" b="0">
+              <a:rPr sz="1600" i="0" b="0">
                 <a:solidFill>
                   <a:srgbClr val="D4D4D4"/>
                 </a:solidFill>
@@ -14523,7 +14475,7 @@
               <a:t>  </a:t>
             </a:r>
             <a:r>
-              <a:rPr sz="1400" i="0" b="0">
+              <a:rPr sz="1600" i="0" b="0">
                 <a:solidFill>
                   <a:srgbClr val="D4D4D4"/>
                 </a:solidFill>
@@ -14532,7 +14484,7 @@
               <a:t>R</a:t>
             </a:r>
             <a:r>
-              <a:rPr sz="1400" i="0" b="0">
+              <a:rPr sz="1600" i="0" b="0">
                 <a:solidFill>
                   <a:srgbClr val="D4D4D4"/>
                 </a:solidFill>
@@ -14541,7 +14493,7 @@
               <a:t>[</a:t>
             </a:r>
             <a:r>
-              <a:rPr sz="1400" i="0" b="0">
+              <a:rPr sz="1600" i="0" b="0">
                 <a:solidFill>
                   <a:srgbClr val="D4D4D4"/>
                 </a:solidFill>
@@ -14550,7 +14502,7 @@
               <a:t>Requisitos</a:t>
             </a:r>
             <a:r>
-              <a:rPr sz="1400" i="0" b="0">
+              <a:rPr sz="1600" i="0" b="0">
                 <a:solidFill>
                   <a:srgbClr val="D4D4D4"/>
                 </a:solidFill>
@@ -14559,7 +14511,7 @@
               <a:t>] --&gt; </a:t>
             </a:r>
             <a:r>
-              <a:rPr sz="1400" i="0" b="0">
+              <a:rPr sz="1600" i="0" b="0">
                 <a:solidFill>
                   <a:srgbClr val="D4D4D4"/>
                 </a:solidFill>
@@ -14568,7 +14520,7 @@
               <a:t>AF</a:t>
             </a:r>
             <a:r>
-              <a:rPr sz="1400" i="0" b="0">
+              <a:rPr sz="1600" i="0" b="0">
                 <a:solidFill>
                   <a:srgbClr val="D4D4D4"/>
                 </a:solidFill>
@@ -14577,7 +14529,7 @@
               <a:t>[</a:t>
             </a:r>
             <a:r>
-              <a:rPr sz="1400" i="0" b="0">
+              <a:rPr sz="1600" i="0" b="0">
                 <a:solidFill>
                   <a:srgbClr val="D4D4D4"/>
                 </a:solidFill>
@@ -14586,7 +14538,7 @@
               <a:t>Analisis</a:t>
             </a:r>
             <a:r>
-              <a:rPr sz="1400" i="0" b="0">
+              <a:rPr sz="1600" i="0" b="0">
                 <a:solidFill>
                   <a:srgbClr val="D4D4D4"/>
                 </a:solidFill>
@@ -14595,7 +14547,7 @@
               <a:t> </a:t>
             </a:r>
             <a:r>
-              <a:rPr sz="1400" i="0" b="0">
+              <a:rPr sz="1600" i="0" b="0">
                 <a:solidFill>
                   <a:srgbClr val="D4D4D4"/>
                 </a:solidFill>
@@ -14604,7 +14556,7 @@
               <a:t>funcional</a:t>
             </a:r>
             <a:r>
-              <a:rPr sz="1400" i="0" b="0">
+              <a:rPr sz="1600" i="0" b="0">
                 <a:solidFill>
                   <a:srgbClr val="D4D4D4"/>
                 </a:solidFill>
@@ -14616,11 +14568,11 @@
           <a:p>
             <a:pPr>
               <a:spcAft>
-                <a:spcPts val="300"/>
+                <a:spcPts val="342"/>
               </a:spcAft>
             </a:pPr>
             <a:r>
-              <a:rPr sz="1400" i="0" b="0">
+              <a:rPr sz="1600" i="0" b="0">
                 <a:solidFill>
                   <a:srgbClr val="D4D4D4"/>
                 </a:solidFill>
@@ -14629,7 +14581,7 @@
               <a:t>  </a:t>
             </a:r>
             <a:r>
-              <a:rPr sz="1400" i="0" b="0">
+              <a:rPr sz="1600" i="0" b="0">
                 <a:solidFill>
                   <a:srgbClr val="D4D4D4"/>
                 </a:solidFill>
@@ -14638,7 +14590,7 @@
               <a:t>AF</a:t>
             </a:r>
             <a:r>
-              <a:rPr sz="1400" i="0" b="0">
+              <a:rPr sz="1600" i="0" b="0">
                 <a:solidFill>
                   <a:srgbClr val="D4D4D4"/>
                 </a:solidFill>
@@ -14647,7 +14599,7 @@
               <a:t> --&gt; </a:t>
             </a:r>
             <a:r>
-              <a:rPr sz="1400" i="0" b="0">
+              <a:rPr sz="1600" i="0" b="0">
                 <a:solidFill>
                   <a:srgbClr val="D4D4D4"/>
                 </a:solidFill>
@@ -14656,7 +14608,7 @@
               <a:t>DA</a:t>
             </a:r>
             <a:r>
-              <a:rPr sz="1400" i="0" b="0">
+              <a:rPr sz="1600" i="0" b="0">
                 <a:solidFill>
                   <a:srgbClr val="D4D4D4"/>
                 </a:solidFill>
@@ -14665,7 +14617,7 @@
               <a:t>[</a:t>
             </a:r>
             <a:r>
-              <a:rPr sz="1400" i="0" b="0">
+              <a:rPr sz="1600" i="0" b="0">
                 <a:solidFill>
                   <a:srgbClr val="D4D4D4"/>
                 </a:solidFill>
@@ -14674,7 +14626,7 @@
               <a:t>Diseno</a:t>
             </a:r>
             <a:r>
-              <a:rPr sz="1400" i="0" b="0">
+              <a:rPr sz="1600" i="0" b="0">
                 <a:solidFill>
                   <a:srgbClr val="D4D4D4"/>
                 </a:solidFill>
@@ -14683,7 +14635,7 @@
               <a:t> </a:t>
             </a:r>
             <a:r>
-              <a:rPr sz="1400" i="0" b="0">
+              <a:rPr sz="1600" i="0" b="0">
                 <a:solidFill>
                   <a:srgbClr val="D4D4D4"/>
                 </a:solidFill>
@@ -14692,7 +14644,7 @@
               <a:t>de</a:t>
             </a:r>
             <a:r>
-              <a:rPr sz="1400" i="0" b="0">
+              <a:rPr sz="1600" i="0" b="0">
                 <a:solidFill>
                   <a:srgbClr val="D4D4D4"/>
                 </a:solidFill>
@@ -14701,7 +14653,7 @@
               <a:t> </a:t>
             </a:r>
             <a:r>
-              <a:rPr sz="1400" i="0" b="0">
+              <a:rPr sz="1600" i="0" b="0">
                 <a:solidFill>
                   <a:srgbClr val="D4D4D4"/>
                 </a:solidFill>
@@ -14710,7 +14662,7 @@
               <a:t>arquitectura</a:t>
             </a:r>
             <a:r>
-              <a:rPr sz="1400" i="0" b="0">
+              <a:rPr sz="1600" i="0" b="0">
                 <a:solidFill>
                   <a:srgbClr val="D4D4D4"/>
                 </a:solidFill>
@@ -14722,11 +14674,11 @@
           <a:p>
             <a:pPr>
               <a:spcAft>
-                <a:spcPts val="300"/>
+                <a:spcPts val="342"/>
               </a:spcAft>
             </a:pPr>
             <a:r>
-              <a:rPr sz="1400" i="0" b="0">
+              <a:rPr sz="1600" i="0" b="0">
                 <a:solidFill>
                   <a:srgbClr val="D4D4D4"/>
                 </a:solidFill>
@@ -14735,7 +14687,7 @@
               <a:t>  </a:t>
             </a:r>
             <a:r>
-              <a:rPr sz="1400" i="0" b="0">
+              <a:rPr sz="1600" i="0" b="0">
                 <a:solidFill>
                   <a:srgbClr val="D4D4D4"/>
                 </a:solidFill>
@@ -14744,7 +14696,7 @@
               <a:t>DA</a:t>
             </a:r>
             <a:r>
-              <a:rPr sz="1400" i="0" b="0">
+              <a:rPr sz="1600" i="0" b="0">
                 <a:solidFill>
                   <a:srgbClr val="D4D4D4"/>
                 </a:solidFill>
@@ -14753,7 +14705,7 @@
               <a:t> --&gt; </a:t>
             </a:r>
             <a:r>
-              <a:rPr sz="1400" i="0" b="0">
+              <a:rPr sz="1600" i="0" b="0">
                 <a:solidFill>
                   <a:srgbClr val="D4D4D4"/>
                 </a:solidFill>
@@ -14762,7 +14714,7 @@
               <a:t>DD</a:t>
             </a:r>
             <a:r>
-              <a:rPr sz="1400" i="0" b="0">
+              <a:rPr sz="1600" i="0" b="0">
                 <a:solidFill>
                   <a:srgbClr val="D4D4D4"/>
                 </a:solidFill>
@@ -14771,7 +14723,7 @@
               <a:t>[</a:t>
             </a:r>
             <a:r>
-              <a:rPr sz="1400" i="0" b="0">
+              <a:rPr sz="1600" i="0" b="0">
                 <a:solidFill>
                   <a:srgbClr val="D4D4D4"/>
                 </a:solidFill>
@@ -14780,7 +14732,7 @@
               <a:t>Diseno</a:t>
             </a:r>
             <a:r>
-              <a:rPr sz="1400" i="0" b="0">
+              <a:rPr sz="1600" i="0" b="0">
                 <a:solidFill>
                   <a:srgbClr val="D4D4D4"/>
                 </a:solidFill>
@@ -14789,7 +14741,7 @@
               <a:t> </a:t>
             </a:r>
             <a:r>
-              <a:rPr sz="1400" i="0" b="0">
+              <a:rPr sz="1600" i="0" b="0">
                 <a:solidFill>
                   <a:srgbClr val="D4D4D4"/>
                 </a:solidFill>
@@ -14798,7 +14750,7 @@
               <a:t>detallado</a:t>
             </a:r>
             <a:r>
-              <a:rPr sz="1400" i="0" b="0">
+              <a:rPr sz="1600" i="0" b="0">
                 <a:solidFill>
                   <a:srgbClr val="D4D4D4"/>
                 </a:solidFill>
@@ -14810,11 +14762,11 @@
           <a:p>
             <a:pPr>
               <a:spcAft>
-                <a:spcPts val="300"/>
+                <a:spcPts val="342"/>
               </a:spcAft>
             </a:pPr>
             <a:r>
-              <a:rPr sz="1400" i="0" b="0">
+              <a:rPr sz="1600" i="0" b="0">
                 <a:solidFill>
                   <a:srgbClr val="D4D4D4"/>
                 </a:solidFill>
@@ -14823,7 +14775,7 @@
               <a:t>  </a:t>
             </a:r>
             <a:r>
-              <a:rPr sz="1400" i="0" b="0">
+              <a:rPr sz="1600" i="0" b="0">
                 <a:solidFill>
                   <a:srgbClr val="D4D4D4"/>
                 </a:solidFill>
@@ -14832,7 +14784,7 @@
               <a:t>DD</a:t>
             </a:r>
             <a:r>
-              <a:rPr sz="1400" i="0" b="0">
+              <a:rPr sz="1600" i="0" b="0">
                 <a:solidFill>
                   <a:srgbClr val="D4D4D4"/>
                 </a:solidFill>
@@ -14841,7 +14793,7 @@
               <a:t> --&gt; </a:t>
             </a:r>
             <a:r>
-              <a:rPr sz="1400" i="0" b="0">
+              <a:rPr sz="1600" i="0" b="0">
                 <a:solidFill>
                   <a:srgbClr val="D4D4D4"/>
                 </a:solidFill>
@@ -14850,7 +14802,7 @@
               <a:t>COD</a:t>
             </a:r>
             <a:r>
-              <a:rPr sz="1400" i="0" b="0">
+              <a:rPr sz="1600" i="0" b="0">
                 <a:solidFill>
                   <a:srgbClr val="D4D4D4"/>
                 </a:solidFill>
@@ -14859,7 +14811,7 @@
               <a:t>[</a:t>
             </a:r>
             <a:r>
-              <a:rPr sz="1400" i="0" b="0">
+              <a:rPr sz="1600" i="0" b="0">
                 <a:solidFill>
                   <a:srgbClr val="D4D4D4"/>
                 </a:solidFill>
@@ -14868,7 +14820,7 @@
               <a:t>Codificacion</a:t>
             </a:r>
             <a:r>
-              <a:rPr sz="1400" i="0" b="0">
+              <a:rPr sz="1600" i="0" b="0">
                 <a:solidFill>
                   <a:srgbClr val="D4D4D4"/>
                 </a:solidFill>
@@ -14880,11 +14832,11 @@
           <a:p>
             <a:pPr>
               <a:spcAft>
-                <a:spcPts val="300"/>
+                <a:spcPts val="342"/>
               </a:spcAft>
             </a:pPr>
             <a:r>
-              <a:rPr sz="1400" i="0" b="0">
+              <a:rPr sz="1600" i="0" b="0">
                 <a:solidFill>
                   <a:srgbClr val="D4D4D4"/>
                 </a:solidFill>
@@ -14893,7 +14845,7 @@
               <a:t>  </a:t>
             </a:r>
             <a:r>
-              <a:rPr sz="1400" i="0" b="0">
+              <a:rPr sz="1600" i="0" b="0">
                 <a:solidFill>
                   <a:srgbClr val="D4D4D4"/>
                 </a:solidFill>
@@ -14902,7 +14854,7 @@
               <a:t>COD</a:t>
             </a:r>
             <a:r>
-              <a:rPr sz="1400" i="0" b="0">
+              <a:rPr sz="1600" i="0" b="0">
                 <a:solidFill>
                   <a:srgbClr val="D4D4D4"/>
                 </a:solidFill>
@@ -14911,7 +14863,7 @@
               <a:t> --&gt; </a:t>
             </a:r>
             <a:r>
-              <a:rPr sz="1400" i="0" b="0">
+              <a:rPr sz="1600" i="0" b="0">
                 <a:solidFill>
                   <a:srgbClr val="D4D4D4"/>
                 </a:solidFill>
@@ -14920,7 +14872,7 @@
               <a:t>PU</a:t>
             </a:r>
             <a:r>
-              <a:rPr sz="1400" i="0" b="0">
+              <a:rPr sz="1600" i="0" b="0">
                 <a:solidFill>
                   <a:srgbClr val="D4D4D4"/>
                 </a:solidFill>
@@ -14929,7 +14881,7 @@
               <a:t>[</a:t>
             </a:r>
             <a:r>
-              <a:rPr sz="1400" i="0" b="0">
+              <a:rPr sz="1600" i="0" b="0">
                 <a:solidFill>
                   <a:srgbClr val="D4D4D4"/>
                 </a:solidFill>
@@ -14938,7 +14890,7 @@
               <a:t>Pruebas</a:t>
             </a:r>
             <a:r>
-              <a:rPr sz="1400" i="0" b="0">
+              <a:rPr sz="1600" i="0" b="0">
                 <a:solidFill>
                   <a:srgbClr val="D4D4D4"/>
                 </a:solidFill>
@@ -14947,7 +14899,7 @@
               <a:t> </a:t>
             </a:r>
             <a:r>
-              <a:rPr sz="1400" i="0" b="0">
+              <a:rPr sz="1600" i="0" b="0">
                 <a:solidFill>
                   <a:srgbClr val="D4D4D4"/>
                 </a:solidFill>
@@ -14956,7 +14908,7 @@
               <a:t>unitarias</a:t>
             </a:r>
             <a:r>
-              <a:rPr sz="1400" i="0" b="0">
+              <a:rPr sz="1600" i="0" b="0">
                 <a:solidFill>
                   <a:srgbClr val="D4D4D4"/>
                 </a:solidFill>
@@ -14968,11 +14920,11 @@
           <a:p>
             <a:pPr>
               <a:spcAft>
-                <a:spcPts val="300"/>
+                <a:spcPts val="342"/>
               </a:spcAft>
             </a:pPr>
             <a:r>
-              <a:rPr sz="1400" i="0" b="0">
+              <a:rPr sz="1600" i="0" b="0">
                 <a:solidFill>
                   <a:srgbClr val="D4D4D4"/>
                 </a:solidFill>
@@ -14981,7 +14933,7 @@
               <a:t>  </a:t>
             </a:r>
             <a:r>
-              <a:rPr sz="1400" i="0" b="0">
+              <a:rPr sz="1600" i="0" b="0">
                 <a:solidFill>
                   <a:srgbClr val="D4D4D4"/>
                 </a:solidFill>
@@ -14990,7 +14942,7 @@
               <a:t>PU</a:t>
             </a:r>
             <a:r>
-              <a:rPr sz="1400" i="0" b="0">
+              <a:rPr sz="1600" i="0" b="0">
                 <a:solidFill>
                   <a:srgbClr val="D4D4D4"/>
                 </a:solidFill>
@@ -14999,7 +14951,7 @@
               <a:t> --&gt; </a:t>
             </a:r>
             <a:r>
-              <a:rPr sz="1400" i="0" b="0">
+              <a:rPr sz="1600" i="0" b="0">
                 <a:solidFill>
                   <a:srgbClr val="D4D4D4"/>
                 </a:solidFill>
@@ -15008,7 +14960,7 @@
               <a:t>PIN</a:t>
             </a:r>
             <a:r>
-              <a:rPr sz="1400" i="0" b="0">
+              <a:rPr sz="1600" i="0" b="0">
                 <a:solidFill>
                   <a:srgbClr val="D4D4D4"/>
                 </a:solidFill>
@@ -15017,7 +14969,7 @@
               <a:t>[</a:t>
             </a:r>
             <a:r>
-              <a:rPr sz="1400" i="0" b="0">
+              <a:rPr sz="1600" i="0" b="0">
                 <a:solidFill>
                   <a:srgbClr val="D4D4D4"/>
                 </a:solidFill>
@@ -15026,7 +14978,7 @@
               <a:t>Pruebas</a:t>
             </a:r>
             <a:r>
-              <a:rPr sz="1400" i="0" b="0">
+              <a:rPr sz="1600" i="0" b="0">
                 <a:solidFill>
                   <a:srgbClr val="D4D4D4"/>
                 </a:solidFill>
@@ -15035,7 +14987,7 @@
               <a:t> </a:t>
             </a:r>
             <a:r>
-              <a:rPr sz="1400" i="0" b="0">
+              <a:rPr sz="1600" i="0" b="0">
                 <a:solidFill>
                   <a:srgbClr val="D4D4D4"/>
                 </a:solidFill>
@@ -15044,7 +14996,7 @@
               <a:t>de</a:t>
             </a:r>
             <a:r>
-              <a:rPr sz="1400" i="0" b="0">
+              <a:rPr sz="1600" i="0" b="0">
                 <a:solidFill>
                   <a:srgbClr val="D4D4D4"/>
                 </a:solidFill>
@@ -15053,7 +15005,7 @@
               <a:t> </a:t>
             </a:r>
             <a:r>
-              <a:rPr sz="1400" i="0" b="0">
+              <a:rPr sz="1600" i="0" b="0">
                 <a:solidFill>
                   <a:srgbClr val="D4D4D4"/>
                 </a:solidFill>
@@ -15062,7 +15014,7 @@
               <a:t>integracion</a:t>
             </a:r>
             <a:r>
-              <a:rPr sz="1400" i="0" b="0">
+              <a:rPr sz="1600" i="0" b="0">
                 <a:solidFill>
                   <a:srgbClr val="D4D4D4"/>
                 </a:solidFill>
@@ -15074,11 +15026,11 @@
           <a:p>
             <a:pPr>
               <a:spcAft>
-                <a:spcPts val="300"/>
+                <a:spcPts val="342"/>
               </a:spcAft>
             </a:pPr>
             <a:r>
-              <a:rPr sz="1400" i="0" b="0">
+              <a:rPr sz="1600" i="0" b="0">
                 <a:solidFill>
                   <a:srgbClr val="D4D4D4"/>
                 </a:solidFill>
@@ -15087,7 +15039,7 @@
               <a:t>  </a:t>
             </a:r>
             <a:r>
-              <a:rPr sz="1400" i="0" b="0">
+              <a:rPr sz="1600" i="0" b="0">
                 <a:solidFill>
                   <a:srgbClr val="D4D4D4"/>
                 </a:solidFill>
@@ -15096,7 +15048,7 @@
               <a:t>PIN</a:t>
             </a:r>
             <a:r>
-              <a:rPr sz="1400" i="0" b="0">
+              <a:rPr sz="1600" i="0" b="0">
                 <a:solidFill>
                   <a:srgbClr val="D4D4D4"/>
                 </a:solidFill>
@@ -15105,7 +15057,7 @@
               <a:t> --&gt; </a:t>
             </a:r>
             <a:r>
-              <a:rPr sz="1400" i="0" b="0">
+              <a:rPr sz="1600" i="0" b="0">
                 <a:solidFill>
                   <a:srgbClr val="D4D4D4"/>
                 </a:solidFill>
@@ -15114,7 +15066,7 @@
               <a:t>PS</a:t>
             </a:r>
             <a:r>
-              <a:rPr sz="1400" i="0" b="0">
+              <a:rPr sz="1600" i="0" b="0">
                 <a:solidFill>
                   <a:srgbClr val="D4D4D4"/>
                 </a:solidFill>
@@ -15123,7 +15075,7 @@
               <a:t>[</a:t>
             </a:r>
             <a:r>
-              <a:rPr sz="1400" i="0" b="0">
+              <a:rPr sz="1600" i="0" b="0">
                 <a:solidFill>
                   <a:srgbClr val="D4D4D4"/>
                 </a:solidFill>
@@ -15132,7 +15084,7 @@
               <a:t>Pruebas</a:t>
             </a:r>
             <a:r>
-              <a:rPr sz="1400" i="0" b="0">
+              <a:rPr sz="1600" i="0" b="0">
                 <a:solidFill>
                   <a:srgbClr val="D4D4D4"/>
                 </a:solidFill>
@@ -15141,7 +15093,7 @@
               <a:t> </a:t>
             </a:r>
             <a:r>
-              <a:rPr sz="1400" i="0" b="0">
+              <a:rPr sz="1600" i="0" b="0">
                 <a:solidFill>
                   <a:srgbClr val="D4D4D4"/>
                 </a:solidFill>
@@ -15150,7 +15102,7 @@
               <a:t>de</a:t>
             </a:r>
             <a:r>
-              <a:rPr sz="1400" i="0" b="0">
+              <a:rPr sz="1600" i="0" b="0">
                 <a:solidFill>
                   <a:srgbClr val="D4D4D4"/>
                 </a:solidFill>
@@ -15159,7 +15111,7 @@
               <a:t> </a:t>
             </a:r>
             <a:r>
-              <a:rPr sz="1400" i="0" b="0">
+              <a:rPr sz="1600" i="0" b="0">
                 <a:solidFill>
                   <a:srgbClr val="D4D4D4"/>
                 </a:solidFill>
@@ -15168,7 +15120,7 @@
               <a:t>sistema</a:t>
             </a:r>
             <a:r>
-              <a:rPr sz="1400" i="0" b="0">
+              <a:rPr sz="1600" i="0" b="0">
                 <a:solidFill>
                   <a:srgbClr val="D4D4D4"/>
                 </a:solidFill>
@@ -15180,11 +15132,11 @@
           <a:p>
             <a:pPr>
               <a:spcAft>
-                <a:spcPts val="300"/>
+                <a:spcPts val="342"/>
               </a:spcAft>
             </a:pPr>
             <a:r>
-              <a:rPr sz="1400" i="0" b="0">
+              <a:rPr sz="1600" i="0" b="0">
                 <a:solidFill>
                   <a:srgbClr val="D4D4D4"/>
                 </a:solidFill>
@@ -15193,7 +15145,7 @@
               <a:t>  </a:t>
             </a:r>
             <a:r>
-              <a:rPr sz="1400" i="0" b="0">
+              <a:rPr sz="1600" i="0" b="0">
                 <a:solidFill>
                   <a:srgbClr val="D4D4D4"/>
                 </a:solidFill>
@@ -15202,7 +15154,7 @@
               <a:t>PS</a:t>
             </a:r>
             <a:r>
-              <a:rPr sz="1400" i="0" b="0">
+              <a:rPr sz="1600" i="0" b="0">
                 <a:solidFill>
                   <a:srgbClr val="D4D4D4"/>
                 </a:solidFill>
@@ -15211,7 +15163,7 @@
               <a:t> --&gt; </a:t>
             </a:r>
             <a:r>
-              <a:rPr sz="1400" i="0" b="0">
+              <a:rPr sz="1600" i="0" b="0">
                 <a:solidFill>
                   <a:srgbClr val="D4D4D4"/>
                 </a:solidFill>
@@ -15220,7 +15172,7 @@
               <a:t>PA</a:t>
             </a:r>
             <a:r>
-              <a:rPr sz="1400" i="0" b="0">
+              <a:rPr sz="1600" i="0" b="0">
                 <a:solidFill>
                   <a:srgbClr val="D4D4D4"/>
                 </a:solidFill>
@@ -15229,7 +15181,7 @@
               <a:t>[</a:t>
             </a:r>
             <a:r>
-              <a:rPr sz="1400" i="0" b="0">
+              <a:rPr sz="1600" i="0" b="0">
                 <a:solidFill>
                   <a:srgbClr val="D4D4D4"/>
                 </a:solidFill>
@@ -15238,7 +15190,7 @@
               <a:t>Pruebas</a:t>
             </a:r>
             <a:r>
-              <a:rPr sz="1400" i="0" b="0">
+              <a:rPr sz="1600" i="0" b="0">
                 <a:solidFill>
                   <a:srgbClr val="D4D4D4"/>
                 </a:solidFill>
@@ -15247,7 +15199,7 @@
               <a:t> </a:t>
             </a:r>
             <a:r>
-              <a:rPr sz="1400" i="0" b="0">
+              <a:rPr sz="1600" i="0" b="0">
                 <a:solidFill>
                   <a:srgbClr val="D4D4D4"/>
                 </a:solidFill>
@@ -15256,7 +15208,7 @@
               <a:t>de</a:t>
             </a:r>
             <a:r>
-              <a:rPr sz="1400" i="0" b="0">
+              <a:rPr sz="1600" i="0" b="0">
                 <a:solidFill>
                   <a:srgbClr val="D4D4D4"/>
                 </a:solidFill>
@@ -15265,7 +15217,7 @@
               <a:t> </a:t>
             </a:r>
             <a:r>
-              <a:rPr sz="1400" i="0" b="0">
+              <a:rPr sz="1600" i="0" b="0">
                 <a:solidFill>
                   <a:srgbClr val="D4D4D4"/>
                 </a:solidFill>
@@ -15274,7 +15226,7 @@
               <a:t>aceptacion</a:t>
             </a:r>
             <a:r>
-              <a:rPr sz="1400" i="0" b="0">
+              <a:rPr sz="1600" i="0" b="0">
                 <a:solidFill>
                   <a:srgbClr val="D4D4D4"/>
                 </a:solidFill>
@@ -15286,11 +15238,11 @@
           <a:p>
             <a:pPr>
               <a:spcAft>
-                <a:spcPts val="300"/>
+                <a:spcPts val="342"/>
               </a:spcAft>
             </a:pPr>
             <a:r>
-              <a:rPr sz="1400" i="0" b="0">
+              <a:rPr sz="1600" i="0" b="0">
                 <a:solidFill>
                   <a:srgbClr val="D4D4D4"/>
                 </a:solidFill>
@@ -15302,11 +15254,11 @@
           <a:p>
             <a:pPr>
               <a:spcAft>
-                <a:spcPts val="300"/>
+                <a:spcPts val="342"/>
               </a:spcAft>
             </a:pPr>
             <a:r>
-              <a:rPr sz="1400" i="0" b="0">
+              <a:rPr sz="1600" i="0" b="0">
                 <a:solidFill>
                   <a:srgbClr val="D4D4D4"/>
                 </a:solidFill>
@@ -15315,7 +15267,7 @@
               <a:t>  </a:t>
             </a:r>
             <a:r>
-              <a:rPr sz="1400" i="0" b="0">
+              <a:rPr sz="1600" i="0" b="0">
                 <a:solidFill>
                   <a:srgbClr val="D4D4D4"/>
                 </a:solidFill>
@@ -15324,7 +15276,7 @@
               <a:t>R</a:t>
             </a:r>
             <a:r>
-              <a:rPr sz="1400" i="0" b="0">
+              <a:rPr sz="1600" i="0" b="0">
                 <a:solidFill>
                   <a:srgbClr val="D4D4D4"/>
                 </a:solidFill>
@@ -15333,7 +15285,7 @@
               <a:t>  -.</a:t>
             </a:r>
             <a:r>
-              <a:rPr sz="1400" i="0" b="0">
+              <a:rPr sz="1600" i="0" b="0">
                 <a:solidFill>
                   <a:srgbClr val="D4D4D4"/>
                 </a:solidFill>
@@ -15342,7 +15294,7 @@
               <a:t>verifica</a:t>
             </a:r>
             <a:r>
-              <a:rPr sz="1400" i="0" b="0">
+              <a:rPr sz="1600" i="0" b="0">
                 <a:solidFill>
                   <a:srgbClr val="D4D4D4"/>
                 </a:solidFill>
@@ -15351,7 +15303,7 @@
               <a:t>.-&gt; </a:t>
             </a:r>
             <a:r>
-              <a:rPr sz="1400" i="0" b="0">
+              <a:rPr sz="1600" i="0" b="0">
                 <a:solidFill>
                   <a:srgbClr val="D4D4D4"/>
                 </a:solidFill>
@@ -15363,11 +15315,11 @@
           <a:p>
             <a:pPr>
               <a:spcAft>
-                <a:spcPts val="300"/>
+                <a:spcPts val="342"/>
               </a:spcAft>
             </a:pPr>
             <a:r>
-              <a:rPr sz="1400" i="0" b="0">
+              <a:rPr sz="1600" i="0" b="0">
                 <a:solidFill>
                   <a:srgbClr val="D4D4D4"/>
                 </a:solidFill>
@@ -15376,7 +15328,7 @@
               <a:t>  </a:t>
             </a:r>
             <a:r>
-              <a:rPr sz="1400" i="0" b="0">
+              <a:rPr sz="1600" i="0" b="0">
                 <a:solidFill>
                   <a:srgbClr val="D4D4D4"/>
                 </a:solidFill>
@@ -15385,7 +15337,7 @@
               <a:t>AF</a:t>
             </a:r>
             <a:r>
-              <a:rPr sz="1400" i="0" b="0">
+              <a:rPr sz="1600" i="0" b="0">
                 <a:solidFill>
                   <a:srgbClr val="D4D4D4"/>
                 </a:solidFill>
@@ -15394,7 +15346,7 @@
               <a:t> -.</a:t>
             </a:r>
             <a:r>
-              <a:rPr sz="1400" i="0" b="0">
+              <a:rPr sz="1600" i="0" b="0">
                 <a:solidFill>
                   <a:srgbClr val="D4D4D4"/>
                 </a:solidFill>
@@ -15403,7 +15355,7 @@
               <a:t>verifica</a:t>
             </a:r>
             <a:r>
-              <a:rPr sz="1400" i="0" b="0">
+              <a:rPr sz="1600" i="0" b="0">
                 <a:solidFill>
                   <a:srgbClr val="D4D4D4"/>
                 </a:solidFill>
@@ -15412,7 +15364,7 @@
               <a:t>.-&gt; </a:t>
             </a:r>
             <a:r>
-              <a:rPr sz="1400" i="0" b="0">
+              <a:rPr sz="1600" i="0" b="0">
                 <a:solidFill>
                   <a:srgbClr val="D4D4D4"/>
                 </a:solidFill>
@@ -15424,11 +15376,11 @@
           <a:p>
             <a:pPr>
               <a:spcAft>
-                <a:spcPts val="300"/>
+                <a:spcPts val="342"/>
               </a:spcAft>
             </a:pPr>
             <a:r>
-              <a:rPr sz="1400" i="0" b="0">
+              <a:rPr sz="1600" i="0" b="0">
                 <a:solidFill>
                   <a:srgbClr val="D4D4D4"/>
                 </a:solidFill>
@@ -15437,7 +15389,7 @@
               <a:t>  </a:t>
             </a:r>
             <a:r>
-              <a:rPr sz="1400" i="0" b="0">
+              <a:rPr sz="1600" i="0" b="0">
                 <a:solidFill>
                   <a:srgbClr val="D4D4D4"/>
                 </a:solidFill>
@@ -15446,7 +15398,7 @@
               <a:t>DA</a:t>
             </a:r>
             <a:r>
-              <a:rPr sz="1400" i="0" b="0">
+              <a:rPr sz="1600" i="0" b="0">
                 <a:solidFill>
                   <a:srgbClr val="D4D4D4"/>
                 </a:solidFill>
@@ -15455,7 +15407,7 @@
               <a:t> -.</a:t>
             </a:r>
             <a:r>
-              <a:rPr sz="1400" i="0" b="0">
+              <a:rPr sz="1600" i="0" b="0">
                 <a:solidFill>
                   <a:srgbClr val="D4D4D4"/>
                 </a:solidFill>
@@ -15464,7 +15416,7 @@
               <a:t>verifica</a:t>
             </a:r>
             <a:r>
-              <a:rPr sz="1400" i="0" b="0">
+              <a:rPr sz="1600" i="0" b="0">
                 <a:solidFill>
                   <a:srgbClr val="D4D4D4"/>
                 </a:solidFill>
@@ -15473,7 +15425,7 @@
               <a:t>.-&gt; </a:t>
             </a:r>
             <a:r>
-              <a:rPr sz="1400" i="0" b="0">
+              <a:rPr sz="1600" i="0" b="0">
                 <a:solidFill>
                   <a:srgbClr val="D4D4D4"/>
                 </a:solidFill>
@@ -15485,11 +15437,11 @@
           <a:p>
             <a:pPr>
               <a:spcAft>
-                <a:spcPts val="300"/>
+                <a:spcPts val="342"/>
               </a:spcAft>
             </a:pPr>
             <a:r>
-              <a:rPr sz="1400" i="0" b="0">
+              <a:rPr sz="1600" i="0" b="0">
                 <a:solidFill>
                   <a:srgbClr val="D4D4D4"/>
                 </a:solidFill>
@@ -15498,7 +15450,7 @@
               <a:t>  </a:t>
             </a:r>
             <a:r>
-              <a:rPr sz="1400" i="0" b="0">
+              <a:rPr sz="1600" i="0" b="0">
                 <a:solidFill>
                   <a:srgbClr val="D4D4D4"/>
                 </a:solidFill>
@@ -15507,7 +15459,7 @@
               <a:t>DD</a:t>
             </a:r>
             <a:r>
-              <a:rPr sz="1400" i="0" b="0">
+              <a:rPr sz="1600" i="0" b="0">
                 <a:solidFill>
                   <a:srgbClr val="D4D4D4"/>
                 </a:solidFill>
@@ -15516,7 +15468,7 @@
               <a:t> -.</a:t>
             </a:r>
             <a:r>
-              <a:rPr sz="1400" i="0" b="0">
+              <a:rPr sz="1600" i="0" b="0">
                 <a:solidFill>
                   <a:srgbClr val="D4D4D4"/>
                 </a:solidFill>
@@ -15525,7 +15477,7 @@
               <a:t>verifica</a:t>
             </a:r>
             <a:r>
-              <a:rPr sz="1400" i="0" b="0">
+              <a:rPr sz="1600" i="0" b="0">
                 <a:solidFill>
                   <a:srgbClr val="D4D4D4"/>
                 </a:solidFill>
@@ -15534,7 +15486,7 @@
               <a:t>.-&gt; </a:t>
             </a:r>
             <a:r>
-              <a:rPr sz="1400" i="0" b="0">
+              <a:rPr sz="1600" i="0" b="0">
                 <a:solidFill>
                   <a:srgbClr val="D4D4D4"/>
                 </a:solidFill>
@@ -15543,59 +15495,150 @@
               <a:t>PU</a:t>
             </a:r>
           </a:p>
-          <a:p>
-            <a:pPr>
-              <a:spcAft>
-                <a:spcPts val="300"/>
-              </a:spcAft>
-            </a:pPr>
-            <a:r>
-              <a:rPr sz="1400" i="0" b="0">
-                <a:solidFill>
-                  <a:srgbClr val="D4D4D4"/>
-                </a:solidFill>
-                <a:latin typeface="Consolas"/>
-              </a:rPr>
-              <a:t/>
-            </a:r>
-          </a:p>
-          <a:p>
-            <a:pPr>
-              <a:spcAft>
-                <a:spcPts val="300"/>
-              </a:spcAft>
-            </a:pPr>
-            <a:r>
-              <a:rPr sz="1400" i="1" b="0">
-                <a:solidFill>
-                  <a:srgbClr val="6A9955"/>
-                </a:solidFill>
-                <a:latin typeface="Consolas"/>
-              </a:rPr>
-              <a:t>%% Las lineas punteadas SON el modelo en V: cada nivel de diseno tiene</a:t>
-            </a:r>
-          </a:p>
-          <a:p>
-            <a:pPr>
-              <a:spcAft>
-                <a:spcPts val="300"/>
-              </a:spcAft>
-            </a:pPr>
-            <a:r>
-              <a:rPr sz="1400" i="1" b="0">
-                <a:solidFill>
-                  <a:srgbClr val="6A9955"/>
-                </a:solidFill>
-                <a:latin typeface="Consolas"/>
-              </a:rPr>
-              <a:t>%% su nivel de prueba. Sin ellas es una U y no trazabilidad.</a:t>
-            </a:r>
-          </a:p>
-        </p:txBody>
-      </p:sp>
-      <p:sp>
-        <p:nvSpPr>
-          <p:cNvPr id="13" name="TextBox 12"/>
+        </p:txBody>
+      </p:sp>
+      <p:sp>
+        <p:nvSpPr>
+          <p:cNvPr id="13" name="Rounded Rectangle 12"/>
+          <p:cNvSpPr/>
+          <p:nvPr/>
+        </p:nvSpPr>
+        <p:spPr>
+          <a:xfrm>
+            <a:off x="7668579" y="1261872"/>
+            <a:ext cx="4120780" cy="3318569"/>
+          </a:xfrm>
+          <a:prstGeom prst="roundRect">
+            <a:avLst>
+              <a:gd name="adj" fmla="val 4000"/>
+            </a:avLst>
+          </a:prstGeom>
+          <a:solidFill>
+            <a:srgbClr val="E8EEF4"/>
+          </a:solidFill>
+          <a:ln>
+            <a:noFill/>
+          </a:ln>
+        </p:spPr>
+        <p:style>
+          <a:lnRef idx="1">
+            <a:schemeClr val="accent1"/>
+          </a:lnRef>
+          <a:fillRef idx="3">
+            <a:schemeClr val="accent1"/>
+          </a:fillRef>
+          <a:effectRef idx="2">
+            <a:schemeClr val="accent1"/>
+          </a:effectRef>
+          <a:fontRef idx="minor">
+            <a:schemeClr val="lt1"/>
+          </a:fontRef>
+        </p:style>
+        <p:txBody>
+          <a:bodyPr rtlCol="0" anchor="ctr"/>
+          <a:lstStyle/>
+          <a:p>
+            <a:pPr algn="ctr"/>
+          </a:p>
+        </p:txBody>
+      </p:sp>
+      <p:pic>
+        <p:nvPicPr>
+          <p:cNvPr id="14" name="Picture 13" descr="dg-modelo-v-paso1.png"/>
+          <p:cNvPicPr>
+            <a:picLocks noChangeAspect="1"/>
+          </p:cNvPicPr>
+          <p:nvPr/>
+        </p:nvPicPr>
+        <p:blipFill>
+          <a:blip r:embed="rId2"/>
+          <a:stretch>
+            <a:fillRect/>
+          </a:stretch>
+        </p:blipFill>
+        <p:spPr>
+          <a:xfrm>
+            <a:off x="7723443" y="1316736"/>
+            <a:ext cx="4011052" cy="3208841"/>
+          </a:xfrm>
+          <a:prstGeom prst="rect">
+            <a:avLst/>
+          </a:prstGeom>
+        </p:spPr>
+      </p:pic>
+      <p:sp>
+        <p:nvSpPr>
+          <p:cNvPr id="15" name="TextBox 14"/>
+          <p:cNvSpPr txBox="1"/>
+          <p:nvPr/>
+        </p:nvSpPr>
+        <p:spPr>
+          <a:xfrm>
+            <a:off x="7723443" y="4580441"/>
+            <a:ext cx="4011052" cy="320040"/>
+          </a:xfrm>
+          <a:prstGeom prst="rect">
+            <a:avLst/>
+          </a:prstGeom>
+          <a:noFill/>
+        </p:spPr>
+        <p:txBody>
+          <a:bodyPr wrap="square">
+            <a:spAutoFit/>
+          </a:bodyPr>
+          <a:lstStyle/>
+          <a:p>
+            <a:pPr algn="ctr"/>
+            <a:r>
+              <a:rPr sz="1200" b="0" i="1">
+                <a:solidFill>
+                  <a:srgbClr val="666666"/>
+                </a:solidFill>
+                <a:latin typeface="Calibri"/>
+              </a:rPr>
+              <a:t>Lo que dibuja este código</a:t>
+            </a:r>
+          </a:p>
+        </p:txBody>
+      </p:sp>
+      <p:sp>
+        <p:nvSpPr>
+          <p:cNvPr id="16" name="TextBox 15"/>
+          <p:cNvSpPr txBox="1"/>
+          <p:nvPr/>
+        </p:nvSpPr>
+        <p:spPr>
+          <a:xfrm>
+            <a:off x="457200" y="6035040"/>
+            <a:ext cx="11277295" cy="365760"/>
+          </a:xfrm>
+          <a:prstGeom prst="rect">
+            <a:avLst/>
+          </a:prstGeom>
+          <a:noFill/>
+        </p:spPr>
+        <p:txBody>
+          <a:bodyPr wrap="square">
+            <a:spAutoFit/>
+          </a:bodyPr>
+          <a:lstStyle/>
+          <a:p>
+            <a:pPr algn="ctr"/>
+            <a:r>
+              <a:rPr sz="1300" b="0" i="1">
+                <a:solidFill>
+                  <a:srgbClr val="666666"/>
+                </a:solidFill>
+                <a:latin typeface="Calibri"/>
+              </a:rPr>
+              <a:t>Las lineas punteadas SON el modelo en V: cada nivel de diseno tiene su nivel de prueba. Sin ellas es una U.</a:t>
+            </a:r>
+          </a:p>
+        </p:txBody>
+      </p:sp>
+      <p:sp>
+        <p:nvSpPr>
+          <p:cNvPr id="17" name="TextBox 16"/>
           <p:cNvSpPr txBox="1"/>
           <p:nvPr/>
         </p:nvSpPr>
